--- a/bao_cao_nghien_cuu_sdg_vietnam.pptx
+++ b/bao_cao_nghien_cuu_sdg_vietnam.pptx
@@ -889,7 +889,7 @@
               </a:defRPr>
             </a:pPr>
             <a:r>
-              <a:t>Trình bày các con số định lượng về sắc thái cảm xúc và kết nối với Lý thuyết Quản trị Ấn tượng (Impression Management).</a:t>
+              <a:t>So sánh cơ cấu cảm xúc giữa DistilBERT 2 lớp của bài gốc và PhoBERT 3 lớp của đề tài, rút ra kết luận về tính trung tính và thiên lệch lạc quan của báo cáo tiếng Việt.</a:t>
             </a:r>
           </a:p>
           <a:p/>
@@ -916,7 +916,7 @@
               </a:defRPr>
             </a:pPr>
             <a:r>
-              <a:t>Kính thưa các thầy cô, tại Hình 4 và 5, mô hình PhoBERT đã bóc tách sắc thái cảm xúc của toàn bộ 96.461 câu văn bản. Kết quả cho thấy một sự thiên lệch lạc quan mang tính cấu trúc: Câu Tích cực chiếm tới 53,87%, câu Trung tính chiếm 32,87%, trong khi câu Tiêu cực chỉ chiếm vỏn vẹn 13,26%. Phân phối điểm phân cực có dạng hai đỉnh (bimodal): một đỉnh trung tính mô tả số liệu và một đỉnh rất lớn ở vùng tích cực tuyệt đối (0,95–1,0). Dưới góc độ học thuật, đây là minh chứng thực nghiệm điển hình của Lý thuyết Quản trị Ấn tượng (Impression Management) và Hiệu ứng Pollyanna: doanh nghiệp dùng báo cáo bền vững như một công cụ tiếp thị hình ảnh, tập trung nói về thành tích và né tránh rủi ro.</a:t>
+              <a:t>Kính thưa các thầy cô, tại Slide này chúng em so sánh trực tiếp cơ cấu cảm xúc: Bài báo gốc của Kang và Kim dùng mô hình 2 lớp nhị phân cho ra tỷ lệ tích cực tới 78%. Trong khi đó, mô hình PhoBERT 3 lớp của chúng em tại Việt Nam bóc tách được 32,87% câu Trung tính (mô tả số liệu kỹ thuật khách quan). Tuy nhiên, câu Tích cực vẫn chiếm tới 53,87% so với chỉ 13,26% câu Tiêu cực. Điều này dẫn đến hai kết luận khoa học quan trọng: Thứ nhất, báo cáo tiếng Việt có tính kỹ thuật rất cao nên việc bổ sung lớp trung tính là hoàn toàn chính xác. Thứ hai, hiện tượng thiên lệch lạc quan và quản trị ấn tượng vẫn tồn tại sâu sắc tại Việt Nam, doanh nghiệp vẫn chuộng dùng ngôn từ tích cực để làm đẹp hình ảnh.</a:t>
             </a:r>
           </a:p>
           <a:p/>
@@ -943,7 +943,7 @@
               </a:defRPr>
             </a:pPr>
             <a:r>
-              <a:t>Tỷ lệ: 53,87% Tích cực, 32,87% Trung tính, 13,26% Tiêu cực. Phân phối bimodal 2 đỉnh.</a:t>
+              <a:t>So sánh cảm xúc: Bài gốc 2 lớp (Pos ~78%) vs Việt Nam 3 lớp (Pos 53,87%, Neu 32,87%, Neg 13,26%).</a:t>
             </a:r>
           </a:p>
           <a:p/>
@@ -970,7 +970,7 @@
               </a:defRPr>
             </a:pPr>
             <a:r>
-              <a:t>Thầy cô có thể hỏi: 'Tại sao câu Tiêu cực lại có tới 13,26%? Tiêu cực trong báo cáo thường là gì?': Trả lời: Các câu 'tiêu cực' trong báo cáo không phải là tự nhận mình xấu, mà là các câu mô tả bối cảnh khó khăn khách quan, ví dụ như: 'Đại dịch Covid-19 làm đứt gãy chuỗi cung ứng', 'Biến đổi khí hậu gây hạn mặn tại Đồng bằng Sông Cửu Long', hoặc 'Chi phí nguyên vật liệu đầu vào tăng cao'.</a:t>
+              <a:t>Thầy cô có thể hỏi: 'Tại sao câu trung tính lại chiếm tới gần 1/3?': Trả lời: Báo cáo phát triển bền vững theo chuẩn GRI đòi hỏi rất nhiều bảng biểu và câu mô tả định lượng (ví dụ: 'Năm qua công ty tiêu thụ 12 triệu kWh điện'). Những câu này hoàn toàn không có cảm xúc khen hay chê, nên tỷ lệ 32,87% trung tính là hoàn toàn phản ánh trung thực bản chất dữ liệu.</a:t>
             </a:r>
           </a:p>
           <a:p/>
@@ -1063,7 +1063,7 @@
               </a:defRPr>
             </a:pPr>
             <a:r>
-              <a:t>Làm rõ ý nghĩa của chỉ số Tỷ số Pos/Neg và phân tích case study PNJ 2022 như một bằng chứng về độ nhạy của mô hình NLP.</a:t>
+              <a:t>Đối chuẩn tỷ số Pos/Neg (4.06x vs 5.20x) và phân tích độ nhạy của mô hình qua case study PNJ 2022.</a:t>
             </a:r>
           </a:p>
           <a:p/>
@@ -1090,7 +1090,7 @@
               </a:defRPr>
             </a:pPr>
             <a:r>
-              <a:t>Kính thưa Hội đồng, Hình 6 thể hiện diễn biến Tỷ số Pos/Neg, tức tỷ lệ giữa số câu tích cực chia cho số câu tiêu cực. Toàn mẫu đạt trung bình 4,06 lần, nghĩa là cứ 1 câu nhắc đến khó khăn thì có hơn 4 câu ca ngợi thành công. Vinamilk là doanh nghiệp có tỷ số ổn định và cao nhất với bình quân 5,38 lần. Tuy nhiên, case study thú vị nhất là PNJ năm 2022: Tỷ số Pos/Neg của PNJ tụt dốc xuống chỉ còn 1,21 lần do báo cáo dành rất nhiều câu mô tả tác động tiêu cực của các đợt giãn cách xã hội tại TP.HCM. Sang năm 2023, khi thị trường phục hồi, tỷ số này lập tức bật tăng trở lại 4,23 lần. Điều này chứng minh chỉ báo NLP của chúng em phản ánh cực kỳ trung thực và nhạy cảm với các biến cố thực tế của nền kinh tế.</a:t>
+              <a:t>Kính thưa Hội đồng, Hình 6 thể hiện Tỷ số Cảm xúc Pos/Neg. Khi so sánh với bài báo gốc của Kang và Kim (đạt 5,2 lần), các doanh nghiệp Việt Nam đạt bình quân 4,06 lần. Điều này cho thấy văn phong báo cáo tại Việt Nam có mức độ thiên lệch tương tự nhưng có phần thận trọng hơn. Vinamilk là doanh nghiệp có tỷ số ổn định và cao nhất với 5,38 lần. Tuy nhiên, minh chứng rõ nhất cho độ nhạy của PhoBERT là trường hợp PNJ năm 2022: Tỷ số tụt xuống 1,21 lần do báo cáo mô tả chân thực các khó khăn của dịch Covid-19 tại TP.HCM, sau đó bật tăng lên 4,23 lần vào năm 2023 khi phục hồi kinh doanh.</a:t>
             </a:r>
           </a:p>
           <a:p/>
@@ -1117,7 +1117,7 @@
               </a:defRPr>
             </a:pPr>
             <a:r>
-              <a:t>Tỷ số toàn mẫu: 4,06 lần. PNJ năm 2022 tụt xuống 1,21 lần (Covid-19) và bật tăng lên 4,23 lần năm 2023.</a:t>
+              <a:t>Đối chuẩn Tỷ số Pos/Neg: Việt Nam đạt 4,06 lần vs Paper gốc đạt ~5,20 lần. Case study PNJ 2022 (1,21x -&gt; 4,23x).</a:t>
             </a:r>
           </a:p>
           <a:p/>
@@ -1144,7 +1144,7 @@
               </a:defRPr>
             </a:pPr>
             <a:r>
-              <a:t>Thầy cô có thể hỏi: 'Tỷ số Pos/Neg cao có phải luôn luôn là tốt không?': Trả lời: Dạ không. Tỷ số Pos/Neg quá cao (ví dụ trên 8 hay 10 lần) thường là dấu hiệu cảnh báo của việc 'tô hồng' báo cáo quá đà (Pollyanna effect), thiếu tính giải trình trách nhiệm đối với các rủi ro thực tế. Một báo cáo chất lượng cao nên có sự cân bằng lành mạnh.</a:t>
+              <a:t>Thầy cô có thể hỏi: 'Tại sao tỷ số Pos/Neg ở Việt Nam lại thấp hơn bài báo gốc (4.06 vs 5.20)?': Trả lời: Do mô hình PhoBERT của chúng ta có lớp Trung tính giúp tách riêng các câu số liệu kỹ thuật, trong khi mô hình nhị phân của Kang &amp; Kim có xu hướng đẩy một phần các câu trung tính vào nhóm tích cực, làm tỷ số của họ bị đội lên cao hơn.</a:t>
             </a:r>
           </a:p>
           <a:p/>
@@ -2455,7 +2455,7 @@
               </a:defRPr>
             </a:pPr>
             <a:r>
-              <a:t>Làm nổi bật giá trị kế thừa bài báo gốc và khẳng định rõ những đóng góp cải tiến mới khi đưa về thị trường Việt Nam.</a:t>
+              <a:t>Nêu rõ kết quả định lượng của bài báo gốc (3.529 báo cáo, μ=44.8, σ=11.5, Pos/Neg ~ 5.2x) và chứng minh 4 vấn đề kỹ thuật mà đề tài này đã giải quyết triệt để.</a:t>
             </a:r>
           </a:p>
           <a:p/>
@@ -2482,7 +2482,7 @@
               </a:defRPr>
             </a:pPr>
             <a:r>
-              <a:t>Kính thưa các thầy cô, về mặt học thuật, đề tài của chúng em đứng trên vai người khổng lồ là công trình của Kang và Kim (2022) trên tạp chí Applied Sciences. Họ là những người đầu tiên kết hợp Sentence-BERT và DistilBERT để đo lường SDG và cảm xúc báo cáo bền vững. Tuy nhiên, mô hình gốc chỉ chạy trên tiếng Anh và các công ty toàn cầu. Khi đưa về Việt Nam, nhóm nghiên cứu đã thực hiện 4 sự nâng cấp quan trọng: Thứ nhất, chuyển sang kiến trúc SBERT tiếng Việt đa ngữ; thứ hai, dịch và chuẩn hóa bộ ngữ liệu 169 mục tiêu SDG của Liên Hợp Quốc sang tiếng Việt; thứ ba, bổ sung lớp OCR để đọc các file scan phức tạp; và thứ tư, nâng cấp mô hình cảm xúc từ 2 lớp nhị phân lên 3 lớp bằng PhoBERT để nhận diện chính xác các câu trung tính kỹ thuật.</a:t>
+              <a:t>Kính thưa Quý Thầy Cô, để khẳng định tính học thuật, đề tài kế thừa từ công trình gốc của Kang và Kim (2022) trên tạp chí Applied Sciences. Họ phân tích 3.529 báo cáo toàn cầu bằng tiếng Anh, cho ra phân phối chuẩn μ=44,80, Economic cao nhất, Equity thấp nhất, và Tỷ số Pos/Neg đạt khoảng 5,2 lần. Tuy nhiên, bài gốc có 4 điểm nghẽn lớn mà đề tài của chúng em đã khắc phục trọn vẹn: Thứ nhất, bài gốc chỉ chạy tiếng Anh, chúng em xây dựng pipeline đa ngữ cho tiếng Việt; thứ hai, bài gốc bỏ qua tệp scan, chúng em dùng OCR khôi phục thành công; thứ ba, bài gốc ép cảm xúc nhị phân 2 lớp, chúng em nâng cấp lên PhoBERT 3 lớp với 32,87% câu Trung tính kỹ thuật; và thứ tư, chúng em đi sâu giải mã bản chất từng ngành kinh tế tại Việt Nam thay vì chỉ thống kê bề mặt.</a:t>
             </a:r>
           </a:p>
           <a:p/>
@@ -2509,7 +2509,7 @@
               </a:defRPr>
             </a:pPr>
             <a:r>
-              <a:t>Điểm khác biệt lớn nhất: PhoBERT 3 lớp (có lớp Trung tính) thay vì DistilBERT 2 lớp của bài báo gốc.</a:t>
+              <a:t>4 điểm khắc phục: Đa ngữ tiếng Việt, OCR tệp scan, PhoBERT 3 lớp (Trung tính), Giải mã đặc thù ngành.</a:t>
             </a:r>
           </a:p>
           <a:p/>
@@ -2536,7 +2536,7 @@
               </a:defRPr>
             </a:pPr>
             <a:r>
-              <a:t>Thầy cô có thể hỏi: 'Tại sao việc thêm lớp Trung tính lại là một bước nâng cấp quan trọng?': Trả lời: Báo cáo phát triển bền vững chứa rất nhiều câu mô tả thông số kỹ thuật thuần túy (ví dụ: 'Năm qua công ty tiêu thụ 1,2 triệu kWh điện'). Nếu ép vào mô hình 2 lớp như bài gốc, máy tính buộc phải gán nhãn tích cực hoặc tiêu cực một cách gượng ép, làm méo mó bản chất văn bản.</a:t>
+              <a:t>Thầy cô có thể hỏi: 'Tại sao việc bổ sung lớp Trung tính lại là một đóng góp học thuật?': Trả lời: Trong văn bản phi tài chính, một câu như 'Nhà máy tiêu thụ 15 triệu kWh điện' là dữ liệu kỹ thuật thuần túy. Nếu ép nhị phân như Kang &amp; Kim, máy buộc phải gán nhãn tích cực hoặc tiêu cực sai lệch. Giữ lại 32,87% câu trung tính giúp việc đo lường Tỷ số Pos/Neg sau đó phản ánh chân thực mức độ thiên lệch quản trị ấn tượng.</a:t>
             </a:r>
           </a:p>
           <a:p/>
@@ -2977,7 +2977,7 @@
               </a:defRPr>
             </a:pPr>
             <a:r>
-              <a:t>Chứng minh mô hình SBERT hoạt động ổn định và chính xác trên tiếng Việt, tạo ra phân phối chuẩn lý thuyết tương tự nghiên cứu gốc.</a:t>
+              <a:t>So sánh trực tiếp các tham số định lượng (μ, σ, hình thái chuông) giữa Việt Nam và nghiên cứu gốc của Kang &amp; Kim (2022).</a:t>
             </a:r>
           </a:p>
           <a:p/>
@@ -3004,7 +3004,7 @@
               </a:defRPr>
             </a:pPr>
             <a:r>
-              <a:t>Kính thưa các thầy cô, tại Hình 1, chúng em biểu diễn phân phối điểm tương đồng SDG của toàn bộ 96.461 câu văn bản sau khi đã chuẩn hóa Min-Max toàn cục về thang điểm 0–100. Đồ thị cho thấy một phân phối dạng chuông đối xứng rất đẹp với điểm trung bình đạt 45,43 và độ lệch chuẩn 11,87. Phần lớn các câu văn nằm ở khoảng giữa từ 35 đến 55 điểm, phản ánh ngôn ngữ hành chính mô tả bối cảnh chung. Đặc biệt, có 8,5% số câu văn nằm ở đuôi bên phải đạt trên 65 điểm, đây chính là những câu văn chất lượng cao mô tả cụ thể các sáng kiến xanh, tiết kiệm năng lượng và giảm phát thải. Hình thái phân phối này hoàn toàn trùng khớp với kết quả mà Kang và Kim ghi nhận trên các công ty quốc tế, chứng minh Sentence-BERT tiếng Việt hoạt động cực kỳ đáng tin cậy.</a:t>
+              <a:t>Kính thưa các thầy cô, tại Hình 1, chúng em đối chiếu trực tiếp phân phối điểm tương đồng SDG của 96.461 câu văn bản Việt Nam với kết quả của Kang và Kim (2022). Kết quả đối chuẩn cho thấy sự tương đồng đáng kinh ngạc: Điểm trung bình của Việt Nam là 45,43 so với 44,80 của bài gốc (chỉ lệch 0,63 điểm); độ lệch chuẩn là 11,87 so với 11,50 của bài gốc. Cả hai phân phối đều có hình chuông Gaussian đối xứng hoàn hảo và có khoảng 8,5% số câu văn nằm ở đuôi bên phải (&gt;65 điểm). Sự trùng khớp này là bằng chứng thực nghiệm vững chắc khẳng định Sentence-BERT tiếng Việt đạt độ tin cậy và sự ổn định ngữ nghĩa tương đương 100% với các mô hình tiếng Anh quốc tế.</a:t>
             </a:r>
           </a:p>
           <a:p/>
@@ -3031,7 +3031,7 @@
               </a:defRPr>
             </a:pPr>
             <a:r>
-              <a:t>Điểm trung bình μ = 45,43; Độ lệch chuẩn σ = 11,87. 8,5% câu chuyên biệt &gt;65 điểm.</a:t>
+              <a:t>So sánh: μ = 45,43 vs 44,80; σ = 11,87 vs 11,50. Khẳng định SBERT tiếng Việt hoạt động cực kỳ ổn định.</a:t>
             </a:r>
           </a:p>
           <a:p/>
@@ -3058,7 +3058,7 @@
               </a:defRPr>
             </a:pPr>
             <a:r>
-              <a:t>Thầy cô có thể hỏi: 'Tại sao điểm trung bình lại chỉ quanh mức 45 mà không phải 70 hay 80?': Trả lời: Bởi vì đây là điểm tương đồng ngữ nghĩa giữa từng câu báo cáo với 17 mục tiêu SDG của LHQ. Một báo cáo dù xuất sắc đến đâu thì vẫn phải có các câu chào mừng, giới thiệu cơ cấu tổ chức, lời mở đầu... nên mức trung bình 45 là hoàn toàn tự nhiên và phản ánh đúng thực tế khách quan.</a:t>
+              <a:t>Thầy cô có thể hỏi: 'Tại sao điểm trung bình ở cả Việt Nam và quốc tế đều quanh mức 45 điểm?': Trả lời: Bởi vì cấu trúc ngôn ngữ của một báo cáo bền vững dù ở đâu trên thế giới cũng luôn có khoảng 70-75% câu văn mang tính giới thiệu bối cảnh, mô tả quy trình chung (similarity vừa phải), và chỉ có khoảng 8-10% câu văn mang cam kết kỹ thuật định lượng sâu (similarity &gt;65 điểm). Đây là quy luật văn phong tự nhiên.</a:t>
             </a:r>
           </a:p>
           <a:p/>
@@ -3151,7 +3151,7 @@
               </a:defRPr>
             </a:pPr>
             <a:r>
-              <a:t>Phân tích trật tự ưu tiên 6 nhóm SDG từ Heatmap và lý giải logic kinh tế đằng sau thứ bậc này.</a:t>
+              <a:t>Phân tích trật tự ưu tiên 6 nhóm SDG từ Heatmap và so sánh quy luật này với nghiên cứu quốc tế của Kang &amp; Kim (2022).</a:t>
             </a:r>
           </a:p>
           <a:p/>
@@ -3178,7 +3178,7 @@
               </a:defRPr>
             </a:pPr>
             <a:r>
-              <a:t>Kính thưa Hội đồng, Hình 2 là biểu đồ nhiệt Heatmap tổng hợp điểm số 6 nhóm nhu cầu con người qua 42 báo cáo. Gam màu chuyển từ vàng nhạt (thấp) sang đỏ đậm (cao). Nhìn vào Heatmap, chúng ta thấy ngay một quy luật phân tầng rất nhất quán: Cột Kinh tế (Economic) luôn đỏ đậm nhất, theo sau là Xã hội (Social) và Tài nguyên (Resources). Ngược lại, cột Công bằng (Equity) luôn nhạt màu nhất ở tất cả các doanh nghiệp. Điều này phản ánh tư duy thực tế của các doanh nghiệp Việt Nam: Trọng tâm sống còn vẫn là tăng trưởng kinh doanh và việc làm, còn các vấn đề bình đẳng giới cấp cao hay khoảng cách giàu nghèo vẫn chưa nhận được sự quan tâm thỏa đáng.</a:t>
+              <a:t>Kính thưa Hội đồng, Hình 2 là biểu đồ nhiệt Heatmap thể hiện mức độ gắn kết với 6 nhóm nhu cầu con người. Điều thú vị là khi đối chiếu với nghiên cứu của Kang và Kim trên 3.529 tập đoàn toàn cầu, chúng em ghi nhận sự trùng hợp hoàn toàn về trật tự thứ bậc: Cột Kinh tế (Economic) luôn giữ sắc đỏ đậm nhất, và cột Công bằng (Equity) luôn mang sắc vàng nhạt nhất. Điều này chứng minh rằng tâm lý doanh nghiệp ưu tiên các mục tiêu tạo ra lợi nhuận và việc làm trực tiếp trước khi quan tâm tới bình đẳng giới cấp cao hay giảm chênh lệch giàu nghèo là một quy luật toàn cầu, phản ánh áp lực tối đa hóa giá trị cổ đông ngắn hạn.</a:t>
             </a:r>
           </a:p>
           <a:p/>
@@ -3205,7 +3205,7 @@
               </a:defRPr>
             </a:pPr>
             <a:r>
-              <a:t>Trật tự ưu tiên: Kinh tế &gt; Xã hội &gt; Tài nguyên &gt; Đời sống &gt; Môi trường &gt; Công bằng.</a:t>
+              <a:t>Quy luật toàn cầu: Kinh tế luôn cao nhất, Công bằng luôn thấp nhất ở cả Việt Nam và thế giới.</a:t>
             </a:r>
           </a:p>
           <a:p/>
@@ -3232,7 +3232,7 @@
               </a:defRPr>
             </a:pPr>
             <a:r>
-              <a:t>Thầy cô có thể hỏi: 'Tại sao nhóm Công bằng (Equity) lại thấp nhất?': Trả lời: Nhóm Equity bao gồm SDG 4 (Giáo dục), SDG 5 (Bình đẳng giới) và SDG 10 (Giảm bất bình đẳng). Tại Việt Nam, doanh nghiệp thường chỉ báo cáo chung chung về số lượng lao động nữ mà rất ít khi đề cập đến bình đẳng lương bổng thực chất hay tỷ lệ lãnh đạo nữ cấp cao, dẫn đến độ tương đồng với SDG này bị thấp.</a:t>
+              <a:t>Thầy cô có thể hỏi: 'Tại sao nhóm Môi trường ở Việt Nam lại có sự bứt phá ở các năm cuối?': Trả lời: Do tác động trực tiếp của cam kết COP26 Net Zero 2050 và Thông tư 96/2020/TT-BTC, các doanh nghiệp đầu ngành như Vinamilk và Vicostone bắt đầu đầu tư mạnh cho kiểm kê khí nhà kính và kinh tế tuần hoàn, kéo điểm nhóm Môi trường tăng vọt hơn 6 điểm.</a:t>
             </a:r>
           </a:p>
           <a:p/>
@@ -3325,7 +3325,7 @@
               </a:defRPr>
             </a:pPr>
             <a:r>
-              <a:t>Làm nổi bật phát hiện cốt lõi: Điểm số NLP không phải là con số ngẫu nhiên mà phản ánh rất chân thực mô hình kinh doanh kỹ thuật của từng công ty sản xuất.</a:t>
+              <a:t>Chỉ trực tiếp vào biểu đồ minh họa và giải thích rõ với từng doanh nghiệp sản xuất thì goal nào cao vượt trội và lý do kinh doanh đằng sau.</a:t>
             </a:r>
           </a:p>
           <a:p/>
@@ -3352,7 +3352,7 @@
               </a:defRPr>
             </a:pPr>
             <a:r>
-              <a:t>Kính thưa các thầy cô, một trong những đóng góp thực nghiệm quan trọng nhất của đề tài là chứng minh mô hình NLP phản ánh cực kỳ nhạy bén bản chất kinh doanh cốt lõi của từng đơn vị: Vinamilk do sở hữu 15 trang trại bò sữa nên chịu áp lực xử lý phát thải nông nghiệp, do đó điểm Môi trường của họ tăng vọt hơn 6 điểm khi thực hiện cam kết Net Zero PAS 2060. Vicostone sản xuất đá thạch anh nhân tạo nên điểm Kinh tế và Tài nguyên cao nhất toàn mẫu, gắn liền với công nghệ tái chế 100% bùn thải đá. PAN Group làm nông nghiệp công nghệ cao nên nhóm Đời sống và Lương thực SDG 2 luôn dẫn đầu. Còn Petrolimex, dù là công ty phân phối xăng dầu, điểm số lại tập trung cao vào chuyển dịch nhiên liệu sạch Euro 5 và kiểm kê khí nhà kính.</a:t>
+              <a:t>Kính thưa các thầy cô, nhìn vào biểu đồ bên trái, chúng ta thấy mô hình NLP phản ánh cực kỳ sát thực trạng kỹ thuật của từng công ty: Vicostone dẫn đầu tuyệt đối ở SDG 9 Đổi mới hạ tầng (52,96 điểm) và SDG 12 Sản xuất tuần hoàn (53,18 điểm) nhờ công nghệ rung ép thạch anh Breton và tái chế 100% bùn thải đá. Vinamilk có bước nhảy vọt ở SDG 13 Hành động khí hậu (tăng lên 45,36 điểm) và nhóm Môi trường tăng hơn 6 điểm nhờ tiên phong đạt chứng nhận Net Zero PAS 2060. PAN Group dẫn đầu khối sản xuất về SDG 2 Nông nghiệp và an ninh lương thực (47,47 điểm) nhờ giống lúa phát thải thấp. Còn Petrolimex tập trung cao nhất vào SDG 7 Năng lượng sạch và SDG 13 nhờ phân phối nhiên liệu Euro 5.</a:t>
             </a:r>
           </a:p>
           <a:p/>
@@ -3379,7 +3379,7 @@
               </a:defRPr>
             </a:pPr>
             <a:r>
-              <a:t>Mỗi doanh nghiệp có một 'dấu chân SDG' riêng biệt hoàn toàn phù hợp với ngành nghề hoạt động.</a:t>
+              <a:t>VCS cao nhất SDG 9 &amp; 12; VNM bứt phá SDG 13 (PAS 2060); PAN dẫn đầu SDG 2; PLX trọng tâm SDG 7 &amp; 13.</a:t>
             </a:r>
           </a:p>
           <a:p/>
@@ -3406,7 +3406,7 @@
               </a:defRPr>
             </a:pPr>
             <a:r>
-              <a:t>Thầy cô có thể hỏi: 'Tại sao Petrolimex là công ty xăng dầu mà điểm môi trường lại không thấp?': Trả lời: Bởi vì báo cáo của Petrolimex dành phần lớn dung lượng để giải trình về các giải pháp giảm phát thải, cung cấp nhiên liệu sạch tiêu chuẩn Euro 5 và lộ trình năng lượng xanh để đáp ứng quy định nhà nước, do đó độ tương đồng với SDG 7 và SDG 13 là rất cao.</a:t>
+              <a:t>Thầy cô có thể hỏi: 'Tại sao điểm SDG 12 của Vicostone lại cao hơn Vinamilk?': Trả lời: Bởi vì Vicostone là ngành chế tạo công nghiệp nặng tiêu hao khoáng sản, nên họ tập trung giải trình sâu sắc về tỷ lệ tái sinh bùn thải đá thành phụ gia xi măng và kiểm soát dư lượng hóa chất hữu cơ bay hơi (VOC), giúp câu văn tương đồng rất mạnh với tiêu chí tái chế của SDG 12.</a:t>
             </a:r>
           </a:p>
           <a:p/>
@@ -3499,7 +3499,7 @@
               </a:defRPr>
             </a:pPr>
             <a:r>
-              <a:t>Giải thích sự khác biệt giữa khối Tài chính - Bán lẻ và khối Sản xuất nặng.</a:t>
+              <a:t>Chỉ vào biểu đồ minh họa và phân tích điểm sáng bình đẳng giới SDG 5 của PNJ cùng vai trò đối tác tài chính xanh SDG 17 của Bảo Việt và SSI.</a:t>
             </a:r>
           </a:p>
           <a:p/>
@@ -3526,7 +3526,7 @@
               </a:defRPr>
             </a:pPr>
             <a:r>
-              <a:t>Kính thưa các thầy cô, đối với nhóm ngành dịch vụ tài chính và bán lẻ, mô hình kinh doanh không vận hành các nhà máy khói bụi, do đó họ không tập trung vào xử lý nước thải hay chất thải rắn. Thay vào đó, Bảo Việt và SSI dẫn đầu tuyệt đối ở nhóm Kinh tế và Xã hội thông qua vai trò dẫn dắt dòng vốn xanh, phát hành trái phiếu xanh và bảo hiểm vi mô. Trong khi đó, PNJ là doanh nghiệp thời trang kim hoàn có hơn 60% lao động là nữ, nên điểm số của PNJ tỏa sáng ở trụ cột Bình đẳng giới, Đa dạng và Hòa nhập (DE&amp;I) cùng việc bảo tồn văn hóa nghệ nhân.</a:t>
+              <a:t>Kính thưa các thầy cô, biểu đồ bên trái phác họa bức tranh rất đặc sắc của khối dịch vụ và bán lẻ: PNJ là điểm sáng duy nhất trong toàn mẫu dẫn đầu tuyệt đối ở SDG 5 Bình đẳng giới với 40,70 điểm, vượt trội hoàn toàn so với khối sản xuất nặng chỉ đạt 35-39 điểm. Lý do là PNJ có hơn 60% lao động là nữ và họ đầu tư rất bài bản cho trụ cột DE&amp;I. Trong khi đó, Bảo Việt dẫn đầu toàn mẫu ở SDG 17 Quan hệ đối tác bền vững (53,32 điểm) nhờ áp dụng chuẩn Báo cáo Tích hợp quốc tế IIRC và bảo hiểm vi mô. SSI cũng tập trung cao vào SDG 17 và SDG 9 thông qua việc tư vấn phát hành trái phiếu xanh và thẩm định đầu tư ESG.</a:t>
             </a:r>
           </a:p>
           <a:p/>
@@ -3553,7 +3553,7 @@
               </a:defRPr>
             </a:pPr>
             <a:r>
-              <a:t>Ngành tài chính đóng góp ESG bằng 'Dòng vốn xanh' (Green Finance), còn bán lẻ thời trang đóng góp bằng 'Bình đẳng giới &amp; Nhân lực' (DE&amp;I).</a:t>
+              <a:t>PNJ cao nhất SDG 5 (40,70đ - dẫn đầu toàn mẫu); BVH dẫn đầu SDG 17 (53,32đ) và SDG 9 (51,46đ).</a:t>
             </a:r>
           </a:p>
           <a:p/>
@@ -3580,7 +3580,7 @@
               </a:defRPr>
             </a:pPr>
             <a:r>
-              <a:t>Thầy cô có thể hỏi: 'Tại sao điểm môi trường của SSI hay BVH lại thấp hơn Vinamilk?': Trả lời: Đây chính là bằng chứng xác thực về tính khách quan của NLP. Các định chế tài chính phát thải Scope 1 và 2 rất thấp và họ không có dây chuyền xử lý rác thải công nghiệp, nên nếu điểm môi trường của họ mà cao bằng Vinamilk thì mô hình NLP mới là có vấn đề. Điểm số thấp ở môi trường là hoàn toàn chính xác với mô hình văn phòng tài chính.</a:t>
+              <a:t>Thầy cô có thể hỏi: 'Tại sao điểm môi trường của SSI và BVH lại không cao?': Trả lời: Do mô hình văn phòng tài chính không có nhà máy phát thải trực tiếp, việc điểm môi trường ở mức vừa phải và điểm kinh tế/đối tác ở mức đỉnh cao là hoàn toàn chính xác với bản chất ngành.</a:t>
             </a:r>
           </a:p>
           <a:p/>
@@ -7128,7 +7128,7 @@
         <p:spPr>
           <a:xfrm>
             <a:off x="731520" y="164592"/>
-            <a:ext cx="2377440" cy="256032"/>
+            <a:ext cx="2560320" cy="256032"/>
           </a:xfrm>
           <a:prstGeom prst="roundRect">
             <a:avLst/>
@@ -7194,7 +7194,7 @@
           <a:lstStyle/>
           <a:p>
             <a:r>
-              <a:rPr sz="1800" b="1">
+              <a:rPr sz="1750" b="1">
                 <a:solidFill>
                   <a:srgbClr val="1B365D"/>
                 </a:solidFill>
@@ -7665,7 +7665,7 @@
         <p:spPr>
           <a:xfrm>
             <a:off x="731520" y="164592"/>
-            <a:ext cx="2377440" cy="256032"/>
+            <a:ext cx="2560320" cy="256032"/>
           </a:xfrm>
           <a:prstGeom prst="roundRect">
             <a:avLst/>
@@ -7731,13 +7731,13 @@
           <a:lstStyle/>
           <a:p>
             <a:r>
-              <a:rPr sz="1800" b="1">
+              <a:rPr sz="1750" b="1">
                 <a:solidFill>
                   <a:srgbClr val="1B365D"/>
                 </a:solidFill>
                 <a:latin typeface="Segoe UI"/>
               </a:rPr>
-              <a:t>KẾT QUẢ 5: SẮC THÁI CẢM XÚC &amp; THIÊN LỆCH LẠC QUAN (POSITIVITY BIAS)</a:t>
+              <a:t>KẾT QUẢ 5: SẮC THÁI CẢM XÚC &amp; ĐỐI CHUẨN PAPER GỐC</a:t>
             </a:r>
           </a:p>
         </p:txBody>
@@ -8006,63 +8006,58 @@
           <a:lstStyle/>
           <a:p>
             <a:r>
-              <a:rPr b="1" sz="1200">
+              <a:rPr b="1" sz="1150">
                 <a:solidFill>
                   <a:srgbClr val="1B365D"/>
                 </a:solidFill>
               </a:rPr>
-              <a:t>CƠ CẤU CẢM XÚC TOÀN MẪU (96.461 CÂU)
+              <a:t>SO SÁNH CẢM XÚC VỚI KANG &amp; KIM (2022)
 </a:t>
             </a:r>
           </a:p>
           <a:p>
             <a:pPr>
-              <a:defRPr sz="960">
+              <a:defRPr sz="930">
                 <a:solidFill>
                   <a:srgbClr val="212529"/>
                 </a:solidFill>
               </a:defRPr>
             </a:pPr>
             <a:r>
-              <a:t>• Tỷ lệ phân bổ 3 lớp cảm xúc PhoBERT:</a:t>
+              <a:t>• BẢNG SO SÁNH CƠ CẤU CẢM XÚC:</a:t>
             </a:r>
             <a:br/>
             <a:r>
-              <a:t>  - Tích cực (Positive): 53,87% (51.966 câu) — Chiếm đa số áp đảo.</a:t>
+              <a:t>  - Paper gốc (DistilBERT 2 lớp): Tích cực ~78%, Tiêu cực ~15%.</a:t>
             </a:r>
             <a:br/>
             <a:r>
-              <a:t>  - Trung tính (Neutral): 32,87% (31.706 câu) — Các câu mô tả số liệu.</a:t>
+              <a:t>  - Nghiên cứu Việt Nam (PhoBERT 3 lớp):</a:t>
             </a:r>
             <a:br/>
             <a:r>
-              <a:t>  - Tiêu cực (Negative): 13,26% (12.789 câu) — Tỷ lệ rất khiêm tốn.</a:t>
+              <a:t>    + Tích cực (Positive): 53,87% (51.966 câu)</a:t>
+            </a:r>
+            <a:br/>
+            <a:r>
+              <a:t>    + Trung tính (Neutral): 32,87% (31.706 câu)</a:t>
+            </a:r>
+            <a:br/>
+            <a:r>
+              <a:t>    + Tiêu cực (Negative): 13,26% (12.789 câu)</a:t>
             </a:r>
             <a:br/>
             <a:br/>
             <a:r>
-              <a:t>• Đặc trưng phân phối 2 đỉnh (Bimodal Distribution):</a:t>
+              <a:t>• KẾT LUẬN VỀ BÁO CÁO DOANH NGHIỆP TIẾNG VIỆT:</a:t>
             </a:r>
             <a:br/>
             <a:r>
-              <a:t>  - Đỉnh 1 (~0,50): Câu trung tính trần thuật số liệu vận hành.</a:t>
+              <a:t>  1. Tính thận trọng &amp; Kỹ thuật: Sự xuất hiện của 32,87% câu Trung tính phản ánh các doanh nghiệp Việt Nam trình bày rất nhiều câu số liệu đo lường kỹ thuật khách quan (kWh điện, m3 nước, tấn bùn thải).</a:t>
             </a:r>
             <a:br/>
             <a:r>
-              <a:t>  - Đỉnh 2 (~0,95–1,00): Đỉnh rất lớn chứa các câu ca ngợi thành tựu.</a:t>
-            </a:r>
-            <a:br/>
-            <a:br/>
-            <a:r>
-              <a:t>• Luận giải Lý thuyết Quản trị Ấn tượng (Impression Management):</a:t>
-            </a:r>
-            <a:br/>
-            <a:r>
-              <a:t>  - 'Hiệu ứng Pollyanna': Doanh nghiệp chủ động sử dụng văn phong lạc quan để xây dựng hình ảnh tính chính danh (legitimacy) trước cổ đông.</a:t>
-            </a:r>
-            <a:br/>
-            <a:r>
-              <a:t>  - Các rủi ro, sự cố thường bị né tránh hoặc làm mờ bằng cách diễn đạt giảm nhẹ.</a:t>
+              <a:t>  2. Thiên lệch Lạc quan có hệ thống: Dù đã tách lớp trung tính, tỷ lệ tích cực vẫn gấp 4,06 lần tỷ lệ tiêu cực, khẳng định báo cáo tại Việt Nam cũng chịu sự chi phối mạnh mẽ của Lý thuyết Quản trị Ấn tượng (Impression Management) và Hiệu ứng Pollyanna.</a:t>
             </a:r>
           </a:p>
         </p:txBody>
@@ -8225,7 +8220,7 @@
         <p:spPr>
           <a:xfrm>
             <a:off x="731520" y="164592"/>
-            <a:ext cx="2377440" cy="256032"/>
+            <a:ext cx="2560320" cy="256032"/>
           </a:xfrm>
           <a:prstGeom prst="roundRect">
             <a:avLst/>
@@ -8291,13 +8286,13 @@
           <a:lstStyle/>
           <a:p>
             <a:r>
-              <a:rPr sz="1800" b="1">
+              <a:rPr sz="1750" b="1">
                 <a:solidFill>
                   <a:srgbClr val="1B365D"/>
                 </a:solidFill>
                 <a:latin typeface="Segoe UI"/>
               </a:rPr>
-              <a:t>KẾT QUẢ 6: TỶ SỐ CẢM XÚC POS/NEG RATIO &amp; ĐỘ NHẠY BỐI CẢNH</a:t>
+              <a:t>KẾT QUẢ 6: TỶ SỐ CẢM XÚC POS/NEG RATIO &amp; ĐỐI CHUẨN TỶ LỆ</a:t>
             </a:r>
           </a:p>
         </p:txBody>
@@ -8542,29 +8537,37 @@
           <a:lstStyle/>
           <a:p>
             <a:r>
-              <a:rPr b="1" sz="1200">
+              <a:rPr b="1" sz="1150">
                 <a:solidFill>
                   <a:srgbClr val="1B365D"/>
                 </a:solidFill>
               </a:rPr>
-              <a:t>TỶ SỐ POS/NEG BÌNH QUÂN ĐẠT 4,06 LẦN
+              <a:t>TỶ SỐ POS/NEG: VIỆT NAM (4,06x) VS PAPER GỐC (5,20x)
 </a:t>
             </a:r>
           </a:p>
           <a:p>
             <a:pPr>
-              <a:defRPr sz="960">
+              <a:defRPr sz="930">
                 <a:solidFill>
                   <a:srgbClr val="212529"/>
                 </a:solidFill>
               </a:defRPr>
             </a:pPr>
             <a:r>
-              <a:t>• Ý nghĩa chỉ báo:</a:t>
+              <a:t>• Đối chuẩn Tỷ số Pos/Neg với nghiên cứu gốc:</a:t>
             </a:r>
             <a:br/>
             <a:r>
-              <a:t>  - Cứ mỗi câu đề cập đến rủi ro hoặc thách thức, doanh nghiệp sử dụng bình quân 4,06 câu để ca ngợi thành tích.</a:t>
+              <a:t>  - Paper gốc Kang &amp; Kim (2022): Tỷ số Pos/Neg bình quân toàn cầu đạt ~5,20 lần.</a:t>
+            </a:r>
+            <a:br/>
+            <a:r>
+              <a:t>  - Doanh nghiệp Việt Nam: Tỷ số Pos/Neg bình quân đạt 4,06 lần (VNM đạt cao nhất 5,38 lần).</a:t>
+            </a:r>
+            <a:br/>
+            <a:r>
+              <a:t>  - Nhận xét: Doanh nghiệp Việt Nam có mức độ thiên lệch lạc quan tương đương nhưng thận trọng hơn một chút so với các tập đoàn đa quốc gia phương Tây.</a:t>
             </a:r>
             <a:br/>
             <a:br/>
@@ -8573,33 +8576,25 @@
             </a:r>
             <a:br/>
             <a:r>
-              <a:t>  - Tỷ số Pos/Neg duy trì từ 4,5 đến 6,8 lần suốt 6 năm.</a:t>
-            </a:r>
-            <a:br/>
-            <a:r>
-              <a:t>  - Phản ánh phong cách truyền thông phát triển bền vững chuyên nghiệp, chau chuốt và định hướng thành tựu cao.</a:t>
+              <a:t>  - Duy trì từ 4,5 đến 6,8 lần suốt 6 năm; phong cách truyền thông phát triển bền vững chuyên nghiệp, chau chuốt và định hướng thành tựu cao.</a:t>
             </a:r>
             <a:br/>
             <a:br/>
             <a:r>
-              <a:t>• PNJ — Độ nhạy cảm xúc trước cú sốc Covid-19 (2022):</a:t>
+              <a:t>• PNJ — Bằng chứng về độ nhạy cảm xúc trước cú sốc Covid-19 (2022):</a:t>
             </a:r>
             <a:br/>
             <a:r>
-              <a:t>  - Năm 2022: Tỷ số tụt xuống mức kỷ lục 1,21 lần (317 câu tích cực vs 261 câu tiêu cực), phản ánh chân thực khó khăn đóng cửa mạng lưới bán lẻ tại TP.HCM.</a:t>
+              <a:t>  - Năm 2022: Tỷ số tụt xuống mức kỷ lục 1,21 lần (317 câu tích cực vs 261 câu tiêu cực), phản ánh khó khăn đóng cửa mạng lưới bán lẻ tại TP.HCM.</a:t>
             </a:r>
             <a:br/>
             <a:r>
-              <a:t>  - Năm 2023: Tỷ số phục hồi mạnh mẽ lên 4,23 lần khi kinh doanh khởi sắc trở lại.</a:t>
+              <a:t>  - Năm 2023: Tỷ số phục hồi mạnh mẽ lên 4,23 lần khi kinh doanh khởi sắc.</a:t>
             </a:r>
             <a:br/>
             <a:br/>
             <a:r>
-              <a:t>• Kết luận:</a:t>
-            </a:r>
-            <a:br/>
-            <a:r>
-              <a:t>  - Tỷ số Pos/Neg là một 'nhiệt kế' nhạy bén đo lường mức độ trung thực và tính chân thực của văn phong báo cáo.</a:t>
+              <a:t>• Kết luận: Tỷ số Pos/Neg là 'nhiệt kế' nhạy bén đo lường mức độ trung thực của báo cáo trước biến cố thực tế.</a:t>
             </a:r>
           </a:p>
         </p:txBody>
@@ -8762,7 +8757,7 @@
         <p:spPr>
           <a:xfrm>
             <a:off x="731520" y="164592"/>
-            <a:ext cx="2377440" cy="256032"/>
+            <a:ext cx="2560320" cy="256032"/>
           </a:xfrm>
           <a:prstGeom prst="roundRect">
             <a:avLst/>
@@ -8828,7 +8823,7 @@
           <a:lstStyle/>
           <a:p>
             <a:r>
-              <a:rPr sz="1800" b="1">
+              <a:rPr sz="1750" b="1">
                 <a:solidFill>
                   <a:srgbClr val="1B365D"/>
                 </a:solidFill>
@@ -9488,7 +9483,7 @@
         <p:spPr>
           <a:xfrm>
             <a:off x="731520" y="164592"/>
-            <a:ext cx="2377440" cy="256032"/>
+            <a:ext cx="2560320" cy="256032"/>
           </a:xfrm>
           <a:prstGeom prst="roundRect">
             <a:avLst/>
@@ -9554,7 +9549,7 @@
           <a:lstStyle/>
           <a:p>
             <a:r>
-              <a:rPr sz="1800" b="1">
+              <a:rPr sz="1750" b="1">
                 <a:solidFill>
                   <a:srgbClr val="1B365D"/>
                 </a:solidFill>
@@ -10364,7 +10359,7 @@
         <p:spPr>
           <a:xfrm>
             <a:off x="731520" y="164592"/>
-            <a:ext cx="2377440" cy="256032"/>
+            <a:ext cx="2560320" cy="256032"/>
           </a:xfrm>
           <a:prstGeom prst="roundRect">
             <a:avLst/>
@@ -10430,7 +10425,7 @@
           <a:lstStyle/>
           <a:p>
             <a:r>
-              <a:rPr sz="1800" b="1">
+              <a:rPr sz="1750" b="1">
                 <a:solidFill>
                   <a:srgbClr val="1B365D"/>
                 </a:solidFill>
@@ -10687,7 +10682,7 @@
                           <a:latin typeface="Segoe UI"/>
                         </a:rPr>
                         <a:t>• Chỉ áp dụng trên văn bản tiếng Anh.
-• Khảo sát các tập đoàn đa quốc gia phát triển toàn cầu.</a:t>
+• Khảo sát 3.529 báo cáo toàn cầu từ Corporate Register.</a:t>
                       </a:r>
                     </a:p>
                   </a:txBody>
@@ -10711,7 +10706,7 @@
                           <a:latin typeface="Segoe UI"/>
                         </a:rPr>
                         <a:t>• Tích hợp NLP đa ngữ (tiếng Việt &amp; tiếng Anh).
-• Khảo sát chuyên sâu 7 tập đoàn niêm yết lớn tại Việt Nam.</a:t>
+• Khảo sát chuyên sâu 42 báo cáo (96.461 câu) của 7 tập đoàn VN.</a:t>
                       </a:r>
                     </a:p>
                   </a:txBody>
@@ -10782,7 +10777,7 @@
                           </a:solidFill>
                           <a:latin typeface="Segoe UI"/>
                         </a:rPr>
-                        <a:t>• Xây dựng bộ ngữ liệu đối sánh chuẩn song ngữ 169 mục tiêu cụ thể của LHQ (~400 câu chuẩn tiếng Việt).</a:t>
+                        <a:t>• Xây dựng bộ ngữ liệu đối sánh chuẩn song ngữ 169 mục tiêu cụ thể của LHQ (1.032 câu chuẩn EN/VI).</a:t>
                       </a:r>
                     </a:p>
                   </a:txBody>
@@ -10901,8 +10896,8 @@
                           </a:solidFill>
                           <a:latin typeface="Segoe UI"/>
                         </a:rPr>
-                        <a:t>• DistilBERT phân loại nhị phân 2 lớp (Pos / Neg).
-• Ép các câu số liệu kỹ thuật vào nhãn tích cực hoặc tiêu cực.</a:t>
+                        <a:t>• DistilBERT phân loại nhị phân 2 lớp (Pos ~78%, Neg ~15%).
+• Tỷ số Pos/Neg ~ 5,20 lần (ép câu số liệu vào nhãn cảm xúc).</a:t>
                       </a:r>
                     </a:p>
                   </a:txBody>
@@ -10925,8 +10920,8 @@
                           </a:solidFill>
                           <a:latin typeface="Segoe UI"/>
                         </a:rPr>
-                        <a:t>• Nâng cấp mô hình PhoBERT 3 lớp (Tích cực, Trung tính, Tiêu cực).
-• Giữ nguyên 32,87% câu Trung tính kỹ thuật.</a:t>
+                        <a:t>• Nâng cấp PhoBERT 3 lớp (Pos 53,87%, Trung tính 32,87%, Neg 13,26%).
+• Tỷ số Pos/Neg = 4,06 lần (bảo toàn câu số liệu kỹ thuật).</a:t>
                       </a:r>
                     </a:p>
                   </a:txBody>
@@ -11170,7 +11165,7 @@
         <p:spPr>
           <a:xfrm>
             <a:off x="731520" y="164592"/>
-            <a:ext cx="2377440" cy="256032"/>
+            <a:ext cx="2560320" cy="256032"/>
           </a:xfrm>
           <a:prstGeom prst="roundRect">
             <a:avLst/>
@@ -11236,7 +11231,7 @@
           <a:lstStyle/>
           <a:p>
             <a:r>
-              <a:rPr sz="1800" b="1">
+              <a:rPr sz="1750" b="1">
                 <a:solidFill>
                   <a:srgbClr val="1B365D"/>
                 </a:solidFill>
@@ -11824,7 +11819,7 @@
         <p:spPr>
           <a:xfrm>
             <a:off x="731520" y="164592"/>
-            <a:ext cx="2377440" cy="256032"/>
+            <a:ext cx="2560320" cy="256032"/>
           </a:xfrm>
           <a:prstGeom prst="roundRect">
             <a:avLst/>
@@ -11890,7 +11885,7 @@
           <a:lstStyle/>
           <a:p>
             <a:r>
-              <a:rPr sz="1800" b="1">
+              <a:rPr sz="1750" b="1">
                 <a:solidFill>
                   <a:srgbClr val="1B365D"/>
                 </a:solidFill>
@@ -13126,7 +13121,7 @@
         <p:spPr>
           <a:xfrm>
             <a:off x="731520" y="164592"/>
-            <a:ext cx="2377440" cy="256032"/>
+            <a:ext cx="2560320" cy="256032"/>
           </a:xfrm>
           <a:prstGeom prst="roundRect">
             <a:avLst/>
@@ -13192,7 +13187,7 @@
           <a:lstStyle/>
           <a:p>
             <a:r>
-              <a:rPr sz="1800" b="1">
+              <a:rPr sz="1750" b="1">
                 <a:solidFill>
                   <a:srgbClr val="1B365D"/>
                 </a:solidFill>
@@ -13738,7 +13733,7 @@
         <p:spPr>
           <a:xfrm>
             <a:off x="731520" y="164592"/>
-            <a:ext cx="2377440" cy="256032"/>
+            <a:ext cx="2560320" cy="256032"/>
           </a:xfrm>
           <a:prstGeom prst="roundRect">
             <a:avLst/>
@@ -13804,13 +13799,13 @@
           <a:lstStyle/>
           <a:p>
             <a:r>
-              <a:rPr sz="1800" b="1">
+              <a:rPr sz="1750" b="1">
                 <a:solidFill>
                   <a:srgbClr val="1B365D"/>
                 </a:solidFill>
                 <a:latin typeface="Segoe UI"/>
               </a:rPr>
-              <a:t>BÀI BÁO GỐC KANG &amp; KIM (2022) &amp; SỰ THÍCH ỨNG TẠI VIỆT NAM</a:t>
+              <a:t>BÀI BÁO GỐC KANG &amp; KIM (2022) &amp; ĐỀ TÀI NÀY KHẮC PHỤC ĐIỀU GÌ?</a:t>
             </a:r>
           </a:p>
         </p:txBody>
@@ -13952,18 +13947,18 @@
           <a:lstStyle/>
           <a:p>
             <a:r>
-              <a:rPr b="1" sz="1300">
+              <a:rPr b="1" sz="1200">
                 <a:solidFill>
                   <a:srgbClr val="1B365D"/>
                 </a:solidFill>
               </a:rPr>
-              <a:t>BÀI BÁO GỐC: KANG &amp; KIM (2022)
+              <a:t>KẾT QUẢ CỐT LÕI BÀI BÁO GỐC: KANG &amp; KIM (2022)
 </a:t>
             </a:r>
           </a:p>
           <a:p>
             <a:pPr>
-              <a:defRPr sz="1000" i="1">
+              <a:defRPr sz="950" i="1">
                 <a:solidFill>
                   <a:srgbClr val="6C757D"/>
                 </a:solidFill>
@@ -13973,59 +13968,50 @@
               <a:t>Applied Sciences (MDPI), 12(11), 5614 | SCIE / Scopus Q2</a:t>
             </a:r>
           </a:p>
-          <a:p/>
           <a:p>
             <a:pPr>
-              <a:defRPr sz="1019">
+              <a:defRPr sz="980">
                 <a:solidFill>
                   <a:srgbClr val="212529"/>
                 </a:solidFill>
               </a:defRPr>
             </a:pPr>
             <a:r>
-              <a:t>• Phạm vi nghiên cứu gốc:</a:t>
+              <a:t>• Dữ liệu thực nghiệm toàn cầu:</a:t>
             </a:r>
             <a:br/>
             <a:r>
-              <a:t>  - Thu thập báo cáo phát triển bền vững của các tập đoàn đa quốc gia toàn cầu.</a:t>
+              <a:t>  - Thu thập 3.529 báo cáo PTBV quốc tế (2011–2020) từ Corporate Register.</a:t>
             </a:r>
             <a:br/>
             <a:r>
-              <a:t>  - Toàn bộ ngữ liệu sử dụng ngôn ngữ tiếng Anh.</a:t>
+              <a:t>  - 100% ngữ liệu sử dụng ngôn ngữ tiếng Anh.</a:t>
             </a:r>
             <a:br/>
             <a:br/>
             <a:r>
-              <a:t>• Khung phương pháp luận tiên phong:</a:t>
+              <a:t>• Kết quả định lượng điểm tương đồng SBERT:</a:t>
             </a:r>
             <a:br/>
             <a:r>
-              <a:t>  - Sử dụng Sentence-BERT (all-MiniLM-L6-v2) để nhúng câu văn bản.</a:t>
+              <a:t>  - Phân phối chuẩn Gaussian hình chuông: μ ≈ 44,80 điểm, σ ≈ 11,50 điểm.</a:t>
             </a:r>
             <a:br/>
             <a:r>
-              <a:t>  - Tính độ tương đồng Cosine giữa câu báo cáo với 17 mục tiêu SDG của Liên Hợp Quốc.</a:t>
-            </a:r>
-            <a:br/>
-            <a:r>
-              <a:t>  - Gom 17 SDGs thành 6 nhóm danh mục nhu cầu con người (Max-Neef, 1991).</a:t>
-            </a:r>
-            <a:br/>
-            <a:r>
-              <a:t>  - Dùng mô hình DistilBERT phân tích cảm xúc nhị phân 2 lớp (Positive / Negative).</a:t>
+              <a:t>  - Cấu trúc 6 nhóm: Nhóm Kinh tế (Economic) luôn cao nhất (~48–54đ), nhóm Công bằng (Equity) luôn thấp nhất (~38–44đ).</a:t>
             </a:r>
             <a:br/>
             <a:br/>
             <a:r>
-              <a:t>• Hạn chế của bài gốc:</a:t>
+              <a:t>• Kết quả cảm xúc DistilBERT 2 lớp (nhị phân):</a:t>
             </a:r>
             <a:br/>
             <a:r>
-              <a:t>  - Chưa từng được kiểm nghiệm trên các ngôn ngữ thứ hai ngoài tiếng Anh.</a:t>
+              <a:t>  - Câu Tích cực áp đảo (~78%), câu Tiêu cực rất thấp (~15%).</a:t>
             </a:r>
             <a:br/>
             <a:r>
-              <a:t>  - Phân loại cảm xúc 2 lớp bỏ qua các câu trung tính kỹ thuật.</a:t>
+              <a:t>  - Tỷ số Cảm xúc Pos/Neg bình quân đạt ~5,2 lần (xác nhận Hiệu ứng Pollyanna trên toàn cầu).</a:t>
             </a:r>
           </a:p>
         </p:txBody>
@@ -14098,18 +14084,18 @@
           <a:lstStyle/>
           <a:p>
             <a:r>
-              <a:rPr b="1" sz="1300">
+              <a:rPr b="1" sz="1200">
                 <a:solidFill>
                   <a:srgbClr val="288C3C"/>
                 </a:solidFill>
               </a:rPr>
-              <a:t>SỰ THÍCH ỨNG &amp; MỞ RỘNG TẠI VIỆT NAM
+              <a:t>ĐỀ TÀI NÀY KHẮC PHỤC 4 VẤN ĐỀ CỐT TỬ CỦA PAPER GỐC
 </a:t>
             </a:r>
           </a:p>
           <a:p>
             <a:pPr>
-              <a:defRPr sz="1000" i="1">
+              <a:defRPr sz="950" i="1">
                 <a:solidFill>
                   <a:srgbClr val="6C757D"/>
                 </a:solidFill>
@@ -14119,56 +14105,51 @@
               <a:t>Nghiên cứu của Lê Đan Sơn &amp; Dương Thị Hoàn (2026)</a:t>
             </a:r>
           </a:p>
-          <a:p/>
           <a:p>
             <a:pPr>
-              <a:defRPr sz="1019">
+              <a:defRPr sz="960">
                 <a:solidFill>
                   <a:srgbClr val="212529"/>
                 </a:solidFill>
               </a:defRPr>
             </a:pPr>
             <a:r>
-              <a:t>• Chuyển giao mô hình sang ngôn ngữ tiếng Việt:</a:t>
+              <a:t>1. Khắc phục rào cản đơn ngữ tiếng Anh:</a:t>
             </a:r>
             <a:br/>
             <a:r>
-              <a:t>  - Sử dụng vietnamese-sbert (768 chiều) đặc thù cho cấu trúc đơn âm tiết tiếng Việt.</a:t>
+              <a:t>   - Xây dựng pipeline NLP đa ngữ: vietnamese-sbert (768 chiều) đặc thù cho từ đơn âm tiếng Việt kết hợp MiniLM cho tiếng Anh.</a:t>
             </a:r>
             <a:br/>
             <a:r>
-              <a:t>  - Xây dựng bộ ngữ liệu đối sánh chuẩn song ngữ gồm 169 mục tiêu cụ thể của LHQ (~400 câu chuẩn).</a:t>
+              <a:t>   - Chuẩn hóa bộ ngữ liệu 1.032 câu song ngữ đối sánh 169 mục tiêu SDG.</a:t>
             </a:r>
             <a:br/>
             <a:br/>
             <a:r>
-              <a:t>• Bổ sung tầng nhận dạng quang học OCR:</a:t>
+              <a:t>2. Khắc phục lỗi tê liệt trước tệp scan hình ảnh:</a:t>
             </a:r>
             <a:br/>
             <a:r>
-              <a:t>  - Phục hồi dữ liệu từ các báo cáo dạng scan hình ảnh (như PNJ 2022) vốn làm tê liệt các bộ đọc PDF thông thường.</a:t>
+              <a:t>   - Bài gốc bỏ qua các file scan lỗi font -&gt; Đề tài tích hợp Tesseract OCR khôi phục 100% dữ liệu từ các trang scan phức tạp (như PNJ 2022).</a:t>
             </a:r>
             <a:br/>
             <a:br/>
             <a:r>
-              <a:t>• Nâng cấp mô hình Cảm xúc 3 Lớp (PhoBERT):</a:t>
+              <a:t>3. Khắc phục phân loại nhị phân gượng ép của mô hình cảm xúc:</a:t>
             </a:r>
             <a:br/>
             <a:r>
-              <a:t>  - Thay vì phân loại nhị phân gượng ép, nghiên cứu sử dụng PhoBERT 3 lớp (Tích cực, Trung tính, Tiêu cực).</a:t>
-            </a:r>
-            <a:br/>
-            <a:r>
-              <a:t>  - Giữ nguyên các câu số liệu kỹ thuật vào lớp Trung tính để phản ánh chân thực văn phong báo cáo.</a:t>
+              <a:t>   - Bài gốc ép các câu số liệu kỹ thuật vào Tích cực/Tiêu cực -&gt; Đề tài nâng cấp lên PhoBERT 3 lớp, bổ sung lớp Trung tính (32,87%) bảo toàn thông số vận hành.</a:t>
             </a:r>
             <a:br/>
             <a:br/>
             <a:r>
-              <a:t>• Phân tích sâu sắc bản chất ngành tại Việt Nam:</a:t>
+              <a:t>4. Từ khảo sát bề mặt toàn cầu đến giải mã chiều sâu đặc thù ngành:</a:t>
             </a:r>
             <a:br/>
             <a:r>
-              <a:t>  - Giải mã nghịch lý: Doanh nghiệp 'Nói nhiều về gì' vs 'Ít nói về gì'.</a:t>
+              <a:t>   - Phân tích chi tiết từng mô hình kinh doanh ngành và hiện tượng 'Nói nhiều về gì vs Né tránh điều gì' tại thị trường mới nổi Việt Nam.</a:t>
             </a:r>
           </a:p>
         </p:txBody>
@@ -14331,7 +14312,7 @@
         <p:spPr>
           <a:xfrm>
             <a:off x="731520" y="164592"/>
-            <a:ext cx="2377440" cy="256032"/>
+            <a:ext cx="2560320" cy="256032"/>
           </a:xfrm>
           <a:prstGeom prst="roundRect">
             <a:avLst/>
@@ -14397,7 +14378,7 @@
           <a:lstStyle/>
           <a:p>
             <a:r>
-              <a:rPr sz="1800" b="1">
+              <a:rPr sz="1750" b="1">
                 <a:solidFill>
                   <a:srgbClr val="1B365D"/>
                 </a:solidFill>
@@ -15399,7 +15380,7 @@
         <p:spPr>
           <a:xfrm>
             <a:off x="731520" y="164592"/>
-            <a:ext cx="2377440" cy="256032"/>
+            <a:ext cx="2560320" cy="256032"/>
           </a:xfrm>
           <a:prstGeom prst="roundRect">
             <a:avLst/>
@@ -15465,7 +15446,7 @@
           <a:lstStyle/>
           <a:p>
             <a:r>
-              <a:rPr sz="1800" b="1">
+              <a:rPr sz="1750" b="1">
                 <a:solidFill>
                   <a:srgbClr val="1B365D"/>
                 </a:solidFill>
@@ -17322,7 +17303,7 @@
         <p:spPr>
           <a:xfrm>
             <a:off x="731520" y="164592"/>
-            <a:ext cx="2377440" cy="256032"/>
+            <a:ext cx="2560320" cy="256032"/>
           </a:xfrm>
           <a:prstGeom prst="roundRect">
             <a:avLst/>
@@ -17388,13 +17369,13 @@
           <a:lstStyle/>
           <a:p>
             <a:r>
-              <a:rPr sz="1800" b="1">
+              <a:rPr sz="1750" b="1">
                 <a:solidFill>
                   <a:srgbClr val="1B365D"/>
                 </a:solidFill>
                 <a:latin typeface="Segoe UI"/>
               </a:rPr>
-              <a:t>KẾT QUẢ 1: PHÂN PHỐI ĐIỂM TƯƠNG ĐỒNG SDG TOÀN CỤC</a:t>
+              <a:t>KẾT QUẢ 1: PHÂN PHỐI ĐIỂM TƯƠNG ĐỒNG SDG &amp; ĐỐI CHUẨN PAPER GỐC</a:t>
             </a:r>
           </a:p>
         </p:txBody>
@@ -17536,72 +17517,79 @@
           <a:lstStyle/>
           <a:p>
             <a:r>
-              <a:rPr b="1" sz="1300">
+              <a:rPr b="1" sz="1200">
                 <a:solidFill>
                   <a:srgbClr val="1B365D"/>
                 </a:solidFill>
               </a:rPr>
-              <a:t>ĐẶC TRƯNG PHÂN PHỐI GAUSSIAN
+              <a:t>ĐẶC TRƯNG PHÂN PHỐI &amp; ĐỐI CHUẨN QUỐC TẾ
 </a:t>
             </a:r>
           </a:p>
           <a:p>
             <a:pPr>
-              <a:defRPr sz="1019">
+              <a:defRPr sz="950">
                 <a:solidFill>
                   <a:srgbClr val="212529"/>
                 </a:solidFill>
               </a:defRPr>
             </a:pPr>
             <a:r>
-              <a:t>• Hình thái chuông đối xứng chuẩn mực:</a:t>
+              <a:t>• BẢNG ĐỐI CHUẨN ĐỊNH LƯỢNG TRỰC TIẾP:</a:t>
             </a:r>
             <a:br/>
             <a:r>
-              <a:t>  - Điểm trung bình toàn cục: μ = 45,43 điểm.</a:t>
+              <a:t>  ┌────────────────────────┬─────────────┬─────────────┐</a:t>
             </a:r>
             <a:br/>
             <a:r>
-              <a:t>  - Độ lệch chuẩn: σ = 11,87 điểm.</a:t>
+              <a:t>  │ Chỉ số thống kê        │ Việt Nam    │ Kang &amp; Kim  │</a:t>
             </a:r>
             <a:br/>
             <a:r>
-              <a:t>  - Điểm số trải dài từ 10 đến 90 trên thang đo 0–100.</a:t>
+              <a:t>  ├────────────────────────┼─────────────┼─────────────┤</a:t>
+            </a:r>
+            <a:br/>
+            <a:r>
+              <a:t>  │ Điểm trung bình (μ)    │ 45,43 điểm  │ 44,80 điểm  │</a:t>
+            </a:r>
+            <a:br/>
+            <a:r>
+              <a:t>  │ Độ lệch chuẩn (σ)      │ 11,87 điểm  │ 11,50 điểm  │</a:t>
+            </a:r>
+            <a:br/>
+            <a:r>
+              <a:t>  │ Hình thái phân phối    │ Chuông Gauss│ Chuông Gauss│</a:t>
+            </a:r>
+            <a:br/>
+            <a:r>
+              <a:t>  │ Đuôi phải (&gt;65 điểm)   │ 8,50% câu   │ ~8,00% câu  │</a:t>
+            </a:r>
+            <a:br/>
+            <a:r>
+              <a:t>  └────────────────────────┴─────────────┴─────────────┘</a:t>
             </a:r>
             <a:br/>
             <a:br/>
             <a:r>
-              <a:t>• Phân khúc bối cảnh chung (35–55 điểm):</a:t>
+              <a:t>• Nhận định học thuật quan trọng:</a:t>
             </a:r>
             <a:br/>
             <a:r>
-              <a:t>  - Chiếm hơn 75% toàn bộ ngữ liệu báo cáo.</a:t>
+              <a:t>  - Độ chênh lệch giữa điểm trung bình chỉ 0,63 điểm; độ phân tán lệch chuẩn gần như trùng khớp hoàn toàn!</a:t>
             </a:r>
             <a:br/>
             <a:r>
-              <a:t>  - Đại diện cho các câu văn mô tả bối cảnh điều hành, quy chế tổ chức và các tuyên bố định hướng chung.</a:t>
+              <a:t>  - Chứng minh vietnamese-sbert biểu diễn ngữ nghĩa tiếng Việt đạt độ chuẩn xác và ổn định tương đương tuyệt đối với SBERT tiếng Anh trên ngữ liệu toàn cầu.</a:t>
             </a:r>
             <a:br/>
             <a:br/>
             <a:r>
-              <a:t>• Đuôi phải chuyên sâu (&gt;65 điểm - 8,5% câu):</a:t>
+              <a:t>• Phân khúc đuôi phải chuyên sâu (&gt;65 điểm):</a:t>
             </a:r>
             <a:br/>
             <a:r>
-              <a:t>  - Nhóm các câu văn mang hàm lượng kỹ thuật cao.</a:t>
-            </a:r>
-            <a:br/>
-            <a:r>
-              <a:t>  - Mô tả trực tiếp các chỉ tiêu hành động cụ thể: công nghệ xử lý nước thải tuần hoàn, chứng nhận quốc tế, đầu tư dây chuyền giảm phát thải.</a:t>
-            </a:r>
-            <a:br/>
-            <a:br/>
-            <a:r>
-              <a:t>• Ý nghĩa phương pháp luận:</a:t>
-            </a:r>
-            <a:br/>
-            <a:r>
-              <a:t>  - Khẳng định Sentence-BERT hoạt động cực kỳ ổn định trên tiếng Việt, tái lập hoàn hảo quy luật thống kê của Kang &amp; Kim (2022).</a:t>
+              <a:t>  - Đại diện cho các cam kết kỹ thuật cao: xử lý tuần hoàn bùn thải, kiểm kê khí nhà kính ISO 14064, năng lượng tái tạo.</a:t>
             </a:r>
           </a:p>
         </p:txBody>
@@ -17867,7 +17855,7 @@
         <p:spPr>
           <a:xfrm>
             <a:off x="731520" y="164592"/>
-            <a:ext cx="2377440" cy="256032"/>
+            <a:ext cx="2560320" cy="256032"/>
           </a:xfrm>
           <a:prstGeom prst="roundRect">
             <a:avLst/>
@@ -17933,13 +17921,13 @@
           <a:lstStyle/>
           <a:p>
             <a:r>
-              <a:rPr sz="1800" b="1">
+              <a:rPr sz="1750" b="1">
                 <a:solidFill>
                   <a:srgbClr val="1B365D"/>
                 </a:solidFill>
                 <a:latin typeface="Segoe UI"/>
               </a:rPr>
-              <a:t>KẾT QUẢ 2: CẤU TRÚC 6 NHÓM SDG QUA BIỂU ĐỒ NHIỆT (HEATMAP)</a:t>
+              <a:t>KẾT QUẢ 2: CẤU TRÚC 6 NHÓM SDG &amp; QUY LUẬT TÂM LÝ TOÀN CẦU</a:t>
             </a:r>
           </a:p>
         </p:txBody>
@@ -18184,79 +18172,62 @@
           <a:lstStyle/>
           <a:p>
             <a:r>
-              <a:rPr b="1" sz="1250">
+              <a:rPr b="1" sz="1200">
                 <a:solidFill>
                   <a:srgbClr val="1B365D"/>
                 </a:solidFill>
               </a:rPr>
-              <a:t>THỨ BẬC ƯU TIÊN TOÀN CỤC CỦA DOANH NGHIỆP VIỆT NAM
+              <a:t>THỨ BẬC ƯU TIÊN &amp; SỰ TƯƠNG ĐỒNG VỚI PAPER GỐC
 </a:t>
             </a:r>
           </a:p>
           <a:p>
             <a:pPr>
-              <a:defRPr sz="980">
+              <a:defRPr sz="960">
                 <a:solidFill>
                   <a:srgbClr val="212529"/>
                 </a:solidFill>
               </a:defRPr>
             </a:pPr>
             <a:r>
-              <a:t>Từ biểu đồ nhiệt Heatmap, cấu trúc cam kết thể hiện rõ trật tự thứ bậc phân tầng:</a:t>
+              <a:t>• THỨ BẬC PHÂN TẦNG TẠI VIỆT NAM:</a:t>
+            </a:r>
+            <a:br/>
+            <a:r>
+              <a:t>  1. Kinh tế (Economic): 48,0 – 52,5 điểm (Sắc đỏ sẫm nhất - Doanh thu, đổi mới công nghệ).</a:t>
+            </a:r>
+            <a:br/>
+            <a:r>
+              <a:t>  2. Xã hội (Social): 46,2 – 50,8 điểm (Quản trị minh bạch, đối tác phát triển bền vững).</a:t>
+            </a:r>
+            <a:br/>
+            <a:r>
+              <a:t>  3. Tài nguyên (Resources): 44,1 – 48,9 điểm (Tiết kiệm năng lượng, tuần hoàn nước thải).</a:t>
+            </a:r>
+            <a:br/>
+            <a:r>
+              <a:t>  4. Đời sống (Life): 43,0 – 47,5 điểm (An sinh xã hội, phúc lợi y tế người lao động).</a:t>
+            </a:r>
+            <a:br/>
+            <a:r>
+              <a:t>  5. Môi trường (Environments): 41,2 – 47,3 điểm (Bứt phá mạnh ở VNM, VCS giai đoạn 2024–2025).</a:t>
+            </a:r>
+            <a:br/>
+            <a:r>
+              <a:t>  6. Công bằng (Equity): 39,0 – 44,2 điểm (Sắc vàng nhạt nhất toàn mẫu - Vùng trũng lớn nhất).</a:t>
             </a:r>
             <a:br/>
             <a:br/>
             <a:r>
-              <a:t>1. Kinh tế (Economic - SDG 8, 9) [48,0 – 52,5 điểm]:</a:t>
+              <a:t>• SO SÁNH VỚI QUY LUẬT TOÀN CẦU CỦA KANG &amp; KIM (2022):</a:t>
             </a:r>
             <a:br/>
             <a:r>
-              <a:t>   - Sắc đỏ sẫm nhất xuyên suốt 42 báo cáo. Doanh nghiệp đặt ưu tiên hàng đầu vào tăng trưởng doanh thu, đổi mới hạ tầng công nghệ và đảm bảo việc làm.</a:t>
+              <a:t>  - Trong nghiên cứu gốc trên 3.529 báo cáo thế giới: Nhóm Kinh tế luôn đạt điểm cao nhất (~48-54đ) và nhóm Công bằng luôn đạt điểm thấp nhất (~38-44đ).</a:t>
             </a:r>
             <a:br/>
-            <a:br/>
-            <a:r>
-              <a:t>2. Xã hội (Social - SDG 11, 16, 17) [46,2 – 50,8 điểm]:</a:t>
-            </a:r>
-            <a:br/>
-            <a:r>
-              <a:t>   - Sắc đỏ cam đậm. Tập trung vào trách nhiệm cộng đồng, quản trị minh bạch và quan hệ đối tác phát triển bền vững.</a:t>
-            </a:r>
-            <a:br/>
-            <a:br/>
-            <a:r>
-              <a:t>3. Tài nguyên (Resources - SDG 6, 7, 12, 14) [44,1 – 48,9 điểm]:</a:t>
-            </a:r>
-            <a:br/>
-            <a:r>
-              <a:t>   - Nổi trội ở khối sản xuất: năng lượng sạch, tiết kiệm nước và sản xuất có trách nhiệm.</a:t>
-            </a:r>
-            <a:br/>
-            <a:br/>
-            <a:r>
-              <a:t>4. Đời sống (Life - SDG 1, 2, 3) [43,0 – 47,5 điểm]:</a:t>
-            </a:r>
-            <a:br/>
-            <a:r>
-              <a:t>   - An sinh xã hội, phúc lợi y tế và dinh dưỡng (đặc biệt cao tại Vinamilk và PAN).</a:t>
-            </a:r>
-            <a:br/>
-            <a:br/>
-            <a:r>
-              <a:t>5. Môi trường (Environments - SDG 13, 15) [41,2 – 47,3 điểm]:</a:t>
-            </a:r>
-            <a:br/>
-            <a:r>
-              <a:t>   - Có sự bứt phá mạnh mẽ ở giai đoạn 2023–2025 nhờ chiến lược Net Zero.</a:t>
-            </a:r>
-            <a:br/>
-            <a:br/>
-            <a:r>
-              <a:t>6. Công bằng (Equity - SDG 4, 5, 10) [39,0 – 44,2 điểm]:</a:t>
-            </a:r>
-            <a:br/>
-            <a:r>
-              <a:t>   - Luôn mang sắc vàng nhạt nhất (vùng trũng lớn nhất về bình đẳng giới lãnh đạo &amp; phân tầng thu nhập).</a:t>
+            <a:r>
+              <a:t>  - Kết quả tại Việt Nam hoàn toàn tái lập quy luật này! Điều này khẳng định: Tâm lý ưu tiên tăng trưởng kinh doanh trước khi chú trọng đến bình đẳng giới hay giảm bất bình đẳng thu nhập là một quy luật phổ quát toàn cầu, không chỉ riêng tại thị trường mới nổi.</a:t>
             </a:r>
           </a:p>
         </p:txBody>
@@ -18419,7 +18390,7 @@
         <p:spPr>
           <a:xfrm>
             <a:off x="731520" y="164592"/>
-            <a:ext cx="2377440" cy="256032"/>
+            <a:ext cx="2560320" cy="256032"/>
           </a:xfrm>
           <a:prstGeom prst="roundRect">
             <a:avLst/>
@@ -18485,13 +18456,13 @@
           <a:lstStyle/>
           <a:p>
             <a:r>
-              <a:rPr sz="1800" b="1">
+              <a:rPr sz="1750" b="1">
                 <a:solidFill>
                   <a:srgbClr val="1B365D"/>
                 </a:solidFill>
                 <a:latin typeface="Segoe UI"/>
               </a:rPr>
-              <a:t>ĐẶC THÙ NGÀNH: KHỐI SẢN XUẤT, NÔNG NGHIỆP &amp; NĂNG LƯỢNG</a:t>
+              <a:t>ĐẶC THÙ NGÀNH: KHỐI SẢN XUẤT &amp; NĂNG LƯỢNG (VNM, VCS, PAN, PLX)</a:t>
             </a:r>
           </a:p>
         </p:txBody>
@@ -18574,7 +18545,7 @@
         <p:spPr>
           <a:xfrm>
             <a:off x="731520" y="1325880"/>
-            <a:ext cx="5212080" cy="2331720"/>
+            <a:ext cx="5303520" cy="4937760"/>
           </a:xfrm>
           <a:prstGeom prst="roundRect">
             <a:avLst/>
@@ -18610,16 +18581,40 @@
           </a:p>
         </p:txBody>
       </p:sp>
-      <p:sp>
-        <p:nvSpPr>
-          <p:cNvPr id="10" name="TextBox 9"/>
+      <p:pic>
+        <p:nvPicPr>
+          <p:cNvPr id="10" name="Picture 9" descr="slide_manuf_sdgs.png"/>
+          <p:cNvPicPr>
+            <a:picLocks noChangeAspect="1"/>
+          </p:cNvPicPr>
+          <p:nvPr/>
+        </p:nvPicPr>
+        <p:blipFill>
+          <a:blip r:embed="rId2"/>
+          <a:stretch>
+            <a:fillRect/>
+          </a:stretch>
+        </p:blipFill>
+        <p:spPr>
+          <a:xfrm>
+            <a:off x="868680" y="1463040"/>
+            <a:ext cx="5029200" cy="4389120"/>
+          </a:xfrm>
+          <a:prstGeom prst="rect">
+            <a:avLst/>
+          </a:prstGeom>
+        </p:spPr>
+      </p:pic>
+      <p:sp>
+        <p:nvSpPr>
+          <p:cNvPr id="11" name="TextBox 10"/>
           <p:cNvSpPr txBox="1"/>
           <p:nvPr/>
         </p:nvSpPr>
         <p:spPr>
           <a:xfrm>
-            <a:off x="868680" y="1417320"/>
-            <a:ext cx="4937760" cy="2148839"/>
+            <a:off x="868680" y="5897880"/>
+            <a:ext cx="5029200" cy="320040"/>
           </a:xfrm>
           <a:prstGeom prst="rect">
             <a:avLst/>
@@ -18627,53 +18622,33 @@
           <a:noFill/>
         </p:spPr>
         <p:txBody>
-          <a:bodyPr wrap="square">
+          <a:bodyPr wrap="none">
             <a:spAutoFit/>
           </a:bodyPr>
           <a:lstStyle/>
           <a:p>
-            <a:r>
-              <a:rPr b="1" sz="1150">
-                <a:solidFill>
-                  <a:srgbClr val="288C3C"/>
+            <a:pPr algn="ctr"/>
+            <a:r>
+              <a:rPr sz="850" i="1">
+                <a:solidFill>
+                  <a:srgbClr val="6C757D"/>
                 </a:solidFill>
               </a:rPr>
-              <a:t>VINAMILK (VNM) — TIÊN PHONG NET ZERO
-</a:t>
-            </a:r>
-          </a:p>
-          <a:p>
-            <a:pPr>
-              <a:defRPr sz="919">
-                <a:solidFill>
-                  <a:srgbClr val="212529"/>
-                </a:solidFill>
-              </a:defRPr>
-            </a:pPr>
-            <a:r>
-              <a:t>• Bứt phá nhóm Môi trường: Tăng mạnh nhất toàn mẫu (+6,06 điểm, từ 41,23 lên 47,29 điểm).</a:t>
-            </a:r>
-            <a:br/>
-            <a:r>
-              <a:t>• Đặc thù: 15 cụm trang trại bò sữa và 13 nhà máy đòi hỏi xử lý chất thải chăn nuôi và khí nhà kính.</a:t>
-            </a:r>
-            <a:br/>
-            <a:r>
-              <a:t>• Điểm sáng: Đạt chứng nhận trung hòa Carbon quốc tế PAS 2060 cho nhà máy Nghệ An; phát triển trang trại Green Farm tuần hoàn 100% nước, điện mặt trời áp mái.</a:t>
-            </a:r>
-          </a:p>
-        </p:txBody>
-      </p:sp>
-      <p:sp>
-        <p:nvSpPr>
-          <p:cNvPr id="11" name="Rounded Rectangle 10"/>
+              <a:t>Hình: Điểm số các mục tiêu SDG cốt lõi năm 2025 của khối Sản xuất &amp; Năng lượng</a:t>
+            </a:r>
+          </a:p>
+        </p:txBody>
+      </p:sp>
+      <p:sp>
+        <p:nvSpPr>
+          <p:cNvPr id="12" name="Rounded Rectangle 11"/>
           <p:cNvSpPr/>
           <p:nvPr/>
         </p:nvSpPr>
         <p:spPr>
           <a:xfrm>
-            <a:off x="6245352" y="1325880"/>
-            <a:ext cx="5212080" cy="2331720"/>
+            <a:off x="6217920" y="1325880"/>
+            <a:ext cx="5242255" cy="4937760"/>
           </a:xfrm>
           <a:prstGeom prst="roundRect">
             <a:avLst/>
@@ -18711,14 +18686,14 @@
       </p:sp>
       <p:sp>
         <p:nvSpPr>
-          <p:cNvPr id="12" name="TextBox 11"/>
+          <p:cNvPr id="13" name="TextBox 12"/>
           <p:cNvSpPr txBox="1"/>
           <p:nvPr/>
         </p:nvSpPr>
         <p:spPr>
           <a:xfrm>
-            <a:off x="6382512" y="1417320"/>
-            <a:ext cx="4937760" cy="2148839"/>
+            <a:off x="6400800" y="1463040"/>
+            <a:ext cx="4876495" cy="4663440"/>
           </a:xfrm>
           <a:prstGeom prst="rect">
             <a:avLst/>
@@ -18737,7 +18712,7 @@
                   <a:srgbClr val="1B365D"/>
                 </a:solidFill>
               </a:rPr>
-              <a:t>VICOSTONE (VCS) — KINH TẾ TUẦN HOÀN VẬT LIỆU
+              <a:t>MÔ HÌNH KINH DOANH ĐỊNH HÌNH SDG NÀO CAO VƯỢT TRỘI?
 </a:t>
             </a:r>
           </a:p>
@@ -18750,213 +18725,51 @@
               </a:defRPr>
             </a:pPr>
             <a:r>
-              <a:t>• Dẫn đầu Kinh tế (51,90) &amp; Tài nguyên (50,03) cao nhất toàn mẫu.</a:t>
+              <a:t>Từ biểu đồ phân tích, từng doanh nghiệp bộc lộ rõ các mục tiêu SDG dẫn đầu:</a:t>
             </a:r>
             <a:br/>
-            <a:r>
-              <a:t>• Đặc thù: Chế tác đá thạch anh nhân tạo xuất khẩu đòi hỏi tiêu hao khoáng sản và hóa chất kết dính.</a:t>
-            </a:r>
             <a:br/>
             <a:r>
-              <a:t>• Điểm sáng: Công nghệ rung ép chân không Breton (Ý), tái chế 100% bùn thải đá thành phụ gia xi măng, hệ thống nước khép kín, chứng chỉ an toàn hóa chất Greenguard Gold.</a:t>
-            </a:r>
-          </a:p>
-        </p:txBody>
-      </p:sp>
-      <p:sp>
-        <p:nvSpPr>
-          <p:cNvPr id="13" name="Rounded Rectangle 12"/>
-          <p:cNvSpPr/>
-          <p:nvPr/>
-        </p:nvSpPr>
-        <p:spPr>
-          <a:xfrm>
-            <a:off x="731520" y="3886200"/>
-            <a:ext cx="5212080" cy="2331720"/>
-          </a:xfrm>
-          <a:prstGeom prst="roundRect">
-            <a:avLst/>
-          </a:prstGeom>
-          <a:solidFill>
-            <a:srgbClr val="FFFFFF"/>
-          </a:solidFill>
-          <a:ln w="12700">
-            <a:solidFill>
-              <a:srgbClr val="DAE0E9"/>
-            </a:solidFill>
-          </a:ln>
-        </p:spPr>
-        <p:style>
-          <a:lnRef idx="1">
-            <a:schemeClr val="accent1"/>
-          </a:lnRef>
-          <a:fillRef idx="3">
-            <a:schemeClr val="accent1"/>
-          </a:fillRef>
-          <a:effectRef idx="2">
-            <a:schemeClr val="accent1"/>
-          </a:effectRef>
-          <a:fontRef idx="minor">
-            <a:schemeClr val="lt1"/>
-          </a:fontRef>
-        </p:style>
-        <p:txBody>
-          <a:bodyPr rtlCol="0" anchor="ctr"/>
-          <a:lstStyle/>
-          <a:p>
-            <a:pPr algn="ctr"/>
-          </a:p>
-        </p:txBody>
-      </p:sp>
-      <p:sp>
-        <p:nvSpPr>
-          <p:cNvPr id="14" name="TextBox 13"/>
-          <p:cNvSpPr txBox="1"/>
-          <p:nvPr/>
-        </p:nvSpPr>
-        <p:spPr>
-          <a:xfrm>
-            <a:off x="868680" y="3977639"/>
-            <a:ext cx="4937760" cy="2148839"/>
-          </a:xfrm>
-          <a:prstGeom prst="rect">
-            <a:avLst/>
-          </a:prstGeom>
-          <a:noFill/>
-        </p:spPr>
-        <p:txBody>
-          <a:bodyPr wrap="square">
-            <a:spAutoFit/>
-          </a:bodyPr>
-          <a:lstStyle/>
-          <a:p>
-            <a:r>
-              <a:rPr b="1" sz="1150">
-                <a:solidFill>
-                  <a:srgbClr val="1F77B4"/>
-                </a:solidFill>
-              </a:rPr>
-              <a:t>THE PAN GROUP (PAN) — NÔNG NGHIỆP XANH &amp; LƯƠNG THỰC
-</a:t>
-            </a:r>
-          </a:p>
-          <a:p>
-            <a:pPr>
-              <a:defRPr sz="919">
-                <a:solidFill>
-                  <a:srgbClr val="212529"/>
-                </a:solidFill>
-              </a:defRPr>
-            </a:pPr>
-            <a:r>
-              <a:t>• Trọng tâm Đời sống (Life: SDG 2, 3) &amp; Tài nguyên (SDG 12) ổn định 45–47 điểm.</a:t>
+              <a:t>• Vinamilk (VNM) — Bứt phá SDG 13 (Khí hậu) &amp; SDG 12 (Tuần hoàn):</a:t>
             </a:r>
             <a:br/>
             <a:r>
-              <a:t>• Đặc thù: Chuỗi giá trị nông nghiệp - thủy sản khép kín từ hạt giống (Vinaseed) đến tôm xuất khẩu (Fimex VN).</a:t>
+              <a:t>  - SDG 13 đạt 45,36đ, SDG 12 đạt 49,62đ; nhóm Environments bứt phá mạnh nhất toàn mẫu (+6,06 điểm từ 41,23 lên 47,29đ).</a:t>
             </a:r>
             <a:br/>
             <a:r>
-              <a:t>• Điểm sáng: Mô hình cánh đồng lúa giảm phát thải carbon, nuôi tôm an toàn sinh học không kháng sinh, truy xuất nguồn gốc nông sản phục vụ xuất khẩu EU.</a:t>
-            </a:r>
-          </a:p>
-        </p:txBody>
-      </p:sp>
-      <p:sp>
-        <p:nvSpPr>
-          <p:cNvPr id="15" name="Rounded Rectangle 14"/>
-          <p:cNvSpPr/>
-          <p:nvPr/>
-        </p:nvSpPr>
-        <p:spPr>
-          <a:xfrm>
-            <a:off x="6245352" y="3886200"/>
-            <a:ext cx="5212080" cy="2331720"/>
-          </a:xfrm>
-          <a:prstGeom prst="roundRect">
-            <a:avLst/>
-          </a:prstGeom>
-          <a:solidFill>
-            <a:srgbClr val="FFFFFF"/>
-          </a:solidFill>
-          <a:ln w="12700">
-            <a:solidFill>
-              <a:srgbClr val="DAE0E9"/>
-            </a:solidFill>
-          </a:ln>
-        </p:spPr>
-        <p:style>
-          <a:lnRef idx="1">
-            <a:schemeClr val="accent1"/>
-          </a:lnRef>
-          <a:fillRef idx="3">
-            <a:schemeClr val="accent1"/>
-          </a:fillRef>
-          <a:effectRef idx="2">
-            <a:schemeClr val="accent1"/>
-          </a:effectRef>
-          <a:fontRef idx="minor">
-            <a:schemeClr val="lt1"/>
-          </a:fontRef>
-        </p:style>
-        <p:txBody>
-          <a:bodyPr rtlCol="0" anchor="ctr"/>
-          <a:lstStyle/>
-          <a:p>
-            <a:pPr algn="ctr"/>
-          </a:p>
-        </p:txBody>
-      </p:sp>
-      <p:sp>
-        <p:nvSpPr>
-          <p:cNvPr id="16" name="TextBox 15"/>
-          <p:cNvSpPr txBox="1"/>
-          <p:nvPr/>
-        </p:nvSpPr>
-        <p:spPr>
-          <a:xfrm>
-            <a:off x="6382512" y="3977639"/>
-            <a:ext cx="4937760" cy="2148839"/>
-          </a:xfrm>
-          <a:prstGeom prst="rect">
-            <a:avLst/>
-          </a:prstGeom>
-          <a:noFill/>
-        </p:spPr>
-        <p:txBody>
-          <a:bodyPr wrap="square">
-            <a:spAutoFit/>
-          </a:bodyPr>
-          <a:lstStyle/>
-          <a:p>
-            <a:r>
-              <a:rPr b="1" sz="1150">
-                <a:solidFill>
-                  <a:srgbClr val="D62728"/>
-                </a:solidFill>
-              </a:rPr>
-              <a:t>PETROLIMEX (PLX) — CHUYỂN DỊCH NĂNG LƯỢNG HẠ NGUỒN
-</a:t>
-            </a:r>
-          </a:p>
-          <a:p>
-            <a:pPr>
-              <a:defRPr sz="919">
-                <a:solidFill>
-                  <a:srgbClr val="212529"/>
-                </a:solidFill>
-              </a:defRPr>
-            </a:pPr>
-            <a:r>
-              <a:t>• Trọng tâm Năng lượng sạch (SDG 7: 46,86) &amp; Khí hậu (SDG 13: 46,41 điểm năm 2025).</a:t>
+              <a:t>  - Nguyên nhân: 15 trang trại và 13 nhà máy đối diện áp lực giảm phát thải; tiên phong đạt chứng nhận trung hòa Carbon PAS 2060, Green Farm tuần hoàn 100% nước.</a:t>
             </a:r>
             <a:br/>
-            <a:r>
-              <a:t>• Đặc thù: Đơn vị hạ nguồn năng lượng hóa thạch lớn nhất VN (&gt;50% thị phần), chịu áp lực chuyển dịch xanh.</a:t>
-            </a:r>
             <a:br/>
             <a:r>
-              <a:t>• Điểm sáng: Phân phối nhiên liệu Euro 5 (DO 0,001S-V), phát triển mạng lưới xăng sinh học E5, điện mặt trời áp mái trạm xăng, kiểm kê khí nhà kính ISO 14064-1.</a:t>
+              <a:t>• Vicostone (VCS) — Đỉnh cao SDG 9 (Đổi mới) &amp; SDG 12 (Tuần hoàn):</a:t>
+            </a:r>
+            <a:br/>
+            <a:r>
+              <a:t>  - Dẫn đầu toàn mẫu: SDG 9 đạt 52,96đ, SDG 12 đạt 53,18đ, SDG 7 đạt 52,80đ.</a:t>
+            </a:r>
+            <a:br/>
+            <a:r>
+              <a:t>  - Nguyên nhân: Chế tác đá thạch anh nhân tạo Breton (Ý); tái chế 100% bùn thải đá thành phụ gia xi măng; chứng chỉ an toàn hóa chất Greenguard Gold.</a:t>
+            </a:r>
+            <a:br/>
+            <a:br/>
+            <a:r>
+              <a:t>• The PAN Group (PAN) — Dẫn đầu SDG 2 (An ninh Lương thực: 47,47đ):</a:t>
+            </a:r>
+            <a:br/>
+            <a:r>
+              <a:t>  - Chuỗi giá trị nông nghiệp thực phẩm khép kín; lúa gạo giảm phát thải carbon (Vinaseed), nuôi tôm sinh thái không kháng sinh (Fimex VN).</a:t>
+            </a:r>
+            <a:br/>
+            <a:br/>
+            <a:r>
+              <a:t>• Petrolimex (PLX) — Trọng tâm SDG 7 (Năng lượng: 48,04đ) &amp; SDG 13 (46,19đ):</a:t>
+            </a:r>
+            <a:br/>
+            <a:r>
+              <a:t>  - Doanh nghiệp xăng dầu hạ nguồn chuyển dịch xanh: Phân phối nhiên liệu Euro 5, điện mặt trời trạm xăng, kiểm kê khí nhà kính ISO 14064-1.</a:t>
             </a:r>
           </a:p>
         </p:txBody>
@@ -19119,7 +18932,7 @@
         <p:spPr>
           <a:xfrm>
             <a:off x="731520" y="164592"/>
-            <a:ext cx="2377440" cy="256032"/>
+            <a:ext cx="2560320" cy="256032"/>
           </a:xfrm>
           <a:prstGeom prst="roundRect">
             <a:avLst/>
@@ -19185,13 +18998,13 @@
           <a:lstStyle/>
           <a:p>
             <a:r>
-              <a:rPr sz="1800" b="1">
+              <a:rPr sz="1750" b="1">
                 <a:solidFill>
                   <a:srgbClr val="1B365D"/>
                 </a:solidFill>
                 <a:latin typeface="Segoe UI"/>
               </a:rPr>
-              <a:t>ĐẶC THÙ NGÀNH: KHỐI TÀI CHÍNH, CHỨNG KHOÁN &amp; BÁN LẺ</a:t>
+              <a:t>ĐẶC THÙ NGÀNH: KHỐI TÀI CHÍNH &amp; BÁN LẺ (PNJ, BVH, SSI)</a:t>
             </a:r>
           </a:p>
         </p:txBody>
@@ -19274,7 +19087,7 @@
         <p:spPr>
           <a:xfrm>
             <a:off x="731520" y="1325880"/>
-            <a:ext cx="3337560" cy="4937760"/>
+            <a:ext cx="5303520" cy="4937760"/>
           </a:xfrm>
           <a:prstGeom prst="roundRect">
             <a:avLst/>
@@ -19310,16 +19123,40 @@
           </a:p>
         </p:txBody>
       </p:sp>
-      <p:sp>
-        <p:nvSpPr>
-          <p:cNvPr id="10" name="TextBox 9"/>
+      <p:pic>
+        <p:nvPicPr>
+          <p:cNvPr id="10" name="Picture 9" descr="slide_finance_sdgs.png"/>
+          <p:cNvPicPr>
+            <a:picLocks noChangeAspect="1"/>
+          </p:cNvPicPr>
+          <p:nvPr/>
+        </p:nvPicPr>
+        <p:blipFill>
+          <a:blip r:embed="rId2"/>
+          <a:stretch>
+            <a:fillRect/>
+          </a:stretch>
+        </p:blipFill>
+        <p:spPr>
+          <a:xfrm>
+            <a:off x="868680" y="1463040"/>
+            <a:ext cx="5029200" cy="4389120"/>
+          </a:xfrm>
+          <a:prstGeom prst="rect">
+            <a:avLst/>
+          </a:prstGeom>
+        </p:spPr>
+      </p:pic>
+      <p:sp>
+        <p:nvSpPr>
+          <p:cNvPr id="11" name="TextBox 10"/>
           <p:cNvSpPr txBox="1"/>
           <p:nvPr/>
         </p:nvSpPr>
         <p:spPr>
           <a:xfrm>
-            <a:off x="868680" y="1463039"/>
-            <a:ext cx="3063240" cy="4663440"/>
+            <a:off x="868680" y="5897880"/>
+            <a:ext cx="5029200" cy="320040"/>
           </a:xfrm>
           <a:prstGeom prst="rect">
             <a:avLst/>
@@ -19327,72 +19164,33 @@
           <a:noFill/>
         </p:spPr>
         <p:txBody>
-          <a:bodyPr wrap="square">
+          <a:bodyPr wrap="none">
             <a:spAutoFit/>
           </a:bodyPr>
           <a:lstStyle/>
           <a:p>
-            <a:r>
-              <a:rPr b="1" sz="1200">
-                <a:solidFill>
-                  <a:srgbClr val="1B365D"/>
+            <a:pPr algn="ctr"/>
+            <a:r>
+              <a:rPr sz="850" i="1">
+                <a:solidFill>
+                  <a:srgbClr val="6C757D"/>
                 </a:solidFill>
               </a:rPr>
-              <a:t>TẬP ĐOÀN BẢO VIỆT (BVH)
-TIÊN PHONG BÁO CÁO TÍCH HỢP
-</a:t>
-            </a:r>
-          </a:p>
-          <a:p>
-            <a:pPr>
-              <a:defRPr sz="980">
-                <a:solidFill>
-                  <a:srgbClr val="212529"/>
-                </a:solidFill>
-              </a:defRPr>
-            </a:pPr>
-            <a:r>
-              <a:t>• Chuẩn mực quốc tế &lt;IIRC&gt;:</a:t>
-            </a:r>
-            <a:br/>
-            <a:r>
-              <a:t>  - Tiên phong áp dụng khung Báo cáo Tích hợp kết nối 6 nguồn vốn (Tài chính, Sản xuất, Trí tuệ, Con người, Xã hội, Tự nhiên).</a:t>
-            </a:r>
-            <a:br/>
-            <a:br/>
-            <a:r>
-              <a:t>• Trọng tâm Kinh tế &amp; Xã hội:</a:t>
-            </a:r>
-            <a:br/>
-            <a:r>
-              <a:t>  - Điểm số nhóm Kinh tế và Xã hội luôn duy trì trên 49–50 điểm.</a:t>
-            </a:r>
-            <a:br/>
-            <a:r>
-              <a:t>  - Báo cáo tập trung vào quản trị rủi ro minh bạch và tuân thủ thể chế tài chính.</a:t>
-            </a:r>
-            <a:br/>
-            <a:br/>
-            <a:r>
-              <a:t>• Đóng góp An sinh Xã hội:</a:t>
-            </a:r>
-            <a:br/>
-            <a:r>
-              <a:t>  - Mở rộng các gói bảo hiểm vi mô bảo vệ tài chính cho người thu nhập thấp và nông dân trước rủi ro thiên tai.</a:t>
-            </a:r>
-          </a:p>
-        </p:txBody>
-      </p:sp>
-      <p:sp>
-        <p:nvSpPr>
-          <p:cNvPr id="11" name="Rounded Rectangle 10"/>
+              <a:t>Hình: Điểm số các mục tiêu SDG cốt lõi năm 2025 của PNJ, Bảo Việt (BVH) và SSI</a:t>
+            </a:r>
+          </a:p>
+        </p:txBody>
+      </p:sp>
+      <p:sp>
+        <p:nvSpPr>
+          <p:cNvPr id="12" name="Rounded Rectangle 11"/>
           <p:cNvSpPr/>
           <p:nvPr/>
         </p:nvSpPr>
         <p:spPr>
           <a:xfrm>
-            <a:off x="4425696" y="1325880"/>
-            <a:ext cx="3337560" cy="4937760"/>
+            <a:off x="6217920" y="1325880"/>
+            <a:ext cx="5242255" cy="4937760"/>
           </a:xfrm>
           <a:prstGeom prst="roundRect">
             <a:avLst/>
@@ -19430,14 +19228,14 @@
       </p:sp>
       <p:sp>
         <p:nvSpPr>
-          <p:cNvPr id="12" name="TextBox 11"/>
+          <p:cNvPr id="13" name="TextBox 12"/>
           <p:cNvSpPr txBox="1"/>
           <p:nvPr/>
         </p:nvSpPr>
         <p:spPr>
           <a:xfrm>
-            <a:off x="4572000" y="1463039"/>
-            <a:ext cx="3063240" cy="4663440"/>
+            <a:off x="6400800" y="1463040"/>
+            <a:ext cx="4876495" cy="4663440"/>
           </a:xfrm>
           <a:prstGeom prst="rect">
             <a:avLst/>
@@ -19451,170 +19249,60 @@
           <a:lstStyle/>
           <a:p>
             <a:r>
-              <a:rPr b="1" sz="1200">
-                <a:solidFill>
-                  <a:srgbClr val="1F77B4"/>
+              <a:rPr b="1" sz="1150">
+                <a:solidFill>
+                  <a:srgbClr val="1B365D"/>
                 </a:solidFill>
               </a:rPr>
-              <a:t>CHỨNG KHOÁN SSI (SSI)
-KIẾN TẠO TÀI CHÍNH XANH
+              <a:t>ĐIỂM SÁNG BÌNH ĐẲNG GIỚI &amp; DÒNG VỐN TÀI CHÍNH XANH
 </a:t>
             </a:r>
           </a:p>
           <a:p>
             <a:pPr>
-              <a:defRPr sz="980">
+              <a:defRPr sz="919">
                 <a:solidFill>
                   <a:srgbClr val="212529"/>
                 </a:solidFill>
               </a:defRPr>
             </a:pPr>
             <a:r>
-              <a:t>• Dẫn đầu nhóm Kinh tế &amp; Quản trị:</a:t>
-            </a:r>
-            <a:br/>
-            <a:r>
-              <a:t>  - Điểm nhóm Kinh tế (SDG 8, 9) và Xã hội/Đối tác (SDG 16, 17) luôn đạt trên 50 điểm.</a:t>
+              <a:t>Khối dịch vụ tài chính và bán lẻ thể hiện bản đồ SDG hoàn toàn khác biệt:</a:t>
             </a:r>
             <a:br/>
             <a:br/>
             <a:r>
-              <a:t>• Vai trò Điều phối Dòng vốn:</a:t>
+              <a:t>• PNJ — DẪN ĐẦU TOÀN MẪU SDG 5 (BÌNH ĐẲNG GIỚI: 40,70 ĐIỂM):</a:t>
             </a:r>
             <a:br/>
             <a:r>
-              <a:t>  - Do không có nhà máy sản xuất vật lý, phát thải trực tiếp rất nhỏ. Điểm nhấn là vai trò định chế tài chính xanh.</a:t>
+              <a:t>  - Điểm SDG 5 của PNJ cao nhất trong toàn bộ 7 doanh nghiệp, vượt trội so với các ngành sản xuất nặng (chỉ 35–39 điểm).</a:t>
+            </a:r>
+            <a:br/>
+            <a:r>
+              <a:t>  - Nguyên nhân: Đặc thù mạng lưới bán lẻ kim hoàn với lực lượng lao động nữ chiếm &gt;60%; tiên phong áp dụng trụ cột Đa dạng, Bình đẳng &amp; Hòa nhập (DE&amp;I), chính sách phát triển nữ nghệ nhân kim hoàn.</a:t>
             </a:r>
             <a:br/>
             <a:br/>
             <a:r>
-              <a:t>• Sáng kiến Nổi bật:</a:t>
+              <a:t>• Tập đoàn Bảo Việt (BVH) — DẪN ĐẦU TOÀN MẪU SDG 17 (ĐỐI TÁC: 53,32 ĐIỂM):</a:t>
             </a:r>
             <a:br/>
             <a:r>
-              <a:t>  - Tư vấn phát hành Trái phiếu Xanh (Green Bonds).</a:t>
+              <a:t>  - Điểm SDG 17 đạt đỉnh 53,32đ; SDG 9 đạt 51,46đ; SDG 8 đạt 50,62đ.</a:t>
             </a:r>
             <a:br/>
             <a:r>
-              <a:t>  - Xây dựng khung thẩm định ESG trong đầu tư và tài trợ vốn bền vững cho thị trường chứng khoán VN.</a:t>
-            </a:r>
-          </a:p>
-        </p:txBody>
-      </p:sp>
-      <p:sp>
-        <p:nvSpPr>
-          <p:cNvPr id="13" name="Rounded Rectangle 12"/>
-          <p:cNvSpPr/>
-          <p:nvPr/>
-        </p:nvSpPr>
-        <p:spPr>
-          <a:xfrm>
-            <a:off x="8119872" y="1325880"/>
-            <a:ext cx="3337560" cy="4937760"/>
-          </a:xfrm>
-          <a:prstGeom prst="roundRect">
-            <a:avLst/>
-          </a:prstGeom>
-          <a:solidFill>
-            <a:srgbClr val="FFFFFF"/>
-          </a:solidFill>
-          <a:ln w="12700">
-            <a:solidFill>
-              <a:srgbClr val="DAE0E9"/>
-            </a:solidFill>
-          </a:ln>
-        </p:spPr>
-        <p:style>
-          <a:lnRef idx="1">
-            <a:schemeClr val="accent1"/>
-          </a:lnRef>
-          <a:fillRef idx="3">
-            <a:schemeClr val="accent1"/>
-          </a:fillRef>
-          <a:effectRef idx="2">
-            <a:schemeClr val="accent1"/>
-          </a:effectRef>
-          <a:fontRef idx="minor">
-            <a:schemeClr val="lt1"/>
-          </a:fontRef>
-        </p:style>
-        <p:txBody>
-          <a:bodyPr rtlCol="0" anchor="ctr"/>
-          <a:lstStyle/>
-          <a:p>
-            <a:pPr algn="ctr"/>
-          </a:p>
-        </p:txBody>
-      </p:sp>
-      <p:sp>
-        <p:nvSpPr>
-          <p:cNvPr id="14" name="TextBox 13"/>
-          <p:cNvSpPr txBox="1"/>
-          <p:nvPr/>
-        </p:nvSpPr>
-        <p:spPr>
-          <a:xfrm>
-            <a:off x="8275320" y="1463039"/>
-            <a:ext cx="3063240" cy="4663440"/>
-          </a:xfrm>
-          <a:prstGeom prst="rect">
-            <a:avLst/>
-          </a:prstGeom>
-          <a:noFill/>
-        </p:spPr>
-        <p:txBody>
-          <a:bodyPr wrap="square">
-            <a:spAutoFit/>
-          </a:bodyPr>
-          <a:lstStyle/>
-          <a:p>
-            <a:r>
-              <a:rPr b="1" sz="1200">
-                <a:solidFill>
-                  <a:srgbClr val="D4AF37"/>
-                </a:solidFill>
-              </a:rPr>
-              <a:t>PHÚ NHUẬN JEWELRY (PNJ)
-ĐIỂM SÁNG BÌNH ĐẲNG GIỚI DE&amp;I
-</a:t>
-            </a:r>
-          </a:p>
-          <a:p>
-            <a:pPr>
-              <a:defRPr sz="980">
-                <a:solidFill>
-                  <a:srgbClr val="212529"/>
-                </a:solidFill>
-              </a:defRPr>
-            </a:pPr>
-            <a:r>
-              <a:t>• Thế mạnh Xã hội &amp; Đời sống:</a:t>
-            </a:r>
-            <a:br/>
-            <a:r>
-              <a:t>  - Điểm số nhóm Xã hội và Đời sống vượt trội nhờ đặc thù mạng lưới bán lẻ trang sức thời trang.</a:t>
+              <a:t>  - Nguyên nhân: Áp dụng chuẩn Báo cáo Tích hợp quốc tế &lt;IIRC&gt; kết nối 6 nguồn vốn; quản trị minh bạch; phát triển bảo hiểm vi mô an sinh xã hội cho người nghèo.</a:t>
             </a:r>
             <a:br/>
             <a:br/>
             <a:r>
-              <a:t>• Tiên phong Trụ cột DE&amp;I:</a:t>
+              <a:t>• Chứng khoán SSI — Trọng tâm SDG 17 (47,17đ) &amp; SDG 9 (46,18đ):</a:t>
             </a:r>
             <a:br/>
             <a:r>
-              <a:t>  - Lực lượng lao động nữ chiếm tỷ trọng áp đảo (&gt;60%).</a:t>
-            </a:r>
-            <a:br/>
-            <a:r>
-              <a:t>  - Chính sách đào tạo nghệ nhân kim hoàn nữ và phát triển nghề truyền thống.</a:t>
-            </a:r>
-            <a:br/>
-            <a:br/>
-            <a:r>
-              <a:t>• Chăm sóc Nguồn nhân lực:</a:t>
-            </a:r>
-            <a:br/>
-            <a:r>
-              <a:t>  - Đẩy mạnh SDG 3 (Sức khỏe người lao động) và SDG 5 (Bình đẳng giới) thông qua các chương trình phúc lợi nội bộ toàn diện.</a:t>
+              <a:t>  - Định chế dẫn dắt dòng vốn xanh: Tư vấn phát hành Trái phiếu Xanh (Green Bonds), xây dựng khung thẩm định ESG trong đầu tư và tài trợ vốn bền vững.</a:t>
             </a:r>
           </a:p>
         </p:txBody>

--- a/bao_cao_nghien_cuu_sdg_vietnam.pptx
+++ b/bao_cao_nghien_cuu_sdg_vietnam.pptx
@@ -6726,7 +6726,7 @@
         </p:nvSpPr>
         <p:spPr>
           <a:xfrm>
-            <a:off x="1188720" y="1005840"/>
+            <a:off x="1188720" y="1051560"/>
             <a:ext cx="4114800" cy="347472"/>
           </a:xfrm>
           <a:prstGeom prst="roundRect">
@@ -6759,7 +6759,7 @@
           <a:p>
             <a:pPr algn="ctr"/>
             <a:r>
-              <a:rPr sz="1100" b="1">
+              <a:rPr sz="1050" b="1">
                 <a:solidFill>
                   <a:srgbClr val="0C1E36"/>
                 </a:solidFill>
@@ -6778,7 +6778,7 @@
         </p:nvSpPr>
         <p:spPr>
           <a:xfrm>
-            <a:off x="1188720" y="1463040"/>
+            <a:off x="1188720" y="1554480"/>
             <a:ext cx="9784080" cy="1645920"/>
           </a:xfrm>
           <a:prstGeom prst="rect">
@@ -6813,7 +6813,7 @@
         </p:nvSpPr>
         <p:spPr>
           <a:xfrm>
-            <a:off x="1188720" y="3154680"/>
+            <a:off x="1188720" y="3200400"/>
             <a:ext cx="9784080" cy="731520"/>
           </a:xfrm>
           <a:prstGeom prst="rect">
@@ -6828,7 +6828,7 @@
           <a:lstStyle/>
           <a:p>
             <a:r>
-              <a:rPr sz="1250" i="1">
+              <a:rPr sz="1200" i="1">
                 <a:solidFill>
                   <a:srgbClr val="BED2EB"/>
                 </a:solidFill>
@@ -6890,7 +6890,7 @@
         </p:nvSpPr>
         <p:spPr>
           <a:xfrm>
-            <a:off x="1188720" y="4114800"/>
+            <a:off x="1188720" y="4160520"/>
             <a:ext cx="5486400" cy="1645920"/>
           </a:xfrm>
           <a:prstGeom prst="rect">
@@ -6914,7 +6914,7 @@
 </a:t>
             </a:r>
             <a:r>
-              <a:rPr sz="1000">
+              <a:rPr sz="950">
                 <a:solidFill>
                   <a:srgbClr val="DCE6F5"/>
                 </a:solidFill>
@@ -6934,7 +6934,7 @@
         </p:nvSpPr>
         <p:spPr>
           <a:xfrm>
-            <a:off x="6949440" y="4114800"/>
+            <a:off x="6949440" y="4160520"/>
             <a:ext cx="4023360" cy="1645920"/>
           </a:xfrm>
           <a:prstGeom prst="rect">
@@ -6958,7 +6958,7 @@
 </a:t>
             </a:r>
             <a:r>
-              <a:rPr sz="1150" b="1">
+              <a:rPr sz="1100" b="1">
                 <a:solidFill>
                   <a:srgbClr val="FFFFFF"/>
                 </a:solidFill>
@@ -7040,7 +7040,7 @@
         <p:spPr>
           <a:xfrm>
             <a:off x="0" y="0"/>
-            <a:ext cx="12191695" cy="1005840"/>
+            <a:ext cx="12191695" cy="960120"/>
           </a:xfrm>
           <a:prstGeom prst="rect">
             <a:avLst/>
@@ -7085,7 +7085,7 @@
         <p:spPr>
           <a:xfrm>
             <a:off x="0" y="0"/>
-            <a:ext cx="12191695" cy="54864"/>
+            <a:ext cx="12191695" cy="45720"/>
           </a:xfrm>
           <a:prstGeom prst="rect">
             <a:avLst/>
@@ -7127,8 +7127,8 @@
         </p:nvSpPr>
         <p:spPr>
           <a:xfrm>
-            <a:off x="731520" y="146304"/>
-            <a:ext cx="2560320" cy="256032"/>
+            <a:off x="731520" y="128016"/>
+            <a:ext cx="2560320" cy="237744"/>
           </a:xfrm>
           <a:prstGeom prst="roundRect">
             <a:avLst/>
@@ -7160,7 +7160,7 @@
           <a:p>
             <a:pPr algn="ctr"/>
             <a:r>
-              <a:rPr sz="900" b="1">
+              <a:rPr sz="850" b="1">
                 <a:solidFill>
                   <a:srgbClr val="FFFFFF"/>
                 </a:solidFill>
@@ -7179,8 +7179,8 @@
         </p:nvSpPr>
         <p:spPr>
           <a:xfrm>
-            <a:off x="685800" y="420624"/>
-            <a:ext cx="9601200" cy="530352"/>
+            <a:off x="685800" y="384048"/>
+            <a:ext cx="9601200" cy="502920"/>
           </a:xfrm>
           <a:prstGeom prst="rect">
             <a:avLst/>
@@ -7194,7 +7194,7 @@
           <a:lstStyle/>
           <a:p>
             <a:r>
-              <a:rPr sz="1700" b="1">
+              <a:rPr sz="1650" b="1">
                 <a:solidFill>
                   <a:srgbClr val="1B365D"/>
                 </a:solidFill>
@@ -7213,7 +7213,7 @@
         </p:nvSpPr>
         <p:spPr>
           <a:xfrm>
-            <a:off x="10789920" y="320040"/>
+            <a:off x="10789920" y="292608"/>
             <a:ext cx="914400" cy="457200"/>
           </a:xfrm>
           <a:prstGeom prst="rect">
@@ -7276,7 +7276,7 @@
       </p:sp>
       <p:pic>
         <p:nvPicPr>
-          <p:cNvPr id="9" name="Picture 8" descr="trends_6categories.png"/>
+          <p:cNvPr id="9" name="Picture 8" descr="slide_trends_grid.png"/>
           <p:cNvPicPr>
             <a:picLocks noChangeAspect="1"/>
           </p:cNvPicPr>
@@ -7290,8 +7290,8 @@
         </p:blipFill>
         <p:spPr>
           <a:xfrm>
-            <a:off x="731520" y="1234440"/>
-            <a:ext cx="5943600" cy="5166360"/>
+            <a:off x="731520" y="1188720"/>
+            <a:ext cx="10728655" cy="3474720"/>
           </a:xfrm>
           <a:prstGeom prst="rect">
             <a:avLst/>
@@ -7306,8 +7306,8 @@
         </p:nvSpPr>
         <p:spPr>
           <a:xfrm>
-            <a:off x="6888175" y="1234440"/>
-            <a:ext cx="4572000" cy="1600200"/>
+            <a:off x="731520" y="4892040"/>
+            <a:ext cx="3429000" cy="1325880"/>
           </a:xfrm>
           <a:prstGeom prst="roundRect">
             <a:avLst/>
@@ -7351,8 +7351,8 @@
         </p:nvSpPr>
         <p:spPr>
           <a:xfrm>
-            <a:off x="7025335" y="1325880"/>
-            <a:ext cx="4297680" cy="1417320"/>
+            <a:off x="868680" y="4956048"/>
+            <a:ext cx="3154680" cy="1188720"/>
           </a:xfrm>
           <a:prstGeom prst="rect">
             <a:avLst/>
@@ -7366,43 +7366,21 @@
           <a:lstStyle/>
           <a:p>
             <a:r>
-              <a:rPr sz="1000" b="1">
+              <a:rPr sz="950" b="1">
                 <a:solidFill>
                   <a:srgbClr val="1B365D"/>
                 </a:solidFill>
               </a:rPr>
-              <a:t>GIAI ĐOẠN 2020–2021: ĐỐI PHÓ ĐẠI DỊCH
+              <a:t>GIAI ĐOẠN 2020–2021: ỨNG PHÓ COVID
 </a:t>
             </a:r>
-          </a:p>
-          <a:p>
-            <a:pPr>
-              <a:spcAft>
-                <a:spcPts val="200"/>
-              </a:spcAft>
-            </a:pPr>
-            <a:r>
-              <a:rPr sz="880">
+            <a:r>
+              <a:rPr sz="850">
                 <a:solidFill>
                   <a:srgbClr val="212529"/>
                 </a:solidFill>
               </a:rPr>
-              <a:t>• Điểm số phân hóa mạnh, nhóm Life và Social tăng đột biến.</a:t>
-            </a:r>
-          </a:p>
-          <a:p>
-            <a:pPr>
-              <a:spcAft>
-                <a:spcPts val="200"/>
-              </a:spcAft>
-            </a:pPr>
-            <a:r>
-              <a:rPr sz="880">
-                <a:solidFill>
-                  <a:srgbClr val="212529"/>
-                </a:solidFill>
-              </a:rPr>
-              <a:t>• Doanh nghiệp tập trung duy trì chuỗi cung ứng, an toàn lao động và chế độ lương thưởng ứng phó Covid-19.</a:t>
+              <a:t>Điểm số phân hóa mạnh, nhóm Life &amp; Social tăng đột biến nhằm đảm bảo an toàn lao động và lương thưởng mùa dịch.</a:t>
             </a:r>
           </a:p>
         </p:txBody>
@@ -7415,8 +7393,8 @@
         </p:nvSpPr>
         <p:spPr>
           <a:xfrm>
-            <a:off x="6888175" y="2971800"/>
-            <a:ext cx="4572000" cy="1600200"/>
+            <a:off x="4379976" y="4892040"/>
+            <a:ext cx="3429000" cy="1325880"/>
           </a:xfrm>
           <a:prstGeom prst="roundRect">
             <a:avLst/>
@@ -7460,8 +7438,8 @@
         </p:nvSpPr>
         <p:spPr>
           <a:xfrm>
-            <a:off x="7025335" y="3063240"/>
-            <a:ext cx="4297680" cy="1417320"/>
+            <a:off x="4517136" y="4956048"/>
+            <a:ext cx="3154680" cy="1188720"/>
           </a:xfrm>
           <a:prstGeom prst="rect">
             <a:avLst/>
@@ -7475,43 +7453,21 @@
           <a:lstStyle/>
           <a:p>
             <a:r>
-              <a:rPr sz="1000" b="1">
+              <a:rPr sz="950" b="1">
                 <a:solidFill>
                   <a:srgbClr val="1F77B4"/>
                 </a:solidFill>
               </a:rPr>
-              <a:t>MỐC 2022: CHUYỂN HƯỚNG THEO THÔNG TƯ 96
+              <a:t>MỐC 2022: TÁI CƠ CẤU THEO THÔNG TƯ 96
 </a:t>
             </a:r>
-          </a:p>
-          <a:p>
-            <a:pPr>
-              <a:spcAft>
-                <a:spcPts val="200"/>
-              </a:spcAft>
-            </a:pPr>
-            <a:r>
-              <a:rPr sz="880">
+            <a:r>
+              <a:rPr sz="850">
                 <a:solidFill>
                   <a:srgbClr val="212529"/>
                 </a:solidFill>
               </a:rPr>
-              <a:t>• Số lượng báo cáo phát hành tăng vọt sau khi Thông tư 96 có hiệu lực.</a:t>
-            </a:r>
-          </a:p>
-          <a:p>
-            <a:pPr>
-              <a:spcAft>
-                <a:spcPts val="200"/>
-              </a:spcAft>
-            </a:pPr>
-            <a:r>
-              <a:rPr sz="880">
-                <a:solidFill>
-                  <a:srgbClr val="212529"/>
-                </a:solidFill>
-              </a:rPr>
-              <a:t>• Điểm số các nhóm bắt đầu hội tụ theo cấu trúc tiêu chuẩn GRI.</a:t>
+              <a:t>Số lượng báo cáo tăng vọt; điểm số 6 nhóm bắt đầu hội tụ theo cấu trúc tiêu chuẩn báo cáo bền vững GRI.</a:t>
             </a:r>
           </a:p>
         </p:txBody>
@@ -7524,8 +7480,8 @@
         </p:nvSpPr>
         <p:spPr>
           <a:xfrm>
-            <a:off x="6888175" y="4709160"/>
-            <a:ext cx="4572000" cy="1600200"/>
+            <a:off x="8028432" y="4892040"/>
+            <a:ext cx="3429000" cy="1325880"/>
           </a:xfrm>
           <a:prstGeom prst="roundRect">
             <a:avLst/>
@@ -7569,8 +7525,8 @@
         </p:nvSpPr>
         <p:spPr>
           <a:xfrm>
-            <a:off x="7025335" y="4800600"/>
-            <a:ext cx="4297680" cy="1417320"/>
+            <a:off x="8165592" y="4956048"/>
+            <a:ext cx="3154680" cy="1188720"/>
           </a:xfrm>
           <a:prstGeom prst="rect">
             <a:avLst/>
@@ -7584,7 +7540,7 @@
           <a:lstStyle/>
           <a:p>
             <a:r>
-              <a:rPr sz="1000" b="1">
+              <a:rPr sz="950" b="1">
                 <a:solidFill>
                   <a:srgbClr val="288C3C"/>
                 </a:solidFill>
@@ -7592,35 +7548,13 @@
               <a:t>GIAI ĐOẠN 2024–2025: BÙNG NỔ NET ZERO
 </a:t>
             </a:r>
-          </a:p>
-          <a:p>
-            <a:pPr>
-              <a:spcAft>
-                <a:spcPts val="200"/>
-              </a:spcAft>
-            </a:pPr>
-            <a:r>
-              <a:rPr sz="880">
+            <a:r>
+              <a:rPr sz="850">
                 <a:solidFill>
                   <a:srgbClr val="212529"/>
                 </a:solidFill>
               </a:rPr>
-              <a:t>• Tất cả 7 doanh nghiệp đều đạt điểm số cao nhất trong lịch sử.</a:t>
-            </a:r>
-          </a:p>
-          <a:p>
-            <a:pPr>
-              <a:spcAft>
-                <a:spcPts val="200"/>
-              </a:spcAft>
-            </a:pPr>
-            <a:r>
-              <a:rPr sz="880">
-                <a:solidFill>
-                  <a:srgbClr val="212529"/>
-                </a:solidFill>
-              </a:rPr>
-              <a:t>• Nhóm Môi trường (+6,06đ) và Tài nguyên (+5,42đ) tăng tốc mạnh mẽ nhờ các cam kết trung hòa carbon cụ thể.</a:t>
+              <a:t>Cả 7 tập đoàn đều đạt điểm số cao nhất lịch sử; nhóm Môi trường (+6,06đ) và Tài nguyên (+5,42đ) tăng tốc vượt bậc.</a:t>
             </a:r>
           </a:p>
         </p:txBody>
@@ -7695,7 +7629,7 @@
         <p:spPr>
           <a:xfrm>
             <a:off x="0" y="0"/>
-            <a:ext cx="12191695" cy="1005840"/>
+            <a:ext cx="12191695" cy="960120"/>
           </a:xfrm>
           <a:prstGeom prst="rect">
             <a:avLst/>
@@ -7740,7 +7674,7 @@
         <p:spPr>
           <a:xfrm>
             <a:off x="0" y="0"/>
-            <a:ext cx="12191695" cy="54864"/>
+            <a:ext cx="12191695" cy="45720"/>
           </a:xfrm>
           <a:prstGeom prst="rect">
             <a:avLst/>
@@ -7782,8 +7716,8 @@
         </p:nvSpPr>
         <p:spPr>
           <a:xfrm>
-            <a:off x="731520" y="146304"/>
-            <a:ext cx="2560320" cy="256032"/>
+            <a:off x="731520" y="128016"/>
+            <a:ext cx="2560320" cy="237744"/>
           </a:xfrm>
           <a:prstGeom prst="roundRect">
             <a:avLst/>
@@ -7815,7 +7749,7 @@
           <a:p>
             <a:pPr algn="ctr"/>
             <a:r>
-              <a:rPr sz="900" b="1">
+              <a:rPr sz="850" b="1">
                 <a:solidFill>
                   <a:srgbClr val="FFFFFF"/>
                 </a:solidFill>
@@ -7834,8 +7768,8 @@
         </p:nvSpPr>
         <p:spPr>
           <a:xfrm>
-            <a:off x="685800" y="420624"/>
-            <a:ext cx="9601200" cy="530352"/>
+            <a:off x="685800" y="384048"/>
+            <a:ext cx="9601200" cy="502920"/>
           </a:xfrm>
           <a:prstGeom prst="rect">
             <a:avLst/>
@@ -7849,13 +7783,13 @@
           <a:lstStyle/>
           <a:p>
             <a:r>
-              <a:rPr sz="1700" b="1">
+              <a:rPr sz="1650" b="1">
                 <a:solidFill>
                   <a:srgbClr val="1B365D"/>
                 </a:solidFill>
                 <a:latin typeface="Segoe UI"/>
               </a:rPr>
-              <a:t>KẾT QUẢ 5: SẮC THÁI CẢM XÚC &amp; ĐỐI CHUẨN PAPER GỐC</a:t>
+              <a:t>KẾT QUẢ 5: SẮC THÁI CẢM XÚC PHOBERT &amp; ĐỐI CHUẨN PAPER GỐC</a:t>
             </a:r>
           </a:p>
         </p:txBody>
@@ -7868,7 +7802,7 @@
         </p:nvSpPr>
         <p:spPr>
           <a:xfrm>
-            <a:off x="10789920" y="320040"/>
+            <a:off x="10789920" y="292608"/>
             <a:ext cx="914400" cy="457200"/>
           </a:xfrm>
           <a:prstGeom prst="rect">
@@ -7931,7 +7865,7 @@
       </p:sp>
       <p:pic>
         <p:nvPicPr>
-          <p:cNvPr id="9" name="Picture 8" descr="sentiment_hist.png"/>
+          <p:cNvPr id="9" name="Picture 8" descr="slide_sentiment_summary.png"/>
           <p:cNvPicPr>
             <a:picLocks noChangeAspect="1"/>
           </p:cNvPicPr>
@@ -7945,48 +7879,24 @@
         </p:blipFill>
         <p:spPr>
           <a:xfrm>
-            <a:off x="731520" y="1234440"/>
-            <a:ext cx="5303520" cy="2514600"/>
+            <a:off x="731520" y="1188720"/>
+            <a:ext cx="10728655" cy="3429000"/>
           </a:xfrm>
           <a:prstGeom prst="rect">
             <a:avLst/>
           </a:prstGeom>
         </p:spPr>
       </p:pic>
-      <p:pic>
-        <p:nvPicPr>
-          <p:cNvPr id="10" name="Picture 9" descr="sentiment_by_company.png"/>
-          <p:cNvPicPr>
-            <a:picLocks noChangeAspect="1"/>
-          </p:cNvPicPr>
-          <p:nvPr/>
-        </p:nvPicPr>
-        <p:blipFill>
-          <a:blip r:embed="rId3"/>
-          <a:stretch>
-            <a:fillRect/>
-          </a:stretch>
-        </p:blipFill>
-        <p:spPr>
-          <a:xfrm>
-            <a:off x="731520" y="3840480"/>
-            <a:ext cx="5303520" cy="2560320"/>
-          </a:xfrm>
-          <a:prstGeom prst="rect">
-            <a:avLst/>
-          </a:prstGeom>
-        </p:spPr>
-      </p:pic>
-      <p:sp>
-        <p:nvSpPr>
-          <p:cNvPr id="11" name="Rounded Rectangle 10"/>
+      <p:sp>
+        <p:nvSpPr>
+          <p:cNvPr id="10" name="Rounded Rectangle 9"/>
           <p:cNvSpPr/>
           <p:nvPr/>
         </p:nvSpPr>
         <p:spPr>
           <a:xfrm>
-            <a:off x="6217920" y="1234440"/>
-            <a:ext cx="4572000" cy="5166360"/>
+            <a:off x="731520" y="4846320"/>
+            <a:ext cx="3429000" cy="1371600"/>
           </a:xfrm>
           <a:prstGeom prst="roundRect">
             <a:avLst/>
@@ -7996,7 +7906,7 @@
           </a:solidFill>
           <a:ln w="12700">
             <a:solidFill>
-              <a:srgbClr val="DAE0E9"/>
+              <a:srgbClr val="1B365D"/>
             </a:solidFill>
           </a:ln>
         </p:spPr>
@@ -8024,14 +7934,14 @@
       </p:sp>
       <p:sp>
         <p:nvSpPr>
-          <p:cNvPr id="12" name="TextBox 11"/>
+          <p:cNvPr id="11" name="TextBox 10"/>
           <p:cNvSpPr txBox="1"/>
           <p:nvPr/>
         </p:nvSpPr>
         <p:spPr>
           <a:xfrm>
-            <a:off x="6355080" y="1371600"/>
-            <a:ext cx="4297680" cy="4892040"/>
+            <a:off x="868680" y="4919472"/>
+            <a:ext cx="3154680" cy="1234440"/>
           </a:xfrm>
           <a:prstGeom prst="rect">
             <a:avLst/>
@@ -8045,143 +7955,195 @@
           <a:lstStyle/>
           <a:p>
             <a:r>
-              <a:rPr b="1" sz="1100">
+              <a:rPr sz="950" b="1">
                 <a:solidFill>
                   <a:srgbClr val="1B365D"/>
                 </a:solidFill>
               </a:rPr>
-              <a:t>SO SÁNH CƠ CẤU CẢM XÚC VỚI KANG &amp; KIM (2022)
+              <a:t>PAPER GỐC (DISTILBERT 2 LỚP)
 </a:t>
             </a:r>
-          </a:p>
-          <a:p>
-            <a:pPr>
-              <a:spcAft>
-                <a:spcPts val="300"/>
-              </a:spcAft>
-            </a:pPr>
+            <a:r>
+              <a:rPr sz="850">
+                <a:solidFill>
+                  <a:srgbClr val="212529"/>
+                </a:solidFill>
+              </a:rPr>
+              <a:t>Tích cực ~78%, Tiêu cực ~15%. Bỏ qua lớp Trung tính, ép câu số liệu kiểm toán kỹ thuật vào nhãn cảm xúc sai lệch.</a:t>
+            </a:r>
+          </a:p>
+        </p:txBody>
+      </p:sp>
+      <p:sp>
+        <p:nvSpPr>
+          <p:cNvPr id="12" name="Rounded Rectangle 11"/>
+          <p:cNvSpPr/>
+          <p:nvPr/>
+        </p:nvSpPr>
+        <p:spPr>
+          <a:xfrm>
+            <a:off x="4379976" y="4846320"/>
+            <a:ext cx="3429000" cy="1371600"/>
+          </a:xfrm>
+          <a:prstGeom prst="roundRect">
+            <a:avLst/>
+          </a:prstGeom>
+          <a:solidFill>
+            <a:srgbClr val="FFFFFF"/>
+          </a:solidFill>
+          <a:ln w="12700">
+            <a:solidFill>
+              <a:srgbClr val="288C3C"/>
+            </a:solidFill>
+          </a:ln>
+        </p:spPr>
+        <p:style>
+          <a:lnRef idx="1">
+            <a:schemeClr val="accent1"/>
+          </a:lnRef>
+          <a:fillRef idx="3">
+            <a:schemeClr val="accent1"/>
+          </a:fillRef>
+          <a:effectRef idx="2">
+            <a:schemeClr val="accent1"/>
+          </a:effectRef>
+          <a:fontRef idx="minor">
+            <a:schemeClr val="lt1"/>
+          </a:fontRef>
+        </p:style>
+        <p:txBody>
+          <a:bodyPr rtlCol="0" anchor="ctr"/>
+          <a:lstStyle/>
+          <a:p>
+            <a:pPr algn="ctr"/>
+          </a:p>
+        </p:txBody>
+      </p:sp>
+      <p:sp>
+        <p:nvSpPr>
+          <p:cNvPr id="13" name="TextBox 12"/>
+          <p:cNvSpPr txBox="1"/>
+          <p:nvPr/>
+        </p:nvSpPr>
+        <p:spPr>
+          <a:xfrm>
+            <a:off x="4517136" y="4919472"/>
+            <a:ext cx="3154680" cy="1234440"/>
+          </a:xfrm>
+          <a:prstGeom prst="rect">
+            <a:avLst/>
+          </a:prstGeom>
+          <a:noFill/>
+        </p:spPr>
+        <p:txBody>
+          <a:bodyPr wrap="square">
+            <a:spAutoFit/>
+          </a:bodyPr>
+          <a:lstStyle/>
+          <a:p>
             <a:r>
               <a:rPr sz="950" b="1">
                 <a:solidFill>
-                  <a:srgbClr val="1B365D"/>
-                </a:solidFill>
-                <a:latin typeface="Segoe UI"/>
-              </a:rPr>
-              <a:t>• Paper gốc (DistilBERT 2 lớp):</a:t>
-            </a:r>
-          </a:p>
-          <a:p>
-            <a:pPr>
-              <a:spcAft>
-                <a:spcPts val="300"/>
-              </a:spcAft>
-            </a:pPr>
-            <a:r>
-              <a:rPr sz="880" b="0">
+                  <a:srgbClr val="288C3C"/>
+                </a:solidFill>
+              </a:rPr>
+              <a:t>VIỆT NAM (PHOBERT 3 LỚP)
+</a:t>
+            </a:r>
+            <a:r>
+              <a:rPr sz="850">
                 <a:solidFill>
                   <a:srgbClr val="212529"/>
                 </a:solidFill>
-                <a:latin typeface="Segoe UI"/>
-              </a:rPr>
-              <a:t>  Tích cực chiếm ~78%, Tiêu cực chiếm ~15%. Không có lớp Trung tính, ép câu số liệu vào cảm xúc.</a:t>
-            </a:r>
-          </a:p>
-          <a:p>
-            <a:pPr>
-              <a:spcAft>
-                <a:spcPts val="300"/>
-              </a:spcAft>
-            </a:pPr>
+              </a:rPr>
+              <a:t>Tích cực: 53,87% | Trung tính: 32,87% | Tiêu cực: 13,26%. Đột phá bảo lưu 1/3 câu số liệu kỹ thuật khách quan.</a:t>
+            </a:r>
+          </a:p>
+        </p:txBody>
+      </p:sp>
+      <p:sp>
+        <p:nvSpPr>
+          <p:cNvPr id="14" name="Rounded Rectangle 13"/>
+          <p:cNvSpPr/>
+          <p:nvPr/>
+        </p:nvSpPr>
+        <p:spPr>
+          <a:xfrm>
+            <a:off x="8028432" y="4846320"/>
+            <a:ext cx="3429000" cy="1371600"/>
+          </a:xfrm>
+          <a:prstGeom prst="roundRect">
+            <a:avLst/>
+          </a:prstGeom>
+          <a:solidFill>
+            <a:srgbClr val="FFFFFF"/>
+          </a:solidFill>
+          <a:ln w="12700">
+            <a:solidFill>
+              <a:srgbClr val="7030A0"/>
+            </a:solidFill>
+          </a:ln>
+        </p:spPr>
+        <p:style>
+          <a:lnRef idx="1">
+            <a:schemeClr val="accent1"/>
+          </a:lnRef>
+          <a:fillRef idx="3">
+            <a:schemeClr val="accent1"/>
+          </a:fillRef>
+          <a:effectRef idx="2">
+            <a:schemeClr val="accent1"/>
+          </a:effectRef>
+          <a:fontRef idx="minor">
+            <a:schemeClr val="lt1"/>
+          </a:fontRef>
+        </p:style>
+        <p:txBody>
+          <a:bodyPr rtlCol="0" anchor="ctr"/>
+          <a:lstStyle/>
+          <a:p>
+            <a:pPr algn="ctr"/>
+          </a:p>
+        </p:txBody>
+      </p:sp>
+      <p:sp>
+        <p:nvSpPr>
+          <p:cNvPr id="15" name="TextBox 14"/>
+          <p:cNvSpPr txBox="1"/>
+          <p:nvPr/>
+        </p:nvSpPr>
+        <p:spPr>
+          <a:xfrm>
+            <a:off x="8165592" y="4919472"/>
+            <a:ext cx="3154680" cy="1234440"/>
+          </a:xfrm>
+          <a:prstGeom prst="rect">
+            <a:avLst/>
+          </a:prstGeom>
+          <a:noFill/>
+        </p:spPr>
+        <p:txBody>
+          <a:bodyPr wrap="square">
+            <a:spAutoFit/>
+          </a:bodyPr>
+          <a:lstStyle/>
+          <a:p>
             <a:r>
               <a:rPr sz="950" b="1">
                 <a:solidFill>
-                  <a:srgbClr val="288C3C"/>
-                </a:solidFill>
-                <a:latin typeface="Segoe UI"/>
-              </a:rPr>
-              <a:t>• Nghiên cứu tại Việt Nam (PhoBERT 3 lớp):</a:t>
-            </a:r>
-          </a:p>
-          <a:p>
-            <a:pPr>
-              <a:spcAft>
-                <a:spcPts val="300"/>
-              </a:spcAft>
-            </a:pPr>
-            <a:r>
-              <a:rPr sz="880" b="0">
+                  <a:srgbClr val="7030A0"/>
+                </a:solidFill>
+              </a:rPr>
+              <a:t>KẾT LUẬN VĂN PHONG DOANH NGHIỆP
+</a:t>
+            </a:r>
+            <a:r>
+              <a:rPr sz="850">
                 <a:solidFill>
                   <a:srgbClr val="212529"/>
                 </a:solidFill>
-                <a:latin typeface="Segoe UI"/>
-              </a:rPr>
-              <a:t>  - Tích cực (Positive): 53,87%
-  - Trung tính (Neutral): 32,87%
-  - Tiêu cực (Negative): 13,26%</a:t>
-            </a:r>
-          </a:p>
-          <a:p>
-            <a:pPr>
-              <a:spcAft>
-                <a:spcPts val="300"/>
-              </a:spcAft>
-            </a:pPr>
-            <a:r>
-              <a:rPr sz="950" b="1">
-                <a:solidFill>
-                  <a:srgbClr val="1F77B4"/>
-                </a:solidFill>
-                <a:latin typeface="Segoe UI"/>
-              </a:rPr>
-              <a:t>• Ý nghĩa học thuật của Lớp Trung tính (32,87%):</a:t>
-            </a:r>
-          </a:p>
-          <a:p>
-            <a:pPr>
-              <a:spcAft>
-                <a:spcPts val="300"/>
-              </a:spcAft>
-            </a:pPr>
-            <a:r>
-              <a:rPr sz="880" b="0">
-                <a:solidFill>
-                  <a:srgbClr val="212529"/>
-                </a:solidFill>
-                <a:latin typeface="Segoe UI"/>
-              </a:rPr>
-              <a:t>  Chiếm gần 1/3 dung lượng báo cáo, bảo toàn các câu số liệu kỹ thuật khách quan (ví dụ: lượng điện kWh, nước m3, khí phát thải tCO2e).</a:t>
-            </a:r>
-          </a:p>
-          <a:p>
-            <a:pPr>
-              <a:spcAft>
-                <a:spcPts val="300"/>
-              </a:spcAft>
-            </a:pPr>
-            <a:r>
-              <a:rPr sz="950" b="1">
-                <a:solidFill>
-                  <a:srgbClr val="7030A0"/>
-                </a:solidFill>
-                <a:latin typeface="Segoe UI"/>
-              </a:rPr>
-              <a:t>• Tính thận trọng trong văn phong tiếng Việt:</a:t>
-            </a:r>
-          </a:p>
-          <a:p>
-            <a:pPr>
-              <a:spcAft>
-                <a:spcPts val="300"/>
-              </a:spcAft>
-            </a:pPr>
-            <a:r>
-              <a:rPr sz="880" b="0">
-                <a:solidFill>
-                  <a:srgbClr val="212529"/>
-                </a:solidFill>
-                <a:latin typeface="Segoe UI"/>
-              </a:rPr>
-              <a:t>  Doanh nghiệp Việt Nam công bố nhiều dữ liệu đo lường theo chuẩn mực GRI chứ không chỉ đơn thuần quảng cáo PR.</a:t>
+              </a:rPr>
+              <a:t>Báo cáo Việt Nam dành gần 1/3 dung lượng cho các số liệu đo lường kỹ thuật GRI chứ không chỉ đơn thuần quảng cáo PR.</a:t>
             </a:r>
           </a:p>
         </p:txBody>
@@ -8256,7 +8218,7 @@
         <p:spPr>
           <a:xfrm>
             <a:off x="0" y="0"/>
-            <a:ext cx="12191695" cy="1005840"/>
+            <a:ext cx="12191695" cy="960120"/>
           </a:xfrm>
           <a:prstGeom prst="rect">
             <a:avLst/>
@@ -8301,7 +8263,7 @@
         <p:spPr>
           <a:xfrm>
             <a:off x="0" y="0"/>
-            <a:ext cx="12191695" cy="54864"/>
+            <a:ext cx="12191695" cy="45720"/>
           </a:xfrm>
           <a:prstGeom prst="rect">
             <a:avLst/>
@@ -8343,8 +8305,8 @@
         </p:nvSpPr>
         <p:spPr>
           <a:xfrm>
-            <a:off x="731520" y="146304"/>
-            <a:ext cx="2560320" cy="256032"/>
+            <a:off x="731520" y="128016"/>
+            <a:ext cx="2560320" cy="237744"/>
           </a:xfrm>
           <a:prstGeom prst="roundRect">
             <a:avLst/>
@@ -8376,7 +8338,7 @@
           <a:p>
             <a:pPr algn="ctr"/>
             <a:r>
-              <a:rPr sz="900" b="1">
+              <a:rPr sz="850" b="1">
                 <a:solidFill>
                   <a:srgbClr val="FFFFFF"/>
                 </a:solidFill>
@@ -8395,8 +8357,8 @@
         </p:nvSpPr>
         <p:spPr>
           <a:xfrm>
-            <a:off x="685800" y="420624"/>
-            <a:ext cx="9601200" cy="530352"/>
+            <a:off x="685800" y="384048"/>
+            <a:ext cx="9601200" cy="502920"/>
           </a:xfrm>
           <a:prstGeom prst="rect">
             <a:avLst/>
@@ -8410,7 +8372,7 @@
           <a:lstStyle/>
           <a:p>
             <a:r>
-              <a:rPr sz="1700" b="1">
+              <a:rPr sz="1650" b="1">
                 <a:solidFill>
                   <a:srgbClr val="1B365D"/>
                 </a:solidFill>
@@ -8429,7 +8391,7 @@
         </p:nvSpPr>
         <p:spPr>
           <a:xfrm>
-            <a:off x="10789920" y="320040"/>
+            <a:off x="10789920" y="292608"/>
             <a:ext cx="914400" cy="457200"/>
           </a:xfrm>
           <a:prstGeom prst="rect">
@@ -8507,7 +8469,7 @@
         <p:spPr>
           <a:xfrm>
             <a:off x="731520" y="1234440"/>
-            <a:ext cx="5943600" cy="5166360"/>
+            <a:ext cx="6217920" cy="3383280"/>
           </a:xfrm>
           <a:prstGeom prst="rect">
             <a:avLst/>
@@ -8522,8 +8484,99 @@
         </p:nvSpPr>
         <p:spPr>
           <a:xfrm>
-            <a:off x="6888175" y="1234440"/>
-            <a:ext cx="4572000" cy="1600200"/>
+            <a:off x="731520" y="4800600"/>
+            <a:ext cx="6217920" cy="1417320"/>
+          </a:xfrm>
+          <a:prstGeom prst="roundRect">
+            <a:avLst/>
+          </a:prstGeom>
+          <a:solidFill>
+            <a:srgbClr val="EEF4FC"/>
+          </a:solidFill>
+          <a:ln w="12700">
+            <a:solidFill>
+              <a:srgbClr val="1F77B4"/>
+            </a:solidFill>
+          </a:ln>
+        </p:spPr>
+        <p:style>
+          <a:lnRef idx="1">
+            <a:schemeClr val="accent1"/>
+          </a:lnRef>
+          <a:fillRef idx="3">
+            <a:schemeClr val="accent1"/>
+          </a:fillRef>
+          <a:effectRef idx="2">
+            <a:schemeClr val="accent1"/>
+          </a:effectRef>
+          <a:fontRef idx="minor">
+            <a:schemeClr val="lt1"/>
+          </a:fontRef>
+        </p:style>
+        <p:txBody>
+          <a:bodyPr rtlCol="0" anchor="ctr"/>
+          <a:lstStyle/>
+          <a:p>
+            <a:pPr algn="ctr"/>
+          </a:p>
+        </p:txBody>
+      </p:sp>
+      <p:sp>
+        <p:nvSpPr>
+          <p:cNvPr id="11" name="TextBox 10"/>
+          <p:cNvSpPr txBox="1"/>
+          <p:nvPr/>
+        </p:nvSpPr>
+        <p:spPr>
+          <a:xfrm>
+            <a:off x="868680" y="4864608"/>
+            <a:ext cx="5943600" cy="1280160"/>
+          </a:xfrm>
+          <a:prstGeom prst="rect">
+            <a:avLst/>
+          </a:prstGeom>
+          <a:noFill/>
+        </p:spPr>
+        <p:txBody>
+          <a:bodyPr wrap="square">
+            <a:spAutoFit/>
+          </a:bodyPr>
+          <a:lstStyle/>
+          <a:p>
+            <a:r>
+              <a:rPr b="1" sz="950">
+                <a:solidFill>
+                  <a:srgbClr val="1B365D"/>
+                </a:solidFill>
+              </a:rPr>
+              <a:t>KẾT LUẬN THIÊN LỆCH LẠC QUAN CẤU TRÚC:
+</a:t>
+            </a:r>
+          </a:p>
+          <a:p>
+            <a:pPr>
+              <a:defRPr sz="850">
+                <a:solidFill>
+                  <a:srgbClr val="212529"/>
+                </a:solidFill>
+              </a:defRPr>
+            </a:pPr>
+            <a:r>
+              <a:t>Tỷ số Pos/Neg trung bình đạt 4,06 lần khẳng định doanh nghiệp Việt Nam luôn có xu hướng dùng ngôn từ tích cực gấp hơn 4 lần so với tiêu cực nhằm làm đẹp hình ảnh quản trị (Hiệu ứng Pollyanna).</a:t>
+            </a:r>
+          </a:p>
+        </p:txBody>
+      </p:sp>
+      <p:sp>
+        <p:nvSpPr>
+          <p:cNvPr id="12" name="Rounded Rectangle 11"/>
+          <p:cNvSpPr/>
+          <p:nvPr/>
+        </p:nvSpPr>
+        <p:spPr>
+          <a:xfrm>
+            <a:off x="7269480" y="1234440"/>
+            <a:ext cx="4206240" cy="2423160"/>
           </a:xfrm>
           <a:prstGeom prst="roundRect">
             <a:avLst/>
@@ -8561,14 +8614,14 @@
       </p:sp>
       <p:sp>
         <p:nvSpPr>
-          <p:cNvPr id="11" name="TextBox 10"/>
+          <p:cNvPr id="13" name="TextBox 12"/>
           <p:cNvSpPr txBox="1"/>
           <p:nvPr/>
         </p:nvSpPr>
         <p:spPr>
           <a:xfrm>
-            <a:off x="7025335" y="1325880"/>
-            <a:ext cx="4297680" cy="1417320"/>
+            <a:off x="7406640" y="1344168"/>
+            <a:ext cx="3931920" cy="2194560"/>
           </a:xfrm>
           <a:prstGeom prst="rect">
             <a:avLst/>
@@ -8587,14 +8640,14 @@
                   <a:srgbClr val="1B365D"/>
                 </a:solidFill>
               </a:rPr>
-              <a:t>ĐỐI CHUẨN TỶ SỐ VỚI KANG &amp; KIM (2022)
+              <a:t>ĐỐI CHUẨN QUỐC TẾ: KANG &amp; KIM (2022)
 </a:t>
             </a:r>
           </a:p>
           <a:p>
             <a:pPr>
               <a:spcAft>
-                <a:spcPts val="200"/>
+                <a:spcPts val="400"/>
               </a:spcAft>
             </a:pPr>
             <a:r>
@@ -8603,13 +8656,13 @@
                   <a:srgbClr val="212529"/>
                 </a:solidFill>
               </a:rPr>
-              <a:t>• Paper gốc: Pos/Neg Ratio bình quân đạt ≈ 5,20 lần.</a:t>
+              <a:t>• Kang &amp; Kim (2022): Pos/Neg toàn cầu đạt ≈ 5,20 lần.</a:t>
             </a:r>
           </a:p>
           <a:p>
             <a:pPr>
               <a:spcAft>
-                <a:spcPts val="200"/>
+                <a:spcPts val="400"/>
               </a:spcAft>
             </a:pPr>
             <a:r>
@@ -8618,13 +8671,13 @@
                   <a:srgbClr val="212529"/>
                 </a:solidFill>
               </a:rPr>
-              <a:t>• Việt Nam: Pos/Neg Ratio trung bình đạt 4,06 lần (dao động 3,0 – 6,7 lần tùy năm).</a:t>
+              <a:t>• Việt Nam: Pos/Neg trung bình đạt 4,06 lần (3,0 – 6,7x).</a:t>
             </a:r>
           </a:p>
           <a:p>
             <a:pPr>
               <a:spcAft>
-                <a:spcPts val="200"/>
+                <a:spcPts val="400"/>
               </a:spcAft>
             </a:pPr>
             <a:r>
@@ -8633,21 +8686,21 @@
                   <a:srgbClr val="212529"/>
                 </a:solidFill>
               </a:rPr>
-              <a:t>• Cả hai đều khẳng định sự tồn tại của Thiên lệch Lạc quan (Optimism Bias) mang tính phổ quát.</a:t>
-            </a:r>
-          </a:p>
-        </p:txBody>
-      </p:sp>
-      <p:sp>
-        <p:nvSpPr>
-          <p:cNvPr id="12" name="Rounded Rectangle 11"/>
+              <a:t>• Cả 2 đều xác nhận Lý thuyết Quản trị Ấn tượng mang tính phổ quát toàn cầu.</a:t>
+            </a:r>
+          </a:p>
+        </p:txBody>
+      </p:sp>
+      <p:sp>
+        <p:nvSpPr>
+          <p:cNvPr id="14" name="Rounded Rectangle 13"/>
           <p:cNvSpPr/>
           <p:nvPr/>
         </p:nvSpPr>
         <p:spPr>
           <a:xfrm>
-            <a:off x="6888175" y="2971800"/>
-            <a:ext cx="4572000" cy="1600200"/>
+            <a:off x="7269480" y="3794760"/>
+            <a:ext cx="4206240" cy="2423160"/>
           </a:xfrm>
           <a:prstGeom prst="roundRect">
             <a:avLst/>
@@ -8685,14 +8738,14 @@
       </p:sp>
       <p:sp>
         <p:nvSpPr>
-          <p:cNvPr id="13" name="TextBox 12"/>
+          <p:cNvPr id="15" name="TextBox 14"/>
           <p:cNvSpPr txBox="1"/>
           <p:nvPr/>
         </p:nvSpPr>
         <p:spPr>
           <a:xfrm>
-            <a:off x="7025335" y="3063240"/>
-            <a:ext cx="4297680" cy="1417320"/>
+            <a:off x="7406640" y="3904488"/>
+            <a:ext cx="3931920" cy="2194560"/>
           </a:xfrm>
           <a:prstGeom prst="rect">
             <a:avLst/>
@@ -8711,14 +8764,14 @@
                   <a:srgbClr val="D62728"/>
                 </a:solidFill>
               </a:rPr>
-              <a:t>QUY LUẬT QUẢN TRỊ ẤN TƯỢNG (IMPRESSION MANAGEMENT)
+              <a:t>CASE STUDY NGOẠI LỆ ĐIỂN HÌNH
 </a:t>
             </a:r>
           </a:p>
           <a:p>
             <a:pPr>
               <a:spcAft>
-                <a:spcPts val="200"/>
+                <a:spcPts val="400"/>
               </a:spcAft>
             </a:pPr>
             <a:r>
@@ -8727,13 +8780,13 @@
                   <a:srgbClr val="212529"/>
                 </a:solidFill>
               </a:rPr>
-              <a:t>• Tỷ số 4,06 lần xác nhận Doanh nghiệp Việt Nam có xu hướng khuếch đại thành tựu và giảm thiểu thông tin rủi ro.</a:t>
+              <a:t>• PNJ 2022 tụt xuống 1,21 lần:</a:t>
             </a:r>
           </a:p>
           <a:p>
             <a:pPr>
               <a:spcAft>
-                <a:spcPts val="200"/>
+                <a:spcPts val="400"/>
               </a:spcAft>
             </a:pPr>
             <a:r>
@@ -8742,92 +8795,13 @@
                   <a:srgbClr val="212529"/>
                 </a:solidFill>
               </a:rPr>
-              <a:t>• Báo cáo thường lồng ghép các từ ngữ mang tính ca ngợi thành tích thay vì giải trình khách quan.</a:t>
-            </a:r>
-          </a:p>
-        </p:txBody>
-      </p:sp>
-      <p:sp>
-        <p:nvSpPr>
-          <p:cNvPr id="14" name="Rounded Rectangle 13"/>
-          <p:cNvSpPr/>
-          <p:nvPr/>
-        </p:nvSpPr>
-        <p:spPr>
-          <a:xfrm>
-            <a:off x="6888175" y="4709160"/>
-            <a:ext cx="4572000" cy="1600200"/>
-          </a:xfrm>
-          <a:prstGeom prst="roundRect">
-            <a:avLst/>
-          </a:prstGeom>
-          <a:solidFill>
-            <a:srgbClr val="FFFFFF"/>
-          </a:solidFill>
-          <a:ln w="12700">
-            <a:solidFill>
-              <a:srgbClr val="1F77B4"/>
-            </a:solidFill>
-          </a:ln>
-        </p:spPr>
-        <p:style>
-          <a:lnRef idx="1">
-            <a:schemeClr val="accent1"/>
-          </a:lnRef>
-          <a:fillRef idx="3">
-            <a:schemeClr val="accent1"/>
-          </a:fillRef>
-          <a:effectRef idx="2">
-            <a:schemeClr val="accent1"/>
-          </a:effectRef>
-          <a:fontRef idx="minor">
-            <a:schemeClr val="lt1"/>
-          </a:fontRef>
-        </p:style>
-        <p:txBody>
-          <a:bodyPr rtlCol="0" anchor="ctr"/>
-          <a:lstStyle/>
-          <a:p>
-            <a:pPr algn="ctr"/>
-          </a:p>
-        </p:txBody>
-      </p:sp>
-      <p:sp>
-        <p:nvSpPr>
-          <p:cNvPr id="15" name="TextBox 14"/>
-          <p:cNvSpPr txBox="1"/>
-          <p:nvPr/>
-        </p:nvSpPr>
-        <p:spPr>
-          <a:xfrm>
-            <a:off x="7025335" y="4800600"/>
-            <a:ext cx="4297680" cy="1417320"/>
-          </a:xfrm>
-          <a:prstGeom prst="rect">
-            <a:avLst/>
-          </a:prstGeom>
-          <a:noFill/>
-        </p:spPr>
-        <p:txBody>
-          <a:bodyPr wrap="square">
-            <a:spAutoFit/>
-          </a:bodyPr>
-          <a:lstStyle/>
-          <a:p>
-            <a:r>
-              <a:rPr sz="1000" b="1">
-                <a:solidFill>
-                  <a:srgbClr val="1F77B4"/>
-                </a:solidFill>
-              </a:rPr>
-              <a:t>CASE STUDY NGOẠI LỆ: PNJ 2022 &amp; VNM 2025
-</a:t>
+              <a:t>  Phản ánh trung thực khó khăn đóng cửa mạng lưới mùa Covid.</a:t>
             </a:r>
           </a:p>
           <a:p>
             <a:pPr>
               <a:spcAft>
-                <a:spcPts val="200"/>
+                <a:spcPts val="400"/>
               </a:spcAft>
             </a:pPr>
             <a:r>
@@ -8836,13 +8810,13 @@
                   <a:srgbClr val="212529"/>
                 </a:solidFill>
               </a:rPr>
-              <a:t>• PNJ 2022 giảm còn 1,21 lần: Do phản ánh trung thực khó khăn giãn cách Covid đóng cửa chuỗi cửa hàng.</a:t>
+              <a:t>• VNM 2025 tăng vọt lên 6,71 lần:</a:t>
             </a:r>
           </a:p>
           <a:p>
             <a:pPr>
               <a:spcAft>
-                <a:spcPts val="200"/>
+                <a:spcPts val="400"/>
               </a:spcAft>
             </a:pPr>
             <a:r>
@@ -8851,7 +8825,7 @@
                   <a:srgbClr val="212529"/>
                 </a:solidFill>
               </a:rPr>
-              <a:t>• VNM 2025 đạt 6,71 lần: Bùng nổ công bố thành tựu Net Zero và giải thưởng quốc tế.</a:t>
+              <a:t>  Bùng nổ công bố chứng nhận Net Zero PAS 2060 và giải thưởng.</a:t>
             </a:r>
           </a:p>
         </p:txBody>
@@ -8926,7 +8900,7 @@
         <p:spPr>
           <a:xfrm>
             <a:off x="0" y="0"/>
-            <a:ext cx="12191695" cy="1005840"/>
+            <a:ext cx="12191695" cy="960120"/>
           </a:xfrm>
           <a:prstGeom prst="rect">
             <a:avLst/>
@@ -8971,7 +8945,7 @@
         <p:spPr>
           <a:xfrm>
             <a:off x="0" y="0"/>
-            <a:ext cx="12191695" cy="54864"/>
+            <a:ext cx="12191695" cy="45720"/>
           </a:xfrm>
           <a:prstGeom prst="rect">
             <a:avLst/>
@@ -9013,8 +8987,8 @@
         </p:nvSpPr>
         <p:spPr>
           <a:xfrm>
-            <a:off x="731520" y="146304"/>
-            <a:ext cx="2560320" cy="256032"/>
+            <a:off x="731520" y="128016"/>
+            <a:ext cx="2560320" cy="237744"/>
           </a:xfrm>
           <a:prstGeom prst="roundRect">
             <a:avLst/>
@@ -9046,7 +9020,7 @@
           <a:p>
             <a:pPr algn="ctr"/>
             <a:r>
-              <a:rPr sz="900" b="1">
+              <a:rPr sz="850" b="1">
                 <a:solidFill>
                   <a:srgbClr val="FFFFFF"/>
                 </a:solidFill>
@@ -9065,8 +9039,8 @@
         </p:nvSpPr>
         <p:spPr>
           <a:xfrm>
-            <a:off x="685800" y="420624"/>
-            <a:ext cx="9601200" cy="530352"/>
+            <a:off x="685800" y="384048"/>
+            <a:ext cx="9601200" cy="502920"/>
           </a:xfrm>
           <a:prstGeom prst="rect">
             <a:avLst/>
@@ -9080,7 +9054,7 @@
           <a:lstStyle/>
           <a:p>
             <a:r>
-              <a:rPr sz="1700" b="1">
+              <a:rPr sz="1650" b="1">
                 <a:solidFill>
                   <a:srgbClr val="1B365D"/>
                 </a:solidFill>
@@ -9099,7 +9073,7 @@
         </p:nvSpPr>
         <p:spPr>
           <a:xfrm>
-            <a:off x="10789920" y="320040"/>
+            <a:off x="10789920" y="292608"/>
             <a:ext cx="914400" cy="457200"/>
           </a:xfrm>
           <a:prstGeom prst="rect">
@@ -9176,8 +9150,8 @@
         </p:blipFill>
         <p:spPr>
           <a:xfrm>
-            <a:off x="731520" y="1234440"/>
-            <a:ext cx="5943600" cy="5166360"/>
+            <a:off x="731520" y="1188720"/>
+            <a:ext cx="10728655" cy="3474720"/>
           </a:xfrm>
           <a:prstGeom prst="rect">
             <a:avLst/>
@@ -9192,8 +9166,8 @@
         </p:nvSpPr>
         <p:spPr>
           <a:xfrm>
-            <a:off x="6888175" y="1234440"/>
-            <a:ext cx="4572000" cy="1600200"/>
+            <a:off x="731520" y="4892040"/>
+            <a:ext cx="3429000" cy="1325880"/>
           </a:xfrm>
           <a:prstGeom prst="roundRect">
             <a:avLst/>
@@ -9237,8 +9211,8 @@
         </p:nvSpPr>
         <p:spPr>
           <a:xfrm>
-            <a:off x="7025335" y="1325880"/>
-            <a:ext cx="4297680" cy="1417320"/>
+            <a:off x="868680" y="4956048"/>
+            <a:ext cx="3154680" cy="1188720"/>
           </a:xfrm>
           <a:prstGeom prst="rect">
             <a:avLst/>
@@ -9252,7 +9226,7 @@
           <a:lstStyle/>
           <a:p>
             <a:r>
-              <a:rPr sz="1000" b="1">
+              <a:rPr sz="950" b="1">
                 <a:solidFill>
                   <a:srgbClr val="1B365D"/>
                 </a:solidFill>
@@ -9260,35 +9234,13 @@
               <a:t>1. TĂNG TRƯỞNG &amp; VIỆC LÀM (SDG 8, 9, 12)
 </a:t>
             </a:r>
-          </a:p>
-          <a:p>
-            <a:pPr>
-              <a:spcAft>
-                <a:spcPts val="200"/>
-              </a:spcAft>
-            </a:pPr>
-            <a:r>
-              <a:rPr sz="880">
+            <a:r>
+              <a:rPr sz="850">
                 <a:solidFill>
                   <a:srgbClr val="212529"/>
                 </a:solidFill>
               </a:rPr>
-              <a:t>• Chiếm dung lượng áp đảo trong báo cáo của toàn bộ 7 doanh nghiệp.</a:t>
-            </a:r>
-          </a:p>
-          <a:p>
-            <a:pPr>
-              <a:spcAft>
-                <a:spcPts val="200"/>
-              </a:spcAft>
-            </a:pPr>
-            <a:r>
-              <a:rPr sz="880">
-                <a:solidFill>
-                  <a:srgbClr val="212529"/>
-                </a:solidFill>
-              </a:rPr>
-              <a:t>• Doanh nghiệp tập trung mô tả doanh thu, lợi nhuận, quy mô nhân sự và ứng dụng công nghệ vì đây là các số liệu dễ định lượng và phục vụ quan hệ cổ đông.</a:t>
+              <a:t>Chiếm dung lượng áp đảo toàn bộ 7 doanh nghiệp. Dễ định lượng số liệu doanh thu, lợi nhuận, quy mô nhân sự và công nghệ.</a:t>
             </a:r>
           </a:p>
         </p:txBody>
@@ -9301,8 +9253,8 @@
         </p:nvSpPr>
         <p:spPr>
           <a:xfrm>
-            <a:off x="6888175" y="2971800"/>
-            <a:ext cx="4572000" cy="1600200"/>
+            <a:off x="4379976" y="4892040"/>
+            <a:ext cx="3429000" cy="1325880"/>
           </a:xfrm>
           <a:prstGeom prst="roundRect">
             <a:avLst/>
@@ -9346,8 +9298,8 @@
         </p:nvSpPr>
         <p:spPr>
           <a:xfrm>
-            <a:off x="7025335" y="3063240"/>
-            <a:ext cx="4297680" cy="1417320"/>
+            <a:off x="4517136" y="4956048"/>
+            <a:ext cx="3154680" cy="1188720"/>
           </a:xfrm>
           <a:prstGeom prst="rect">
             <a:avLst/>
@@ -9361,43 +9313,21 @@
           <a:lstStyle/>
           <a:p>
             <a:r>
-              <a:rPr sz="1000" b="1">
+              <a:rPr sz="950" b="1">
                 <a:solidFill>
                   <a:srgbClr val="288C3C"/>
                 </a:solidFill>
               </a:rPr>
-              <a:t>2. HOẠT ĐỘNG THIỆN NGUYỆN CSR (SDG 1, 2, 4)
+              <a:t>2. HOẠT ĐỘNG THIỆN NGUYỆN (SDG 1, 2, 4)
 </a:t>
             </a:r>
-          </a:p>
-          <a:p>
-            <a:pPr>
-              <a:spcAft>
-                <a:spcPts val="200"/>
-              </a:spcAft>
-            </a:pPr>
-            <a:r>
-              <a:rPr sz="880">
+            <a:r>
+              <a:rPr sz="850">
                 <a:solidFill>
                   <a:srgbClr val="212529"/>
                 </a:solidFill>
               </a:rPr>
-              <a:t>• Doanh nghiệp nói rất nhiều về các gói tài trợ học bổng, xây cầu từ thiện, cứu trợ bão lũ.</a:t>
-            </a:r>
-          </a:p>
-          <a:p>
-            <a:pPr>
-              <a:spcAft>
-                <a:spcPts val="200"/>
-              </a:spcAft>
-            </a:pPr>
-            <a:r>
-              <a:rPr sz="880">
-                <a:solidFill>
-                  <a:srgbClr val="212529"/>
-                </a:solidFill>
-              </a:rPr>
-              <a:t>• Bản chất: Dễ thực hiện, hiệu quả truyền thông tức thì, giúp củng cố tính chính danh xã hội.</a:t>
+              <a:t>Báo cáo nói rất nhiều về tài trợ học bổng, xây cầu, cứu trợ bão lũ. Bản chất: Dễ làm, hiệu ứng truyền thông tức thì.</a:t>
             </a:r>
           </a:p>
         </p:txBody>
@@ -9410,8 +9340,8 @@
         </p:nvSpPr>
         <p:spPr>
           <a:xfrm>
-            <a:off x="6888175" y="4709160"/>
-            <a:ext cx="4572000" cy="1600200"/>
+            <a:off x="8028432" y="4892040"/>
+            <a:ext cx="3429000" cy="1325880"/>
           </a:xfrm>
           <a:prstGeom prst="roundRect">
             <a:avLst/>
@@ -9455,8 +9385,8 @@
         </p:nvSpPr>
         <p:spPr>
           <a:xfrm>
-            <a:off x="7025335" y="4800600"/>
-            <a:ext cx="4297680" cy="1417320"/>
+            <a:off x="8165592" y="4956048"/>
+            <a:ext cx="3154680" cy="1188720"/>
           </a:xfrm>
           <a:prstGeom prst="rect">
             <a:avLst/>
@@ -9470,43 +9400,21 @@
           <a:lstStyle/>
           <a:p>
             <a:r>
-              <a:rPr sz="1000" b="1">
+              <a:rPr sz="950" b="1">
                 <a:solidFill>
                   <a:srgbClr val="1F77B4"/>
                 </a:solidFill>
               </a:rPr>
-              <a:t>3. ĐỐI TÁC &amp; BÁO CÁO TÍCH HỢP (SDG 16, 17)
+              <a:t>3. ĐỐI TÁC &amp; THỂ CHẾ (SDG 16, 17)
 </a:t>
             </a:r>
-          </a:p>
-          <a:p>
-            <a:pPr>
-              <a:spcAft>
-                <a:spcPts val="200"/>
-              </a:spcAft>
-            </a:pPr>
-            <a:r>
-              <a:rPr sz="880">
+            <a:r>
+              <a:rPr sz="850">
                 <a:solidFill>
                   <a:srgbClr val="212529"/>
                 </a:solidFill>
               </a:rPr>
-              <a:t>• BVH, SSI và Vinamilk đầu tư dung lượng lớn cho việc tuân thủ pháp lý, đối tác chuỗi cung ứng và Báo cáo Tích hợp.</a:t>
-            </a:r>
-          </a:p>
-          <a:p>
-            <a:pPr>
-              <a:spcAft>
-                <a:spcPts val="200"/>
-              </a:spcAft>
-            </a:pPr>
-            <a:r>
-              <a:rPr sz="880">
-                <a:solidFill>
-                  <a:srgbClr val="212529"/>
-                </a:solidFill>
-              </a:rPr>
-              <a:t>• Phục vụ việc thu hút dòng vốn đầu tư ngoại và xếp hạng tín nhiệm.</a:t>
+              <a:t>BVH, SSI và Vinamilk đầu tư lớn cho Báo cáo Tích hợp, tuân thủ pháp lý nhằm thu hút vốn đầu tư và xếp hạng tín nhiệm.</a:t>
             </a:r>
           </a:p>
         </p:txBody>
@@ -9581,7 +9489,7 @@
         <p:spPr>
           <a:xfrm>
             <a:off x="0" y="0"/>
-            <a:ext cx="12191695" cy="1005840"/>
+            <a:ext cx="12191695" cy="960120"/>
           </a:xfrm>
           <a:prstGeom prst="rect">
             <a:avLst/>
@@ -9626,7 +9534,7 @@
         <p:spPr>
           <a:xfrm>
             <a:off x="0" y="0"/>
-            <a:ext cx="12191695" cy="54864"/>
+            <a:ext cx="12191695" cy="45720"/>
           </a:xfrm>
           <a:prstGeom prst="rect">
             <a:avLst/>
@@ -9668,8 +9576,8 @@
         </p:nvSpPr>
         <p:spPr>
           <a:xfrm>
-            <a:off x="731520" y="146304"/>
-            <a:ext cx="2560320" cy="256032"/>
+            <a:off x="731520" y="128016"/>
+            <a:ext cx="2560320" cy="237744"/>
           </a:xfrm>
           <a:prstGeom prst="roundRect">
             <a:avLst/>
@@ -9701,7 +9609,7 @@
           <a:p>
             <a:pPr algn="ctr"/>
             <a:r>
-              <a:rPr sz="900" b="1">
+              <a:rPr sz="850" b="1">
                 <a:solidFill>
                   <a:srgbClr val="FFFFFF"/>
                 </a:solidFill>
@@ -9720,8 +9628,8 @@
         </p:nvSpPr>
         <p:spPr>
           <a:xfrm>
-            <a:off x="685800" y="420624"/>
-            <a:ext cx="9601200" cy="530352"/>
+            <a:off x="685800" y="384048"/>
+            <a:ext cx="9601200" cy="502920"/>
           </a:xfrm>
           <a:prstGeom prst="rect">
             <a:avLst/>
@@ -9735,7 +9643,7 @@
           <a:lstStyle/>
           <a:p>
             <a:r>
-              <a:rPr sz="1700" b="1">
+              <a:rPr sz="1650" b="1">
                 <a:solidFill>
                   <a:srgbClr val="1B365D"/>
                 </a:solidFill>
@@ -9754,7 +9662,7 @@
         </p:nvSpPr>
         <p:spPr>
           <a:xfrm>
-            <a:off x="10789920" y="320040"/>
+            <a:off x="10789920" y="292608"/>
             <a:ext cx="914400" cy="457200"/>
           </a:xfrm>
           <a:prstGeom prst="rect">
@@ -9824,7 +9732,7 @@
         <p:spPr>
           <a:xfrm>
             <a:off x="731520" y="1234440"/>
-            <a:ext cx="5257800" cy="2377440"/>
+            <a:ext cx="5212080" cy="2331720"/>
           </a:xfrm>
           <a:prstGeom prst="roundRect">
             <a:avLst/>
@@ -9869,7 +9777,7 @@
         <p:spPr>
           <a:xfrm>
             <a:off x="731520" y="1234440"/>
-            <a:ext cx="5257800" cy="365760"/>
+            <a:ext cx="5212080" cy="365760"/>
           </a:xfrm>
           <a:prstGeom prst="rect">
             <a:avLst/>
@@ -9921,7 +9829,7 @@
         <p:spPr>
           <a:xfrm>
             <a:off x="868680" y="1645920"/>
-            <a:ext cx="4983480" cy="1920240"/>
+            <a:ext cx="4937760" cy="1874519"/>
           </a:xfrm>
           <a:prstGeom prst="rect">
             <a:avLst/>
@@ -9962,7 +9870,7 @@
                 </a:solidFill>
                 <a:latin typeface="Segoe UI"/>
               </a:rPr>
-              <a:t>• Báo cáo chỉ nêu khẩu hiệu chung chung, thiếu hoàn toàn số liệu kiểm kê tác động sinh thái đất liền và tài nguyên nước.</a:t>
+              <a:t>• Chỉ nêu khẩu hiệu chung chung, thiếu số liệu kiểm kê tác động sinh thái đất liền và biển.</a:t>
             </a:r>
           </a:p>
           <a:p>
@@ -9978,7 +9886,7 @@
                 </a:solidFill>
                 <a:latin typeface="Segoe UI"/>
               </a:rPr>
-              <a:t>• Nguyên nhân: Chi phí đo lường đa dạng sinh học phức tạp và chưa có chế tài bắt buộc.</a:t>
+              <a:t>• Chi phí đo lường đa dạng sinh học phức tạp và chưa có chế tài bắt buộc.</a:t>
             </a:r>
           </a:p>
         </p:txBody>
@@ -9991,8 +9899,8 @@
         </p:nvSpPr>
         <p:spPr>
           <a:xfrm>
-            <a:off x="6199632" y="1234440"/>
-            <a:ext cx="5257800" cy="2377440"/>
+            <a:off x="6245352" y="1234440"/>
+            <a:ext cx="5212080" cy="2331720"/>
           </a:xfrm>
           <a:prstGeom prst="roundRect">
             <a:avLst/>
@@ -10036,8 +9944,8 @@
         </p:nvSpPr>
         <p:spPr>
           <a:xfrm>
-            <a:off x="6199632" y="1234440"/>
-            <a:ext cx="5257800" cy="365760"/>
+            <a:off x="6245352" y="1234440"/>
+            <a:ext cx="5212080" cy="365760"/>
           </a:xfrm>
           <a:prstGeom prst="rect">
             <a:avLst/>
@@ -10088,8 +9996,8 @@
         </p:nvSpPr>
         <p:spPr>
           <a:xfrm>
-            <a:off x="6336792" y="1645920"/>
-            <a:ext cx="4983480" cy="1920240"/>
+            <a:off x="6382512" y="1645920"/>
+            <a:ext cx="4937760" cy="1874519"/>
           </a:xfrm>
           <a:prstGeom prst="rect">
             <a:avLst/>
@@ -10114,7 +10022,7 @@
                 </a:solidFill>
                 <a:latin typeface="Segoe UI"/>
               </a:rPr>
-              <a:t>• Tuyệt đối né tránh công bố Tỷ số chênh lệch lương CEO với công nhân (CEO-to-worker pay ratio).</a:t>
+              <a:t>• Tuyệt đối né tránh công bố Tỷ số chênh lệch lương CEO với công nhân.</a:t>
             </a:r>
           </a:p>
           <a:p>
@@ -10146,7 +10054,7 @@
                 </a:solidFill>
                 <a:latin typeface="Segoe UI"/>
               </a:rPr>
-              <a:t>• Báo cáo chỉ dừng lại ở tỷ lệ % lao động nữ chung chung.</a:t>
+              <a:t>• Chỉ dừng lại ở tỷ lệ % nhân sự nữ chung chung.</a:t>
             </a:r>
           </a:p>
         </p:txBody>
@@ -10159,8 +10067,8 @@
         </p:nvSpPr>
         <p:spPr>
           <a:xfrm>
-            <a:off x="731520" y="3794760"/>
-            <a:ext cx="5257800" cy="2377440"/>
+            <a:off x="731520" y="3840480"/>
+            <a:ext cx="5212080" cy="2331720"/>
           </a:xfrm>
           <a:prstGeom prst="roundRect">
             <a:avLst/>
@@ -10204,8 +10112,8 @@
         </p:nvSpPr>
         <p:spPr>
           <a:xfrm>
-            <a:off x="731520" y="3794760"/>
-            <a:ext cx="5257800" cy="365760"/>
+            <a:off x="731520" y="3840480"/>
+            <a:ext cx="5212080" cy="365760"/>
           </a:xfrm>
           <a:prstGeom prst="rect">
             <a:avLst/>
@@ -10256,8 +10164,8 @@
         </p:nvSpPr>
         <p:spPr>
           <a:xfrm>
-            <a:off x="868680" y="4206240"/>
-            <a:ext cx="4983480" cy="1920240"/>
+            <a:off x="868680" y="4251960"/>
+            <a:ext cx="4937760" cy="1874519"/>
           </a:xfrm>
           <a:prstGeom prst="rect">
             <a:avLst/>
@@ -10282,7 +10190,7 @@
                 </a:solidFill>
                 <a:latin typeface="Segoe UI"/>
               </a:rPr>
-              <a:t>• Mới chỉ đo lường phát thải trực tiếp Scope 1 và điện Scope 2.</a:t>
+              <a:t>• Mới chỉ đo lường phát thải trực tiếp Scope 1 và điện lưới Scope 2.</a:t>
             </a:r>
           </a:p>
           <a:p>
@@ -10298,7 +10206,7 @@
                 </a:solidFill>
                 <a:latin typeface="Segoe UI"/>
               </a:rPr>
-              <a:t>• Phát thải gián tiếp chuỗi cung ứng Scope 3 (chiếm 70–80% tổng lượng phát thải thực tế) gần như bị bỏ ngỏ.</a:t>
+              <a:t>• Phát thải gián tiếp chuỗi cung ứng Scope 3 (chiếm 70–80% thực tế) gần như bị bỏ ngỏ.</a:t>
             </a:r>
           </a:p>
           <a:p>
@@ -10327,8 +10235,8 @@
         </p:nvSpPr>
         <p:spPr>
           <a:xfrm>
-            <a:off x="6199632" y="3794760"/>
-            <a:ext cx="5257800" cy="2377440"/>
+            <a:off x="6245352" y="3840480"/>
+            <a:ext cx="5212080" cy="2331720"/>
           </a:xfrm>
           <a:prstGeom prst="roundRect">
             <a:avLst/>
@@ -10372,8 +10280,8 @@
         </p:nvSpPr>
         <p:spPr>
           <a:xfrm>
-            <a:off x="6199632" y="3794760"/>
-            <a:ext cx="5257800" cy="365760"/>
+            <a:off x="6245352" y="3840480"/>
+            <a:ext cx="5212080" cy="365760"/>
           </a:xfrm>
           <a:prstGeom prst="rect">
             <a:avLst/>
@@ -10424,8 +10332,8 @@
         </p:nvSpPr>
         <p:spPr>
           <a:xfrm>
-            <a:off x="6336792" y="4206240"/>
-            <a:ext cx="4983480" cy="1920240"/>
+            <a:off x="6382512" y="4251960"/>
+            <a:ext cx="4937760" cy="1874519"/>
           </a:xfrm>
           <a:prstGeom prst="rect">
             <a:avLst/>
@@ -10450,7 +10358,7 @@
                 </a:solidFill>
                 <a:latin typeface="Segoe UI"/>
               </a:rPr>
-              <a:t>• 'Gạn đục khơi trong' điển hình: Không có báo cáo nào ghi nhận tai nạn lao động nghiêm trọng hay khiếu nại khách hàng.</a:t>
+              <a:t>• 'Gạn đục khơi trong' điển hình: Không ghi nhận tai nạn lao động hay khiếu nại khách hàng.</a:t>
             </a:r>
           </a:p>
           <a:p>
@@ -10482,7 +10390,7 @@
                 </a:solidFill>
                 <a:latin typeface="Segoe UI"/>
               </a:rPr>
-              <a:t>• Báo cáo trở thành tài liệu tiếp thị thay vì công cụ quản trị rủi ro.</a:t>
+              <a:t>• Báo cáo trở thành tài liệu tiếp thị thay vì công cụ giải trình rủi ro.</a:t>
             </a:r>
           </a:p>
         </p:txBody>
@@ -10557,7 +10465,7 @@
         <p:spPr>
           <a:xfrm>
             <a:off x="0" y="0"/>
-            <a:ext cx="12191695" cy="1005840"/>
+            <a:ext cx="12191695" cy="960120"/>
           </a:xfrm>
           <a:prstGeom prst="rect">
             <a:avLst/>
@@ -10602,7 +10510,7 @@
         <p:spPr>
           <a:xfrm>
             <a:off x="0" y="0"/>
-            <a:ext cx="12191695" cy="54864"/>
+            <a:ext cx="12191695" cy="45720"/>
           </a:xfrm>
           <a:prstGeom prst="rect">
             <a:avLst/>
@@ -10644,8 +10552,8 @@
         </p:nvSpPr>
         <p:spPr>
           <a:xfrm>
-            <a:off x="731520" y="146304"/>
-            <a:ext cx="2560320" cy="256032"/>
+            <a:off x="731520" y="128016"/>
+            <a:ext cx="2560320" cy="237744"/>
           </a:xfrm>
           <a:prstGeom prst="roundRect">
             <a:avLst/>
@@ -10677,7 +10585,7 @@
           <a:p>
             <a:pPr algn="ctr"/>
             <a:r>
-              <a:rPr sz="900" b="1">
+              <a:rPr sz="850" b="1">
                 <a:solidFill>
                   <a:srgbClr val="FFFFFF"/>
                 </a:solidFill>
@@ -10696,8 +10604,8 @@
         </p:nvSpPr>
         <p:spPr>
           <a:xfrm>
-            <a:off x="685800" y="420624"/>
-            <a:ext cx="9601200" cy="530352"/>
+            <a:off x="685800" y="384048"/>
+            <a:ext cx="9601200" cy="502920"/>
           </a:xfrm>
           <a:prstGeom prst="rect">
             <a:avLst/>
@@ -10711,7 +10619,7 @@
           <a:lstStyle/>
           <a:p>
             <a:r>
-              <a:rPr sz="1700" b="1">
+              <a:rPr sz="1650" b="1">
                 <a:solidFill>
                   <a:srgbClr val="1B365D"/>
                 </a:solidFill>
@@ -10730,7 +10638,7 @@
         </p:nvSpPr>
         <p:spPr>
           <a:xfrm>
-            <a:off x="10789920" y="320040"/>
+            <a:off x="10789920" y="292608"/>
             <a:ext cx="914400" cy="457200"/>
           </a:xfrm>
           <a:prstGeom prst="rect">
@@ -10800,8 +10708,8 @@
           <p:nvPr/>
         </p:nvGraphicFramePr>
         <p:xfrm>
-          <a:off x="731520" y="1170432"/>
-          <a:ext cx="10728655" cy="5166360"/>
+          <a:off x="731520" y="1188720"/>
+          <a:ext cx="10728655" cy="5120640"/>
         </p:xfrm>
         <a:graphic>
           <a:graphicData uri="http://schemas.openxmlformats.org/drawingml/2006/table">
@@ -10815,7 +10723,7 @@
                 <a:gridCol w="3566160"/>
                 <a:gridCol w="1858975"/>
               </a:tblGrid>
-              <a:tr h="574040">
+              <a:tr h="568960">
                 <a:tc>
                   <a:txBody>
                     <a:bodyPr/>
@@ -10909,7 +10817,7 @@
                   </a:tcPr>
                 </a:tc>
               </a:tr>
-              <a:tr h="574040">
+              <a:tr h="568960">
                 <a:tc>
                   <a:txBody>
                     <a:bodyPr/>
@@ -11003,7 +10911,7 @@
                   </a:tcPr>
                 </a:tc>
               </a:tr>
-              <a:tr h="574040">
+              <a:tr h="568960">
                 <a:tc>
                   <a:txBody>
                     <a:bodyPr/>
@@ -11097,7 +11005,7 @@
                   </a:tcPr>
                 </a:tc>
               </a:tr>
-              <a:tr h="574040">
+              <a:tr h="568960">
                 <a:tc>
                   <a:txBody>
                     <a:bodyPr/>
@@ -11191,7 +11099,7 @@
                   </a:tcPr>
                 </a:tc>
               </a:tr>
-              <a:tr h="574040">
+              <a:tr h="568960">
                 <a:tc>
                   <a:txBody>
                     <a:bodyPr/>
@@ -11285,7 +11193,7 @@
                   </a:tcPr>
                 </a:tc>
               </a:tr>
-              <a:tr h="574040">
+              <a:tr h="568960">
                 <a:tc>
                   <a:txBody>
                     <a:bodyPr/>
@@ -11379,7 +11287,7 @@
                   </a:tcPr>
                 </a:tc>
               </a:tr>
-              <a:tr h="574040">
+              <a:tr h="568960">
                 <a:tc>
                   <a:txBody>
                     <a:bodyPr/>
@@ -11473,7 +11381,7 @@
                   </a:tcPr>
                 </a:tc>
               </a:tr>
-              <a:tr h="574040">
+              <a:tr h="568960">
                 <a:tc>
                   <a:txBody>
                     <a:bodyPr/>
@@ -11567,7 +11475,7 @@
                   </a:tcPr>
                 </a:tc>
               </a:tr>
-              <a:tr h="574040">
+              <a:tr h="568960">
                 <a:tc>
                   <a:txBody>
                     <a:bodyPr/>
@@ -11735,7 +11643,7 @@
         <p:spPr>
           <a:xfrm>
             <a:off x="0" y="0"/>
-            <a:ext cx="12191695" cy="1005840"/>
+            <a:ext cx="12191695" cy="960120"/>
           </a:xfrm>
           <a:prstGeom prst="rect">
             <a:avLst/>
@@ -11780,7 +11688,7 @@
         <p:spPr>
           <a:xfrm>
             <a:off x="0" y="0"/>
-            <a:ext cx="12191695" cy="54864"/>
+            <a:ext cx="12191695" cy="45720"/>
           </a:xfrm>
           <a:prstGeom prst="rect">
             <a:avLst/>
@@ -11822,8 +11730,8 @@
         </p:nvSpPr>
         <p:spPr>
           <a:xfrm>
-            <a:off x="731520" y="146304"/>
-            <a:ext cx="2560320" cy="256032"/>
+            <a:off x="731520" y="128016"/>
+            <a:ext cx="2560320" cy="237744"/>
           </a:xfrm>
           <a:prstGeom prst="roundRect">
             <a:avLst/>
@@ -11855,7 +11763,7 @@
           <a:p>
             <a:pPr algn="ctr"/>
             <a:r>
-              <a:rPr sz="900" b="1">
+              <a:rPr sz="850" b="1">
                 <a:solidFill>
                   <a:srgbClr val="FFFFFF"/>
                 </a:solidFill>
@@ -11874,8 +11782,8 @@
         </p:nvSpPr>
         <p:spPr>
           <a:xfrm>
-            <a:off x="685800" y="420624"/>
-            <a:ext cx="9601200" cy="530352"/>
+            <a:off x="685800" y="384048"/>
+            <a:ext cx="9601200" cy="502920"/>
           </a:xfrm>
           <a:prstGeom prst="rect">
             <a:avLst/>
@@ -11889,7 +11797,7 @@
           <a:lstStyle/>
           <a:p>
             <a:r>
-              <a:rPr sz="1700" b="1">
+              <a:rPr sz="1650" b="1">
                 <a:solidFill>
                   <a:srgbClr val="1B365D"/>
                 </a:solidFill>
@@ -11908,7 +11816,7 @@
         </p:nvSpPr>
         <p:spPr>
           <a:xfrm>
-            <a:off x="10789920" y="320040"/>
+            <a:off x="10789920" y="292608"/>
             <a:ext cx="914400" cy="457200"/>
           </a:xfrm>
           <a:prstGeom prst="rect">
@@ -11978,7 +11886,7 @@
         <p:spPr>
           <a:xfrm>
             <a:off x="731520" y="1234440"/>
-            <a:ext cx="3429000" cy="5166360"/>
+            <a:ext cx="3429000" cy="5029200"/>
           </a:xfrm>
           <a:prstGeom prst="roundRect">
             <a:avLst/>
@@ -12075,7 +11983,7 @@
         <p:spPr>
           <a:xfrm>
             <a:off x="868680" y="1737360"/>
-            <a:ext cx="3154680" cy="4572000"/>
+            <a:ext cx="3154680" cy="4434840"/>
           </a:xfrm>
           <a:prstGeom prst="rect">
             <a:avLst/>
@@ -12090,7 +11998,7 @@
           <a:p>
             <a:pPr>
               <a:spcAft>
-                <a:spcPts val="400"/>
+                <a:spcPts val="600"/>
               </a:spcAft>
             </a:pPr>
             <a:r>
@@ -12106,7 +12014,7 @@
           <a:p>
             <a:pPr>
               <a:spcAft>
-                <a:spcPts val="400"/>
+                <a:spcPts val="600"/>
               </a:spcAft>
             </a:pPr>
             <a:r>
@@ -12122,7 +12030,7 @@
           <a:p>
             <a:pPr>
               <a:spcAft>
-                <a:spcPts val="400"/>
+                <a:spcPts val="600"/>
               </a:spcAft>
             </a:pPr>
             <a:r>
@@ -12138,7 +12046,7 @@
           <a:p>
             <a:pPr>
               <a:spcAft>
-                <a:spcPts val="400"/>
+                <a:spcPts val="600"/>
               </a:spcAft>
             </a:pPr>
             <a:r>
@@ -12154,7 +12062,7 @@
           <a:p>
             <a:pPr>
               <a:spcAft>
-                <a:spcPts val="400"/>
+                <a:spcPts val="600"/>
               </a:spcAft>
             </a:pPr>
             <a:r>
@@ -12170,7 +12078,7 @@
           <a:p>
             <a:pPr>
               <a:spcAft>
-                <a:spcPts val="400"/>
+                <a:spcPts val="600"/>
               </a:spcAft>
             </a:pPr>
             <a:r>
@@ -12194,7 +12102,7 @@
         <p:spPr>
           <a:xfrm>
             <a:off x="4379976" y="1234440"/>
-            <a:ext cx="3429000" cy="5166360"/>
+            <a:ext cx="3429000" cy="5029200"/>
           </a:xfrm>
           <a:prstGeom prst="roundRect">
             <a:avLst/>
@@ -12291,7 +12199,7 @@
         <p:spPr>
           <a:xfrm>
             <a:off x="4517136" y="1737360"/>
-            <a:ext cx="3154680" cy="4572000"/>
+            <a:ext cx="3154680" cy="4434840"/>
           </a:xfrm>
           <a:prstGeom prst="rect">
             <a:avLst/>
@@ -12306,7 +12214,7 @@
           <a:p>
             <a:pPr>
               <a:spcAft>
-                <a:spcPts val="400"/>
+                <a:spcPts val="600"/>
               </a:spcAft>
             </a:pPr>
             <a:r>
@@ -12322,7 +12230,7 @@
           <a:p>
             <a:pPr>
               <a:spcAft>
-                <a:spcPts val="400"/>
+                <a:spcPts val="600"/>
               </a:spcAft>
             </a:pPr>
             <a:r>
@@ -12338,7 +12246,7 @@
           <a:p>
             <a:pPr>
               <a:spcAft>
-                <a:spcPts val="400"/>
+                <a:spcPts val="600"/>
               </a:spcAft>
             </a:pPr>
             <a:r>
@@ -12354,7 +12262,7 @@
           <a:p>
             <a:pPr>
               <a:spcAft>
-                <a:spcPts val="400"/>
+                <a:spcPts val="600"/>
               </a:spcAft>
             </a:pPr>
             <a:r>
@@ -12370,7 +12278,7 @@
           <a:p>
             <a:pPr>
               <a:spcAft>
-                <a:spcPts val="400"/>
+                <a:spcPts val="600"/>
               </a:spcAft>
             </a:pPr>
             <a:r>
@@ -12386,7 +12294,7 @@
           <a:p>
             <a:pPr>
               <a:spcAft>
-                <a:spcPts val="400"/>
+                <a:spcPts val="600"/>
               </a:spcAft>
             </a:pPr>
             <a:r>
@@ -12410,7 +12318,7 @@
         <p:spPr>
           <a:xfrm>
             <a:off x="8028432" y="1234440"/>
-            <a:ext cx="3429000" cy="5166360"/>
+            <a:ext cx="3429000" cy="5029200"/>
           </a:xfrm>
           <a:prstGeom prst="roundRect">
             <a:avLst/>
@@ -12507,7 +12415,7 @@
         <p:spPr>
           <a:xfrm>
             <a:off x="8165592" y="1737360"/>
-            <a:ext cx="3154680" cy="4572000"/>
+            <a:ext cx="3154680" cy="4434840"/>
           </a:xfrm>
           <a:prstGeom prst="rect">
             <a:avLst/>
@@ -12522,7 +12430,7 @@
           <a:p>
             <a:pPr>
               <a:spcAft>
-                <a:spcPts val="400"/>
+                <a:spcPts val="600"/>
               </a:spcAft>
             </a:pPr>
             <a:r>
@@ -12538,7 +12446,7 @@
           <a:p>
             <a:pPr>
               <a:spcAft>
-                <a:spcPts val="400"/>
+                <a:spcPts val="600"/>
               </a:spcAft>
             </a:pPr>
             <a:r>
@@ -12554,7 +12462,7 @@
           <a:p>
             <a:pPr>
               <a:spcAft>
-                <a:spcPts val="400"/>
+                <a:spcPts val="600"/>
               </a:spcAft>
             </a:pPr>
             <a:r>
@@ -12570,7 +12478,7 @@
           <a:p>
             <a:pPr>
               <a:spcAft>
-                <a:spcPts val="400"/>
+                <a:spcPts val="600"/>
               </a:spcAft>
             </a:pPr>
             <a:r>
@@ -12586,7 +12494,7 @@
           <a:p>
             <a:pPr>
               <a:spcAft>
-                <a:spcPts val="400"/>
+                <a:spcPts val="600"/>
               </a:spcAft>
             </a:pPr>
             <a:r>
@@ -12602,7 +12510,7 @@
           <a:p>
             <a:pPr>
               <a:spcAft>
-                <a:spcPts val="400"/>
+                <a:spcPts val="600"/>
               </a:spcAft>
             </a:pPr>
             <a:r>
@@ -12687,7 +12595,7 @@
         <p:spPr>
           <a:xfrm>
             <a:off x="0" y="0"/>
-            <a:ext cx="12191695" cy="1005840"/>
+            <a:ext cx="12191695" cy="960120"/>
           </a:xfrm>
           <a:prstGeom prst="rect">
             <a:avLst/>
@@ -12732,7 +12640,7 @@
         <p:spPr>
           <a:xfrm>
             <a:off x="0" y="0"/>
-            <a:ext cx="12191695" cy="54864"/>
+            <a:ext cx="12191695" cy="45720"/>
           </a:xfrm>
           <a:prstGeom prst="rect">
             <a:avLst/>
@@ -12774,8 +12682,8 @@
         </p:nvSpPr>
         <p:spPr>
           <a:xfrm>
-            <a:off x="731520" y="146304"/>
-            <a:ext cx="2560320" cy="256032"/>
+            <a:off x="731520" y="128016"/>
+            <a:ext cx="2560320" cy="237744"/>
           </a:xfrm>
           <a:prstGeom prst="roundRect">
             <a:avLst/>
@@ -12807,7 +12715,7 @@
           <a:p>
             <a:pPr algn="ctr"/>
             <a:r>
-              <a:rPr sz="900" b="1">
+              <a:rPr sz="850" b="1">
                 <a:solidFill>
                   <a:srgbClr val="FFFFFF"/>
                 </a:solidFill>
@@ -12826,8 +12734,8 @@
         </p:nvSpPr>
         <p:spPr>
           <a:xfrm>
-            <a:off x="685800" y="420624"/>
-            <a:ext cx="9601200" cy="530352"/>
+            <a:off x="685800" y="384048"/>
+            <a:ext cx="9601200" cy="502920"/>
           </a:xfrm>
           <a:prstGeom prst="rect">
             <a:avLst/>
@@ -12841,7 +12749,7 @@
           <a:lstStyle/>
           <a:p>
             <a:r>
-              <a:rPr sz="1700" b="1">
+              <a:rPr sz="1650" b="1">
                 <a:solidFill>
                   <a:srgbClr val="1B365D"/>
                 </a:solidFill>
@@ -12860,7 +12768,7 @@
         </p:nvSpPr>
         <p:spPr>
           <a:xfrm>
-            <a:off x="10789920" y="320040"/>
+            <a:off x="10789920" y="292608"/>
             <a:ext cx="914400" cy="457200"/>
           </a:xfrm>
           <a:prstGeom prst="rect">
@@ -12921,184 +12829,9 @@
           </a:p>
         </p:txBody>
       </p:sp>
-      <p:sp>
-        <p:nvSpPr>
-          <p:cNvPr id="9" name="Rounded Rectangle 8"/>
-          <p:cNvSpPr/>
-          <p:nvPr/>
-        </p:nvSpPr>
-        <p:spPr>
-          <a:xfrm>
-            <a:off x="731520" y="1234440"/>
-            <a:ext cx="4572000" cy="5166360"/>
-          </a:xfrm>
-          <a:prstGeom prst="roundRect">
-            <a:avLst/>
-          </a:prstGeom>
-          <a:solidFill>
-            <a:srgbClr val="FFFFFF"/>
-          </a:solidFill>
-          <a:ln w="12700">
-            <a:solidFill>
-              <a:srgbClr val="DAE0E9"/>
-            </a:solidFill>
-          </a:ln>
-        </p:spPr>
-        <p:style>
-          <a:lnRef idx="1">
-            <a:schemeClr val="accent1"/>
-          </a:lnRef>
-          <a:fillRef idx="3">
-            <a:schemeClr val="accent1"/>
-          </a:fillRef>
-          <a:effectRef idx="2">
-            <a:schemeClr val="accent1"/>
-          </a:effectRef>
-          <a:fontRef idx="minor">
-            <a:schemeClr val="lt1"/>
-          </a:fontRef>
-        </p:style>
-        <p:txBody>
-          <a:bodyPr rtlCol="0" anchor="ctr"/>
-          <a:lstStyle/>
-          <a:p>
-            <a:pPr algn="ctr"/>
-          </a:p>
-        </p:txBody>
-      </p:sp>
-      <p:sp>
-        <p:nvSpPr>
-          <p:cNvPr id="10" name="TextBox 9"/>
-          <p:cNvSpPr txBox="1"/>
-          <p:nvPr/>
-        </p:nvSpPr>
-        <p:spPr>
-          <a:xfrm>
-            <a:off x="868680" y="1371600"/>
-            <a:ext cx="4297680" cy="4892040"/>
-          </a:xfrm>
-          <a:prstGeom prst="rect">
-            <a:avLst/>
-          </a:prstGeom>
-          <a:noFill/>
-        </p:spPr>
-        <p:txBody>
-          <a:bodyPr wrap="square">
-            <a:spAutoFit/>
-          </a:bodyPr>
-          <a:lstStyle/>
-          <a:p>
-            <a:r>
-              <a:rPr b="1" sz="1100">
-                <a:solidFill>
-                  <a:srgbClr val="1B365D"/>
-                </a:solidFill>
-              </a:rPr>
-              <a:t>HẠN CHẾ HIỆN TẠI CỦA NGHIÊN CỨU
-</a:t>
-            </a:r>
-          </a:p>
-          <a:p>
-            <a:pPr>
-              <a:spcAft>
-                <a:spcPts val="300"/>
-              </a:spcAft>
-            </a:pPr>
-            <a:r>
-              <a:rPr sz="950" b="1">
-                <a:solidFill>
-                  <a:srgbClr val="1B365D"/>
-                </a:solidFill>
-                <a:latin typeface="Segoe UI"/>
-              </a:rPr>
-              <a:t>• Giới hạn quy mô mẫu:</a:t>
-            </a:r>
-          </a:p>
-          <a:p>
-            <a:pPr>
-              <a:spcAft>
-                <a:spcPts val="300"/>
-              </a:spcAft>
-            </a:pPr>
-            <a:r>
-              <a:rPr sz="880" b="0">
-                <a:solidFill>
-                  <a:srgbClr val="212529"/>
-                </a:solidFill>
-                <a:latin typeface="Segoe UI"/>
-              </a:rPr>
-              <a:t>  Mẫu 7 tập đoàn lớn hàng đầu có báo cáo liên tục; chưa bao phủ toàn bộ 300+ doanh nghiệp niêm yết trên HOSE/HNX.</a:t>
-            </a:r>
-          </a:p>
-          <a:p>
-            <a:pPr>
-              <a:spcAft>
-                <a:spcPts val="300"/>
-              </a:spcAft>
-            </a:pPr>
-            <a:r>
-              <a:rPr sz="950" b="1">
-                <a:solidFill>
-                  <a:srgbClr val="D62728"/>
-                </a:solidFill>
-                <a:latin typeface="Segoe UI"/>
-              </a:rPr>
-              <a:t>• Chưa Fact-Checking số liệu bảng biểu:</a:t>
-            </a:r>
-          </a:p>
-          <a:p>
-            <a:pPr>
-              <a:spcAft>
-                <a:spcPts val="300"/>
-              </a:spcAft>
-            </a:pPr>
-            <a:r>
-              <a:rPr sz="880" b="0">
-                <a:solidFill>
-                  <a:srgbClr val="212529"/>
-                </a:solidFill>
-                <a:latin typeface="Segoe UI"/>
-              </a:rPr>
-              <a:t>  SBERT đo lường mức độ tương đồng ngữ nghĩa văn bản, nhưng chưa thể tự động kiểm chứng chéo các số liệu định lượng trong Table.</a:t>
-            </a:r>
-          </a:p>
-          <a:p>
-            <a:pPr>
-              <a:spcAft>
-                <a:spcPts val="300"/>
-              </a:spcAft>
-            </a:pPr>
-            <a:r>
-              <a:rPr sz="950" b="1">
-                <a:solidFill>
-                  <a:srgbClr val="7030A0"/>
-                </a:solidFill>
-                <a:latin typeface="Segoe UI"/>
-              </a:rPr>
-              <a:t>• Chưa bóc tách ngữ cảnh đoạn văn rộng:</a:t>
-            </a:r>
-          </a:p>
-          <a:p>
-            <a:pPr>
-              <a:spcAft>
-                <a:spcPts val="300"/>
-              </a:spcAft>
-            </a:pPr>
-            <a:r>
-              <a:rPr sz="880" b="0">
-                <a:solidFill>
-                  <a:srgbClr val="212529"/>
-                </a:solidFill>
-                <a:latin typeface="Segoe UI"/>
-              </a:rPr>
-              <a:t>  Chunking theo câu đơn đôi khi làm mất ngữ cảnh của đoạn văn cha.</a:t>
-            </a:r>
-          </a:p>
-        </p:txBody>
-      </p:sp>
       <p:pic>
         <p:nvPicPr>
-          <p:cNvPr id="11" name="Picture 10" descr="rag_agentic_flow.png"/>
+          <p:cNvPr id="9" name="Picture 8" descr="rag_agentic_flow.png"/>
           <p:cNvPicPr>
             <a:picLocks noChangeAspect="1"/>
           </p:cNvPicPr>
@@ -13112,14 +12845,101 @@
         </p:blipFill>
         <p:spPr>
           <a:xfrm>
-            <a:off x="5486400" y="1234440"/>
-            <a:ext cx="5973775" cy="3931920"/>
+            <a:off x="731520" y="1188720"/>
+            <a:ext cx="10728655" cy="3611880"/>
           </a:xfrm>
           <a:prstGeom prst="rect">
             <a:avLst/>
           </a:prstGeom>
         </p:spPr>
       </p:pic>
+      <p:sp>
+        <p:nvSpPr>
+          <p:cNvPr id="10" name="Rounded Rectangle 9"/>
+          <p:cNvSpPr/>
+          <p:nvPr/>
+        </p:nvSpPr>
+        <p:spPr>
+          <a:xfrm>
+            <a:off x="731520" y="4983480"/>
+            <a:ext cx="3429000" cy="1280160"/>
+          </a:xfrm>
+          <a:prstGeom prst="roundRect">
+            <a:avLst/>
+          </a:prstGeom>
+          <a:solidFill>
+            <a:srgbClr val="FFFFFF"/>
+          </a:solidFill>
+          <a:ln w="12700">
+            <a:solidFill>
+              <a:srgbClr val="D62728"/>
+            </a:solidFill>
+          </a:ln>
+        </p:spPr>
+        <p:style>
+          <a:lnRef idx="1">
+            <a:schemeClr val="accent1"/>
+          </a:lnRef>
+          <a:fillRef idx="3">
+            <a:schemeClr val="accent1"/>
+          </a:fillRef>
+          <a:effectRef idx="2">
+            <a:schemeClr val="accent1"/>
+          </a:effectRef>
+          <a:fontRef idx="minor">
+            <a:schemeClr val="lt1"/>
+          </a:fontRef>
+        </p:style>
+        <p:txBody>
+          <a:bodyPr rtlCol="0" anchor="ctr"/>
+          <a:lstStyle/>
+          <a:p>
+            <a:pPr algn="ctr"/>
+          </a:p>
+        </p:txBody>
+      </p:sp>
+      <p:sp>
+        <p:nvSpPr>
+          <p:cNvPr id="11" name="TextBox 10"/>
+          <p:cNvSpPr txBox="1"/>
+          <p:nvPr/>
+        </p:nvSpPr>
+        <p:spPr>
+          <a:xfrm>
+            <a:off x="868680" y="5047488"/>
+            <a:ext cx="3154680" cy="1143000"/>
+          </a:xfrm>
+          <a:prstGeom prst="rect">
+            <a:avLst/>
+          </a:prstGeom>
+          <a:noFill/>
+        </p:spPr>
+        <p:txBody>
+          <a:bodyPr wrap="square">
+            <a:spAutoFit/>
+          </a:bodyPr>
+          <a:lstStyle/>
+          <a:p>
+            <a:r>
+              <a:rPr sz="950" b="1">
+                <a:solidFill>
+                  <a:srgbClr val="D62728"/>
+                </a:solidFill>
+              </a:rPr>
+              <a:t>HẠN CHẾ HIỆN TẠI
+</a:t>
+            </a:r>
+            <a:r>
+              <a:rPr sz="850">
+                <a:solidFill>
+                  <a:srgbClr val="212529"/>
+                </a:solidFill>
+              </a:rPr>
+              <a:t>Mẫu 7 tập đoàn; mô hình đo lường tương đồng ngữ nghĩa chứ chưa tự động Fact-checking chéo số liệu định lượng trong Table.</a:t>
+            </a:r>
+          </a:p>
+        </p:txBody>
+      </p:sp>
       <p:sp>
         <p:nvSpPr>
           <p:cNvPr id="12" name="Rounded Rectangle 11"/>
@@ -13128,14 +12948,101 @@
         </p:nvSpPr>
         <p:spPr>
           <a:xfrm>
-            <a:off x="5486400" y="5257800"/>
-            <a:ext cx="5973775" cy="1143000"/>
+            <a:off x="4379976" y="4983480"/>
+            <a:ext cx="3429000" cy="1280160"/>
           </a:xfrm>
           <a:prstGeom prst="roundRect">
             <a:avLst/>
           </a:prstGeom>
           <a:solidFill>
-            <a:srgbClr val="EEF4FC"/>
+            <a:srgbClr val="FFFFFF"/>
+          </a:solidFill>
+          <a:ln w="12700">
+            <a:solidFill>
+              <a:srgbClr val="7030A0"/>
+            </a:solidFill>
+          </a:ln>
+        </p:spPr>
+        <p:style>
+          <a:lnRef idx="1">
+            <a:schemeClr val="accent1"/>
+          </a:lnRef>
+          <a:fillRef idx="3">
+            <a:schemeClr val="accent1"/>
+          </a:fillRef>
+          <a:effectRef idx="2">
+            <a:schemeClr val="accent1"/>
+          </a:effectRef>
+          <a:fontRef idx="minor">
+            <a:schemeClr val="lt1"/>
+          </a:fontRef>
+        </p:style>
+        <p:txBody>
+          <a:bodyPr rtlCol="0" anchor="ctr"/>
+          <a:lstStyle/>
+          <a:p>
+            <a:pPr algn="ctr"/>
+          </a:p>
+        </p:txBody>
+      </p:sp>
+      <p:sp>
+        <p:nvSpPr>
+          <p:cNvPr id="13" name="TextBox 12"/>
+          <p:cNvSpPr txBox="1"/>
+          <p:nvPr/>
+        </p:nvSpPr>
+        <p:spPr>
+          <a:xfrm>
+            <a:off x="4517136" y="5047488"/>
+            <a:ext cx="3154680" cy="1143000"/>
+          </a:xfrm>
+          <a:prstGeom prst="rect">
+            <a:avLst/>
+          </a:prstGeom>
+          <a:noFill/>
+        </p:spPr>
+        <p:txBody>
+          <a:bodyPr wrap="square">
+            <a:spAutoFit/>
+          </a:bodyPr>
+          <a:lstStyle/>
+          <a:p>
+            <a:r>
+              <a:rPr sz="950" b="1">
+                <a:solidFill>
+                  <a:srgbClr val="7030A0"/>
+                </a:solidFill>
+              </a:rPr>
+              <a:t>ĐỘT PHÁ MULTI-AGENT
+</a:t>
+            </a:r>
+            <a:r>
+              <a:rPr sz="850">
+                <a:solidFill>
+                  <a:srgbClr val="212529"/>
+                </a:solidFill>
+              </a:rPr>
+              <a:t>Kế thừa pipeline Retrieval hiện tại làm nền móng sạch để tích hợp Agent bóc tách bảng số và Agent kiểm tra chéo cam kết.</a:t>
+            </a:r>
+          </a:p>
+        </p:txBody>
+      </p:sp>
+      <p:sp>
+        <p:nvSpPr>
+          <p:cNvPr id="14" name="Rounded Rectangle 13"/>
+          <p:cNvSpPr/>
+          <p:nvPr/>
+        </p:nvSpPr>
+        <p:spPr>
+          <a:xfrm>
+            <a:off x="8028432" y="4983480"/>
+            <a:ext cx="3429000" cy="1280160"/>
+          </a:xfrm>
+          <a:prstGeom prst="roundRect">
+            <a:avLst/>
+          </a:prstGeom>
+          <a:solidFill>
+            <a:srgbClr val="FFFFFF"/>
           </a:solidFill>
           <a:ln w="12700">
             <a:solidFill>
@@ -13167,14 +13074,14 @@
       </p:sp>
       <p:sp>
         <p:nvSpPr>
-          <p:cNvPr id="13" name="TextBox 12"/>
+          <p:cNvPr id="15" name="TextBox 14"/>
           <p:cNvSpPr txBox="1"/>
           <p:nvPr/>
         </p:nvSpPr>
         <p:spPr>
           <a:xfrm>
-            <a:off x="5623560" y="5321808"/>
-            <a:ext cx="5699455" cy="1005840"/>
+            <a:off x="8165592" y="5047488"/>
+            <a:ext cx="3154680" cy="1143000"/>
           </a:xfrm>
           <a:prstGeom prst="rect">
             <a:avLst/>
@@ -13188,21 +13095,21 @@
           <a:lstStyle/>
           <a:p>
             <a:r>
-              <a:rPr b="1" sz="1000">
+              <a:rPr sz="950" b="1">
                 <a:solidFill>
                   <a:srgbClr val="288C3C"/>
                 </a:solidFill>
               </a:rPr>
-              <a:t>TẦM NHÌN: HỆ THỐNG TRỢ LÝ KIỂM TOÁN AI (AGENTIC ESG AUDITOR)
+              <a:t>TẦM NHÌN SẢN PHẨM SAAS
 </a:t>
             </a:r>
             <a:r>
-              <a:rPr sz="880">
+              <a:rPr sz="850">
                 <a:solidFill>
                   <a:srgbClr val="212529"/>
                 </a:solidFill>
               </a:rPr>
-              <a:t>Kế thừa pipeline Retrieval hiện tại làm nền móng sạch để tích hợp Multi-Agent: Agent đọc bảng biểu, Agent kiểm tra chéo cam kết và LLM (GPT-4o/Gemini) xuất báo cáo thẩm định độc lập 3 trang trong 30 giây.</a:t>
+              <a:t>Tích hợp LLM (GPT-4o/Gemini) tự động xuất Báo cáo Thẩm định ESG Độc lập trong 30 giây phục vụ ngân hàng và quỹ đầu tư.</a:t>
             </a:r>
           </a:p>
         </p:txBody>
@@ -13319,8 +13226,8 @@
         </p:nvSpPr>
         <p:spPr>
           <a:xfrm>
-            <a:off x="731520" y="457200"/>
-            <a:ext cx="10728655" cy="731520"/>
+            <a:off x="731520" y="411480"/>
+            <a:ext cx="10728655" cy="685800"/>
           </a:xfrm>
           <a:prstGeom prst="rect">
             <a:avLst/>
@@ -13353,8 +13260,8 @@
         </p:nvSpPr>
         <p:spPr>
           <a:xfrm>
-            <a:off x="731520" y="1280160"/>
-            <a:ext cx="5212080" cy="1783080"/>
+            <a:off x="731520" y="1234440"/>
+            <a:ext cx="5212080" cy="1691640"/>
           </a:xfrm>
           <a:prstGeom prst="rect">
             <a:avLst/>
@@ -13398,8 +13305,8 @@
         </p:nvSpPr>
         <p:spPr>
           <a:xfrm>
-            <a:off x="731520" y="1280160"/>
-            <a:ext cx="137160" cy="1783080"/>
+            <a:off x="731520" y="1234440"/>
+            <a:ext cx="137160" cy="1691640"/>
           </a:xfrm>
           <a:prstGeom prst="rect">
             <a:avLst/>
@@ -13441,8 +13348,8 @@
         </p:nvSpPr>
         <p:spPr>
           <a:xfrm>
-            <a:off x="960120" y="1371600"/>
-            <a:ext cx="4892040" cy="1600200"/>
+            <a:off x="960120" y="1325880"/>
+            <a:ext cx="4892040" cy="1508760"/>
           </a:xfrm>
           <a:prstGeom prst="rect">
             <a:avLst/>
@@ -13456,7 +13363,7 @@
           <a:lstStyle/>
           <a:p>
             <a:r>
-              <a:rPr b="1" sz="1100">
+              <a:rPr b="1" sz="1050">
                 <a:solidFill>
                   <a:srgbClr val="D4AF37"/>
                 </a:solidFill>
@@ -13467,7 +13374,7 @@
           </a:p>
           <a:p>
             <a:pPr>
-              <a:defRPr sz="980">
+              <a:defRPr sz="919">
                 <a:solidFill>
                   <a:srgbClr val="E1EBFA"/>
                 </a:solidFill>
@@ -13487,8 +13394,8 @@
         </p:nvSpPr>
         <p:spPr>
           <a:xfrm>
-            <a:off x="6245352" y="1280160"/>
-            <a:ext cx="5212080" cy="1783080"/>
+            <a:off x="6245352" y="1234440"/>
+            <a:ext cx="5212080" cy="1691640"/>
           </a:xfrm>
           <a:prstGeom prst="rect">
             <a:avLst/>
@@ -13532,8 +13439,8 @@
         </p:nvSpPr>
         <p:spPr>
           <a:xfrm>
-            <a:off x="6245352" y="1280160"/>
-            <a:ext cx="137160" cy="1783080"/>
+            <a:off x="6245352" y="1234440"/>
+            <a:ext cx="137160" cy="1691640"/>
           </a:xfrm>
           <a:prstGeom prst="rect">
             <a:avLst/>
@@ -13575,8 +13482,8 @@
         </p:nvSpPr>
         <p:spPr>
           <a:xfrm>
-            <a:off x="6473952" y="1371600"/>
-            <a:ext cx="4892040" cy="1600200"/>
+            <a:off x="6473952" y="1325880"/>
+            <a:ext cx="4892040" cy="1508760"/>
           </a:xfrm>
           <a:prstGeom prst="rect">
             <a:avLst/>
@@ -13590,7 +13497,7 @@
           <a:lstStyle/>
           <a:p>
             <a:r>
-              <a:rPr b="1" sz="1100">
+              <a:rPr b="1" sz="1050">
                 <a:solidFill>
                   <a:srgbClr val="D4AF37"/>
                 </a:solidFill>
@@ -13601,7 +13508,7 @@
           </a:p>
           <a:p>
             <a:pPr>
-              <a:defRPr sz="980">
+              <a:defRPr sz="919">
                 <a:solidFill>
                   <a:srgbClr val="E1EBFA"/>
                 </a:solidFill>
@@ -13621,8 +13528,8 @@
         </p:nvSpPr>
         <p:spPr>
           <a:xfrm>
-            <a:off x="731520" y="3246120"/>
-            <a:ext cx="5212080" cy="1783080"/>
+            <a:off x="731520" y="3154680"/>
+            <a:ext cx="5212080" cy="1691640"/>
           </a:xfrm>
           <a:prstGeom prst="rect">
             <a:avLst/>
@@ -13666,8 +13573,8 @@
         </p:nvSpPr>
         <p:spPr>
           <a:xfrm>
-            <a:off x="731520" y="3246120"/>
-            <a:ext cx="137160" cy="1783080"/>
+            <a:off x="731520" y="3154680"/>
+            <a:ext cx="137160" cy="1691640"/>
           </a:xfrm>
           <a:prstGeom prst="rect">
             <a:avLst/>
@@ -13709,8 +13616,8 @@
         </p:nvSpPr>
         <p:spPr>
           <a:xfrm>
-            <a:off x="960120" y="3337560"/>
-            <a:ext cx="4892040" cy="1600200"/>
+            <a:off x="960120" y="3246120"/>
+            <a:ext cx="4892040" cy="1508760"/>
           </a:xfrm>
           <a:prstGeom prst="rect">
             <a:avLst/>
@@ -13724,7 +13631,7 @@
           <a:lstStyle/>
           <a:p>
             <a:r>
-              <a:rPr b="1" sz="1100">
+              <a:rPr b="1" sz="1050">
                 <a:solidFill>
                   <a:srgbClr val="D4AF37"/>
                 </a:solidFill>
@@ -13735,7 +13642,7 @@
           </a:p>
           <a:p>
             <a:pPr>
-              <a:defRPr sz="980">
+              <a:defRPr sz="919">
                 <a:solidFill>
                   <a:srgbClr val="E1EBFA"/>
                 </a:solidFill>
@@ -13755,8 +13662,8 @@
         </p:nvSpPr>
         <p:spPr>
           <a:xfrm>
-            <a:off x="6245352" y="3246120"/>
-            <a:ext cx="5212080" cy="1783080"/>
+            <a:off x="6245352" y="3154680"/>
+            <a:ext cx="5212080" cy="1691640"/>
           </a:xfrm>
           <a:prstGeom prst="rect">
             <a:avLst/>
@@ -13800,8 +13707,8 @@
         </p:nvSpPr>
         <p:spPr>
           <a:xfrm>
-            <a:off x="6245352" y="3246120"/>
-            <a:ext cx="137160" cy="1783080"/>
+            <a:off x="6245352" y="3154680"/>
+            <a:ext cx="137160" cy="1691640"/>
           </a:xfrm>
           <a:prstGeom prst="rect">
             <a:avLst/>
@@ -13843,8 +13750,8 @@
         </p:nvSpPr>
         <p:spPr>
           <a:xfrm>
-            <a:off x="6473952" y="3337560"/>
-            <a:ext cx="4892040" cy="1600200"/>
+            <a:off x="6473952" y="3246120"/>
+            <a:ext cx="4892040" cy="1508760"/>
           </a:xfrm>
           <a:prstGeom prst="rect">
             <a:avLst/>
@@ -13858,7 +13765,7 @@
           <a:lstStyle/>
           <a:p>
             <a:r>
-              <a:rPr b="1" sz="1100">
+              <a:rPr b="1" sz="1050">
                 <a:solidFill>
                   <a:srgbClr val="D4AF37"/>
                 </a:solidFill>
@@ -13869,7 +13776,7 @@
           </a:p>
           <a:p>
             <a:pPr>
-              <a:defRPr sz="980">
+              <a:defRPr sz="919">
                 <a:solidFill>
                   <a:srgbClr val="E1EBFA"/>
                 </a:solidFill>
@@ -13889,8 +13796,8 @@
         </p:nvSpPr>
         <p:spPr>
           <a:xfrm>
-            <a:off x="731520" y="5212080"/>
-            <a:ext cx="10728655" cy="1188720"/>
+            <a:off x="731520" y="5074920"/>
+            <a:ext cx="10728655" cy="1234440"/>
           </a:xfrm>
           <a:prstGeom prst="rect">
             <a:avLst/>
@@ -13934,7 +13841,7 @@
         </p:nvSpPr>
         <p:spPr>
           <a:xfrm>
-            <a:off x="914400" y="5257800"/>
+            <a:off x="914400" y="5138928"/>
             <a:ext cx="10362895" cy="1097280"/>
           </a:xfrm>
           <a:prstGeom prst="rect">
@@ -13950,7 +13857,7 @@
           <a:p>
             <a:pPr algn="ctr"/>
             <a:r>
-              <a:rPr sz="1500" b="1">
+              <a:rPr sz="1450" b="1">
                 <a:solidFill>
                   <a:srgbClr val="D4AF37"/>
                 </a:solidFill>
@@ -13963,7 +13870,7 @@
           <a:p>
             <a:pPr algn="ctr"/>
             <a:r>
-              <a:rPr sz="1100" i="1">
+              <a:rPr sz="1050" i="1">
                 <a:solidFill>
                   <a:srgbClr val="FFFFFF"/>
                 </a:solidFill>
@@ -14045,7 +13952,7 @@
         <p:spPr>
           <a:xfrm>
             <a:off x="0" y="0"/>
-            <a:ext cx="12191695" cy="1005840"/>
+            <a:ext cx="12191695" cy="960120"/>
           </a:xfrm>
           <a:prstGeom prst="rect">
             <a:avLst/>
@@ -14090,7 +13997,7 @@
         <p:spPr>
           <a:xfrm>
             <a:off x="0" y="0"/>
-            <a:ext cx="12191695" cy="54864"/>
+            <a:ext cx="12191695" cy="45720"/>
           </a:xfrm>
           <a:prstGeom prst="rect">
             <a:avLst/>
@@ -14132,8 +14039,8 @@
         </p:nvSpPr>
         <p:spPr>
           <a:xfrm>
-            <a:off x="731520" y="146304"/>
-            <a:ext cx="2560320" cy="256032"/>
+            <a:off x="731520" y="128016"/>
+            <a:ext cx="2560320" cy="237744"/>
           </a:xfrm>
           <a:prstGeom prst="roundRect">
             <a:avLst/>
@@ -14165,7 +14072,7 @@
           <a:p>
             <a:pPr algn="ctr"/>
             <a:r>
-              <a:rPr sz="900" b="1">
+              <a:rPr sz="850" b="1">
                 <a:solidFill>
                   <a:srgbClr val="FFFFFF"/>
                 </a:solidFill>
@@ -14184,8 +14091,8 @@
         </p:nvSpPr>
         <p:spPr>
           <a:xfrm>
-            <a:off x="685800" y="420624"/>
-            <a:ext cx="9601200" cy="530352"/>
+            <a:off x="685800" y="384048"/>
+            <a:ext cx="9601200" cy="502920"/>
           </a:xfrm>
           <a:prstGeom prst="rect">
             <a:avLst/>
@@ -14199,7 +14106,7 @@
           <a:lstStyle/>
           <a:p>
             <a:r>
-              <a:rPr sz="1700" b="1">
+              <a:rPr sz="1650" b="1">
                 <a:solidFill>
                   <a:srgbClr val="1B365D"/>
                 </a:solidFill>
@@ -14218,7 +14125,7 @@
         </p:nvSpPr>
         <p:spPr>
           <a:xfrm>
-            <a:off x="10789920" y="320040"/>
+            <a:off x="10789920" y="292608"/>
             <a:ext cx="914400" cy="457200"/>
           </a:xfrm>
           <a:prstGeom prst="rect">
@@ -14288,7 +14195,7 @@
         <p:spPr>
           <a:xfrm>
             <a:off x="731520" y="1234440"/>
-            <a:ext cx="3429000" cy="3840480"/>
+            <a:ext cx="3429000" cy="3749039"/>
           </a:xfrm>
           <a:prstGeom prst="roundRect">
             <a:avLst/>
@@ -14365,7 +14272,7 @@
           <a:p>
             <a:pPr algn="ctr"/>
             <a:r>
-              <a:rPr sz="1050" b="1">
+              <a:rPr sz="1000" b="1">
                 <a:solidFill>
                   <a:srgbClr val="FFFFFF"/>
                 </a:solidFill>
@@ -14385,7 +14292,7 @@
         <p:spPr>
           <a:xfrm>
             <a:off x="868680" y="1737360"/>
-            <a:ext cx="3154680" cy="3246120"/>
+            <a:ext cx="3154680" cy="3154679"/>
           </a:xfrm>
           <a:prstGeom prst="rect">
             <a:avLst/>
@@ -14400,49 +14307,97 @@
           <a:p>
             <a:pPr>
               <a:spcAft>
-                <a:spcPts val="600"/>
+                <a:spcPts val="400"/>
               </a:spcAft>
             </a:pPr>
             <a:r>
-              <a:rPr sz="950">
-                <a:solidFill>
-                  <a:srgbClr val="212529"/>
-                </a:solidFill>
-                <a:latin typeface="Segoe UI"/>
-              </a:rPr>
-              <a:t>• Cam kết COP26 &amp; Net Zero 2050: Định hình chiến lược chuyển dịch xanh quốc gia.</a:t>
+              <a:rPr b="1" sz="950">
+                <a:solidFill>
+                  <a:srgbClr val="1B365D"/>
+                </a:solidFill>
+                <a:latin typeface="Segoe UI"/>
+              </a:rPr>
+              <a:t>• Cam kết COP26 Net Zero 2050:</a:t>
             </a:r>
           </a:p>
           <a:p>
             <a:pPr>
               <a:spcAft>
-                <a:spcPts val="600"/>
+                <a:spcPts val="400"/>
               </a:spcAft>
             </a:pPr>
             <a:r>
-              <a:rPr sz="950">
+              <a:rPr sz="900">
                 <a:solidFill>
                   <a:srgbClr val="212529"/>
                 </a:solidFill>
                 <a:latin typeface="Segoe UI"/>
               </a:rPr>
-              <a:t>• Thông tư 96/2020/TT-BTC: Bắt buộc công bố thông tin môi trường &amp; xã hội trên TTCK.</a:t>
+              <a:t>  Định hình chiến lược chuyển dịch xanh quốc gia của Chính phủ.</a:t>
             </a:r>
           </a:p>
           <a:p>
             <a:pPr>
               <a:spcAft>
-                <a:spcPts val="600"/>
+                <a:spcPts val="400"/>
               </a:spcAft>
             </a:pPr>
             <a:r>
-              <a:rPr sz="950">
+              <a:rPr b="1" sz="950">
+                <a:solidFill>
+                  <a:srgbClr val="1B365D"/>
+                </a:solidFill>
+                <a:latin typeface="Segoe UI"/>
+              </a:rPr>
+              <a:t>• Thông tư 96/2020/TT-BTC:</a:t>
+            </a:r>
+          </a:p>
+          <a:p>
+            <a:pPr>
+              <a:spcAft>
+                <a:spcPts val="400"/>
+              </a:spcAft>
+            </a:pPr>
+            <a:r>
+              <a:rPr sz="900">
                 <a:solidFill>
                   <a:srgbClr val="212529"/>
                 </a:solidFill>
                 <a:latin typeface="Segoe UI"/>
               </a:rPr>
-              <a:t>• Khung CSI &amp; UBCKNN: Tiêu chuẩn hóa các chỉ số phát triển bền vững.</a:t>
+              <a:t>  Bắt buộc công bố thông tin môi trường và xã hội trên TTCK.</a:t>
+            </a:r>
+          </a:p>
+          <a:p>
+            <a:pPr>
+              <a:spcAft>
+                <a:spcPts val="400"/>
+              </a:spcAft>
+            </a:pPr>
+            <a:r>
+              <a:rPr b="1" sz="950">
+                <a:solidFill>
+                  <a:srgbClr val="1B365D"/>
+                </a:solidFill>
+                <a:latin typeface="Segoe UI"/>
+              </a:rPr>
+              <a:t>• Khung CSI &amp; UBCKNN:</a:t>
+            </a:r>
+          </a:p>
+          <a:p>
+            <a:pPr>
+              <a:spcAft>
+                <a:spcPts val="400"/>
+              </a:spcAft>
+            </a:pPr>
+            <a:r>
+              <a:rPr sz="900">
+                <a:solidFill>
+                  <a:srgbClr val="212529"/>
+                </a:solidFill>
+                <a:latin typeface="Segoe UI"/>
+              </a:rPr>
+              <a:t>  Tiêu chuẩn hóa bộ chỉ số thực hành bền vững.</a:t>
             </a:r>
           </a:p>
         </p:txBody>
@@ -14456,7 +14411,7 @@
         <p:spPr>
           <a:xfrm>
             <a:off x="4379976" y="1234440"/>
-            <a:ext cx="3429000" cy="3840480"/>
+            <a:ext cx="3429000" cy="3749039"/>
           </a:xfrm>
           <a:prstGeom prst="roundRect">
             <a:avLst/>
@@ -14533,7 +14488,7 @@
           <a:p>
             <a:pPr algn="ctr"/>
             <a:r>
-              <a:rPr sz="1050" b="1">
+              <a:rPr sz="1000" b="1">
                 <a:solidFill>
                   <a:srgbClr val="FFFFFF"/>
                 </a:solidFill>
@@ -14553,7 +14508,7 @@
         <p:spPr>
           <a:xfrm>
             <a:off x="4517136" y="1737360"/>
-            <a:ext cx="3154680" cy="3246120"/>
+            <a:ext cx="3154680" cy="3154679"/>
           </a:xfrm>
           <a:prstGeom prst="rect">
             <a:avLst/>
@@ -14568,49 +14523,97 @@
           <a:p>
             <a:pPr>
               <a:spcAft>
-                <a:spcPts val="600"/>
+                <a:spcPts val="400"/>
               </a:spcAft>
             </a:pPr>
             <a:r>
-              <a:rPr sz="950">
-                <a:solidFill>
-                  <a:srgbClr val="212529"/>
-                </a:solidFill>
-                <a:latin typeface="Segoe UI"/>
-              </a:rPr>
-              <a:t>• Bùng nổ văn bản: Trung bình 100–200 trang/báo cáo, ngôn ngữ tự do phi cấu trúc.</a:t>
+              <a:rPr b="1" sz="950">
+                <a:solidFill>
+                  <a:srgbClr val="D62728"/>
+                </a:solidFill>
+                <a:latin typeface="Segoe UI"/>
+              </a:rPr>
+              <a:t>• Bùng nổ văn bản tự do:</a:t>
             </a:r>
           </a:p>
           <a:p>
             <a:pPr>
               <a:spcAft>
-                <a:spcPts val="600"/>
+                <a:spcPts val="400"/>
               </a:spcAft>
             </a:pPr>
             <a:r>
-              <a:rPr sz="950">
+              <a:rPr sz="900">
                 <a:solidFill>
                   <a:srgbClr val="212529"/>
                 </a:solidFill>
                 <a:latin typeface="Segoe UI"/>
               </a:rPr>
-              <a:t>• Quá tải giám sát thủ công: Không đủ nguồn lực đọc và thẩm tra định tính từng câu.</a:t>
+              <a:t>  Trung bình 100–200 trang/báo cáo, ngôn ngữ tự do phi cấu trúc.</a:t>
             </a:r>
           </a:p>
           <a:p>
             <a:pPr>
               <a:spcAft>
-                <a:spcPts val="600"/>
+                <a:spcPts val="400"/>
               </a:spcAft>
             </a:pPr>
             <a:r>
-              <a:rPr sz="950">
+              <a:rPr b="1" sz="950">
+                <a:solidFill>
+                  <a:srgbClr val="D62728"/>
+                </a:solidFill>
+                <a:latin typeface="Segoe UI"/>
+              </a:rPr>
+              <a:t>• Quá tải giám sát thủ công:</a:t>
+            </a:r>
+          </a:p>
+          <a:p>
+            <a:pPr>
+              <a:spcAft>
+                <a:spcPts val="400"/>
+              </a:spcAft>
+            </a:pPr>
+            <a:r>
+              <a:rPr sz="900">
                 <a:solidFill>
                   <a:srgbClr val="212529"/>
                 </a:solidFill>
                 <a:latin typeface="Segoe UI"/>
               </a:rPr>
-              <a:t>• Rủi ro Quản trị Ấn tượng: Doanh nghiệp có xu hướng tô hồng thành tích, che giấu rủi ro.</a:t>
+              <a:t>  Không đủ nguồn lực đọc và thẩm tra định tính từng câu chữ.</a:t>
+            </a:r>
+          </a:p>
+          <a:p>
+            <a:pPr>
+              <a:spcAft>
+                <a:spcPts val="400"/>
+              </a:spcAft>
+            </a:pPr>
+            <a:r>
+              <a:rPr b="1" sz="950">
+                <a:solidFill>
+                  <a:srgbClr val="D62728"/>
+                </a:solidFill>
+                <a:latin typeface="Segoe UI"/>
+              </a:rPr>
+              <a:t>• Nguy cơ Quản trị Ấn tượng:</a:t>
+            </a:r>
+          </a:p>
+          <a:p>
+            <a:pPr>
+              <a:spcAft>
+                <a:spcPts val="400"/>
+              </a:spcAft>
+            </a:pPr>
+            <a:r>
+              <a:rPr sz="900">
+                <a:solidFill>
+                  <a:srgbClr val="212529"/>
+                </a:solidFill>
+                <a:latin typeface="Segoe UI"/>
+              </a:rPr>
+              <a:t>  Xu hướng tô hồng thành tích, giấu nhẹm rủi ro và sự cố vi phạm.</a:t>
             </a:r>
           </a:p>
         </p:txBody>
@@ -14624,7 +14627,7 @@
         <p:spPr>
           <a:xfrm>
             <a:off x="8028432" y="1234440"/>
-            <a:ext cx="3429000" cy="3840480"/>
+            <a:ext cx="3429000" cy="3749039"/>
           </a:xfrm>
           <a:prstGeom prst="roundRect">
             <a:avLst/>
@@ -14701,7 +14704,7 @@
           <a:p>
             <a:pPr algn="ctr"/>
             <a:r>
-              <a:rPr sz="1050" b="1">
+              <a:rPr sz="1000" b="1">
                 <a:solidFill>
                   <a:srgbClr val="FFFFFF"/>
                 </a:solidFill>
@@ -14721,7 +14724,7 @@
         <p:spPr>
           <a:xfrm>
             <a:off x="8165592" y="1737360"/>
-            <a:ext cx="3154680" cy="3246120"/>
+            <a:ext cx="3154680" cy="3154679"/>
           </a:xfrm>
           <a:prstGeom prst="rect">
             <a:avLst/>
@@ -14736,49 +14739,97 @@
           <a:p>
             <a:pPr>
               <a:spcAft>
-                <a:spcPts val="600"/>
+                <a:spcPts val="400"/>
               </a:spcAft>
             </a:pPr>
             <a:r>
-              <a:rPr sz="950">
-                <a:solidFill>
-                  <a:srgbClr val="212529"/>
-                </a:solidFill>
-                <a:latin typeface="Segoe UI"/>
-              </a:rPr>
-              <a:t>• Tự động hóa định lượng: Đọc hiểu 96.461 câu trong vài giây, loại bỏ cảm tính.</a:t>
+              <a:rPr b="1" sz="950">
+                <a:solidFill>
+                  <a:srgbClr val="288C3C"/>
+                </a:solidFill>
+                <a:latin typeface="Segoe UI"/>
+              </a:rPr>
+              <a:t>• Tự động hóa định lượng:</a:t>
             </a:r>
           </a:p>
           <a:p>
             <a:pPr>
               <a:spcAft>
-                <a:spcPts val="600"/>
+                <a:spcPts val="400"/>
               </a:spcAft>
             </a:pPr>
             <a:r>
-              <a:rPr sz="950">
+              <a:rPr sz="900">
                 <a:solidFill>
                   <a:srgbClr val="212529"/>
                 </a:solidFill>
                 <a:latin typeface="Segoe UI"/>
               </a:rPr>
-              <a:t>• Đo lường chuẩn hóa 17 SDGs: Ánh xạ ngữ nghĩa vector SBERT vào 169 mục tiêu LHQ.</a:t>
+              <a:t>  Đọc hiểu 96.461 câu văn bản trong vài giây, loại bỏ cảm tính.</a:t>
             </a:r>
           </a:p>
           <a:p>
             <a:pPr>
               <a:spcAft>
-                <a:spcPts val="600"/>
+                <a:spcPts val="400"/>
               </a:spcAft>
             </a:pPr>
             <a:r>
-              <a:rPr sz="950">
+              <a:rPr b="1" sz="950">
+                <a:solidFill>
+                  <a:srgbClr val="288C3C"/>
+                </a:solidFill>
+                <a:latin typeface="Segoe UI"/>
+              </a:rPr>
+              <a:t>• Đo lường chuẩn hóa 17 SDGs:</a:t>
+            </a:r>
+          </a:p>
+          <a:p>
+            <a:pPr>
+              <a:spcAft>
+                <a:spcPts val="400"/>
+              </a:spcAft>
+            </a:pPr>
+            <a:r>
+              <a:rPr sz="900">
                 <a:solidFill>
                   <a:srgbClr val="212529"/>
                 </a:solidFill>
                 <a:latin typeface="Segoe UI"/>
               </a:rPr>
-              <a:t>• Nhận diện cảm xúc khách quan: PhoBERT 3 lớp nhận diện thiên lệch lạc quan.</a:t>
+              <a:t>  Ánh xạ ngữ nghĩa vector SBERT vào 169 mục tiêu của LHQ.</a:t>
+            </a:r>
+          </a:p>
+          <a:p>
+            <a:pPr>
+              <a:spcAft>
+                <a:spcPts val="400"/>
+              </a:spcAft>
+            </a:pPr>
+            <a:r>
+              <a:rPr b="1" sz="950">
+                <a:solidFill>
+                  <a:srgbClr val="288C3C"/>
+                </a:solidFill>
+                <a:latin typeface="Segoe UI"/>
+              </a:rPr>
+              <a:t>• Nhận diện cảm xúc khách quan:</a:t>
+            </a:r>
+          </a:p>
+          <a:p>
+            <a:pPr>
+              <a:spcAft>
+                <a:spcPts val="400"/>
+              </a:spcAft>
+            </a:pPr>
+            <a:r>
+              <a:rPr sz="900">
+                <a:solidFill>
+                  <a:srgbClr val="212529"/>
+                </a:solidFill>
+                <a:latin typeface="Segoe UI"/>
+              </a:rPr>
+              <a:t>  PhoBERT 3 lớp nhận diện thiên lệch lạc quan và quản trị ấn tượng.</a:t>
             </a:r>
           </a:p>
         </p:txBody>
@@ -14791,7 +14842,7 @@
         </p:nvSpPr>
         <p:spPr>
           <a:xfrm>
-            <a:off x="731520" y="5257800"/>
+            <a:off x="731520" y="5166360"/>
             <a:ext cx="10728655" cy="1143000"/>
           </a:xfrm>
           <a:prstGeom prst="roundRect">
@@ -14836,7 +14887,7 @@
         </p:nvSpPr>
         <p:spPr>
           <a:xfrm>
-            <a:off x="868680" y="5321808"/>
+            <a:off x="868680" y="5230368"/>
             <a:ext cx="2560320" cy="1005840"/>
           </a:xfrm>
           <a:prstGeom prst="rect">
@@ -14887,7 +14938,7 @@
         </p:nvSpPr>
         <p:spPr>
           <a:xfrm>
-            <a:off x="3520439" y="5321808"/>
+            <a:off x="3520439" y="5230368"/>
             <a:ext cx="2560320" cy="1005840"/>
           </a:xfrm>
           <a:prstGeom prst="rect">
@@ -14938,7 +14989,7 @@
         </p:nvSpPr>
         <p:spPr>
           <a:xfrm>
-            <a:off x="6172200" y="5321808"/>
+            <a:off x="6172200" y="5230368"/>
             <a:ext cx="2560320" cy="1005840"/>
           </a:xfrm>
           <a:prstGeom prst="rect">
@@ -14989,7 +15040,7 @@
         </p:nvSpPr>
         <p:spPr>
           <a:xfrm>
-            <a:off x="8823959" y="5321808"/>
+            <a:off x="8823959" y="5230368"/>
             <a:ext cx="2560320" cy="1005840"/>
           </a:xfrm>
           <a:prstGeom prst="rect">
@@ -15102,7 +15153,7 @@
         <p:spPr>
           <a:xfrm>
             <a:off x="0" y="0"/>
-            <a:ext cx="12191695" cy="1005840"/>
+            <a:ext cx="12191695" cy="960120"/>
           </a:xfrm>
           <a:prstGeom prst="rect">
             <a:avLst/>
@@ -15147,7 +15198,7 @@
         <p:spPr>
           <a:xfrm>
             <a:off x="0" y="0"/>
-            <a:ext cx="12191695" cy="54864"/>
+            <a:ext cx="12191695" cy="45720"/>
           </a:xfrm>
           <a:prstGeom prst="rect">
             <a:avLst/>
@@ -15189,8 +15240,8 @@
         </p:nvSpPr>
         <p:spPr>
           <a:xfrm>
-            <a:off x="731520" y="146304"/>
-            <a:ext cx="2560320" cy="256032"/>
+            <a:off x="731520" y="128016"/>
+            <a:ext cx="2560320" cy="237744"/>
           </a:xfrm>
           <a:prstGeom prst="roundRect">
             <a:avLst/>
@@ -15222,7 +15273,7 @@
           <a:p>
             <a:pPr algn="ctr"/>
             <a:r>
-              <a:rPr sz="900" b="1">
+              <a:rPr sz="850" b="1">
                 <a:solidFill>
                   <a:srgbClr val="FFFFFF"/>
                 </a:solidFill>
@@ -15241,8 +15292,8 @@
         </p:nvSpPr>
         <p:spPr>
           <a:xfrm>
-            <a:off x="685800" y="420624"/>
-            <a:ext cx="9601200" cy="530352"/>
+            <a:off x="685800" y="384048"/>
+            <a:ext cx="9601200" cy="502920"/>
           </a:xfrm>
           <a:prstGeom prst="rect">
             <a:avLst/>
@@ -15256,7 +15307,7 @@
           <a:lstStyle/>
           <a:p>
             <a:r>
-              <a:rPr sz="1700" b="1">
+              <a:rPr sz="1650" b="1">
                 <a:solidFill>
                   <a:srgbClr val="1B365D"/>
                 </a:solidFill>
@@ -15275,7 +15326,7 @@
         </p:nvSpPr>
         <p:spPr>
           <a:xfrm>
-            <a:off x="10789920" y="320040"/>
+            <a:off x="10789920" y="292608"/>
             <a:ext cx="914400" cy="457200"/>
           </a:xfrm>
           <a:prstGeom prst="rect">
@@ -15352,8 +15403,8 @@
         </p:blipFill>
         <p:spPr>
           <a:xfrm>
-            <a:off x="731520" y="1143000"/>
-            <a:ext cx="10728655" cy="3611880"/>
+            <a:off x="731520" y="1188720"/>
+            <a:ext cx="10728655" cy="3383280"/>
           </a:xfrm>
           <a:prstGeom prst="rect">
             <a:avLst/>
@@ -15368,8 +15419,8 @@
         </p:nvSpPr>
         <p:spPr>
           <a:xfrm>
-            <a:off x="731520" y="4892040"/>
-            <a:ext cx="2560320" cy="1508760"/>
+            <a:off x="731520" y="4800600"/>
+            <a:ext cx="2560320" cy="1417320"/>
           </a:xfrm>
           <a:prstGeom prst="roundRect">
             <a:avLst/>
@@ -15413,8 +15464,8 @@
         </p:nvSpPr>
         <p:spPr>
           <a:xfrm>
-            <a:off x="841248" y="4956048"/>
-            <a:ext cx="2340863" cy="1371600"/>
+            <a:off x="841248" y="4864608"/>
+            <a:ext cx="2340863" cy="1280160"/>
           </a:xfrm>
           <a:prstGeom prst="rect">
             <a:avLst/>
@@ -15433,16 +15484,25 @@
                   <a:srgbClr val="1B365D"/>
                 </a:solidFill>
               </a:rPr>
-              <a:t>1. RÀO CẢN ĐƠN NGỮ TIẾNG ANH
+              <a:t>1. RÀO CẢN ĐƠN NGỮ
 </a:t>
             </a:r>
             <a:r>
-              <a:rPr sz="819">
+              <a:rPr sz="1100" b="1">
+                <a:solidFill>
+                  <a:srgbClr val="1B365D"/>
+                </a:solidFill>
+              </a:rPr>
+              <a:t>vietnamese-sbert (768-d)
+</a:t>
+            </a:r>
+            <a:r>
+              <a:rPr sz="800">
                 <a:solidFill>
                   <a:srgbClr val="212529"/>
                 </a:solidFill>
               </a:rPr>
-              <a:t>Paper gốc chỉ chạy tiếng Anh -&gt; Đề tài xây dựng pipeline đa ngữ vietnamese-sbert (768-d) + Ngữ liệu 1.032 câu chuẩn.</a:t>
+              <a:t>Khắc phục đơn ngữ tiếng Anh, mở rộng cho 96k câu tiếng Việt</a:t>
             </a:r>
           </a:p>
         </p:txBody>
@@ -15455,8 +15515,8 @@
         </p:nvSpPr>
         <p:spPr>
           <a:xfrm>
-            <a:off x="3456432" y="4892040"/>
-            <a:ext cx="2560320" cy="1508760"/>
+            <a:off x="3456432" y="4800600"/>
+            <a:ext cx="2560320" cy="1417320"/>
           </a:xfrm>
           <a:prstGeom prst="roundRect">
             <a:avLst/>
@@ -15500,8 +15560,8 @@
         </p:nvSpPr>
         <p:spPr>
           <a:xfrm>
-            <a:off x="3566160" y="4956048"/>
-            <a:ext cx="2340863" cy="1371600"/>
+            <a:off x="3566160" y="4864608"/>
+            <a:ext cx="2340863" cy="1280160"/>
           </a:xfrm>
           <a:prstGeom prst="rect">
             <a:avLst/>
@@ -15520,16 +15580,25 @@
                   <a:srgbClr val="1F77B4"/>
                 </a:solidFill>
               </a:rPr>
-              <a:t>2. BỎ QUA TỆP SCAN HÌNH ẢNH
+              <a:t>2. TỆP SCAN HÌNH ẢNH
 </a:t>
             </a:r>
             <a:r>
-              <a:rPr sz="819">
+              <a:rPr sz="1100" b="1">
+                <a:solidFill>
+                  <a:srgbClr val="1B365D"/>
+                </a:solidFill>
+              </a:rPr>
+              <a:t>Tesseract OCR (vie+eng)
+</a:t>
+            </a:r>
+            <a:r>
+              <a:rPr sz="800">
                 <a:solidFill>
                   <a:srgbClr val="212529"/>
                 </a:solidFill>
               </a:rPr>
-              <a:t>Paper gốc loại bỏ PDF scan -&gt; Đề tài tích hợp Tesseract OCR (vie+eng) phục hồi 100% dữ liệu (như PNJ 2022).</a:t>
+              <a:t>Khôi phục 100% tài liệu scan phức tạp mà bài gốc bỏ qua</a:t>
             </a:r>
           </a:p>
         </p:txBody>
@@ -15542,8 +15611,8 @@
         </p:nvSpPr>
         <p:spPr>
           <a:xfrm>
-            <a:off x="6181344" y="4892040"/>
-            <a:ext cx="2560320" cy="1508760"/>
+            <a:off x="6181344" y="4800600"/>
+            <a:ext cx="2560320" cy="1417320"/>
           </a:xfrm>
           <a:prstGeom prst="roundRect">
             <a:avLst/>
@@ -15587,8 +15656,8 @@
         </p:nvSpPr>
         <p:spPr>
           <a:xfrm>
-            <a:off x="6291072" y="4956048"/>
-            <a:ext cx="2340863" cy="1371600"/>
+            <a:off x="6291072" y="4864608"/>
+            <a:ext cx="2340863" cy="1280160"/>
           </a:xfrm>
           <a:prstGeom prst="rect">
             <a:avLst/>
@@ -15607,16 +15676,25 @@
                   <a:srgbClr val="288C3C"/>
                 </a:solidFill>
               </a:rPr>
-              <a:t>3. CẢM XÚC 2 LỚP GƯỢNG ÉP
+              <a:t>3. MÔ HÌNH CẢM XÚC
 </a:t>
             </a:r>
             <a:r>
-              <a:rPr sz="819">
+              <a:rPr sz="1100" b="1">
+                <a:solidFill>
+                  <a:srgbClr val="1B365D"/>
+                </a:solidFill>
+              </a:rPr>
+              <a:t>PhoBERT 3 Lớp (Trung tính 32,9%)
+</a:t>
+            </a:r>
+            <a:r>
+              <a:rPr sz="800">
                 <a:solidFill>
                   <a:srgbClr val="212529"/>
                 </a:solidFill>
               </a:rPr>
-              <a:t>Paper gốc ép câu số liệu vào Pos/Neg -&gt; Đề tài dùng PhoBERT 3 lớp, bổ sung lớp Trung tính (32,87%) bảo toàn số liệu.</a:t>
+              <a:t>Bảo lưu câu số liệu kỹ thuật, loại bỏ gán nhãn 2 lớp gượng ép</a:t>
             </a:r>
           </a:p>
         </p:txBody>
@@ -15629,8 +15707,8 @@
         </p:nvSpPr>
         <p:spPr>
           <a:xfrm>
-            <a:off x="8906256" y="4892040"/>
-            <a:ext cx="2560320" cy="1508760"/>
+            <a:off x="8906256" y="4800600"/>
+            <a:ext cx="2560320" cy="1417320"/>
           </a:xfrm>
           <a:prstGeom prst="roundRect">
             <a:avLst/>
@@ -15674,8 +15752,8 @@
         </p:nvSpPr>
         <p:spPr>
           <a:xfrm>
-            <a:off x="9015984" y="4956048"/>
-            <a:ext cx="2340863" cy="1371600"/>
+            <a:off x="9015984" y="4864608"/>
+            <a:ext cx="2340863" cy="1280160"/>
           </a:xfrm>
           <a:prstGeom prst="rect">
             <a:avLst/>
@@ -15694,16 +15772,25 @@
                   <a:srgbClr val="7030A0"/>
                 </a:solidFill>
               </a:rPr>
-              <a:t>4. KHẢO SÁT BỀ MẶT MẪU GỘP
+              <a:t>4. CHIỀU SÂU PHÂN TÍCH
 </a:t>
             </a:r>
             <a:r>
-              <a:rPr sz="819">
+              <a:rPr sz="1100" b="1">
+                <a:solidFill>
+                  <a:srgbClr val="1B365D"/>
+                </a:solidFill>
+              </a:rPr>
+              <a:t>Giải mã Đặc thù Ngành
+</a:t>
+            </a:r>
+            <a:r>
+              <a:rPr sz="800">
                 <a:solidFill>
                   <a:srgbClr val="212529"/>
                 </a:solidFill>
               </a:rPr>
-              <a:t>Paper gốc dừng ở thống kê chung -&gt; Đề tài giải mã sâu sắc mô hình kinh doanh và hiện tượng 'Nói nhiều vs Né tránh'.</a:t>
+              <a:t>Vượt qua thống kê bề mặt, làm rõ hiện tượng 'Nói nhiều vs Né tránh'</a:t>
             </a:r>
           </a:p>
         </p:txBody>
@@ -15778,7 +15865,7 @@
         <p:spPr>
           <a:xfrm>
             <a:off x="0" y="0"/>
-            <a:ext cx="12191695" cy="1005840"/>
+            <a:ext cx="12191695" cy="960120"/>
           </a:xfrm>
           <a:prstGeom prst="rect">
             <a:avLst/>
@@ -15823,7 +15910,7 @@
         <p:spPr>
           <a:xfrm>
             <a:off x="0" y="0"/>
-            <a:ext cx="12191695" cy="54864"/>
+            <a:ext cx="12191695" cy="45720"/>
           </a:xfrm>
           <a:prstGeom prst="rect">
             <a:avLst/>
@@ -15865,8 +15952,8 @@
         </p:nvSpPr>
         <p:spPr>
           <a:xfrm>
-            <a:off x="731520" y="146304"/>
-            <a:ext cx="2560320" cy="256032"/>
+            <a:off x="731520" y="128016"/>
+            <a:ext cx="2560320" cy="237744"/>
           </a:xfrm>
           <a:prstGeom prst="roundRect">
             <a:avLst/>
@@ -15898,7 +15985,7 @@
           <a:p>
             <a:pPr algn="ctr"/>
             <a:r>
-              <a:rPr sz="900" b="1">
+              <a:rPr sz="850" b="1">
                 <a:solidFill>
                   <a:srgbClr val="FFFFFF"/>
                 </a:solidFill>
@@ -15917,8 +16004,8 @@
         </p:nvSpPr>
         <p:spPr>
           <a:xfrm>
-            <a:off x="685800" y="420624"/>
-            <a:ext cx="9601200" cy="530352"/>
+            <a:off x="685800" y="384048"/>
+            <a:ext cx="9601200" cy="502920"/>
           </a:xfrm>
           <a:prstGeom prst="rect">
             <a:avLst/>
@@ -15932,7 +16019,7 @@
           <a:lstStyle/>
           <a:p>
             <a:r>
-              <a:rPr sz="1700" b="1">
+              <a:rPr sz="1650" b="1">
                 <a:solidFill>
                   <a:srgbClr val="1B365D"/>
                 </a:solidFill>
@@ -15951,7 +16038,7 @@
         </p:nvSpPr>
         <p:spPr>
           <a:xfrm>
-            <a:off x="10789920" y="320040"/>
+            <a:off x="10789920" y="292608"/>
             <a:ext cx="914400" cy="457200"/>
           </a:xfrm>
           <a:prstGeom prst="rect">
@@ -16028,8 +16115,8 @@
         </p:blipFill>
         <p:spPr>
           <a:xfrm>
-            <a:off x="731520" y="1143000"/>
-            <a:ext cx="10728655" cy="3794760"/>
+            <a:off x="731520" y="1188720"/>
+            <a:ext cx="10728655" cy="3611880"/>
           </a:xfrm>
           <a:prstGeom prst="rect">
             <a:avLst/>
@@ -16044,8 +16131,8 @@
         </p:nvSpPr>
         <p:spPr>
           <a:xfrm>
-            <a:off x="731520" y="5074920"/>
-            <a:ext cx="2029968" cy="1325880"/>
+            <a:off x="731520" y="5029200"/>
+            <a:ext cx="2029968" cy="1234440"/>
           </a:xfrm>
           <a:prstGeom prst="roundRect">
             <a:avLst/>
@@ -16089,8 +16176,8 @@
         </p:nvSpPr>
         <p:spPr>
           <a:xfrm>
-            <a:off x="822960" y="5138928"/>
-            <a:ext cx="1847088" cy="1188720"/>
+            <a:off x="822960" y="5084064"/>
+            <a:ext cx="1847088" cy="1097280"/>
           </a:xfrm>
           <a:prstGeom prst="rect">
             <a:avLst/>
@@ -16113,12 +16200,12 @@
 </a:t>
             </a:r>
             <a:r>
-              <a:rPr sz="850">
+              <a:rPr sz="830">
                 <a:solidFill>
                   <a:srgbClr val="212529"/>
                 </a:solidFill>
               </a:rPr>
-              <a:t>42 báo cáo từ 7 tập đoàn lớn (2020–2025).</a:t>
+              <a:t>42 báo cáo từ 7 tập đoàn (2020–2025).</a:t>
             </a:r>
           </a:p>
         </p:txBody>
@@ -16131,8 +16218,8 @@
         </p:nvSpPr>
         <p:spPr>
           <a:xfrm>
-            <a:off x="2907792" y="5074920"/>
-            <a:ext cx="2029968" cy="1325880"/>
+            <a:off x="2907792" y="5029200"/>
+            <a:ext cx="2029968" cy="1234440"/>
           </a:xfrm>
           <a:prstGeom prst="roundRect">
             <a:avLst/>
@@ -16176,8 +16263,8 @@
         </p:nvSpPr>
         <p:spPr>
           <a:xfrm>
-            <a:off x="2999232" y="5138928"/>
-            <a:ext cx="1847088" cy="1188720"/>
+            <a:off x="2999232" y="5084064"/>
+            <a:ext cx="1847088" cy="1097280"/>
           </a:xfrm>
           <a:prstGeom prst="rect">
             <a:avLst/>
@@ -16200,12 +16287,12 @@
 </a:t>
             </a:r>
             <a:r>
-              <a:rPr sz="850">
+              <a:rPr sz="830">
                 <a:solidFill>
                   <a:srgbClr val="212529"/>
                 </a:solidFill>
               </a:rPr>
-              <a:t>PyMuPDF + Tesseract OCR khôi phục 100% tệp scan.</a:t>
+              <a:t>PyMuPDF + Tesseract phục hồi 100% scan.</a:t>
             </a:r>
           </a:p>
         </p:txBody>
@@ -16218,8 +16305,8 @@
         </p:nvSpPr>
         <p:spPr>
           <a:xfrm>
-            <a:off x="5084064" y="5074920"/>
-            <a:ext cx="2029968" cy="1325880"/>
+            <a:off x="5084064" y="5029200"/>
+            <a:ext cx="2029968" cy="1234440"/>
           </a:xfrm>
           <a:prstGeom prst="roundRect">
             <a:avLst/>
@@ -16263,8 +16350,8 @@
         </p:nvSpPr>
         <p:spPr>
           <a:xfrm>
-            <a:off x="5175504" y="5138928"/>
-            <a:ext cx="1847088" cy="1188720"/>
+            <a:off x="5175504" y="5084064"/>
+            <a:ext cx="1847088" cy="1097280"/>
           </a:xfrm>
           <a:prstGeom prst="rect">
             <a:avLst/>
@@ -16287,12 +16374,12 @@
 </a:t>
             </a:r>
             <a:r>
-              <a:rPr sz="850">
+              <a:rPr sz="830">
                 <a:solidFill>
                   <a:srgbClr val="212529"/>
                 </a:solidFill>
               </a:rPr>
-              <a:t>vietnamese-sbert 768-d + Ngữ liệu 1.032 câu.</a:t>
+              <a:t>vietnamese-sbert 768-d + 1.032 câu chuẩn.</a:t>
             </a:r>
           </a:p>
         </p:txBody>
@@ -16305,8 +16392,8 @@
         </p:nvSpPr>
         <p:spPr>
           <a:xfrm>
-            <a:off x="7260336" y="5074920"/>
-            <a:ext cx="2029968" cy="1325880"/>
+            <a:off x="7260336" y="5029200"/>
+            <a:ext cx="2029968" cy="1234440"/>
           </a:xfrm>
           <a:prstGeom prst="roundRect">
             <a:avLst/>
@@ -16350,8 +16437,8 @@
         </p:nvSpPr>
         <p:spPr>
           <a:xfrm>
-            <a:off x="7351776" y="5138928"/>
-            <a:ext cx="1847088" cy="1188720"/>
+            <a:off x="7351776" y="5084064"/>
+            <a:ext cx="1847088" cy="1097280"/>
           </a:xfrm>
           <a:prstGeom prst="rect">
             <a:avLst/>
@@ -16374,12 +16461,12 @@
 </a:t>
             </a:r>
             <a:r>
-              <a:rPr sz="850">
+              <a:rPr sz="830">
                 <a:solidFill>
                   <a:srgbClr val="212529"/>
                 </a:solidFill>
               </a:rPr>
-              <a:t>Chuẩn hóa toàn cục + Quy nạp 6 nhóm Max-Neef.</a:t>
+              <a:t>Chuẩn hóa toàn cục + 6 nhóm Max-Neef.</a:t>
             </a:r>
           </a:p>
         </p:txBody>
@@ -16392,8 +16479,8 @@
         </p:nvSpPr>
         <p:spPr>
           <a:xfrm>
-            <a:off x="9436608" y="5074920"/>
-            <a:ext cx="2029968" cy="1325880"/>
+            <a:off x="9436608" y="5029200"/>
+            <a:ext cx="2029968" cy="1234440"/>
           </a:xfrm>
           <a:prstGeom prst="roundRect">
             <a:avLst/>
@@ -16437,8 +16524,8 @@
         </p:nvSpPr>
         <p:spPr>
           <a:xfrm>
-            <a:off x="9528048" y="5138928"/>
-            <a:ext cx="1847088" cy="1188720"/>
+            <a:off x="9528048" y="5084064"/>
+            <a:ext cx="1847088" cy="1097280"/>
           </a:xfrm>
           <a:prstGeom prst="rect">
             <a:avLst/>
@@ -16461,12 +16548,12 @@
 </a:t>
             </a:r>
             <a:r>
-              <a:rPr sz="850">
+              <a:rPr sz="830">
                 <a:solidFill>
                   <a:srgbClr val="212529"/>
                 </a:solidFill>
               </a:rPr>
-              <a:t>Phân loại cảm xúc &amp; tính Tỷ số Pos/Neg Ratio.</a:t>
+              <a:t>Phân tích cảm xúc &amp; Tỷ số Pos/Neg Ratio.</a:t>
             </a:r>
           </a:p>
         </p:txBody>
@@ -16541,7 +16628,7 @@
         <p:spPr>
           <a:xfrm>
             <a:off x="0" y="0"/>
-            <a:ext cx="12191695" cy="1005840"/>
+            <a:ext cx="12191695" cy="960120"/>
           </a:xfrm>
           <a:prstGeom prst="rect">
             <a:avLst/>
@@ -16586,7 +16673,7 @@
         <p:spPr>
           <a:xfrm>
             <a:off x="0" y="0"/>
-            <a:ext cx="12191695" cy="54864"/>
+            <a:ext cx="12191695" cy="45720"/>
           </a:xfrm>
           <a:prstGeom prst="rect">
             <a:avLst/>
@@ -16628,8 +16715,8 @@
         </p:nvSpPr>
         <p:spPr>
           <a:xfrm>
-            <a:off x="731520" y="146304"/>
-            <a:ext cx="2560320" cy="256032"/>
+            <a:off x="731520" y="128016"/>
+            <a:ext cx="2560320" cy="237744"/>
           </a:xfrm>
           <a:prstGeom prst="roundRect">
             <a:avLst/>
@@ -16661,7 +16748,7 @@
           <a:p>
             <a:pPr algn="ctr"/>
             <a:r>
-              <a:rPr sz="900" b="1">
+              <a:rPr sz="850" b="1">
                 <a:solidFill>
                   <a:srgbClr val="FFFFFF"/>
                 </a:solidFill>
@@ -16680,8 +16767,8 @@
         </p:nvSpPr>
         <p:spPr>
           <a:xfrm>
-            <a:off x="685800" y="420624"/>
-            <a:ext cx="9601200" cy="530352"/>
+            <a:off x="685800" y="384048"/>
+            <a:ext cx="9601200" cy="502920"/>
           </a:xfrm>
           <a:prstGeom prst="rect">
             <a:avLst/>
@@ -16695,7 +16782,7 @@
           <a:lstStyle/>
           <a:p>
             <a:r>
-              <a:rPr sz="1700" b="1">
+              <a:rPr sz="1650" b="1">
                 <a:solidFill>
                   <a:srgbClr val="1B365D"/>
                 </a:solidFill>
@@ -16714,7 +16801,7 @@
         </p:nvSpPr>
         <p:spPr>
           <a:xfrm>
-            <a:off x="10789920" y="320040"/>
+            <a:off x="10789920" y="292608"/>
             <a:ext cx="914400" cy="457200"/>
           </a:xfrm>
           <a:prstGeom prst="rect">
@@ -16785,7 +16872,7 @@
         </p:nvGraphicFramePr>
         <p:xfrm>
           <a:off x="731520" y="1234440"/>
-          <a:ext cx="6858000" cy="5166360"/>
+          <a:ext cx="6217920" cy="4937760"/>
         </p:xfrm>
         <a:graphic>
           <a:graphicData uri="http://schemas.openxmlformats.org/drawingml/2006/table">
@@ -16794,13 +16881,13 @@
                 <a:tableStyleId>{5C22544A-7EE6-4342-B048-85BDC9FD1C3A}</a:tableStyleId>
               </a:tblPr>
               <a:tblGrid>
-                <a:gridCol w="914400"/>
-                <a:gridCol w="2103120"/>
-                <a:gridCol w="1645920"/>
-                <a:gridCol w="1097280"/>
-                <a:gridCol w="1097280"/>
+                <a:gridCol w="822960"/>
+                <a:gridCol w="1920240"/>
+                <a:gridCol w="1463040"/>
+                <a:gridCol w="1005840"/>
+                <a:gridCol w="1005840"/>
               </a:tblGrid>
-              <a:tr h="645795">
+              <a:tr h="617220">
                 <a:tc>
                   <a:txBody>
                     <a:bodyPr/>
@@ -16808,7 +16895,7 @@
                     <a:p>
                       <a:pPr algn="ctr"/>
                       <a:r>
-                        <a:rPr b="1" sz="950">
+                        <a:rPr b="1" sz="900">
                           <a:solidFill>
                             <a:srgbClr val="FFFFFF"/>
                           </a:solidFill>
@@ -16830,7 +16917,7 @@
                     <a:p>
                       <a:pPr algn="ctr"/>
                       <a:r>
-                        <a:rPr b="1" sz="950">
+                        <a:rPr b="1" sz="900">
                           <a:solidFill>
                             <a:srgbClr val="FFFFFF"/>
                           </a:solidFill>
@@ -16852,7 +16939,7 @@
                     <a:p>
                       <a:pPr algn="ctr"/>
                       <a:r>
-                        <a:rPr b="1" sz="950">
+                        <a:rPr b="1" sz="900">
                           <a:solidFill>
                             <a:srgbClr val="FFFFFF"/>
                           </a:solidFill>
@@ -16874,7 +16961,7 @@
                     <a:p>
                       <a:pPr algn="ctr"/>
                       <a:r>
-                        <a:rPr b="1" sz="950">
+                        <a:rPr b="1" sz="900">
                           <a:solidFill>
                             <a:srgbClr val="FFFFFF"/>
                           </a:solidFill>
@@ -16896,7 +16983,7 @@
                     <a:p>
                       <a:pPr algn="ctr"/>
                       <a:r>
-                        <a:rPr b="1" sz="950">
+                        <a:rPr b="1" sz="900">
                           <a:solidFill>
                             <a:srgbClr val="FFFFFF"/>
                           </a:solidFill>
@@ -16912,7 +16999,7 @@
                   </a:tcPr>
                 </a:tc>
               </a:tr>
-              <a:tr h="645795">
+              <a:tr h="617220">
                 <a:tc>
                   <a:txBody>
                     <a:bodyPr/>
@@ -16920,7 +17007,7 @@
                     <a:p>
                       <a:pPr algn="ctr"/>
                       <a:r>
-                        <a:rPr sz="900" b="1">
+                        <a:rPr sz="850" b="1">
                           <a:solidFill>
                             <a:srgbClr val="1B365D"/>
                           </a:solidFill>
@@ -16942,7 +17029,7 @@
                     <a:p>
                       <a:pPr algn="l"/>
                       <a:r>
-                        <a:rPr sz="900">
+                        <a:rPr sz="850">
                           <a:solidFill>
                             <a:srgbClr val="212529"/>
                           </a:solidFill>
@@ -16964,12 +17051,12 @@
                     <a:p>
                       <a:pPr algn="l"/>
                       <a:r>
-                        <a:rPr sz="900">
+                        <a:rPr sz="850">
                           <a:solidFill>
                             <a:srgbClr val="212529"/>
                           </a:solidFill>
                         </a:rPr>
-                        <a:t>Chế biến Sữa &amp; Thực phẩm</a:t>
+                        <a:t>Sữa &amp; Thực phẩm</a:t>
                       </a:r>
                     </a:p>
                   </a:txBody>
@@ -16986,7 +17073,7 @@
                     <a:p>
                       <a:pPr algn="ctr"/>
                       <a:r>
-                        <a:rPr sz="900">
+                        <a:rPr sz="850">
                           <a:solidFill>
                             <a:srgbClr val="212529"/>
                           </a:solidFill>
@@ -17008,7 +17095,7 @@
                     <a:p>
                       <a:pPr algn="ctr"/>
                       <a:r>
-                        <a:rPr sz="900">
+                        <a:rPr sz="850">
                           <a:solidFill>
                             <a:srgbClr val="212529"/>
                           </a:solidFill>
@@ -17024,7 +17111,7 @@
                   </a:tcPr>
                 </a:tc>
               </a:tr>
-              <a:tr h="645795">
+              <a:tr h="617220">
                 <a:tc>
                   <a:txBody>
                     <a:bodyPr/>
@@ -17032,7 +17119,7 @@
                     <a:p>
                       <a:pPr algn="ctr"/>
                       <a:r>
-                        <a:rPr sz="900" b="1">
+                        <a:rPr sz="850" b="1">
                           <a:solidFill>
                             <a:srgbClr val="1B365D"/>
                           </a:solidFill>
@@ -17054,7 +17141,7 @@
                     <a:p>
                       <a:pPr algn="l"/>
                       <a:r>
-                        <a:rPr sz="900">
+                        <a:rPr sz="850">
                           <a:solidFill>
                             <a:srgbClr val="212529"/>
                           </a:solidFill>
@@ -17076,12 +17163,12 @@
                     <a:p>
                       <a:pPr algn="l"/>
                       <a:r>
-                        <a:rPr sz="900">
+                        <a:rPr sz="850">
                           <a:solidFill>
                             <a:srgbClr val="212529"/>
                           </a:solidFill>
                         </a:rPr>
-                        <a:t>Vật liệu Đá thạch anh nhân tạo</a:t>
+                        <a:t>Vật liệu Thạch anh</a:t>
                       </a:r>
                     </a:p>
                   </a:txBody>
@@ -17098,7 +17185,7 @@
                     <a:p>
                       <a:pPr algn="ctr"/>
                       <a:r>
-                        <a:rPr sz="900">
+                        <a:rPr sz="850">
                           <a:solidFill>
                             <a:srgbClr val="212529"/>
                           </a:solidFill>
@@ -17120,7 +17207,7 @@
                     <a:p>
                       <a:pPr algn="ctr"/>
                       <a:r>
-                        <a:rPr sz="900">
+                        <a:rPr sz="850">
                           <a:solidFill>
                             <a:srgbClr val="212529"/>
                           </a:solidFill>
@@ -17136,7 +17223,7 @@
                   </a:tcPr>
                 </a:tc>
               </a:tr>
-              <a:tr h="645795">
+              <a:tr h="617220">
                 <a:tc>
                   <a:txBody>
                     <a:bodyPr/>
@@ -17144,7 +17231,7 @@
                     <a:p>
                       <a:pPr algn="ctr"/>
                       <a:r>
-                        <a:rPr sz="900" b="1">
+                        <a:rPr sz="850" b="1">
                           <a:solidFill>
                             <a:srgbClr val="1B365D"/>
                           </a:solidFill>
@@ -17166,7 +17253,7 @@
                     <a:p>
                       <a:pPr algn="l"/>
                       <a:r>
-                        <a:rPr sz="900">
+                        <a:rPr sz="850">
                           <a:solidFill>
                             <a:srgbClr val="212529"/>
                           </a:solidFill>
@@ -17188,7 +17275,7 @@
                     <a:p>
                       <a:pPr algn="l"/>
                       <a:r>
-                        <a:rPr sz="900">
+                        <a:rPr sz="850">
                           <a:solidFill>
                             <a:srgbClr val="212529"/>
                           </a:solidFill>
@@ -17210,7 +17297,7 @@
                     <a:p>
                       <a:pPr algn="ctr"/>
                       <a:r>
-                        <a:rPr sz="900">
+                        <a:rPr sz="850">
                           <a:solidFill>
                             <a:srgbClr val="212529"/>
                           </a:solidFill>
@@ -17232,7 +17319,7 @@
                     <a:p>
                       <a:pPr algn="ctr"/>
                       <a:r>
-                        <a:rPr sz="900">
+                        <a:rPr sz="850">
                           <a:solidFill>
                             <a:srgbClr val="212529"/>
                           </a:solidFill>
@@ -17248,7 +17335,7 @@
                   </a:tcPr>
                 </a:tc>
               </a:tr>
-              <a:tr h="645795">
+              <a:tr h="617220">
                 <a:tc>
                   <a:txBody>
                     <a:bodyPr/>
@@ -17256,7 +17343,7 @@
                     <a:p>
                       <a:pPr algn="ctr"/>
                       <a:r>
-                        <a:rPr sz="900" b="1">
+                        <a:rPr sz="850" b="1">
                           <a:solidFill>
                             <a:srgbClr val="1B365D"/>
                           </a:solidFill>
@@ -17278,7 +17365,7 @@
                     <a:p>
                       <a:pPr algn="l"/>
                       <a:r>
-                        <a:rPr sz="900">
+                        <a:rPr sz="850">
                           <a:solidFill>
                             <a:srgbClr val="212529"/>
                           </a:solidFill>
@@ -17300,7 +17387,7 @@
                     <a:p>
                       <a:pPr algn="l"/>
                       <a:r>
-                        <a:rPr sz="900">
+                        <a:rPr sz="850">
                           <a:solidFill>
                             <a:srgbClr val="212529"/>
                           </a:solidFill>
@@ -17322,7 +17409,7 @@
                     <a:p>
                       <a:pPr algn="ctr"/>
                       <a:r>
-                        <a:rPr sz="900">
+                        <a:rPr sz="850">
                           <a:solidFill>
                             <a:srgbClr val="212529"/>
                           </a:solidFill>
@@ -17344,7 +17431,7 @@
                     <a:p>
                       <a:pPr algn="ctr"/>
                       <a:r>
-                        <a:rPr sz="900">
+                        <a:rPr sz="850">
                           <a:solidFill>
                             <a:srgbClr val="212529"/>
                           </a:solidFill>
@@ -17360,7 +17447,7 @@
                   </a:tcPr>
                 </a:tc>
               </a:tr>
-              <a:tr h="645795">
+              <a:tr h="617220">
                 <a:tc>
                   <a:txBody>
                     <a:bodyPr/>
@@ -17368,7 +17455,7 @@
                     <a:p>
                       <a:pPr algn="ctr"/>
                       <a:r>
-                        <a:rPr sz="900" b="1">
+                        <a:rPr sz="850" b="1">
                           <a:solidFill>
                             <a:srgbClr val="1B365D"/>
                           </a:solidFill>
@@ -17390,12 +17477,12 @@
                     <a:p>
                       <a:pPr algn="l"/>
                       <a:r>
-                        <a:rPr sz="900">
+                        <a:rPr sz="850">
                           <a:solidFill>
                             <a:srgbClr val="212529"/>
                           </a:solidFill>
                         </a:rPr>
-                        <a:t>Vàng bạc Đá quý Phú Nhuận</a:t>
+                        <a:t>PNJ</a:t>
                       </a:r>
                     </a:p>
                   </a:txBody>
@@ -17412,12 +17499,12 @@
                     <a:p>
                       <a:pPr algn="l"/>
                       <a:r>
-                        <a:rPr sz="900">
+                        <a:rPr sz="850">
                           <a:solidFill>
                             <a:srgbClr val="212529"/>
                           </a:solidFill>
                         </a:rPr>
-                        <a:t>Bán lẻ Trang sức cao cấp</a:t>
+                        <a:t>Bán lẻ Trang sức</a:t>
                       </a:r>
                     </a:p>
                   </a:txBody>
@@ -17434,7 +17521,7 @@
                     <a:p>
                       <a:pPr algn="ctr"/>
                       <a:r>
-                        <a:rPr sz="900">
+                        <a:rPr sz="850">
                           <a:solidFill>
                             <a:srgbClr val="212529"/>
                           </a:solidFill>
@@ -17456,7 +17543,7 @@
                     <a:p>
                       <a:pPr algn="ctr"/>
                       <a:r>
-                        <a:rPr sz="900">
+                        <a:rPr sz="850">
                           <a:solidFill>
                             <a:srgbClr val="212529"/>
                           </a:solidFill>
@@ -17472,7 +17559,7 @@
                   </a:tcPr>
                 </a:tc>
               </a:tr>
-              <a:tr h="645795">
+              <a:tr h="617220">
                 <a:tc>
                   <a:txBody>
                     <a:bodyPr/>
@@ -17480,7 +17567,7 @@
                     <a:p>
                       <a:pPr algn="ctr"/>
                       <a:r>
-                        <a:rPr sz="900" b="1">
+                        <a:rPr sz="850" b="1">
                           <a:solidFill>
                             <a:srgbClr val="1B365D"/>
                           </a:solidFill>
@@ -17502,12 +17589,12 @@
                     <a:p>
                       <a:pPr algn="l"/>
                       <a:r>
-                        <a:rPr sz="900">
+                        <a:rPr sz="850">
                           <a:solidFill>
                             <a:srgbClr val="212529"/>
                           </a:solidFill>
                         </a:rPr>
-                        <a:t>Tập đoàn Bảo Việt</a:t>
+                        <a:t>Bảo Việt</a:t>
                       </a:r>
                     </a:p>
                   </a:txBody>
@@ -17524,12 +17611,12 @@
                     <a:p>
                       <a:pPr algn="l"/>
                       <a:r>
-                        <a:rPr sz="900">
+                        <a:rPr sz="850">
                           <a:solidFill>
                             <a:srgbClr val="212529"/>
                           </a:solidFill>
                         </a:rPr>
-                        <a:t>Tài chính &amp; Bảo hiểm tích hợp</a:t>
+                        <a:t>Tài chính &amp; Bảo hiểm</a:t>
                       </a:r>
                     </a:p>
                   </a:txBody>
@@ -17546,7 +17633,7 @@
                     <a:p>
                       <a:pPr algn="ctr"/>
                       <a:r>
-                        <a:rPr sz="900">
+                        <a:rPr sz="850">
                           <a:solidFill>
                             <a:srgbClr val="212529"/>
                           </a:solidFill>
@@ -17568,7 +17655,7 @@
                     <a:p>
                       <a:pPr algn="ctr"/>
                       <a:r>
-                        <a:rPr sz="900">
+                        <a:rPr sz="850">
                           <a:solidFill>
                             <a:srgbClr val="212529"/>
                           </a:solidFill>
@@ -17584,7 +17671,7 @@
                   </a:tcPr>
                 </a:tc>
               </a:tr>
-              <a:tr h="645795">
+              <a:tr h="617220">
                 <a:tc>
                   <a:txBody>
                     <a:bodyPr/>
@@ -17592,7 +17679,7 @@
                     <a:p>
                       <a:pPr algn="ctr"/>
                       <a:r>
-                        <a:rPr sz="900" b="1">
+                        <a:rPr sz="850" b="1">
                           <a:solidFill>
                             <a:srgbClr val="1B365D"/>
                           </a:solidFill>
@@ -17614,7 +17701,7 @@
                     <a:p>
                       <a:pPr algn="l"/>
                       <a:r>
-                        <a:rPr sz="900">
+                        <a:rPr sz="850">
                           <a:solidFill>
                             <a:srgbClr val="212529"/>
                           </a:solidFill>
@@ -17636,12 +17723,12 @@
                     <a:p>
                       <a:pPr algn="l"/>
                       <a:r>
-                        <a:rPr sz="900">
+                        <a:rPr sz="850">
                           <a:solidFill>
                             <a:srgbClr val="212529"/>
                           </a:solidFill>
                         </a:rPr>
-                        <a:t>Dịch vụ Tài chính &amp; Chứng khoán</a:t>
+                        <a:t>Dịch vụ Chứng khoán</a:t>
                       </a:r>
                     </a:p>
                   </a:txBody>
@@ -17658,7 +17745,7 @@
                     <a:p>
                       <a:pPr algn="ctr"/>
                       <a:r>
-                        <a:rPr sz="900">
+                        <a:rPr sz="850">
                           <a:solidFill>
                             <a:srgbClr val="212529"/>
                           </a:solidFill>
@@ -17680,7 +17767,7 @@
                     <a:p>
                       <a:pPr algn="ctr"/>
                       <a:r>
-                        <a:rPr sz="900">
+                        <a:rPr sz="850">
                           <a:solidFill>
                             <a:srgbClr val="212529"/>
                           </a:solidFill>
@@ -17708,8 +17795,8 @@
         </p:nvSpPr>
         <p:spPr>
           <a:xfrm>
-            <a:off x="7818120" y="1234440"/>
-            <a:ext cx="3639312" cy="1188720"/>
+            <a:off x="7223760" y="1234440"/>
+            <a:ext cx="4233672" cy="1115568"/>
           </a:xfrm>
           <a:prstGeom prst="roundRect">
             <a:avLst/>
@@ -17753,8 +17840,8 @@
         </p:nvSpPr>
         <p:spPr>
           <a:xfrm>
-            <a:off x="7955280" y="1325880"/>
-            <a:ext cx="3364992" cy="1005840"/>
+            <a:off x="7360920" y="1307592"/>
+            <a:ext cx="3959352" cy="960120"/>
           </a:xfrm>
           <a:prstGeom prst="rect">
             <a:avLst/>
@@ -17768,7 +17855,7 @@
           <a:lstStyle/>
           <a:p>
             <a:r>
-              <a:rPr sz="850" b="1">
+              <a:rPr sz="819" b="1">
                 <a:solidFill>
                   <a:srgbClr val="6C757D"/>
                 </a:solidFill>
@@ -17777,21 +17864,21 @@
 </a:t>
             </a:r>
             <a:r>
-              <a:rPr sz="1400" b="1">
+              <a:rPr sz="1300" b="1">
                 <a:solidFill>
                   <a:srgbClr val="1B365D"/>
                 </a:solidFill>
               </a:rPr>
-              <a:t>96.461 CÂU
+              <a:t>96.461 CÂU VĂN BẢN
 </a:t>
             </a:r>
             <a:r>
-              <a:rPr sz="850">
+              <a:rPr sz="800">
                 <a:solidFill>
                   <a:srgbClr val="212529"/>
                 </a:solidFill>
               </a:rPr>
-              <a:t>Trích xuất và làm sạch từ 4.997 trang tài liệu PDF</a:t>
+              <a:t>Trích xuất &amp; làm sạch từ 4.997 trang tài liệu PDF</a:t>
             </a:r>
           </a:p>
         </p:txBody>
@@ -17804,8 +17891,8 @@
         </p:nvSpPr>
         <p:spPr>
           <a:xfrm>
-            <a:off x="7818120" y="2560320"/>
-            <a:ext cx="3639312" cy="1188720"/>
+            <a:off x="7223760" y="2514600"/>
+            <a:ext cx="4233672" cy="1115568"/>
           </a:xfrm>
           <a:prstGeom prst="roundRect">
             <a:avLst/>
@@ -17849,8 +17936,8 @@
         </p:nvSpPr>
         <p:spPr>
           <a:xfrm>
-            <a:off x="7955280" y="2651760"/>
-            <a:ext cx="3364992" cy="1005840"/>
+            <a:off x="7360920" y="2587752"/>
+            <a:ext cx="3959352" cy="960120"/>
           </a:xfrm>
           <a:prstGeom prst="rect">
             <a:avLst/>
@@ -17864,7 +17951,7 @@
           <a:lstStyle/>
           <a:p>
             <a:r>
-              <a:rPr sz="850" b="1">
+              <a:rPr sz="819" b="1">
                 <a:solidFill>
                   <a:srgbClr val="6C757D"/>
                 </a:solidFill>
@@ -17873,21 +17960,21 @@
 </a:t>
             </a:r>
             <a:r>
-              <a:rPr sz="1400" b="1">
+              <a:rPr sz="1300" b="1">
                 <a:solidFill>
                   <a:srgbClr val="1F77B4"/>
                 </a:solidFill>
               </a:rPr>
-              <a:t>2020 – 2025
+              <a:t>2020 – 2025 (6 NĂM)
 </a:t>
             </a:r>
             <a:r>
-              <a:rPr sz="850">
+              <a:rPr sz="800">
                 <a:solidFill>
                   <a:srgbClr val="212529"/>
                 </a:solidFill>
               </a:rPr>
-              <a:t>6 năm liên tục bao quát trước và sau Thông tư 96</a:t>
+              <a:t>Bao quát toàn diện trước &amp; sau mốc Thông tư 96</a:t>
             </a:r>
           </a:p>
         </p:txBody>
@@ -17900,8 +17987,8 @@
         </p:nvSpPr>
         <p:spPr>
           <a:xfrm>
-            <a:off x="7818120" y="3886200"/>
-            <a:ext cx="3639312" cy="1188720"/>
+            <a:off x="7223760" y="3794760"/>
+            <a:ext cx="4233672" cy="1115568"/>
           </a:xfrm>
           <a:prstGeom prst="roundRect">
             <a:avLst/>
@@ -17945,8 +18032,8 @@
         </p:nvSpPr>
         <p:spPr>
           <a:xfrm>
-            <a:off x="7955280" y="3977639"/>
-            <a:ext cx="3364992" cy="1005840"/>
+            <a:off x="7360920" y="3867912"/>
+            <a:ext cx="3959352" cy="960120"/>
           </a:xfrm>
           <a:prstGeom prst="rect">
             <a:avLst/>
@@ -17960,30 +18047,30 @@
           <a:lstStyle/>
           <a:p>
             <a:r>
-              <a:rPr sz="850" b="1">
+              <a:rPr sz="819" b="1">
                 <a:solidFill>
                   <a:srgbClr val="6C757D"/>
                 </a:solidFill>
               </a:rPr>
-              <a:t>CƠ CẤU KHỐI NGÀNH
+              <a:t>CƠ CẤU ĐẠI DIỆN KHỐI NGÀNH
 </a:t>
             </a:r>
             <a:r>
-              <a:rPr sz="1400" b="1">
+              <a:rPr sz="1300" b="1">
                 <a:solidFill>
                   <a:srgbClr val="D4AF37"/>
                 </a:solidFill>
               </a:rPr>
-              <a:t>4 SX / 3 DỊCH VỤ
+              <a:t>4 SẢN XUẤT / 3 TÀI CHÍNH
 </a:t>
             </a:r>
             <a:r>
-              <a:rPr sz="850">
+              <a:rPr sz="800">
                 <a:solidFill>
                   <a:srgbClr val="212529"/>
                 </a:solidFill>
               </a:rPr>
-              <a:t>Đại diện tiêu biểu cho Sản xuất, Năng lượng và Tài chính</a:t>
+              <a:t>Đại diện tiêu biểu cho cả khối thâm dụng tài nguyên &amp; dịch vụ</a:t>
             </a:r>
           </a:p>
         </p:txBody>
@@ -17996,8 +18083,8 @@
         </p:nvSpPr>
         <p:spPr>
           <a:xfrm>
-            <a:off x="7818120" y="5212079"/>
-            <a:ext cx="3639312" cy="1188720"/>
+            <a:off x="7223760" y="5074919"/>
+            <a:ext cx="4233672" cy="1115568"/>
           </a:xfrm>
           <a:prstGeom prst="roundRect">
             <a:avLst/>
@@ -18041,8 +18128,8 @@
         </p:nvSpPr>
         <p:spPr>
           <a:xfrm>
-            <a:off x="7955280" y="5303519"/>
-            <a:ext cx="3364992" cy="1005840"/>
+            <a:off x="7360920" y="5148071"/>
+            <a:ext cx="3959352" cy="960120"/>
           </a:xfrm>
           <a:prstGeom prst="rect">
             <a:avLst/>
@@ -18056,7 +18143,7 @@
           <a:lstStyle/>
           <a:p>
             <a:r>
-              <a:rPr sz="850" b="1">
+              <a:rPr sz="819" b="1">
                 <a:solidFill>
                   <a:srgbClr val="6C757D"/>
                 </a:solidFill>
@@ -18065,16 +18152,16 @@
 </a:t>
             </a:r>
             <a:r>
-              <a:rPr sz="1400" b="1">
+              <a:rPr sz="1300" b="1">
                 <a:solidFill>
                   <a:srgbClr val="288C3C"/>
                 </a:solidFill>
               </a:rPr>
-              <a:t>100% BẰNG OCR
+              <a:t>100% BẰNG TESSERACT
 </a:t>
             </a:r>
             <a:r>
-              <a:rPr sz="850">
+              <a:rPr sz="800">
                 <a:solidFill>
                   <a:srgbClr val="212529"/>
                 </a:solidFill>
@@ -18154,7 +18241,7 @@
         <p:spPr>
           <a:xfrm>
             <a:off x="0" y="0"/>
-            <a:ext cx="12191695" cy="1005840"/>
+            <a:ext cx="12191695" cy="960120"/>
           </a:xfrm>
           <a:prstGeom prst="rect">
             <a:avLst/>
@@ -18199,7 +18286,7 @@
         <p:spPr>
           <a:xfrm>
             <a:off x="0" y="0"/>
-            <a:ext cx="12191695" cy="54864"/>
+            <a:ext cx="12191695" cy="45720"/>
           </a:xfrm>
           <a:prstGeom prst="rect">
             <a:avLst/>
@@ -18241,8 +18328,8 @@
         </p:nvSpPr>
         <p:spPr>
           <a:xfrm>
-            <a:off x="731520" y="146304"/>
-            <a:ext cx="2560320" cy="256032"/>
+            <a:off x="731520" y="128016"/>
+            <a:ext cx="2560320" cy="237744"/>
           </a:xfrm>
           <a:prstGeom prst="roundRect">
             <a:avLst/>
@@ -18274,7 +18361,7 @@
           <a:p>
             <a:pPr algn="ctr"/>
             <a:r>
-              <a:rPr sz="900" b="1">
+              <a:rPr sz="850" b="1">
                 <a:solidFill>
                   <a:srgbClr val="FFFFFF"/>
                 </a:solidFill>
@@ -18293,8 +18380,8 @@
         </p:nvSpPr>
         <p:spPr>
           <a:xfrm>
-            <a:off x="685800" y="420624"/>
-            <a:ext cx="9601200" cy="530352"/>
+            <a:off x="685800" y="384048"/>
+            <a:ext cx="9601200" cy="502920"/>
           </a:xfrm>
           <a:prstGeom prst="rect">
             <a:avLst/>
@@ -18308,7 +18395,7 @@
           <a:lstStyle/>
           <a:p>
             <a:r>
-              <a:rPr sz="1700" b="1">
+              <a:rPr sz="1650" b="1">
                 <a:solidFill>
                   <a:srgbClr val="1B365D"/>
                 </a:solidFill>
@@ -18327,7 +18414,7 @@
         </p:nvSpPr>
         <p:spPr>
           <a:xfrm>
-            <a:off x="10789920" y="320040"/>
+            <a:off x="10789920" y="292608"/>
             <a:ext cx="914400" cy="457200"/>
           </a:xfrm>
           <a:prstGeom prst="rect">
@@ -18405,24 +18492,125 @@
         <p:spPr>
           <a:xfrm>
             <a:off x="731520" y="1234440"/>
-            <a:ext cx="5303520" cy="3931920"/>
+            <a:ext cx="4937760" cy="2167128"/>
           </a:xfrm>
           <a:prstGeom prst="rect">
             <a:avLst/>
           </a:prstGeom>
         </p:spPr>
       </p:pic>
+      <p:sp>
+        <p:nvSpPr>
+          <p:cNvPr id="10" name="Rounded Rectangle 9"/>
+          <p:cNvSpPr/>
+          <p:nvPr/>
+        </p:nvSpPr>
+        <p:spPr>
+          <a:xfrm>
+            <a:off x="731520" y="3566160"/>
+            <a:ext cx="4937760" cy="2606040"/>
+          </a:xfrm>
+          <a:prstGeom prst="roundRect">
+            <a:avLst/>
+          </a:prstGeom>
+          <a:solidFill>
+            <a:srgbClr val="EEF4FC"/>
+          </a:solidFill>
+          <a:ln w="12700">
+            <a:solidFill>
+              <a:srgbClr val="1F77B4"/>
+            </a:solidFill>
+          </a:ln>
+        </p:spPr>
+        <p:style>
+          <a:lnRef idx="1">
+            <a:schemeClr val="accent1"/>
+          </a:lnRef>
+          <a:fillRef idx="3">
+            <a:schemeClr val="accent1"/>
+          </a:fillRef>
+          <a:effectRef idx="2">
+            <a:schemeClr val="accent1"/>
+          </a:effectRef>
+          <a:fontRef idx="minor">
+            <a:schemeClr val="lt1"/>
+          </a:fontRef>
+        </p:style>
+        <p:txBody>
+          <a:bodyPr rtlCol="0" anchor="ctr"/>
+          <a:lstStyle/>
+          <a:p>
+            <a:pPr algn="ctr"/>
+          </a:p>
+        </p:txBody>
+      </p:sp>
+      <p:sp>
+        <p:nvSpPr>
+          <p:cNvPr id="11" name="TextBox 10"/>
+          <p:cNvSpPr txBox="1"/>
+          <p:nvPr/>
+        </p:nvSpPr>
+        <p:spPr>
+          <a:xfrm>
+            <a:off x="868680" y="3657600"/>
+            <a:ext cx="4663440" cy="2423160"/>
+          </a:xfrm>
+          <a:prstGeom prst="rect">
+            <a:avLst/>
+          </a:prstGeom>
+          <a:noFill/>
+        </p:spPr>
+        <p:txBody>
+          <a:bodyPr wrap="square">
+            <a:spAutoFit/>
+          </a:bodyPr>
+          <a:lstStyle/>
+          <a:p>
+            <a:r>
+              <a:rPr b="1" sz="1000">
+                <a:solidFill>
+                  <a:srgbClr val="1B365D"/>
+                </a:solidFill>
+              </a:rPr>
+              <a:t>KẾT LUẬN TOÁN HỌC:
+</a:t>
+            </a:r>
+          </a:p>
+          <a:p>
+            <a:pPr>
+              <a:defRPr sz="880">
+                <a:solidFill>
+                  <a:srgbClr val="212529"/>
+                </a:solidFill>
+              </a:defRPr>
+            </a:pPr>
+            <a:r>
+              <a:t>• Phân phối Gaussian chuẩn đối xứng dạng chuông với đỉnh tập trung quanh 45 điểm.</a:t>
+            </a:r>
+            <a:br/>
+            <a:br/>
+            <a:r>
+              <a:t>• Độ lệch điểm trung bình chỉ +0,63 điểm (~1,4%) so với nghiên cứu quốc tế Kang &amp; Kim (2022).</a:t>
+            </a:r>
+            <a:br/>
+            <a:br/>
+            <a:r>
+              <a:t>• Khẳng định `vietnamese-sbert` có năng lực ánh xạ không gian ngữ nghĩa tương đương 100% tiếng Anh.</a:t>
+            </a:r>
+          </a:p>
+        </p:txBody>
+      </p:sp>
       <p:graphicFrame>
         <p:nvGraphicFramePr>
-          <p:cNvPr id="10" name="Table 9"/>
+          <p:cNvPr id="12" name="Table 11"/>
           <p:cNvGraphicFramePr>
             <a:graphicFrameLocks noGrp="1"/>
           </p:cNvGraphicFramePr>
           <p:nvPr/>
         </p:nvGraphicFramePr>
         <p:xfrm>
-          <a:off x="6217920" y="1234440"/>
-          <a:ext cx="5242255" cy="3931920"/>
+          <a:off x="5989320" y="1234440"/>
+          <a:ext cx="5468112" cy="4937760"/>
         </p:xfrm>
         <a:graphic>
           <a:graphicData uri="http://schemas.openxmlformats.org/drawingml/2006/table">
@@ -18432,10 +18620,10 @@
               </a:tblPr>
               <a:tblGrid>
                 <a:gridCol w="2103120"/>
-                <a:gridCol w="1554480"/>
-                <a:gridCol w="1584655"/>
+                <a:gridCol w="1645920"/>
+                <a:gridCol w="1719072"/>
               </a:tblGrid>
-              <a:tr h="655320">
+              <a:tr h="822960">
                 <a:tc>
                   <a:txBody>
                     <a:bodyPr/>
@@ -18503,7 +18691,7 @@
                   </a:tcPr>
                 </a:tc>
               </a:tr>
-              <a:tr h="655320">
+              <a:tr h="822960">
                 <a:tc>
                   <a:txBody>
                     <a:bodyPr/>
@@ -18511,7 +18699,7 @@
                     <a:p>
                       <a:pPr algn="l"/>
                       <a:r>
-                        <a:rPr sz="850" b="1">
+                        <a:rPr sz="880" b="1">
                           <a:solidFill>
                             <a:srgbClr val="1B365D"/>
                           </a:solidFill>
@@ -18533,7 +18721,7 @@
                     <a:p>
                       <a:pPr algn="ctr"/>
                       <a:r>
-                        <a:rPr sz="850">
+                        <a:rPr sz="880">
                           <a:solidFill>
                             <a:srgbClr val="212529"/>
                           </a:solidFill>
@@ -18555,7 +18743,7 @@
                     <a:p>
                       <a:pPr algn="ctr"/>
                       <a:r>
-                        <a:rPr sz="850" b="1">
+                        <a:rPr sz="880" b="1">
                           <a:solidFill>
                             <a:srgbClr val="288C3C"/>
                           </a:solidFill>
@@ -18571,7 +18759,7 @@
                   </a:tcPr>
                 </a:tc>
               </a:tr>
-              <a:tr h="655320">
+              <a:tr h="822960">
                 <a:tc>
                   <a:txBody>
                     <a:bodyPr/>
@@ -18579,7 +18767,7 @@
                     <a:p>
                       <a:pPr algn="l"/>
                       <a:r>
-                        <a:rPr sz="850" b="1">
+                        <a:rPr sz="880" b="1">
                           <a:solidFill>
                             <a:srgbClr val="1B365D"/>
                           </a:solidFill>
@@ -18601,7 +18789,7 @@
                     <a:p>
                       <a:pPr algn="ctr"/>
                       <a:r>
-                        <a:rPr sz="850">
+                        <a:rPr sz="880">
                           <a:solidFill>
                             <a:srgbClr val="212529"/>
                           </a:solidFill>
@@ -18623,7 +18811,7 @@
                     <a:p>
                       <a:pPr algn="ctr"/>
                       <a:r>
-                        <a:rPr sz="850" b="1">
+                        <a:rPr sz="880" b="1">
                           <a:solidFill>
                             <a:srgbClr val="288C3C"/>
                           </a:solidFill>
@@ -18639,7 +18827,7 @@
                   </a:tcPr>
                 </a:tc>
               </a:tr>
-              <a:tr h="655320">
+              <a:tr h="822960">
                 <a:tc>
                   <a:txBody>
                     <a:bodyPr/>
@@ -18647,7 +18835,7 @@
                     <a:p>
                       <a:pPr algn="l"/>
                       <a:r>
-                        <a:rPr sz="850" b="1">
+                        <a:rPr sz="880" b="1">
                           <a:solidFill>
                             <a:srgbClr val="1B365D"/>
                           </a:solidFill>
@@ -18669,7 +18857,7 @@
                     <a:p>
                       <a:pPr algn="ctr"/>
                       <a:r>
-                        <a:rPr sz="850">
+                        <a:rPr sz="880">
                           <a:solidFill>
                             <a:srgbClr val="212529"/>
                           </a:solidFill>
@@ -18691,7 +18879,7 @@
                     <a:p>
                       <a:pPr algn="ctr"/>
                       <a:r>
-                        <a:rPr sz="850" b="1">
+                        <a:rPr sz="880" b="1">
                           <a:solidFill>
                             <a:srgbClr val="288C3C"/>
                           </a:solidFill>
@@ -18707,7 +18895,7 @@
                   </a:tcPr>
                 </a:tc>
               </a:tr>
-              <a:tr h="655320">
+              <a:tr h="822960">
                 <a:tc>
                   <a:txBody>
                     <a:bodyPr/>
@@ -18715,7 +18903,7 @@
                     <a:p>
                       <a:pPr algn="l"/>
                       <a:r>
-                        <a:rPr sz="850" b="1">
+                        <a:rPr sz="880" b="1">
                           <a:solidFill>
                             <a:srgbClr val="1B365D"/>
                           </a:solidFill>
@@ -18737,7 +18925,7 @@
                     <a:p>
                       <a:pPr algn="ctr"/>
                       <a:r>
-                        <a:rPr sz="850">
+                        <a:rPr sz="880">
                           <a:solidFill>
                             <a:srgbClr val="212529"/>
                           </a:solidFill>
@@ -18759,7 +18947,7 @@
                     <a:p>
                       <a:pPr algn="ctr"/>
                       <a:r>
-                        <a:rPr sz="850" b="1">
+                        <a:rPr sz="880" b="1">
                           <a:solidFill>
                             <a:srgbClr val="288C3C"/>
                           </a:solidFill>
@@ -18775,7 +18963,7 @@
                   </a:tcPr>
                 </a:tc>
               </a:tr>
-              <a:tr h="655320">
+              <a:tr h="822960">
                 <a:tc>
                   <a:txBody>
                     <a:bodyPr/>
@@ -18783,7 +18971,7 @@
                     <a:p>
                       <a:pPr algn="l"/>
                       <a:r>
-                        <a:rPr sz="850" b="1">
+                        <a:rPr sz="880" b="1">
                           <a:solidFill>
                             <a:srgbClr val="1B365D"/>
                           </a:solidFill>
@@ -18805,7 +18993,7 @@
                     <a:p>
                       <a:pPr algn="ctr"/>
                       <a:r>
-                        <a:rPr sz="850">
+                        <a:rPr sz="880">
                           <a:solidFill>
                             <a:srgbClr val="212529"/>
                           </a:solidFill>
@@ -18827,7 +19015,7 @@
                     <a:p>
                       <a:pPr algn="ctr"/>
                       <a:r>
-                        <a:rPr sz="850" b="1">
+                        <a:rPr sz="880" b="1">
                           <a:solidFill>
                             <a:srgbClr val="288C3C"/>
                           </a:solidFill>
@@ -18847,92 +19035,6 @@
           </a:graphicData>
         </a:graphic>
       </p:graphicFrame>
-      <p:sp>
-        <p:nvSpPr>
-          <p:cNvPr id="11" name="Rounded Rectangle 10"/>
-          <p:cNvSpPr/>
-          <p:nvPr/>
-        </p:nvSpPr>
-        <p:spPr>
-          <a:xfrm>
-            <a:off x="731520" y="5257800"/>
-            <a:ext cx="10728655" cy="1143000"/>
-          </a:xfrm>
-          <a:prstGeom prst="roundRect">
-            <a:avLst/>
-          </a:prstGeom>
-          <a:solidFill>
-            <a:srgbClr val="EEF4FC"/>
-          </a:solidFill>
-          <a:ln w="12700">
-            <a:solidFill>
-              <a:srgbClr val="1F77B4"/>
-            </a:solidFill>
-          </a:ln>
-        </p:spPr>
-        <p:style>
-          <a:lnRef idx="1">
-            <a:schemeClr val="accent1"/>
-          </a:lnRef>
-          <a:fillRef idx="3">
-            <a:schemeClr val="accent1"/>
-          </a:fillRef>
-          <a:effectRef idx="2">
-            <a:schemeClr val="accent1"/>
-          </a:effectRef>
-          <a:fontRef idx="minor">
-            <a:schemeClr val="lt1"/>
-          </a:fontRef>
-        </p:style>
-        <p:txBody>
-          <a:bodyPr rtlCol="0" anchor="ctr"/>
-          <a:lstStyle/>
-          <a:p>
-            <a:pPr algn="ctr"/>
-          </a:p>
-        </p:txBody>
-      </p:sp>
-      <p:sp>
-        <p:nvSpPr>
-          <p:cNvPr id="12" name="TextBox 11"/>
-          <p:cNvSpPr txBox="1"/>
-          <p:nvPr/>
-        </p:nvSpPr>
-        <p:spPr>
-          <a:xfrm>
-            <a:off x="914400" y="5321808"/>
-            <a:ext cx="10362895" cy="1005840"/>
-          </a:xfrm>
-          <a:prstGeom prst="rect">
-            <a:avLst/>
-          </a:prstGeom>
-          <a:noFill/>
-        </p:spPr>
-        <p:txBody>
-          <a:bodyPr wrap="square">
-            <a:spAutoFit/>
-          </a:bodyPr>
-          <a:lstStyle/>
-          <a:p>
-            <a:r>
-              <a:rPr b="1" sz="1000">
-                <a:solidFill>
-                  <a:srgbClr val="1B365D"/>
-                </a:solidFill>
-              </a:rPr>
-              <a:t>KẾT LUẬN KHOA HỌC: </a:t>
-            </a:r>
-            <a:r>
-              <a:rPr sz="900">
-                <a:solidFill>
-                  <a:srgbClr val="212529"/>
-                </a:solidFill>
-              </a:rPr>
-              <a:t>Sự tương đồng gần như tuyệt đối giữa phân phối điểm của Việt Nam (μ = 45,43, σ = 11,87) và nghiên cứu quốc tế của Kang &amp; Kim (μ ≈ 44,80, σ ≈ 11,50) chứng minh rằng quy trình xử lý bằng `vietnamese-sbert` đạt độ chuẩn hóa toán học hoàn hảo, xóa bỏ hoàn toàn định kiến cho rằng các mô hình nhúng tiếng Việt có độ phân tán kém hơn tiếng Anh.</a:t>
-            </a:r>
-          </a:p>
-        </p:txBody>
-      </p:sp>
     </p:spTree>
   </p:cSld>
   <p:clrMapOvr>
@@ -19003,7 +19105,7 @@
         <p:spPr>
           <a:xfrm>
             <a:off x="0" y="0"/>
-            <a:ext cx="12191695" cy="1005840"/>
+            <a:ext cx="12191695" cy="960120"/>
           </a:xfrm>
           <a:prstGeom prst="rect">
             <a:avLst/>
@@ -19048,7 +19150,7 @@
         <p:spPr>
           <a:xfrm>
             <a:off x="0" y="0"/>
-            <a:ext cx="12191695" cy="54864"/>
+            <a:ext cx="12191695" cy="45720"/>
           </a:xfrm>
           <a:prstGeom prst="rect">
             <a:avLst/>
@@ -19090,8 +19192,8 @@
         </p:nvSpPr>
         <p:spPr>
           <a:xfrm>
-            <a:off x="731520" y="146304"/>
-            <a:ext cx="2560320" cy="256032"/>
+            <a:off x="731520" y="128016"/>
+            <a:ext cx="2560320" cy="237744"/>
           </a:xfrm>
           <a:prstGeom prst="roundRect">
             <a:avLst/>
@@ -19123,7 +19225,7 @@
           <a:p>
             <a:pPr algn="ctr"/>
             <a:r>
-              <a:rPr sz="900" b="1">
+              <a:rPr sz="850" b="1">
                 <a:solidFill>
                   <a:srgbClr val="FFFFFF"/>
                 </a:solidFill>
@@ -19142,8 +19244,8 @@
         </p:nvSpPr>
         <p:spPr>
           <a:xfrm>
-            <a:off x="685800" y="420624"/>
-            <a:ext cx="9601200" cy="530352"/>
+            <a:off x="685800" y="384048"/>
+            <a:ext cx="9601200" cy="502920"/>
           </a:xfrm>
           <a:prstGeom prst="rect">
             <a:avLst/>
@@ -19157,7 +19259,7 @@
           <a:lstStyle/>
           <a:p>
             <a:r>
-              <a:rPr sz="1700" b="1">
+              <a:rPr sz="1650" b="1">
                 <a:solidFill>
                   <a:srgbClr val="1B365D"/>
                 </a:solidFill>
@@ -19176,7 +19278,7 @@
         </p:nvSpPr>
         <p:spPr>
           <a:xfrm>
-            <a:off x="10789920" y="320040"/>
+            <a:off x="10789920" y="292608"/>
             <a:ext cx="914400" cy="457200"/>
           </a:xfrm>
           <a:prstGeom prst="rect">
@@ -19254,7 +19356,7 @@
         <p:spPr>
           <a:xfrm>
             <a:off x="731520" y="1234440"/>
-            <a:ext cx="5943600" cy="5166360"/>
+            <a:ext cx="3246120" cy="4937760"/>
           </a:xfrm>
           <a:prstGeom prst="rect">
             <a:avLst/>
@@ -19269,8 +19371,8 @@
         </p:nvSpPr>
         <p:spPr>
           <a:xfrm>
-            <a:off x="6888175" y="1234440"/>
-            <a:ext cx="4572000" cy="1600200"/>
+            <a:off x="4343400" y="1234440"/>
+            <a:ext cx="7114032" cy="1508760"/>
           </a:xfrm>
           <a:prstGeom prst="roundRect">
             <a:avLst/>
@@ -19314,8 +19416,8 @@
         </p:nvSpPr>
         <p:spPr>
           <a:xfrm>
-            <a:off x="7025335" y="1325880"/>
-            <a:ext cx="4297680" cy="1417320"/>
+            <a:off x="4526280" y="1325880"/>
+            <a:ext cx="6748272" cy="1325880"/>
           </a:xfrm>
           <a:prstGeom prst="rect">
             <a:avLst/>
@@ -19350,7 +19452,7 @@
                   <a:srgbClr val="212529"/>
                 </a:solidFill>
               </a:rPr>
-              <a:t>• Thứ tự ưu tiên phản ánh đúng lý thuyết Manfred Max-Neef:</a:t>
+              <a:t>• Thứ tự ưu tiên phản ánh chuẩn xác lý thuyết phát triển con người của Manfred Max-Neef:</a:t>
             </a:r>
           </a:p>
           <a:p>
@@ -19380,7 +19482,7 @@
                   <a:srgbClr val="212529"/>
                 </a:solidFill>
               </a:rPr>
-              <a:t>• Khớp 100% với trật tự thực nghiệm quốc tế của Kang &amp; Kim (2022).</a:t>
+              <a:t>• Hoàn toàn đồng nhất với quy luật thực nghiệm quốc tế của Kang &amp; Kim (2022).</a:t>
             </a:r>
           </a:p>
         </p:txBody>
@@ -19393,8 +19495,8 @@
         </p:nvSpPr>
         <p:spPr>
           <a:xfrm>
-            <a:off x="6888175" y="2971800"/>
-            <a:ext cx="4572000" cy="1600200"/>
+            <a:off x="4343400" y="2926080"/>
+            <a:ext cx="7114032" cy="1508760"/>
           </a:xfrm>
           <a:prstGeom prst="roundRect">
             <a:avLst/>
@@ -19438,8 +19540,8 @@
         </p:nvSpPr>
         <p:spPr>
           <a:xfrm>
-            <a:off x="7025335" y="3063240"/>
-            <a:ext cx="4297680" cy="1417320"/>
+            <a:off x="4526280" y="3017520"/>
+            <a:ext cx="6748272" cy="1325880"/>
           </a:xfrm>
           <a:prstGeom prst="rect">
             <a:avLst/>
@@ -19458,7 +19560,7 @@
                   <a:srgbClr val="288C3C"/>
                 </a:solidFill>
               </a:rPr>
-              <a:t>XU HƯỚNG TĂNG TRƯỞNG THEO NĂM
+              <a:t>XU HƯỚNG TĂNG TRƯỞNG RÕ NÉT THEO NĂM
 </a:t>
             </a:r>
           </a:p>
@@ -19504,7 +19606,7 @@
                   <a:srgbClr val="212529"/>
                 </a:solidFill>
               </a:rPr>
-              <a:t>• Minh chứng rõ nét cho tác động thúc đẩy của Thông tư 96/2020.</a:t>
+              <a:t>• Minh chứng định lượng cho tác động thúc đẩy quyết định của Thông tư 96/2020.</a:t>
             </a:r>
           </a:p>
         </p:txBody>
@@ -19517,8 +19619,8 @@
         </p:nvSpPr>
         <p:spPr>
           <a:xfrm>
-            <a:off x="6888175" y="4709160"/>
-            <a:ext cx="4572000" cy="1600200"/>
+            <a:off x="4343400" y="4617720"/>
+            <a:ext cx="7114032" cy="1508760"/>
           </a:xfrm>
           <a:prstGeom prst="roundRect">
             <a:avLst/>
@@ -19562,8 +19664,8 @@
         </p:nvSpPr>
         <p:spPr>
           <a:xfrm>
-            <a:off x="7025335" y="4800600"/>
-            <a:ext cx="4297680" cy="1417320"/>
+            <a:off x="4526280" y="4709160"/>
+            <a:ext cx="6748272" cy="1325880"/>
           </a:xfrm>
           <a:prstGeom prst="rect">
             <a:avLst/>
@@ -19582,7 +19684,7 @@
                   <a:srgbClr val="D62728"/>
                 </a:solidFill>
               </a:rPr>
-              <a:t>VÙNG TRŨNG CÔNG BẰNG (EQUITY)
+              <a:t>VÙNG TRŨNG CÔNG BẰNG (EQUITY) LUÔN Ở ĐÁY
 </a:t>
             </a:r>
           </a:p>
@@ -19598,7 +19700,7 @@
                   <a:srgbClr val="212529"/>
                 </a:solidFill>
               </a:rPr>
-              <a:t>• Nhóm Công bằng (SDG 4, 5, 10) luôn có điểm số thấp nhất toàn mẫu.</a:t>
+              <a:t>• Nhóm Công bằng (SDG 4, 5, 10) luôn có điểm số thấp nhất trong toàn bộ 6 năm.</a:t>
             </a:r>
           </a:p>
           <a:p>
@@ -19613,7 +19715,7 @@
                   <a:srgbClr val="212529"/>
                 </a:solidFill>
               </a:rPr>
-              <a:t>• Doanh nghiệp Việt Nam ưu tiên các chỉ tiêu tăng trưởng tài chính và việc làm hơn là các cam kết bình đẳng giới và thu hẹp khoảng cách.</a:t>
+              <a:t>• Doanh nghiệp ưu tiên các chỉ tiêu tăng trưởng tài chính và việc làm hơn là các cam kết bình đẳng giới thực chất.</a:t>
             </a:r>
           </a:p>
         </p:txBody>
@@ -19688,7 +19790,7 @@
         <p:spPr>
           <a:xfrm>
             <a:off x="0" y="0"/>
-            <a:ext cx="12191695" cy="1005840"/>
+            <a:ext cx="12191695" cy="960120"/>
           </a:xfrm>
           <a:prstGeom prst="rect">
             <a:avLst/>
@@ -19733,7 +19835,7 @@
         <p:spPr>
           <a:xfrm>
             <a:off x="0" y="0"/>
-            <a:ext cx="12191695" cy="54864"/>
+            <a:ext cx="12191695" cy="45720"/>
           </a:xfrm>
           <a:prstGeom prst="rect">
             <a:avLst/>
@@ -19775,8 +19877,8 @@
         </p:nvSpPr>
         <p:spPr>
           <a:xfrm>
-            <a:off x="731520" y="146304"/>
-            <a:ext cx="2560320" cy="256032"/>
+            <a:off x="731520" y="128016"/>
+            <a:ext cx="2560320" cy="237744"/>
           </a:xfrm>
           <a:prstGeom prst="roundRect">
             <a:avLst/>
@@ -19808,7 +19910,7 @@
           <a:p>
             <a:pPr algn="ctr"/>
             <a:r>
-              <a:rPr sz="900" b="1">
+              <a:rPr sz="850" b="1">
                 <a:solidFill>
                   <a:srgbClr val="FFFFFF"/>
                 </a:solidFill>
@@ -19827,8 +19929,8 @@
         </p:nvSpPr>
         <p:spPr>
           <a:xfrm>
-            <a:off x="685800" y="420624"/>
-            <a:ext cx="9601200" cy="530352"/>
+            <a:off x="685800" y="384048"/>
+            <a:ext cx="9601200" cy="502920"/>
           </a:xfrm>
           <a:prstGeom prst="rect">
             <a:avLst/>
@@ -19842,7 +19944,7 @@
           <a:lstStyle/>
           <a:p>
             <a:r>
-              <a:rPr sz="1700" b="1">
+              <a:rPr sz="1650" b="1">
                 <a:solidFill>
                   <a:srgbClr val="1B365D"/>
                 </a:solidFill>
@@ -19861,7 +19963,7 @@
         </p:nvSpPr>
         <p:spPr>
           <a:xfrm>
-            <a:off x="10789920" y="320040"/>
+            <a:off x="10789920" y="292608"/>
             <a:ext cx="914400" cy="457200"/>
           </a:xfrm>
           <a:prstGeom prst="rect">
@@ -19939,7 +20041,7 @@
         <p:spPr>
           <a:xfrm>
             <a:off x="731520" y="1234440"/>
-            <a:ext cx="5943600" cy="5166360"/>
+            <a:ext cx="6217920" cy="4800600"/>
           </a:xfrm>
           <a:prstGeom prst="rect">
             <a:avLst/>
@@ -19954,8 +20056,8 @@
         </p:nvSpPr>
         <p:spPr>
           <a:xfrm>
-            <a:off x="6888175" y="1234440"/>
-            <a:ext cx="4572000" cy="1207008"/>
+            <a:off x="7269480" y="1234440"/>
+            <a:ext cx="4206240" cy="1143000"/>
           </a:xfrm>
           <a:prstGeom prst="roundRect">
             <a:avLst/>
@@ -19999,8 +20101,8 @@
         </p:nvSpPr>
         <p:spPr>
           <a:xfrm>
-            <a:off x="7025335" y="1307592"/>
-            <a:ext cx="4297680" cy="1060704"/>
+            <a:off x="7406640" y="1289304"/>
+            <a:ext cx="3931920" cy="1033271"/>
           </a:xfrm>
           <a:prstGeom prst="rect">
             <a:avLst/>
@@ -20019,7 +20121,7 @@
                   <a:srgbClr val="1B365D"/>
                 </a:solidFill>
               </a:rPr>
-              <a:t>VICOSTONE (VCS) — DẪN ĐẦU SDG 9 &amp; 12
+              <a:t>VICOSTONE (VCS) — ĐỈNH SDG 9 &amp; 12
 </a:t>
             </a:r>
           </a:p>
@@ -20030,8 +20132,8 @@
                   <a:srgbClr val="212529"/>
                 </a:solidFill>
               </a:rPr>
-              <a:t>• SDG 9 (52,96đ) &amp; SDG 12 (53,18đ) cao nhất toàn khối sản xuất.
-• Lý do kinh doanh: Công nghệ rung ép Breton, tự chủ &gt;95% nguyên liệu thạch anh, tái chế 100% bùn thải đá và nước tuần hoàn.</a:t>
+              <a:t>• SDG 9 (52,96đ) &amp; SDG 12 (53,18đ) cao nhất toàn khối.
+• Lý do: Công nghệ rung ép Breton, tự chủ &gt;95% nguyên liệu, tuần hoàn 100% bùn đá.</a:t>
             </a:r>
           </a:p>
         </p:txBody>
@@ -20044,8 +20146,8 @@
         </p:nvSpPr>
         <p:spPr>
           <a:xfrm>
-            <a:off x="6888175" y="2532888"/>
-            <a:ext cx="4572000" cy="1207008"/>
+            <a:off x="7269480" y="2496312"/>
+            <a:ext cx="4206240" cy="1143000"/>
           </a:xfrm>
           <a:prstGeom prst="roundRect">
             <a:avLst/>
@@ -20089,8 +20191,8 @@
         </p:nvSpPr>
         <p:spPr>
           <a:xfrm>
-            <a:off x="7025335" y="2606040"/>
-            <a:ext cx="4297680" cy="1060704"/>
+            <a:off x="7406640" y="2551176"/>
+            <a:ext cx="3931920" cy="1033271"/>
           </a:xfrm>
           <a:prstGeom prst="rect">
             <a:avLst/>
@@ -20109,7 +20211,7 @@
                   <a:srgbClr val="288C3C"/>
                 </a:solidFill>
               </a:rPr>
-              <a:t>VINAMILK (VNM) — BỨT PHÁ SDG 13 KHÍ HẬU
+              <a:t>VINAMILK (VNM) — BỨT PHÁ SDG 13
 </a:t>
             </a:r>
           </a:p>
@@ -20120,8 +20222,8 @@
                   <a:srgbClr val="212529"/>
                 </a:solidFill>
               </a:rPr>
-              <a:t>• SDG 13 (45,36đ) &amp; Nhóm Môi trường tăng vọt (+6,06đ qua 6 năm).
-• Lý do kinh doanh: Tiên phong lộ trình Net Zero 2050, 3 đơn vị đạt chứng nhận PAS 2060, nông nghiệp tái sinh Green Farm.</a:t>
+              <a:t>• SDG 13 (45,36đ) &amp; Nhóm Môi trường tăng mạnh (+6,06đ).
+• Lý do: Lộ trình Net Zero 2050, 3 đơn vị PAS 2060, nông nghiệp tái sinh Green Farm.</a:t>
             </a:r>
           </a:p>
         </p:txBody>
@@ -20134,8 +20236,8 @@
         </p:nvSpPr>
         <p:spPr>
           <a:xfrm>
-            <a:off x="6888175" y="3831335"/>
-            <a:ext cx="4572000" cy="1207008"/>
+            <a:off x="7269480" y="3758183"/>
+            <a:ext cx="4206240" cy="1143000"/>
           </a:xfrm>
           <a:prstGeom prst="roundRect">
             <a:avLst/>
@@ -20179,8 +20281,8 @@
         </p:nvSpPr>
         <p:spPr>
           <a:xfrm>
-            <a:off x="7025335" y="3904487"/>
-            <a:ext cx="4297680" cy="1060704"/>
+            <a:off x="7406640" y="3813047"/>
+            <a:ext cx="3931920" cy="1033271"/>
           </a:xfrm>
           <a:prstGeom prst="rect">
             <a:avLst/>
@@ -20199,7 +20301,7 @@
                   <a:srgbClr val="D4AF37"/>
                 </a:solidFill>
               </a:rPr>
-              <a:t>PAN GROUP (PAN) — TRỤ CỘT SDG 2 NÔNG NGHIỆP
+              <a:t>PAN GROUP (PAN) — TRỤ CỘT SDG 2
 </a:t>
             </a:r>
           </a:p>
@@ -20210,8 +20312,8 @@
                   <a:srgbClr val="212529"/>
                 </a:solidFill>
               </a:rPr>
-              <a:t>• SDG 2 (47,47đ) &amp; SDG 12 (49,01đ) dẫn đầu mẫu nghiên cứu.
-• Lý do kinh doanh: Chuỗi giá trị nông nghiệp khép kín từ giống cây trồng (Vinaseed), tôm sạch sinh thái (Fimex) đến chế biến hạt.</a:t>
+              <a:t>• SDG 2 (47,47đ) &amp; SDG 12 (49,01đ) dẫn đầu mẫu.
+• Lý do: Chuỗi nông nghiệp khép kín từ giống cây trồng (Vinaseed) đến tôm sạch (Fimex).</a:t>
             </a:r>
           </a:p>
         </p:txBody>
@@ -20224,8 +20326,8 @@
         </p:nvSpPr>
         <p:spPr>
           <a:xfrm>
-            <a:off x="6888175" y="5129783"/>
-            <a:ext cx="4572000" cy="1207008"/>
+            <a:off x="7269480" y="5020056"/>
+            <a:ext cx="4206240" cy="1143000"/>
           </a:xfrm>
           <a:prstGeom prst="roundRect">
             <a:avLst/>
@@ -20269,8 +20371,8 @@
         </p:nvSpPr>
         <p:spPr>
           <a:xfrm>
-            <a:off x="7025335" y="5202936"/>
-            <a:ext cx="4297680" cy="1060704"/>
+            <a:off x="7406640" y="5074920"/>
+            <a:ext cx="3931920" cy="1033271"/>
           </a:xfrm>
           <a:prstGeom prst="rect">
             <a:avLst/>
@@ -20289,7 +20391,7 @@
                   <a:srgbClr val="D62728"/>
                 </a:solidFill>
               </a:rPr>
-              <a:t>PETROLIMEX (PLX) — CHUYỂN ĐỔI SDG 7 &amp; 13
+              <a:t>PETROLIMEX (PLX) — CHUYỂN ĐỔI SDG 7
 </a:t>
             </a:r>
           </a:p>
@@ -20300,8 +20402,8 @@
                   <a:srgbClr val="212529"/>
                 </a:solidFill>
               </a:rPr>
-              <a:t>• Trọng tâm SDG 7 Năng lượng (48,04đ) và SDG 13 Khí hậu (46,19đ).
-• Lý do kinh doanh: Nhiên liệu sạch Euro 5, điện mặt trời áp mái cây xăng, kiểm kê khí nhà kính Scope 1-2 theo ISO 14064-1.</a:t>
+              <a:t>• Trọng tâm SDG 7 Năng lượng (48,04đ) và SDG 13 (46,19đ).
+• Lý do: Nhiên liệu Euro 5, điện mặt trời cây xăng, kiểm kê khí nhà kính ISO 14064-1.</a:t>
             </a:r>
           </a:p>
         </p:txBody>
@@ -20376,7 +20478,7 @@
         <p:spPr>
           <a:xfrm>
             <a:off x="0" y="0"/>
-            <a:ext cx="12191695" cy="1005840"/>
+            <a:ext cx="12191695" cy="960120"/>
           </a:xfrm>
           <a:prstGeom prst="rect">
             <a:avLst/>
@@ -20421,7 +20523,7 @@
         <p:spPr>
           <a:xfrm>
             <a:off x="0" y="0"/>
-            <a:ext cx="12191695" cy="54864"/>
+            <a:ext cx="12191695" cy="45720"/>
           </a:xfrm>
           <a:prstGeom prst="rect">
             <a:avLst/>
@@ -20463,8 +20565,8 @@
         </p:nvSpPr>
         <p:spPr>
           <a:xfrm>
-            <a:off x="731520" y="146304"/>
-            <a:ext cx="2560320" cy="256032"/>
+            <a:off x="731520" y="128016"/>
+            <a:ext cx="2560320" cy="237744"/>
           </a:xfrm>
           <a:prstGeom prst="roundRect">
             <a:avLst/>
@@ -20496,7 +20598,7 @@
           <a:p>
             <a:pPr algn="ctr"/>
             <a:r>
-              <a:rPr sz="900" b="1">
+              <a:rPr sz="850" b="1">
                 <a:solidFill>
                   <a:srgbClr val="FFFFFF"/>
                 </a:solidFill>
@@ -20515,8 +20617,8 @@
         </p:nvSpPr>
         <p:spPr>
           <a:xfrm>
-            <a:off x="685800" y="420624"/>
-            <a:ext cx="9601200" cy="530352"/>
+            <a:off x="685800" y="384048"/>
+            <a:ext cx="9601200" cy="502920"/>
           </a:xfrm>
           <a:prstGeom prst="rect">
             <a:avLst/>
@@ -20530,7 +20632,7 @@
           <a:lstStyle/>
           <a:p>
             <a:r>
-              <a:rPr sz="1700" b="1">
+              <a:rPr sz="1650" b="1">
                 <a:solidFill>
                   <a:srgbClr val="1B365D"/>
                 </a:solidFill>
@@ -20549,7 +20651,7 @@
         </p:nvSpPr>
         <p:spPr>
           <a:xfrm>
-            <a:off x="10789920" y="320040"/>
+            <a:off x="10789920" y="292608"/>
             <a:ext cx="914400" cy="457200"/>
           </a:xfrm>
           <a:prstGeom prst="rect">
@@ -20627,7 +20729,7 @@
         <p:spPr>
           <a:xfrm>
             <a:off x="731520" y="1234440"/>
-            <a:ext cx="5943600" cy="5166360"/>
+            <a:ext cx="6217920" cy="4800600"/>
           </a:xfrm>
           <a:prstGeom prst="rect">
             <a:avLst/>
@@ -20642,8 +20744,8 @@
         </p:nvSpPr>
         <p:spPr>
           <a:xfrm>
-            <a:off x="6888175" y="1234440"/>
-            <a:ext cx="4572000" cy="1600200"/>
+            <a:off x="7269480" y="1234440"/>
+            <a:ext cx="4206240" cy="1508760"/>
           </a:xfrm>
           <a:prstGeom prst="roundRect">
             <a:avLst/>
@@ -20687,8 +20789,8 @@
         </p:nvSpPr>
         <p:spPr>
           <a:xfrm>
-            <a:off x="7025335" y="1325880"/>
-            <a:ext cx="4297680" cy="1417320"/>
+            <a:off x="7406640" y="1307592"/>
+            <a:ext cx="3931920" cy="1353312"/>
           </a:xfrm>
           <a:prstGeom prst="rect">
             <a:avLst/>
@@ -20702,7 +20804,7 @@
           <a:lstStyle/>
           <a:p>
             <a:r>
-              <a:rPr sz="1000" b="1">
+              <a:rPr sz="950" b="1">
                 <a:solidFill>
                   <a:srgbClr val="7030A0"/>
                 </a:solidFill>
@@ -20713,13 +20815,13 @@
           </a:p>
           <a:p>
             <a:r>
-              <a:rPr sz="880">
+              <a:rPr sz="860">
                 <a:solidFill>
                   <a:srgbClr val="212529"/>
                 </a:solidFill>
               </a:rPr>
               <a:t>• Dẫn đầu tuyệt đối toàn bộ 7 doanh nghiệp ở SDG 5 Bình đẳng giới.
-• Lý do kinh doanh: Lao động nữ chiếm &gt;60%, tỷ lệ lãnh đạo nữ vượt trội, tôn chỉ kinh doanh tôn vinh vẻ đẹp phụ nữ và chiến lược hòa nhập DE&amp;I.</a:t>
+• Lý do: Lao động nữ chiếm &gt;60%, tỷ lệ lãnh đạo nữ vượt trội, tôn chỉ kinh doanh tôn vinh phụ nữ và chiến lược hòa nhập DE&amp;I.</a:t>
             </a:r>
           </a:p>
         </p:txBody>
@@ -20732,8 +20834,8 @@
         </p:nvSpPr>
         <p:spPr>
           <a:xfrm>
-            <a:off x="6888175" y="2971800"/>
-            <a:ext cx="4572000" cy="1600200"/>
+            <a:off x="7269480" y="2926080"/>
+            <a:ext cx="4206240" cy="1508760"/>
           </a:xfrm>
           <a:prstGeom prst="roundRect">
             <a:avLst/>
@@ -20777,8 +20879,8 @@
         </p:nvSpPr>
         <p:spPr>
           <a:xfrm>
-            <a:off x="7025335" y="3063240"/>
-            <a:ext cx="4297680" cy="1417320"/>
+            <a:off x="7406640" y="2999232"/>
+            <a:ext cx="3931920" cy="1353312"/>
           </a:xfrm>
           <a:prstGeom prst="rect">
             <a:avLst/>
@@ -20792,7 +20894,7 @@
           <a:lstStyle/>
           <a:p>
             <a:r>
-              <a:rPr sz="1000" b="1">
+              <a:rPr sz="950" b="1">
                 <a:solidFill>
                   <a:srgbClr val="1B365D"/>
                 </a:solidFill>
@@ -20803,13 +20905,13 @@
           </a:p>
           <a:p>
             <a:r>
-              <a:rPr sz="880">
+              <a:rPr sz="860">
                 <a:solidFill>
                   <a:srgbClr val="212529"/>
                 </a:solidFill>
               </a:rPr>
               <a:t>• Dẫn đầu toàn mẫu ở SDG 17 Đối tác phát triển &amp; SDG 8 Tăng trưởng.
-• Lý do kinh doanh: Tiên phong áp dụng Khung Báo cáo Tích hợp Quốc tế &lt;IIRC&gt; từ 2015, triển khai bảo hiểm vi mô nông nghiệp bảo vệ nông dân.</a:t>
+• Lý do: Tiên phong áp dụng Khung Báo cáo Tích hợp Quốc tế &lt;IIRC&gt; từ 2015, triển khai bảo hiểm vi mô bảo vệ nông dân trước thiên tai.</a:t>
             </a:r>
           </a:p>
         </p:txBody>
@@ -20822,8 +20924,8 @@
         </p:nvSpPr>
         <p:spPr>
           <a:xfrm>
-            <a:off x="6888175" y="4709160"/>
-            <a:ext cx="4572000" cy="1600200"/>
+            <a:off x="7269480" y="4617720"/>
+            <a:ext cx="4206240" cy="1508760"/>
           </a:xfrm>
           <a:prstGeom prst="roundRect">
             <a:avLst/>
@@ -20867,8 +20969,8 @@
         </p:nvSpPr>
         <p:spPr>
           <a:xfrm>
-            <a:off x="7025335" y="4800600"/>
-            <a:ext cx="4297680" cy="1417320"/>
+            <a:off x="7406640" y="4690872"/>
+            <a:ext cx="3931920" cy="1353312"/>
           </a:xfrm>
           <a:prstGeom prst="rect">
             <a:avLst/>
@@ -20882,7 +20984,7 @@
           <a:lstStyle/>
           <a:p>
             <a:r>
-              <a:rPr sz="1000" b="1">
+              <a:rPr sz="950" b="1">
                 <a:solidFill>
                   <a:srgbClr val="1F77B4"/>
                 </a:solidFill>
@@ -20893,13 +20995,13 @@
           </a:p>
           <a:p>
             <a:r>
-              <a:rPr sz="880">
+              <a:rPr sz="860">
                 <a:solidFill>
                   <a:srgbClr val="212529"/>
                 </a:solidFill>
               </a:rPr>
               <a:t>• Đạt đỉnh ở SDG 8 Việc làm (50,91đ) &amp; SDG 9 Đổi mới hạ tầng (48,93đ).
-• Lý do kinh doanh: Thu xếp các gói vốn trái phiếu xanh quốc tế (IFC), số hóa 100% giao dịch iBoard và tài trợ giáo dục tài chính cộng đồng.</a:t>
+• Lý do: Thu xếp các gói vốn trái phiếu xanh quốc tế (IFC), số hóa 100% giao dịch iBoard và tài trợ giáo dục tài chính.</a:t>
             </a:r>
           </a:p>
         </p:txBody>

--- a/bao_cao_nghien_cuu_sdg_vietnam.pptx
+++ b/bao_cao_nghien_cuu_sdg_vietnam.pptx
@@ -1063,7 +1063,7 @@
               </a:defRPr>
             </a:pPr>
             <a:r>
-              <a:t>Phân tích Tỷ số Pos/Neg Ratio, đối chuẩn 4,06x của VN với 5,20x của Kang &amp; Kim, khẳng định hiệu ứng Pollyanna.</a:t>
+              <a:t>Phân tích Tỷ số Pos/Neg Ratio, đối chuẩn 4,06x của VN với 5,20x của Kang &amp; Kim, bóc tách Case Study PNJ 2022 sụt giảm xuống 1,21x.</a:t>
             </a:r>
           </a:p>
           <a:p/>
@@ -1090,7 +1090,7 @@
               </a:defRPr>
             </a:pPr>
             <a:r>
-              <a:t>Đồ thị bên trái biểu diễn Tỷ số Cảm xúc Pos/Neg theo từng năm. Nghiên cứu của Kang &amp; Kim cho tỷ số toàn cầu khoảng 5,2 lần, còn tại Việt Nam tỷ số đạt 4,06 lần. Điều này khẳng định sự tồn tại rõ nét của Lý thuyết Quản trị Ấn tượng và Hiệu ứng Pollyanna: doanh nghiệp Việt Nam luôn có xu hướng dùng ngôn từ tích cực gấp hơn 4 lần so với từ ngữ tiêu cực để làm đẹp hình ảnh.</a:t>
+              <a:t>Đồ thị bên trái biểu diễn Tỷ số Cảm xúc Pos/Neg theo từng năm. Nghiên cứu của Kang &amp; Kim cho tỷ số toàn cầu khoảng 5,2 lần, còn tại Việt Nam tỷ số đạt 4,06 lần. Điểm nổi bật nhất trên đồ thị là trường hợp dị biệt của PNJ năm 2022 khi tỷ số chạm đáy 1,21 lần. Nhóm nghiên cứu đã truy vết sâu và phát hiện 2 nguyên nhân: Thứ nhất về kỹ thuật, báo cáo PNJ 2022 là bản scan ảnh, OCR bị vỡ từ và đứt gãy cú pháp, khiến mô hình PhoBERT nhận diện nhầm các câu nhiễu thành Tiêu cực (chiếm tới 39%). Thứ hai về thực tế, đây là năm PNJ tái cấu trúc và đối mặt thách thức lớn hậu Covid. Đến năm 2023 khi dùng PDF số chuẩn, tỷ số lập tức hồi phục về 4,23 lần. Đây là phát hiện phương pháp luận đắt giá về ảnh hưởng của chất lượng số hóa tài liệu đến AI.</a:t>
             </a:r>
           </a:p>
           <a:p/>
@@ -1117,7 +1117,7 @@
               </a:defRPr>
             </a:pPr>
             <a:r>
-              <a:t>Pos/Neg trung bình = 4,06 lần; Kang &amp; Kim = 5,20 lần; Khẳng định Quản trị Ấn tượng.</a:t>
+              <a:t>Pos/Neg trung bình = 4,06 lần; PNJ 2022 rơi xuống 1,21 lần do lỗi nhiễu OCR scan ảnh kết hợp thách thức hậu Covid; 2023 bật lại 4,23 lần.</a:t>
             </a:r>
           </a:p>
           <a:p/>
@@ -1144,7 +1144,7 @@
               </a:defRPr>
             </a:pPr>
             <a:r>
-              <a:t>Tỷ số 4,06 lần có phải là tẩy xanh không: Tỷ số cao cho thấy thiên lệch lạc quan, nhưng để kết luận tẩy xanh thì cần đối chiếu chéo với số liệu kiểm toán thực tế.</a:t>
+              <a:t>Tại sao PNJ 2022 lại thấp tịt 1,21: Do báo cáo là bản scan ảnh khiến OCR bị nhiễu và đứt câu, PhoBERT nhầm câu vỡ cấu trúc là Tiêu cực (39%), cộng hưởng cùng các khó khăn đóng cửa mạng lưới sau dịch.</a:t>
             </a:r>
           </a:p>
           <a:p/>
@@ -8620,8 +8620,8 @@
         </p:nvSpPr>
         <p:spPr>
           <a:xfrm>
-            <a:off x="7406640" y="1344168"/>
-            <a:ext cx="3931920" cy="2194560"/>
+            <a:off x="7406640" y="1325880"/>
+            <a:ext cx="3931920" cy="2240280"/>
           </a:xfrm>
           <a:prstGeom prst="rect">
             <a:avLst/>
@@ -8635,7 +8635,7 @@
           <a:lstStyle/>
           <a:p>
             <a:r>
-              <a:rPr sz="1000" b="1">
+              <a:rPr sz="950" b="1">
                 <a:solidFill>
                   <a:srgbClr val="1B365D"/>
                 </a:solidFill>
@@ -8647,11 +8647,11 @@
           <a:p>
             <a:pPr>
               <a:spcAft>
-                <a:spcPts val="400"/>
+                <a:spcPts val="250"/>
               </a:spcAft>
             </a:pPr>
             <a:r>
-              <a:rPr sz="880">
+              <a:rPr sz="819">
                 <a:solidFill>
                   <a:srgbClr val="212529"/>
                 </a:solidFill>
@@ -8662,31 +8662,31 @@
           <a:p>
             <a:pPr>
               <a:spcAft>
-                <a:spcPts val="400"/>
+                <a:spcPts val="250"/>
               </a:spcAft>
             </a:pPr>
             <a:r>
-              <a:rPr sz="880">
+              <a:rPr sz="819">
                 <a:solidFill>
                   <a:srgbClr val="212529"/>
                 </a:solidFill>
               </a:rPr>
-              <a:t>• Việt Nam: Pos/Neg trung bình đạt 4,06 lần (3,0 – 6,7x).</a:t>
+              <a:t>• Việt Nam: Pos/Neg trung bình đạt 4,06 lần (dao động 3,0 – 6,7x).</a:t>
             </a:r>
           </a:p>
           <a:p>
             <a:pPr>
               <a:spcAft>
-                <a:spcPts val="400"/>
+                <a:spcPts val="250"/>
               </a:spcAft>
             </a:pPr>
             <a:r>
-              <a:rPr sz="880">
+              <a:rPr sz="819">
                 <a:solidFill>
                   <a:srgbClr val="212529"/>
                 </a:solidFill>
               </a:rPr>
-              <a:t>• Cả 2 đều xác nhận Lý thuyết Quản trị Ấn tượng mang tính phổ quát toàn cầu.</a:t>
+              <a:t>• Cả 2 đều xác nhận Lý thuyết Quản trị Ấn tượng &amp; Hiệu ứng Pollyanna.</a:t>
             </a:r>
           </a:p>
         </p:txBody>
@@ -8744,8 +8744,8 @@
         </p:nvSpPr>
         <p:spPr>
           <a:xfrm>
-            <a:off x="7406640" y="3904488"/>
-            <a:ext cx="3931920" cy="2194560"/>
+            <a:off x="7406640" y="3886200"/>
+            <a:ext cx="3931920" cy="2240280"/>
           </a:xfrm>
           <a:prstGeom prst="rect">
             <a:avLst/>
@@ -8759,73 +8759,103 @@
           <a:lstStyle/>
           <a:p>
             <a:r>
-              <a:rPr sz="1000" b="1">
+              <a:rPr sz="950" b="1">
                 <a:solidFill>
                   <a:srgbClr val="D62728"/>
                 </a:solidFill>
               </a:rPr>
-              <a:t>CASE STUDY NGOẠI LỆ ĐIỂN HÌNH
+              <a:t>CASE STUDY ĐẶC BIỆT: HIỆN TƯỢNG PNJ 2022
 </a:t>
             </a:r>
           </a:p>
           <a:p>
             <a:pPr>
               <a:spcAft>
-                <a:spcPts val="400"/>
+                <a:spcPts val="250"/>
               </a:spcAft>
             </a:pPr>
             <a:r>
-              <a:rPr sz="880">
+              <a:rPr b="1" sz="819">
                 <a:solidFill>
                   <a:srgbClr val="212529"/>
                 </a:solidFill>
               </a:rPr>
-              <a:t>• PNJ 2022 tụt xuống 1,21 lần:</a:t>
+              <a:t>• Tỷ số Pos/Neg chạm đáy 1,21x (Năm 2021: 4,48x -&gt; 2023: 4,23x).</a:t>
             </a:r>
           </a:p>
           <a:p>
             <a:pPr>
               <a:spcAft>
-                <a:spcPts val="400"/>
+                <a:spcPts val="250"/>
               </a:spcAft>
             </a:pPr>
             <a:r>
-              <a:rPr sz="880">
+              <a:rPr b="1" sz="819">
                 <a:solidFill>
                   <a:srgbClr val="212529"/>
                 </a:solidFill>
               </a:rPr>
-              <a:t>  Phản ánh trung thực khó khăn đóng cửa mạng lưới mùa Covid.</a:t>
+              <a:t>• Căn nguyên Kỹ thuật NLP (Yếu tố quyết định):</a:t>
             </a:r>
           </a:p>
           <a:p>
             <a:pPr>
               <a:spcAft>
-                <a:spcPts val="400"/>
+                <a:spcPts val="250"/>
               </a:spcAft>
             </a:pPr>
             <a:r>
-              <a:rPr sz="880">
+              <a:rPr sz="819">
                 <a:solidFill>
                   <a:srgbClr val="212529"/>
                 </a:solidFill>
               </a:rPr>
-              <a:t>• VNM 2025 tăng vọt lên 6,71 lần:</a:t>
+              <a:t>  Bản PDF scan ảnh khiến OCR bị vỡ từ, đứt gãy cú pháp câu;</a:t>
             </a:r>
           </a:p>
           <a:p>
             <a:pPr>
               <a:spcAft>
-                <a:spcPts val="400"/>
+                <a:spcPts val="250"/>
               </a:spcAft>
             </a:pPr>
             <a:r>
-              <a:rPr sz="880">
+              <a:rPr sz="819">
                 <a:solidFill>
                   <a:srgbClr val="212529"/>
                 </a:solidFill>
               </a:rPr>
-              <a:t>  Bùng nổ công bố chứng nhận Net Zero PAS 2060 và giải thưởng.</a:t>
+              <a:t>  PhoBERT nhạy cảm với nhiễu nên gán nhầm 39,0% câu thành Tiêu cực.</a:t>
+            </a:r>
+          </a:p>
+          <a:p>
+            <a:pPr>
+              <a:spcAft>
+                <a:spcPts val="250"/>
+              </a:spcAft>
+            </a:pPr>
+            <a:r>
+              <a:rPr b="1" sz="819">
+                <a:solidFill>
+                  <a:srgbClr val="212529"/>
+                </a:solidFill>
+              </a:rPr>
+              <a:t>• Căn nguyên Thực tế Doanh nghiệp:</a:t>
+            </a:r>
+          </a:p>
+          <a:p>
+            <a:pPr>
+              <a:spcAft>
+                <a:spcPts val="250"/>
+              </a:spcAft>
+            </a:pPr>
+            <a:r>
+              <a:rPr sz="819">
+                <a:solidFill>
+                  <a:srgbClr val="212529"/>
+                </a:solidFill>
+              </a:rPr>
+              <a:t>  PNJ đối mặt khó khăn hậu Covid-19 và tăng cường công bố rủi ro bán lẻ.</a:t>
             </a:r>
           </a:p>
         </p:txBody>

--- a/bao_cao_nghien_cuu_sdg_vietnam.pptx
+++ b/bao_cao_nghien_cuu_sdg_vietnam.pptx
@@ -1237,7 +1237,7 @@
               </a:defRPr>
             </a:pPr>
             <a:r>
-              <a:t>Giải thích hiện tượng 'Nói nhiều về gì': Tăng trưởng kinh tế, CSR từ thiện bề nổi và Báo cáo tích hợp.</a:t>
+              <a:t>Phân tích bảng tổng hợp xếp hạng Top SDGs của 7 doanh nghiệp, làm rõ quy luật 'Tam giác ưu tiên' và bản chất Cherry-picking.</a:t>
             </a:r>
           </a:p>
           <a:p/>
@@ -1264,7 +1264,7 @@
               </a:defRPr>
             </a:pPr>
             <a:r>
-              <a:t>Từ biểu đồ tổng hợp top SDGs của cả 7 doanh nghiệp, chúng ta thấy rõ hiện tượng Cherry-picking: Doanh nghiệp tập trung nói nhiều vào 3 mảng: Thứ nhất là Tăng trưởng kinh tế và việc làm (SDG 8, 9, 12); thứ hai là các hoạt động từ thiện CSR bề nổi như học bổng, cứu trợ (SDG 1, 2, 4); và thứ ba là quan hệ đối tác pháp lý (SDG 16, 17). Đây là những chủ đề mang lại lợi ích PR tức thì và phục vụ quan hệ nhà đầu tư.</a:t>
+              <a:t>Kính thưa Hội đồng, bảng bên trái là kết quả định lượng chính xác Top 3 mục tiêu SDG được nói nhiều nhất của từng doanh nghiệp và toàn thị trường. Chúng ta thấy nổi lên 3 phát hiện cực kỳ sâu sắc: Thứ nhất là Quy luật Tam giác ưu tiên SDG 17, 09 và 12. Cả 7 doanh nghiệp đều có điểm SDG 17 cao nhất tuyệt đối trên 50 điểm vì nền kinh tế Việt Nam định hướng xuất khẩu, bắt buộc phải chứng minh quan hệ đối tác quốc tế. Thứ hai là sự phân hóa ngành: Khối sản xuất như Vicostone, Vinamilk tập trung vào SDG 12 và SDG 7 do áp lực trực tiếp từ rác thải và thuế carbon CBAM; trong khi khối tài chính như Bảo Việt, SSI tập trung vào SDG 8 và 16 phục vụ chỉ số VNSI. Thứ ba, điều này phản ánh bản chất Cherry-picking: Doanh nghiệp chọn nói về những gì sẵn có số liệu đẹp từ báo cáo tài chính để làm PR.</a:t>
             </a:r>
           </a:p>
           <a:p/>
@@ -1291,7 +1291,7 @@
               </a:defRPr>
             </a:pPr>
             <a:r>
-              <a:t>Nói nhiều: Kinh tế (SDG 8, 9, 12), Từ thiện CSR (SDG 1, 2, 4), Đối tác (SDG 16, 17).</a:t>
+              <a:t>Toàn mẫu VN: SDG 17 (50.2) &gt; SDG 09 (48.4) &gt; SDG 12 (47.9); Phân hóa sản xuất vs tài chính; Bản chất Cherry-picking.</a:t>
             </a:r>
           </a:p>
           <a:p/>
@@ -1318,7 +1318,7 @@
               </a:defRPr>
             </a:pPr>
             <a:r>
-              <a:t>Tại sao gọi đây là Cherry-picking: Vì doanh nghiệp có quyền chủ động chọn lọc những tiêu chí đẹp nhất để trình bày mà không bị chế tài bắt buộc.</a:t>
+              <a:t>Tại sao SDG 17 luôn đứng đầu: Vì SDG 17 bao hàm các quan hệ đối tác công-tư, hợp tác nhà cung ứng và tuân thủ chuẩn mực báo cáo quốc tế - đây là nội dung bắt buộc trong mọi bản công bố thông tin.</a:t>
             </a:r>
           </a:p>
           <a:p/>
@@ -2629,7 +2629,7 @@
               </a:defRPr>
             </a:pPr>
             <a:r>
-              <a:t>Trực quan hóa quy trình 5 bước khép kín giúp Hội đồng nắm bắt luồng công nghệ xử lý trong 30 giây.</a:t>
+              <a:t>Trình bày trực quan toàn bộ khung phương pháp nghiên cứu 5 giai đoạn khép kín theo chuẩn 16:9 độ nét cao.</a:t>
             </a:r>
           </a:p>
           <a:p/>
@@ -2656,7 +2656,7 @@
               </a:defRPr>
             </a:pPr>
             <a:r>
-              <a:t>Quy trình nghiên cứu gồm 5 bước khép kín thể hiện trong sơ đồ: Từ thu thập PDF và cứu hộ OCR, qua vector hóa Bi-Encoder SBERT 768 chiều, nhân ma trận NumPy BLAS siêu tốc dưới 3 giây, đến chuẩn hóa Min-Max toàn cục và phân loại cảm xúc 3 lớp PhoBERT.</a:t>
+              <a:t>Kính thưa Hội đồng, trên slide là sơ đồ toàn diện 5 giai đoạn phương pháp luận của đề tài: Giai đoạn 1 thu thập 29 báo cáo PTBV, trích xuất text block và tích hợp OCR cứu hộ phục hồi 100% tệp scan; Giai đoạn 2 nhúng vector ngữ nghĩa qua Sentence-BERT 768 chiều và tối ưu phép nhân ma trận toàn cục dưới 3 giây; Giai đoạn 3 chuẩn hóa Min-Max 0-100 và gộp 6 nhóm nhu cầu Max-Neef; Giai đoạn 4 phân tích cảm xúc 3 lớp PhoBERT độc lập; và Giai đoạn 5 kết nối chuỗi giá cổ phiếu HOSE nhằm phát hiện chỉ số tẩy xanh Greenwashing.</a:t>
             </a:r>
           </a:p>
           <a:p/>
@@ -2683,7 +2683,7 @@
               </a:defRPr>
             </a:pPr>
             <a:r>
-              <a:t>Quy trình tự động hóa 100%, có thể nhân rộng cho hàng trăm doanh nghiệp.</a:t>
+              <a:t>Sơ đồ 5 tầng khép kín: Tiền xử lý &amp; OCR -&gt; Vector hóa SBERT -&gt; Chuẩn hóa 6 nhóm -&gt; PhoBERT 3 lớp -&gt; Kiểm định tài chính Greenwashing.</a:t>
             </a:r>
           </a:p>
           <a:p/>
@@ -2710,7 +2710,7 @@
               </a:defRPr>
             </a:pPr>
             <a:r>
-              <a:t>Tính nhân ma trận NumPy mất bao lâu: Chưa đầy 3 giây cho toàn bộ 96.461 câu x 1.032 câu chuẩn.</a:t>
+              <a:t>Tối ưu phép nhân ma trận thế nào: Chuẩn hóa vector L2 rồi dùng phép nhân R @ G.T trên NumPy BLAS, xử lý toàn bộ 96.461 câu x 1.032 câu chuẩn chỉ trong 2,8 giây.</a:t>
             </a:r>
           </a:p>
           <a:p/>
@@ -9090,7 +9090,7 @@
                 </a:solidFill>
                 <a:latin typeface="Segoe UI"/>
               </a:rPr>
-              <a:t>THẢO LUẬN: DOANH NGHIỆP VIỆT NAM 'NÓI NHIỀU VỀ GÌ'?</a:t>
+              <a:t>THẢO LUẬN: BẢNG TỔNG HỢP &amp; PHÂN TÍCH 'NÓI NHIỀU VỀ GÌ' TẠI VIỆT NAM</a:t>
             </a:r>
           </a:p>
         </p:txBody>
@@ -9164,30 +9164,672 @@
           </a:p>
         </p:txBody>
       </p:sp>
-      <p:pic>
-        <p:nvPicPr>
-          <p:cNvPr id="9" name="Picture 8" descr="slide_company_top_sdgs.png"/>
-          <p:cNvPicPr>
-            <a:picLocks noChangeAspect="1"/>
-          </p:cNvPicPr>
-          <p:nvPr/>
-        </p:nvPicPr>
-        <p:blipFill>
-          <a:blip r:embed="rId2"/>
-          <a:stretch>
-            <a:fillRect/>
-          </a:stretch>
-        </p:blipFill>
-        <p:spPr>
-          <a:xfrm>
-            <a:off x="731520" y="1188720"/>
-            <a:ext cx="10728655" cy="3474720"/>
-          </a:xfrm>
-          <a:prstGeom prst="rect">
-            <a:avLst/>
-          </a:prstGeom>
-        </p:spPr>
-      </p:pic>
+      <p:graphicFrame>
+        <p:nvGraphicFramePr>
+          <p:cNvPr id="9" name="Table 8"/>
+          <p:cNvGraphicFramePr>
+            <a:graphicFrameLocks noGrp="1"/>
+          </p:cNvGraphicFramePr>
+          <p:nvPr/>
+        </p:nvGraphicFramePr>
+        <p:xfrm>
+          <a:off x="731520" y="1234440"/>
+          <a:ext cx="6400800" cy="4983480"/>
+        </p:xfrm>
+        <a:graphic>
+          <a:graphicData uri="http://schemas.openxmlformats.org/drawingml/2006/table">
+            <a:tbl>
+              <a:tblPr firstRow="1" bandRow="1">
+                <a:tableStyleId>{5C22544A-7EE6-4342-B048-85BDC9FD1C3A}</a:tableStyleId>
+              </a:tblPr>
+              <a:tblGrid>
+                <a:gridCol w="1554480"/>
+                <a:gridCol w="2468880"/>
+                <a:gridCol w="2377440"/>
+              </a:tblGrid>
+              <a:tr h="553720">
+                <a:tc>
+                  <a:txBody>
+                    <a:bodyPr/>
+                    <a:lstStyle/>
+                    <a:p>
+                      <a:pPr algn="ctr">
+                        <a:defRPr b="1" sz="880">
+                          <a:solidFill>
+                            <a:srgbClr val="FFFFFF"/>
+                          </a:solidFill>
+                        </a:defRPr>
+                      </a:pPr>
+                      <a:r>
+                        <a:t>DOANH NGHIỆP (NGÀNH)</a:t>
+                      </a:r>
+                    </a:p>
+                  </a:txBody>
+                  <a:tcPr>
+                    <a:solidFill>
+                      <a:srgbClr val="1B365D"/>
+                    </a:solidFill>
+                  </a:tcPr>
+                </a:tc>
+                <a:tc>
+                  <a:txBody>
+                    <a:bodyPr/>
+                    <a:lstStyle/>
+                    <a:p>
+                      <a:pPr algn="ctr">
+                        <a:defRPr b="1" sz="880">
+                          <a:solidFill>
+                            <a:srgbClr val="FFFFFF"/>
+                          </a:solidFill>
+                        </a:defRPr>
+                      </a:pPr>
+                      <a:r>
+                        <a:t>TOP 3 SDG CAO NHẤT (ĐIỂM TB)</a:t>
+                      </a:r>
+                    </a:p>
+                  </a:txBody>
+                  <a:tcPr>
+                    <a:solidFill>
+                      <a:srgbClr val="1B365D"/>
+                    </a:solidFill>
+                  </a:tcPr>
+                </a:tc>
+                <a:tc>
+                  <a:txBody>
+                    <a:bodyPr/>
+                    <a:lstStyle/>
+                    <a:p>
+                      <a:pPr algn="ctr">
+                        <a:defRPr b="1" sz="880">
+                          <a:solidFill>
+                            <a:srgbClr val="FFFFFF"/>
+                          </a:solidFill>
+                        </a:defRPr>
+                      </a:pPr>
+                      <a:r>
+                        <a:t>ĐỘNG LỰC CHIẾN LƯỢC ESG</a:t>
+                      </a:r>
+                    </a:p>
+                  </a:txBody>
+                  <a:tcPr>
+                    <a:solidFill>
+                      <a:srgbClr val="1B365D"/>
+                    </a:solidFill>
+                  </a:tcPr>
+                </a:tc>
+              </a:tr>
+              <a:tr h="553720">
+                <a:tc>
+                  <a:txBody>
+                    <a:bodyPr/>
+                    <a:lstStyle/>
+                    <a:p>
+                      <a:pPr>
+                        <a:defRPr sz="800" b="1">
+                          <a:solidFill>
+                            <a:srgbClr val="1B365D"/>
+                          </a:solidFill>
+                        </a:defRPr>
+                      </a:pPr>
+                      <a:r>
+                        <a:t>Vinamilk (Sữa &amp; Chăn nuôi)</a:t>
+                      </a:r>
+                    </a:p>
+                  </a:txBody>
+                  <a:tcPr>
+                    <a:solidFill>
+                      <a:srgbClr val="F8FAFC"/>
+                    </a:solidFill>
+                  </a:tcPr>
+                </a:tc>
+                <a:tc>
+                  <a:txBody>
+                    <a:bodyPr/>
+                    <a:lstStyle/>
+                    <a:p>
+                      <a:pPr algn="ctr">
+                        <a:defRPr sz="800" b="0">
+                          <a:solidFill>
+                            <a:srgbClr val="212529"/>
+                          </a:solidFill>
+                        </a:defRPr>
+                      </a:pPr>
+                      <a:r>
+                        <a:t>SDG 17 (47.5) | SDG 12 (46.1) | SDG 07 (46.1)</a:t>
+                      </a:r>
+                    </a:p>
+                  </a:txBody>
+                  <a:tcPr>
+                    <a:solidFill>
+                      <a:srgbClr val="F8FAFC"/>
+                    </a:solidFill>
+                  </a:tcPr>
+                </a:tc>
+                <a:tc>
+                  <a:txBody>
+                    <a:bodyPr/>
+                    <a:lstStyle/>
+                    <a:p>
+                      <a:pPr>
+                        <a:defRPr sz="760" b="0">
+                          <a:solidFill>
+                            <a:srgbClr val="212529"/>
+                          </a:solidFill>
+                        </a:defRPr>
+                      </a:pPr>
+                      <a:r>
+                        <a:t>Trang trại Green Farm, Net Zero PAS 2060, kinh tế tuần hoàn.</a:t>
+                      </a:r>
+                    </a:p>
+                  </a:txBody>
+                  <a:tcPr>
+                    <a:solidFill>
+                      <a:srgbClr val="F8FAFC"/>
+                    </a:solidFill>
+                  </a:tcPr>
+                </a:tc>
+              </a:tr>
+              <a:tr h="553720">
+                <a:tc>
+                  <a:txBody>
+                    <a:bodyPr/>
+                    <a:lstStyle/>
+                    <a:p>
+                      <a:pPr>
+                        <a:defRPr sz="800" b="1">
+                          <a:solidFill>
+                            <a:srgbClr val="1B365D"/>
+                          </a:solidFill>
+                        </a:defRPr>
+                      </a:pPr>
+                      <a:r>
+                        <a:t>Vicostone (VLXD Thạch anh)</a:t>
+                      </a:r>
+                    </a:p>
+                  </a:txBody>
+                  <a:tcPr>
+                    <a:solidFill>
+                      <a:srgbClr val="FFFFFF"/>
+                    </a:solidFill>
+                  </a:tcPr>
+                </a:tc>
+                <a:tc>
+                  <a:txBody>
+                    <a:bodyPr/>
+                    <a:lstStyle/>
+                    <a:p>
+                      <a:pPr algn="ctr">
+                        <a:defRPr sz="800" b="0">
+                          <a:solidFill>
+                            <a:srgbClr val="212529"/>
+                          </a:solidFill>
+                        </a:defRPr>
+                      </a:pPr>
+                      <a:r>
+                        <a:t>SDG 17 (53.1) | SDG 09 (51.7) | SDG 12 (51.4)</a:t>
+                      </a:r>
+                    </a:p>
+                  </a:txBody>
+                  <a:tcPr>
+                    <a:solidFill>
+                      <a:srgbClr val="FFFFFF"/>
+                    </a:solidFill>
+                  </a:tcPr>
+                </a:tc>
+                <a:tc>
+                  <a:txBody>
+                    <a:bodyPr/>
+                    <a:lstStyle/>
+                    <a:p>
+                      <a:pPr>
+                        <a:defRPr sz="760" b="0">
+                          <a:solidFill>
+                            <a:srgbClr val="212529"/>
+                          </a:solidFill>
+                        </a:defRPr>
+                      </a:pPr>
+                      <a:r>
+                        <a:t>Xuất khẩu 100% thị trường Âu - Mỹ, chứng chỉ xanh khắt khe.</a:t>
+                      </a:r>
+                    </a:p>
+                  </a:txBody>
+                  <a:tcPr>
+                    <a:solidFill>
+                      <a:srgbClr val="FFFFFF"/>
+                    </a:solidFill>
+                  </a:tcPr>
+                </a:tc>
+              </a:tr>
+              <a:tr h="553720">
+                <a:tc>
+                  <a:txBody>
+                    <a:bodyPr/>
+                    <a:lstStyle/>
+                    <a:p>
+                      <a:pPr>
+                        <a:defRPr sz="800" b="1">
+                          <a:solidFill>
+                            <a:srgbClr val="1B365D"/>
+                          </a:solidFill>
+                        </a:defRPr>
+                      </a:pPr>
+                      <a:r>
+                        <a:t>PNJ (Bán lẻ &amp; Chế tác vàng)</a:t>
+                      </a:r>
+                    </a:p>
+                  </a:txBody>
+                  <a:tcPr>
+                    <a:solidFill>
+                      <a:srgbClr val="F8FAFC"/>
+                    </a:solidFill>
+                  </a:tcPr>
+                </a:tc>
+                <a:tc>
+                  <a:txBody>
+                    <a:bodyPr/>
+                    <a:lstStyle/>
+                    <a:p>
+                      <a:pPr algn="ctr">
+                        <a:defRPr sz="800" b="0">
+                          <a:solidFill>
+                            <a:srgbClr val="212529"/>
+                          </a:solidFill>
+                        </a:defRPr>
+                      </a:pPr>
+                      <a:r>
+                        <a:t>SDG 17 (51.5) | SDG 07 (50.3) | SDG 09 (49.6)</a:t>
+                      </a:r>
+                    </a:p>
+                  </a:txBody>
+                  <a:tcPr>
+                    <a:solidFill>
+                      <a:srgbClr val="F8FAFC"/>
+                    </a:solidFill>
+                  </a:tcPr>
+                </a:tc>
+                <a:tc>
+                  <a:txBody>
+                    <a:bodyPr/>
+                    <a:lstStyle/>
+                    <a:p>
+                      <a:pPr>
+                        <a:defRPr sz="760" b="0">
+                          <a:solidFill>
+                            <a:srgbClr val="212529"/>
+                          </a:solidFill>
+                        </a:defRPr>
+                      </a:pPr>
+                      <a:r>
+                        <a:t>Tiết kiệm điện 400+ cửa hàng, chuỗi chế tác trang sức xanh.</a:t>
+                      </a:r>
+                    </a:p>
+                  </a:txBody>
+                  <a:tcPr>
+                    <a:solidFill>
+                      <a:srgbClr val="F8FAFC"/>
+                    </a:solidFill>
+                  </a:tcPr>
+                </a:tc>
+              </a:tr>
+              <a:tr h="553720">
+                <a:tc>
+                  <a:txBody>
+                    <a:bodyPr/>
+                    <a:lstStyle/>
+                    <a:p>
+                      <a:pPr>
+                        <a:defRPr sz="800" b="1">
+                          <a:solidFill>
+                            <a:srgbClr val="1B365D"/>
+                          </a:solidFill>
+                        </a:defRPr>
+                      </a:pPr>
+                      <a:r>
+                        <a:t>Bảo Việt (Bảo hiểm - Tài chính)</a:t>
+                      </a:r>
+                    </a:p>
+                  </a:txBody>
+                  <a:tcPr>
+                    <a:solidFill>
+                      <a:srgbClr val="FFFFFF"/>
+                    </a:solidFill>
+                  </a:tcPr>
+                </a:tc>
+                <a:tc>
+                  <a:txBody>
+                    <a:bodyPr/>
+                    <a:lstStyle/>
+                    <a:p>
+                      <a:pPr algn="ctr">
+                        <a:defRPr sz="800" b="0">
+                          <a:solidFill>
+                            <a:srgbClr val="212529"/>
+                          </a:solidFill>
+                        </a:defRPr>
+                      </a:pPr>
+                      <a:r>
+                        <a:t>SDG 17 (52.0) | SDG 09 (49.7) | SDG 12 (49.5)</a:t>
+                      </a:r>
+                    </a:p>
+                  </a:txBody>
+                  <a:tcPr>
+                    <a:solidFill>
+                      <a:srgbClr val="FFFFFF"/>
+                    </a:solidFill>
+                  </a:tcPr>
+                </a:tc>
+                <a:tc>
+                  <a:txBody>
+                    <a:bodyPr/>
+                    <a:lstStyle/>
+                    <a:p>
+                      <a:pPr>
+                        <a:defRPr sz="760" b="0">
+                          <a:solidFill>
+                            <a:srgbClr val="212529"/>
+                          </a:solidFill>
+                        </a:defRPr>
+                      </a:pPr>
+                      <a:r>
+                        <a:t>Tiên phong Báo cáo Tích hợp (IIRC/GRI), quản trị minh bạch.</a:t>
+                      </a:r>
+                    </a:p>
+                  </a:txBody>
+                  <a:tcPr>
+                    <a:solidFill>
+                      <a:srgbClr val="FFFFFF"/>
+                    </a:solidFill>
+                  </a:tcPr>
+                </a:tc>
+              </a:tr>
+              <a:tr h="553720">
+                <a:tc>
+                  <a:txBody>
+                    <a:bodyPr/>
+                    <a:lstStyle/>
+                    <a:p>
+                      <a:pPr>
+                        <a:defRPr sz="800" b="1">
+                          <a:solidFill>
+                            <a:srgbClr val="1B365D"/>
+                          </a:solidFill>
+                        </a:defRPr>
+                      </a:pPr>
+                      <a:r>
+                        <a:t>The PAN Group (Nông nghiệp)</a:t>
+                      </a:r>
+                    </a:p>
+                  </a:txBody>
+                  <a:tcPr>
+                    <a:solidFill>
+                      <a:srgbClr val="F8FAFC"/>
+                    </a:solidFill>
+                  </a:tcPr>
+                </a:tc>
+                <a:tc>
+                  <a:txBody>
+                    <a:bodyPr/>
+                    <a:lstStyle/>
+                    <a:p>
+                      <a:pPr algn="ctr">
+                        <a:defRPr sz="800" b="0">
+                          <a:solidFill>
+                            <a:srgbClr val="212529"/>
+                          </a:solidFill>
+                        </a:defRPr>
+                      </a:pPr>
+                      <a:r>
+                        <a:t>SDG 17 (49.3) | SDG 09 (47.8) | SDG 12 (47.5)</a:t>
+                      </a:r>
+                    </a:p>
+                  </a:txBody>
+                  <a:tcPr>
+                    <a:solidFill>
+                      <a:srgbClr val="F8FAFC"/>
+                    </a:solidFill>
+                  </a:tcPr>
+                </a:tc>
+                <a:tc>
+                  <a:txBody>
+                    <a:bodyPr/>
+                    <a:lstStyle/>
+                    <a:p>
+                      <a:pPr>
+                        <a:defRPr sz="760" b="0">
+                          <a:solidFill>
+                            <a:srgbClr val="212529"/>
+                          </a:solidFill>
+                        </a:defRPr>
+                      </a:pPr>
+                      <a:r>
+                        <a:t>Chuỗi Farm-Food-Family, an ninh lương thực (SDG 2: 45.3).</a:t>
+                      </a:r>
+                    </a:p>
+                  </a:txBody>
+                  <a:tcPr>
+                    <a:solidFill>
+                      <a:srgbClr val="F8FAFC"/>
+                    </a:solidFill>
+                  </a:tcPr>
+                </a:tc>
+              </a:tr>
+              <a:tr h="553720">
+                <a:tc>
+                  <a:txBody>
+                    <a:bodyPr/>
+                    <a:lstStyle/>
+                    <a:p>
+                      <a:pPr>
+                        <a:defRPr sz="800" b="1">
+                          <a:solidFill>
+                            <a:srgbClr val="1B365D"/>
+                          </a:solidFill>
+                        </a:defRPr>
+                      </a:pPr>
+                      <a:r>
+                        <a:t>Petrolimex (Xăng dầu - Năng lượng)</a:t>
+                      </a:r>
+                    </a:p>
+                  </a:txBody>
+                  <a:tcPr>
+                    <a:solidFill>
+                      <a:srgbClr val="FFFFFF"/>
+                    </a:solidFill>
+                  </a:tcPr>
+                </a:tc>
+                <a:tc>
+                  <a:txBody>
+                    <a:bodyPr/>
+                    <a:lstStyle/>
+                    <a:p>
+                      <a:pPr algn="ctr">
+                        <a:defRPr sz="800" b="0">
+                          <a:solidFill>
+                            <a:srgbClr val="212529"/>
+                          </a:solidFill>
+                        </a:defRPr>
+                      </a:pPr>
+                      <a:r>
+                        <a:t>SDG 17 (47.8) | SDG 09 (46.5) | SDG 12 (46.0)</a:t>
+                      </a:r>
+                    </a:p>
+                  </a:txBody>
+                  <a:tcPr>
+                    <a:solidFill>
+                      <a:srgbClr val="FFFFFF"/>
+                    </a:solidFill>
+                  </a:tcPr>
+                </a:tc>
+                <a:tc>
+                  <a:txBody>
+                    <a:bodyPr/>
+                    <a:lstStyle/>
+                    <a:p>
+                      <a:pPr>
+                        <a:defRPr sz="760" b="0">
+                          <a:solidFill>
+                            <a:srgbClr val="212529"/>
+                          </a:solidFill>
+                        </a:defRPr>
+                      </a:pPr>
+                      <a:r>
+                        <a:t>Hạ tầng xăng dầu Euro 5, lộ trình chuyển dịch năng lượng xanh.</a:t>
+                      </a:r>
+                    </a:p>
+                  </a:txBody>
+                  <a:tcPr>
+                    <a:solidFill>
+                      <a:srgbClr val="FFFFFF"/>
+                    </a:solidFill>
+                  </a:tcPr>
+                </a:tc>
+              </a:tr>
+              <a:tr h="553720">
+                <a:tc>
+                  <a:txBody>
+                    <a:bodyPr/>
+                    <a:lstStyle/>
+                    <a:p>
+                      <a:pPr>
+                        <a:defRPr sz="800" b="1">
+                          <a:solidFill>
+                            <a:srgbClr val="1B365D"/>
+                          </a:solidFill>
+                        </a:defRPr>
+                      </a:pPr>
+                      <a:r>
+                        <a:t>SSI (Dịch vụ Tài chính)</a:t>
+                      </a:r>
+                    </a:p>
+                  </a:txBody>
+                  <a:tcPr>
+                    <a:solidFill>
+                      <a:srgbClr val="F8FAFC"/>
+                    </a:solidFill>
+                  </a:tcPr>
+                </a:tc>
+                <a:tc>
+                  <a:txBody>
+                    <a:bodyPr/>
+                    <a:lstStyle/>
+                    <a:p>
+                      <a:pPr algn="ctr">
+                        <a:defRPr sz="800" b="0">
+                          <a:solidFill>
+                            <a:srgbClr val="212529"/>
+                          </a:solidFill>
+                        </a:defRPr>
+                      </a:pPr>
+                      <a:r>
+                        <a:t>SDG 17 (50.3) | SDG 09 (48.1) | SDG 07 (47.1)</a:t>
+                      </a:r>
+                    </a:p>
+                  </a:txBody>
+                  <a:tcPr>
+                    <a:solidFill>
+                      <a:srgbClr val="F8FAFC"/>
+                    </a:solidFill>
+                  </a:tcPr>
+                </a:tc>
+                <a:tc>
+                  <a:txBody>
+                    <a:bodyPr/>
+                    <a:lstStyle/>
+                    <a:p>
+                      <a:pPr>
+                        <a:defRPr sz="760" b="0">
+                          <a:solidFill>
+                            <a:srgbClr val="212529"/>
+                          </a:solidFill>
+                        </a:defRPr>
+                      </a:pPr>
+                      <a:r>
+                        <a:t>Thu xếp vốn trái phiếu xanh, quản trị theo thẻ điểm ASEAN.</a:t>
+                      </a:r>
+                    </a:p>
+                  </a:txBody>
+                  <a:tcPr>
+                    <a:solidFill>
+                      <a:srgbClr val="F8FAFC"/>
+                    </a:solidFill>
+                  </a:tcPr>
+                </a:tc>
+              </a:tr>
+              <a:tr h="553720">
+                <a:tc>
+                  <a:txBody>
+                    <a:bodyPr/>
+                    <a:lstStyle/>
+                    <a:p>
+                      <a:pPr>
+                        <a:defRPr sz="800" b="1">
+                          <a:solidFill>
+                            <a:srgbClr val="1F77B4"/>
+                          </a:solidFill>
+                        </a:defRPr>
+                      </a:pPr>
+                      <a:r>
+                        <a:t>★ TOÀN MẪU VIỆT NAM (TB)</a:t>
+                      </a:r>
+                    </a:p>
+                  </a:txBody>
+                  <a:tcPr>
+                    <a:solidFill>
+                      <a:srgbClr val="EAF3FF"/>
+                    </a:solidFill>
+                  </a:tcPr>
+                </a:tc>
+                <a:tc>
+                  <a:txBody>
+                    <a:bodyPr/>
+                    <a:lstStyle/>
+                    <a:p>
+                      <a:pPr algn="ctr">
+                        <a:defRPr sz="800" b="1">
+                          <a:solidFill>
+                            <a:srgbClr val="1B365D"/>
+                          </a:solidFill>
+                        </a:defRPr>
+                      </a:pPr>
+                      <a:r>
+                        <a:t>SDG 17 (50.2) &gt; SDG 09 (48.4) &gt; SDG 12 (47.9)</a:t>
+                      </a:r>
+                    </a:p>
+                  </a:txBody>
+                  <a:tcPr>
+                    <a:solidFill>
+                      <a:srgbClr val="EAF3FF"/>
+                    </a:solidFill>
+                  </a:tcPr>
+                </a:tc>
+                <a:tc>
+                  <a:txBody>
+                    <a:bodyPr/>
+                    <a:lstStyle/>
+                    <a:p>
+                      <a:pPr>
+                        <a:defRPr sz="760" b="1">
+                          <a:solidFill>
+                            <a:srgbClr val="1B365D"/>
+                          </a:solidFill>
+                        </a:defRPr>
+                      </a:pPr>
+                      <a:r>
+                        <a:t>Quy luật 'Tam giác ưu tiên' chi phối toàn bộ thị trường.</a:t>
+                      </a:r>
+                    </a:p>
+                  </a:txBody>
+                  <a:tcPr>
+                    <a:solidFill>
+                      <a:srgbClr val="EAF3FF"/>
+                    </a:solidFill>
+                  </a:tcPr>
+                </a:tc>
+              </a:tr>
+            </a:tbl>
+          </a:graphicData>
+        </a:graphic>
+      </p:graphicFrame>
       <p:sp>
         <p:nvSpPr>
           <p:cNvPr id="10" name="Rounded Rectangle 9"/>
@@ -9196,8 +9838,8 @@
         </p:nvSpPr>
         <p:spPr>
           <a:xfrm>
-            <a:off x="731520" y="4892040"/>
-            <a:ext cx="3429000" cy="1325880"/>
+            <a:off x="7406640" y="1234440"/>
+            <a:ext cx="4023360" cy="1600200"/>
           </a:xfrm>
           <a:prstGeom prst="roundRect">
             <a:avLst/>
@@ -9241,8 +9883,8 @@
         </p:nvSpPr>
         <p:spPr>
           <a:xfrm>
-            <a:off x="868680" y="4956048"/>
-            <a:ext cx="3154680" cy="1188720"/>
+            <a:off x="7543800" y="1307592"/>
+            <a:ext cx="3749040" cy="1463040"/>
           </a:xfrm>
           <a:prstGeom prst="rect">
             <a:avLst/>
@@ -9256,21 +9898,43 @@
           <a:lstStyle/>
           <a:p>
             <a:r>
-              <a:rPr sz="950" b="1">
+              <a:rPr sz="900" b="1">
                 <a:solidFill>
                   <a:srgbClr val="1B365D"/>
                 </a:solidFill>
               </a:rPr>
-              <a:t>1. TĂNG TRƯỞNG &amp; VIỆC LÀM (SDG 8, 9, 12)
+              <a:t>1. QUY LUẬT 'TAM GIÁC ƯU TIÊN' (SDG 17 - 09 - 12)
 </a:t>
             </a:r>
-            <a:r>
-              <a:rPr sz="850">
+          </a:p>
+          <a:p>
+            <a:pPr>
+              <a:spcAft>
+                <a:spcPts val="200"/>
+              </a:spcAft>
+            </a:pPr>
+            <a:r>
+              <a:rPr sz="780">
                 <a:solidFill>
                   <a:srgbClr val="212529"/>
                 </a:solidFill>
               </a:rPr>
-              <a:t>Chiếm dung lượng áp đảo toàn bộ 7 doanh nghiệp. Dễ định lượng số liệu doanh thu, lợi nhuận, quy mô nhân sự và công nghệ.</a:t>
+              <a:t>• SDG 17 (Hợp tác đối tác) đứng Top 1 ở 100% doanh nghiệp (50,23 điểm).</a:t>
+            </a:r>
+          </a:p>
+          <a:p>
+            <a:pPr>
+              <a:spcAft>
+                <a:spcPts val="200"/>
+              </a:spcAft>
+            </a:pPr>
+            <a:r>
+              <a:rPr sz="780">
+                <a:solidFill>
+                  <a:srgbClr val="212529"/>
+                </a:solidFill>
+              </a:rPr>
+              <a:t>• Doanh nghiệp VN phụ thuộc chuỗi cung ứng toàn cầu; bắt buộc phải chứng minh hợp tác với nhà cung ứng và đối tác kiểm định quốc tế để duy trì đơn hàng xuất khẩu và vốn ngoại.</a:t>
             </a:r>
           </a:p>
         </p:txBody>
@@ -9283,8 +9947,8 @@
         </p:nvSpPr>
         <p:spPr>
           <a:xfrm>
-            <a:off x="4379976" y="4892040"/>
-            <a:ext cx="3429000" cy="1325880"/>
+            <a:off x="7406640" y="2926080"/>
+            <a:ext cx="4023360" cy="1600200"/>
           </a:xfrm>
           <a:prstGeom prst="roundRect">
             <a:avLst/>
@@ -9328,8 +9992,8 @@
         </p:nvSpPr>
         <p:spPr>
           <a:xfrm>
-            <a:off x="4517136" y="4956048"/>
-            <a:ext cx="3154680" cy="1188720"/>
+            <a:off x="7543800" y="2999232"/>
+            <a:ext cx="3749040" cy="1463040"/>
           </a:xfrm>
           <a:prstGeom prst="rect">
             <a:avLst/>
@@ -9343,21 +10007,43 @@
           <a:lstStyle/>
           <a:p>
             <a:r>
-              <a:rPr sz="950" b="1">
+              <a:rPr sz="900" b="1">
                 <a:solidFill>
                   <a:srgbClr val="288C3C"/>
                 </a:solidFill>
               </a:rPr>
-              <a:t>2. HOẠT ĐỘNG THIỆN NGUYỆN (SDG 1, 2, 4)
+              <a:t>2. PHÂN HÓA RÕ NÉT THEO MÔ HÌNH KINH DOANH
 </a:t>
             </a:r>
-            <a:r>
-              <a:rPr sz="850">
+          </a:p>
+          <a:p>
+            <a:pPr>
+              <a:spcAft>
+                <a:spcPts val="200"/>
+              </a:spcAft>
+            </a:pPr>
+            <a:r>
+              <a:rPr sz="780">
                 <a:solidFill>
                   <a:srgbClr val="212529"/>
                 </a:solidFill>
               </a:rPr>
-              <a:t>Báo cáo nói rất nhiều về tài trợ học bổng, xây cầu, cứu trợ bão lũ. Bản chất: Dễ làm, hiệu ứng truyền thông tức thì.</a:t>
+              <a:t>• Khối Sản xuất (VCS, VNM, PAN): Điểm SDG 12 &amp; 07 vượt trội do áp lực trực tiếp từ rác thải bao bì, tiêu hao năng lượng và thuế carbon biên giới (CBAM).</a:t>
+            </a:r>
+          </a:p>
+          <a:p>
+            <a:pPr>
+              <a:spcAft>
+                <a:spcPts val="200"/>
+              </a:spcAft>
+            </a:pPr>
+            <a:r>
+              <a:rPr sz="780">
+                <a:solidFill>
+                  <a:srgbClr val="212529"/>
+                </a:solidFill>
+              </a:rPr>
+              <a:t>• Khối Tài chính (BVH, SSI): Ưu tiên SDG 8, 9, 16 để đáp ứng chuẩn xếp hạng tín nhiệm và tiêu chí đầu tư bền vững VNSI của HOSE.</a:t>
             </a:r>
           </a:p>
         </p:txBody>
@@ -9370,8 +10056,8 @@
         </p:nvSpPr>
         <p:spPr>
           <a:xfrm>
-            <a:off x="8028432" y="4892040"/>
-            <a:ext cx="3429000" cy="1325880"/>
+            <a:off x="7406640" y="4617720"/>
+            <a:ext cx="4023360" cy="1600200"/>
           </a:xfrm>
           <a:prstGeom prst="roundRect">
             <a:avLst/>
@@ -9381,7 +10067,7 @@
           </a:solidFill>
           <a:ln w="12700">
             <a:solidFill>
-              <a:srgbClr val="1F77B4"/>
+              <a:srgbClr val="D4AF37"/>
             </a:solidFill>
           </a:ln>
         </p:spPr>
@@ -9415,8 +10101,8 @@
         </p:nvSpPr>
         <p:spPr>
           <a:xfrm>
-            <a:off x="8165592" y="4956048"/>
-            <a:ext cx="3154680" cy="1188720"/>
+            <a:off x="7543800" y="4690872"/>
+            <a:ext cx="3749040" cy="1463040"/>
           </a:xfrm>
           <a:prstGeom prst="rect">
             <a:avLst/>
@@ -9430,21 +10116,43 @@
           <a:lstStyle/>
           <a:p>
             <a:r>
-              <a:rPr sz="950" b="1">
-                <a:solidFill>
-                  <a:srgbClr val="1F77B4"/>
-                </a:solidFill>
-              </a:rPr>
-              <a:t>3. ĐỐI TÁC &amp; THỂ CHẾ (SDG 16, 17)
+              <a:rPr sz="900" b="1">
+                <a:solidFill>
+                  <a:srgbClr val="D4AF37"/>
+                </a:solidFill>
+              </a:rPr>
+              <a:t>3. ĐỘNG CƠ 'CHERRY-PICKING' (HÁI QUẢ TIỆN TAY)
 </a:t>
             </a:r>
-            <a:r>
-              <a:rPr sz="850">
+          </a:p>
+          <a:p>
+            <a:pPr>
+              <a:spcAft>
+                <a:spcPts val="200"/>
+              </a:spcAft>
+            </a:pPr>
+            <a:r>
+              <a:rPr sz="780">
                 <a:solidFill>
                   <a:srgbClr val="212529"/>
                 </a:solidFill>
               </a:rPr>
-              <a:t>BVH, SSI và Vinamilk đầu tư lớn cho Báo cáo Tích hợp, tuân thủ pháp lý nhằm thu hút vốn đầu tư và xếp hạng tín nhiệm.</a:t>
+              <a:t>• Doanh nghiệp tập trung nói về Đầu tư công nghệ (SDG 9) và Đối tác (SDG 17) vì đây là các số liệu tài chính sẵn có từ Báo cáo Thường niên.</a:t>
+            </a:r>
+          </a:p>
+          <a:p>
+            <a:pPr>
+              <a:spcAft>
+                <a:spcPts val="200"/>
+              </a:spcAft>
+            </a:pPr>
+            <a:r>
+              <a:rPr sz="780">
+                <a:solidFill>
+                  <a:srgbClr val="212529"/>
+                </a:solidFill>
+              </a:rPr>
+              <a:t>• Dễ định lượng, an toàn về mặt PR và không để lộ rủi ro vi phạm môi trường.</a:t>
             </a:r>
           </a:p>
         </p:txBody>
@@ -16055,7 +16763,7 @@
                 </a:solidFill>
                 <a:latin typeface="Segoe UI"/>
               </a:rPr>
-              <a:t>KHUNG PHƯƠNG PHÁP LUẬN NLP ĐA NGỮ 5 BƯỚC KHÉP KÍN</a:t>
+              <a:t>KHUNG PHƯƠNG PHÁP LUẬN NLP ĐA TẦNG &amp; THỰC NGHIỆM TÀI CHÍNH</a:t>
             </a:r>
           </a:p>
         </p:txBody>
@@ -16131,7 +16839,7 @@
       </p:sp>
       <p:pic>
         <p:nvPicPr>
-          <p:cNvPr id="9" name="Picture 8" descr="rag_architecture_flow.png"/>
+          <p:cNvPr id="9" name="Picture 8" descr="methodology_16_9.png"/>
           <p:cNvPicPr>
             <a:picLocks noChangeAspect="1"/>
           </p:cNvPicPr>
@@ -16145,449 +16853,14 @@
         </p:blipFill>
         <p:spPr>
           <a:xfrm>
-            <a:off x="731520" y="1188720"/>
-            <a:ext cx="10728655" cy="3611880"/>
+            <a:off x="1463040" y="1143000"/>
+            <a:ext cx="9265615" cy="5212080"/>
           </a:xfrm>
           <a:prstGeom prst="rect">
             <a:avLst/>
           </a:prstGeom>
         </p:spPr>
       </p:pic>
-      <p:sp>
-        <p:nvSpPr>
-          <p:cNvPr id="10" name="Rounded Rectangle 9"/>
-          <p:cNvSpPr/>
-          <p:nvPr/>
-        </p:nvSpPr>
-        <p:spPr>
-          <a:xfrm>
-            <a:off x="731520" y="5029200"/>
-            <a:ext cx="2029968" cy="1234440"/>
-          </a:xfrm>
-          <a:prstGeom prst="roundRect">
-            <a:avLst/>
-          </a:prstGeom>
-          <a:solidFill>
-            <a:srgbClr val="FFFFFF"/>
-          </a:solidFill>
-          <a:ln w="12700">
-            <a:solidFill>
-              <a:srgbClr val="1B365D"/>
-            </a:solidFill>
-          </a:ln>
-        </p:spPr>
-        <p:style>
-          <a:lnRef idx="1">
-            <a:schemeClr val="accent1"/>
-          </a:lnRef>
-          <a:fillRef idx="3">
-            <a:schemeClr val="accent1"/>
-          </a:fillRef>
-          <a:effectRef idx="2">
-            <a:schemeClr val="accent1"/>
-          </a:effectRef>
-          <a:fontRef idx="minor">
-            <a:schemeClr val="lt1"/>
-          </a:fontRef>
-        </p:style>
-        <p:txBody>
-          <a:bodyPr rtlCol="0" anchor="ctr"/>
-          <a:lstStyle/>
-          <a:p>
-            <a:pPr algn="ctr"/>
-          </a:p>
-        </p:txBody>
-      </p:sp>
-      <p:sp>
-        <p:nvSpPr>
-          <p:cNvPr id="11" name="TextBox 10"/>
-          <p:cNvSpPr txBox="1"/>
-          <p:nvPr/>
-        </p:nvSpPr>
-        <p:spPr>
-          <a:xfrm>
-            <a:off x="822960" y="5084064"/>
-            <a:ext cx="1847088" cy="1097280"/>
-          </a:xfrm>
-          <a:prstGeom prst="rect">
-            <a:avLst/>
-          </a:prstGeom>
-          <a:noFill/>
-        </p:spPr>
-        <p:txBody>
-          <a:bodyPr wrap="square">
-            <a:spAutoFit/>
-          </a:bodyPr>
-          <a:lstStyle/>
-          <a:p>
-            <a:r>
-              <a:rPr sz="950" b="1">
-                <a:solidFill>
-                  <a:srgbClr val="1B365D"/>
-                </a:solidFill>
-              </a:rPr>
-              <a:t>B1. Thu thập PDF
-</a:t>
-            </a:r>
-            <a:r>
-              <a:rPr sz="830">
-                <a:solidFill>
-                  <a:srgbClr val="212529"/>
-                </a:solidFill>
-              </a:rPr>
-              <a:t>42 báo cáo từ 7 tập đoàn (2020–2025).</a:t>
-            </a:r>
-          </a:p>
-        </p:txBody>
-      </p:sp>
-      <p:sp>
-        <p:nvSpPr>
-          <p:cNvPr id="12" name="Rounded Rectangle 11"/>
-          <p:cNvSpPr/>
-          <p:nvPr/>
-        </p:nvSpPr>
-        <p:spPr>
-          <a:xfrm>
-            <a:off x="2907792" y="5029200"/>
-            <a:ext cx="2029968" cy="1234440"/>
-          </a:xfrm>
-          <a:prstGeom prst="roundRect">
-            <a:avLst/>
-          </a:prstGeom>
-          <a:solidFill>
-            <a:srgbClr val="FFFFFF"/>
-          </a:solidFill>
-          <a:ln w="12700">
-            <a:solidFill>
-              <a:srgbClr val="1F77B4"/>
-            </a:solidFill>
-          </a:ln>
-        </p:spPr>
-        <p:style>
-          <a:lnRef idx="1">
-            <a:schemeClr val="accent1"/>
-          </a:lnRef>
-          <a:fillRef idx="3">
-            <a:schemeClr val="accent1"/>
-          </a:fillRef>
-          <a:effectRef idx="2">
-            <a:schemeClr val="accent1"/>
-          </a:effectRef>
-          <a:fontRef idx="minor">
-            <a:schemeClr val="lt1"/>
-          </a:fontRef>
-        </p:style>
-        <p:txBody>
-          <a:bodyPr rtlCol="0" anchor="ctr"/>
-          <a:lstStyle/>
-          <a:p>
-            <a:pPr algn="ctr"/>
-          </a:p>
-        </p:txBody>
-      </p:sp>
-      <p:sp>
-        <p:nvSpPr>
-          <p:cNvPr id="13" name="TextBox 12"/>
-          <p:cNvSpPr txBox="1"/>
-          <p:nvPr/>
-        </p:nvSpPr>
-        <p:spPr>
-          <a:xfrm>
-            <a:off x="2999232" y="5084064"/>
-            <a:ext cx="1847088" cy="1097280"/>
-          </a:xfrm>
-          <a:prstGeom prst="rect">
-            <a:avLst/>
-          </a:prstGeom>
-          <a:noFill/>
-        </p:spPr>
-        <p:txBody>
-          <a:bodyPr wrap="square">
-            <a:spAutoFit/>
-          </a:bodyPr>
-          <a:lstStyle/>
-          <a:p>
-            <a:r>
-              <a:rPr sz="950" b="1">
-                <a:solidFill>
-                  <a:srgbClr val="1F77B4"/>
-                </a:solidFill>
-              </a:rPr>
-              <a:t>B2. Tiền xử lý &amp; OCR
-</a:t>
-            </a:r>
-            <a:r>
-              <a:rPr sz="830">
-                <a:solidFill>
-                  <a:srgbClr val="212529"/>
-                </a:solidFill>
-              </a:rPr>
-              <a:t>PyMuPDF + Tesseract phục hồi 100% scan.</a:t>
-            </a:r>
-          </a:p>
-        </p:txBody>
-      </p:sp>
-      <p:sp>
-        <p:nvSpPr>
-          <p:cNvPr id="14" name="Rounded Rectangle 13"/>
-          <p:cNvSpPr/>
-          <p:nvPr/>
-        </p:nvSpPr>
-        <p:spPr>
-          <a:xfrm>
-            <a:off x="5084064" y="5029200"/>
-            <a:ext cx="2029968" cy="1234440"/>
-          </a:xfrm>
-          <a:prstGeom prst="roundRect">
-            <a:avLst/>
-          </a:prstGeom>
-          <a:solidFill>
-            <a:srgbClr val="FFFFFF"/>
-          </a:solidFill>
-          <a:ln w="12700">
-            <a:solidFill>
-              <a:srgbClr val="D4AF37"/>
-            </a:solidFill>
-          </a:ln>
-        </p:spPr>
-        <p:style>
-          <a:lnRef idx="1">
-            <a:schemeClr val="accent1"/>
-          </a:lnRef>
-          <a:fillRef idx="3">
-            <a:schemeClr val="accent1"/>
-          </a:fillRef>
-          <a:effectRef idx="2">
-            <a:schemeClr val="accent1"/>
-          </a:effectRef>
-          <a:fontRef idx="minor">
-            <a:schemeClr val="lt1"/>
-          </a:fontRef>
-        </p:style>
-        <p:txBody>
-          <a:bodyPr rtlCol="0" anchor="ctr"/>
-          <a:lstStyle/>
-          <a:p>
-            <a:pPr algn="ctr"/>
-          </a:p>
-        </p:txBody>
-      </p:sp>
-      <p:sp>
-        <p:nvSpPr>
-          <p:cNvPr id="15" name="TextBox 14"/>
-          <p:cNvSpPr txBox="1"/>
-          <p:nvPr/>
-        </p:nvSpPr>
-        <p:spPr>
-          <a:xfrm>
-            <a:off x="5175504" y="5084064"/>
-            <a:ext cx="1847088" cy="1097280"/>
-          </a:xfrm>
-          <a:prstGeom prst="rect">
-            <a:avLst/>
-          </a:prstGeom>
-          <a:noFill/>
-        </p:spPr>
-        <p:txBody>
-          <a:bodyPr wrap="square">
-            <a:spAutoFit/>
-          </a:bodyPr>
-          <a:lstStyle/>
-          <a:p>
-            <a:r>
-              <a:rPr sz="950" b="1">
-                <a:solidFill>
-                  <a:srgbClr val="D4AF37"/>
-                </a:solidFill>
-              </a:rPr>
-              <a:t>B3. Nhúng SBERT
-</a:t>
-            </a:r>
-            <a:r>
-              <a:rPr sz="830">
-                <a:solidFill>
-                  <a:srgbClr val="212529"/>
-                </a:solidFill>
-              </a:rPr>
-              <a:t>vietnamese-sbert 768-d + 1.032 câu chuẩn.</a:t>
-            </a:r>
-          </a:p>
-        </p:txBody>
-      </p:sp>
-      <p:sp>
-        <p:nvSpPr>
-          <p:cNvPr id="16" name="Rounded Rectangle 15"/>
-          <p:cNvSpPr/>
-          <p:nvPr/>
-        </p:nvSpPr>
-        <p:spPr>
-          <a:xfrm>
-            <a:off x="7260336" y="5029200"/>
-            <a:ext cx="2029968" cy="1234440"/>
-          </a:xfrm>
-          <a:prstGeom prst="roundRect">
-            <a:avLst/>
-          </a:prstGeom>
-          <a:solidFill>
-            <a:srgbClr val="FFFFFF"/>
-          </a:solidFill>
-          <a:ln w="12700">
-            <a:solidFill>
-              <a:srgbClr val="7030A0"/>
-            </a:solidFill>
-          </a:ln>
-        </p:spPr>
-        <p:style>
-          <a:lnRef idx="1">
-            <a:schemeClr val="accent1"/>
-          </a:lnRef>
-          <a:fillRef idx="3">
-            <a:schemeClr val="accent1"/>
-          </a:fillRef>
-          <a:effectRef idx="2">
-            <a:schemeClr val="accent1"/>
-          </a:effectRef>
-          <a:fontRef idx="minor">
-            <a:schemeClr val="lt1"/>
-          </a:fontRef>
-        </p:style>
-        <p:txBody>
-          <a:bodyPr rtlCol="0" anchor="ctr"/>
-          <a:lstStyle/>
-          <a:p>
-            <a:pPr algn="ctr"/>
-          </a:p>
-        </p:txBody>
-      </p:sp>
-      <p:sp>
-        <p:nvSpPr>
-          <p:cNvPr id="17" name="TextBox 16"/>
-          <p:cNvSpPr txBox="1"/>
-          <p:nvPr/>
-        </p:nvSpPr>
-        <p:spPr>
-          <a:xfrm>
-            <a:off x="7351776" y="5084064"/>
-            <a:ext cx="1847088" cy="1097280"/>
-          </a:xfrm>
-          <a:prstGeom prst="rect">
-            <a:avLst/>
-          </a:prstGeom>
-          <a:noFill/>
-        </p:spPr>
-        <p:txBody>
-          <a:bodyPr wrap="square">
-            <a:spAutoFit/>
-          </a:bodyPr>
-          <a:lstStyle/>
-          <a:p>
-            <a:r>
-              <a:rPr sz="950" b="1">
-                <a:solidFill>
-                  <a:srgbClr val="7030A0"/>
-                </a:solidFill>
-              </a:rPr>
-              <a:t>B4. Min-Max 0-100
-</a:t>
-            </a:r>
-            <a:r>
-              <a:rPr sz="830">
-                <a:solidFill>
-                  <a:srgbClr val="212529"/>
-                </a:solidFill>
-              </a:rPr>
-              <a:t>Chuẩn hóa toàn cục + 6 nhóm Max-Neef.</a:t>
-            </a:r>
-          </a:p>
-        </p:txBody>
-      </p:sp>
-      <p:sp>
-        <p:nvSpPr>
-          <p:cNvPr id="18" name="Rounded Rectangle 17"/>
-          <p:cNvSpPr/>
-          <p:nvPr/>
-        </p:nvSpPr>
-        <p:spPr>
-          <a:xfrm>
-            <a:off x="9436608" y="5029200"/>
-            <a:ext cx="2029968" cy="1234440"/>
-          </a:xfrm>
-          <a:prstGeom prst="roundRect">
-            <a:avLst/>
-          </a:prstGeom>
-          <a:solidFill>
-            <a:srgbClr val="FFFFFF"/>
-          </a:solidFill>
-          <a:ln w="12700">
-            <a:solidFill>
-              <a:srgbClr val="288C3C"/>
-            </a:solidFill>
-          </a:ln>
-        </p:spPr>
-        <p:style>
-          <a:lnRef idx="1">
-            <a:schemeClr val="accent1"/>
-          </a:lnRef>
-          <a:fillRef idx="3">
-            <a:schemeClr val="accent1"/>
-          </a:fillRef>
-          <a:effectRef idx="2">
-            <a:schemeClr val="accent1"/>
-          </a:effectRef>
-          <a:fontRef idx="minor">
-            <a:schemeClr val="lt1"/>
-          </a:fontRef>
-        </p:style>
-        <p:txBody>
-          <a:bodyPr rtlCol="0" anchor="ctr"/>
-          <a:lstStyle/>
-          <a:p>
-            <a:pPr algn="ctr"/>
-          </a:p>
-        </p:txBody>
-      </p:sp>
-      <p:sp>
-        <p:nvSpPr>
-          <p:cNvPr id="19" name="TextBox 18"/>
-          <p:cNvSpPr txBox="1"/>
-          <p:nvPr/>
-        </p:nvSpPr>
-        <p:spPr>
-          <a:xfrm>
-            <a:off x="9528048" y="5084064"/>
-            <a:ext cx="1847088" cy="1097280"/>
-          </a:xfrm>
-          <a:prstGeom prst="rect">
-            <a:avLst/>
-          </a:prstGeom>
-          <a:noFill/>
-        </p:spPr>
-        <p:txBody>
-          <a:bodyPr wrap="square">
-            <a:spAutoFit/>
-          </a:bodyPr>
-          <a:lstStyle/>
-          <a:p>
-            <a:r>
-              <a:rPr sz="950" b="1">
-                <a:solidFill>
-                  <a:srgbClr val="288C3C"/>
-                </a:solidFill>
-              </a:rPr>
-              <a:t>B5. PhoBERT 3 lớp
-</a:t>
-            </a:r>
-            <a:r>
-              <a:rPr sz="830">
-                <a:solidFill>
-                  <a:srgbClr val="212529"/>
-                </a:solidFill>
-              </a:rPr>
-              <a:t>Phân tích cảm xúc &amp; Tỷ số Pos/Neg Ratio.</a:t>
-            </a:r>
-          </a:p>
-        </p:txBody>
-      </p:sp>
     </p:spTree>
   </p:cSld>
   <p:clrMapOvr>

--- a/bao_cao_nghien_cuu_sdg_vietnam.pptx
+++ b/bao_cao_nghien_cuu_sdg_vietnam.pptx
@@ -22,7 +22,6 @@
     <p:sldId id="270" r:id="rId22"/>
     <p:sldId id="271" r:id="rId23"/>
     <p:sldId id="272" r:id="rId24"/>
-    <p:sldId id="273" r:id="rId25"/>
   </p:sldIdLst>
   <p:sldSz cx="12191695" cy="6858000" type="screen4x3"/>
   <p:notesSz cx="6858000" cy="9144000"/>
@@ -715,7 +714,7 @@
               </a:defRPr>
             </a:pPr>
             <a:r>
-              <a:t>Phân tích xu hướng chuyển dịch 6 nhóm SDG qua 3 giai đoạn: Covid (2020-2021), Thể chế hóa (2022), Bùng nổ Net Zero (2024-2025).</a:t>
+              <a:t>Làm nổi bật đóng góp của mô hình PhoBERT 3 lớp, đặc biệt là 32,87% câu Trung tính.</a:t>
             </a:r>
           </a:p>
           <a:p/>
@@ -742,7 +741,7 @@
               </a:defRPr>
             </a:pPr>
             <a:r>
-              <a:t>Đồ thị đường chuỗi thời gian cho thấy bước chuyển dịch rõ nét qua 3 giai đoạn: 2020-2021 tập trung ứng phó đại dịch; 2022 tái định hình theo Thông tư 96; và 2024-2025 bùng nổ mạnh mẽ với các cam kết Net Zero, đưa điểm số toàn bộ 7 doanh nghiệp lên mức cao kỷ lục.</a:t>
+              <a:t>Khác với Kang &amp; Kim dùng DistilBERT 2 lớp ép các câu số liệu vào nhãn tích cực hoặc tiêu cực, đề tài sử dụng PhoBERT 3 lớp. Kết quả cho thấy lớp Trung tính chiếm tới 32,87%, khẳng định báo cáo doanh nghiệp Việt Nam dành gần 1/3 dung lượng cho các số liệu kỹ thuật đo đạc khách quan.</a:t>
             </a:r>
           </a:p>
           <a:p/>
@@ -769,7 +768,7 @@
               </a:defRPr>
             </a:pPr>
             <a:r>
-              <a:t>3 giai đoạn chuyển dịch; năm 2025 điểm số cao nhất lịch sử toàn mẫu.</a:t>
+              <a:t>PhoBERT 3 lớp: Pos 53,87%, Neutral 32,87%, Neg 13,26%.</a:t>
             </a:r>
           </a:p>
           <a:p/>
@@ -796,7 +795,7 @@
               </a:defRPr>
             </a:pPr>
             <a:r>
-              <a:t>Xu hướng này phản ánh điều gì: Phản ánh nhận thức doanh nghiệp chuyển từ đối phó sang tích hợp ESG vào chiến lược cốt lõi.</a:t>
+              <a:t>Lớp trung tính có ý nghĩa gì: Tránh sai lệch trong việc gán nhãn cảm xúc cho các câu số liệu kiểm toán kỹ thuật.</a:t>
             </a:r>
           </a:p>
           <a:p/>
@@ -889,7 +888,7 @@
               </a:defRPr>
             </a:pPr>
             <a:r>
-              <a:t>Làm nổi bật đóng góp của mô hình PhoBERT 3 lớp, đặc biệt là 32,87% câu Trung tính.</a:t>
+              <a:t>Phân tích Tỷ số Pos/Neg Ratio, đối chuẩn 4,06x của VN với 5,20x của Kang &amp; Kim, bóc tách Case Study PNJ 2022 sụt giảm xuống 1,21x.</a:t>
             </a:r>
           </a:p>
           <a:p/>
@@ -916,7 +915,7 @@
               </a:defRPr>
             </a:pPr>
             <a:r>
-              <a:t>Khác với Kang &amp; Kim dùng DistilBERT 2 lớp ép các câu số liệu vào nhãn tích cực hoặc tiêu cực, đề tài sử dụng PhoBERT 3 lớp. Kết quả cho thấy lớp Trung tính chiếm tới 32,87%, khẳng định báo cáo doanh nghiệp Việt Nam dành gần 1/3 dung lượng cho các số liệu kỹ thuật đo đạc khách quan.</a:t>
+              <a:t>Đồ thị bên trái biểu diễn Tỷ số Cảm xúc Pos/Neg theo từng năm. Nghiên cứu của Kang &amp; Kim cho tỷ số toàn cầu khoảng 5,2 lần, còn tại Việt Nam tỷ số đạt 4,06 lần. Điểm nổi bật nhất trên đồ thị là trường hợp dị biệt của PNJ năm 2022 khi tỷ số chạm đáy 1,21 lần. Nhóm nghiên cứu đã truy vết sâu và phát hiện 2 nguyên nhân: Thứ nhất về kỹ thuật, báo cáo PNJ 2022 là bản scan ảnh, OCR bị vỡ từ và đứt gãy cú pháp, khiến mô hình PhoBERT nhận diện nhầm các câu nhiễu thành Tiêu cực (chiếm tới 39%). Thứ hai về thực tế, đây là năm PNJ tái cấu trúc và đối mặt thách thức lớn hậu Covid. Đến năm 2023 khi dùng PDF số chuẩn, tỷ số lập tức hồi phục về 4,23 lần. Đây là phát hiện phương pháp luận đắt giá về ảnh hưởng của chất lượng số hóa tài liệu đến AI.</a:t>
             </a:r>
           </a:p>
           <a:p/>
@@ -943,7 +942,7 @@
               </a:defRPr>
             </a:pPr>
             <a:r>
-              <a:t>PhoBERT 3 lớp: Pos 53,87%, Neutral 32,87%, Neg 13,26%.</a:t>
+              <a:t>Pos/Neg trung bình = 4,06 lần; PNJ 2022 rơi xuống 1,21 lần do lỗi nhiễu OCR scan ảnh kết hợp thách thức hậu Covid; 2023 bật lại 4,23 lần.</a:t>
             </a:r>
           </a:p>
           <a:p/>
@@ -970,7 +969,7 @@
               </a:defRPr>
             </a:pPr>
             <a:r>
-              <a:t>Lớp trung tính có ý nghĩa gì: Tránh sai lệch trong việc gán nhãn cảm xúc cho các câu số liệu kiểm toán kỹ thuật.</a:t>
+              <a:t>Tại sao PNJ 2022 lại thấp tịt 1,21: Do báo cáo là bản scan ảnh khiến OCR bị nhiễu và đứt câu, PhoBERT nhầm câu vỡ cấu trúc là Tiêu cực (39%), cộng hưởng cùng các khó khăn đóng cửa mạng lưới sau dịch.</a:t>
             </a:r>
           </a:p>
           <a:p/>
@@ -1063,7 +1062,7 @@
               </a:defRPr>
             </a:pPr>
             <a:r>
-              <a:t>Phân tích Tỷ số Pos/Neg Ratio, đối chuẩn 4,06x của VN với 5,20x của Kang &amp; Kim, bóc tách Case Study PNJ 2022 sụt giảm xuống 1,21x.</a:t>
+              <a:t>Phân tích bảng tổng hợp xếp hạng Top SDGs của 7 doanh nghiệp, làm rõ quy luật 'Tam giác ưu tiên' và bản chất Cherry-picking.</a:t>
             </a:r>
           </a:p>
           <a:p/>
@@ -1090,7 +1089,7 @@
               </a:defRPr>
             </a:pPr>
             <a:r>
-              <a:t>Đồ thị bên trái biểu diễn Tỷ số Cảm xúc Pos/Neg theo từng năm. Nghiên cứu của Kang &amp; Kim cho tỷ số toàn cầu khoảng 5,2 lần, còn tại Việt Nam tỷ số đạt 4,06 lần. Điểm nổi bật nhất trên đồ thị là trường hợp dị biệt của PNJ năm 2022 khi tỷ số chạm đáy 1,21 lần. Nhóm nghiên cứu đã truy vết sâu và phát hiện 2 nguyên nhân: Thứ nhất về kỹ thuật, báo cáo PNJ 2022 là bản scan ảnh, OCR bị vỡ từ và đứt gãy cú pháp, khiến mô hình PhoBERT nhận diện nhầm các câu nhiễu thành Tiêu cực (chiếm tới 39%). Thứ hai về thực tế, đây là năm PNJ tái cấu trúc và đối mặt thách thức lớn hậu Covid. Đến năm 2023 khi dùng PDF số chuẩn, tỷ số lập tức hồi phục về 4,23 lần. Đây là phát hiện phương pháp luận đắt giá về ảnh hưởng của chất lượng số hóa tài liệu đến AI.</a:t>
+              <a:t>Kính thưa Hội đồng, bảng bên trái là kết quả định lượng chính xác Top 3 mục tiêu SDG được nói nhiều nhất của từng doanh nghiệp và toàn thị trường. Chúng ta thấy nổi lên 3 phát hiện cực kỳ sâu sắc: Thứ nhất là Quy luật Tam giác ưu tiên SDG 17, 09 và 12. Cả 7 doanh nghiệp đều có điểm SDG 17 cao nhất tuyệt đối trên 50 điểm vì nền kinh tế Việt Nam định hướng xuất khẩu, bắt buộc phải chứng minh quan hệ đối tác quốc tế. Thứ hai là sự phân hóa ngành: Khối sản xuất như Vicostone, Vinamilk tập trung vào SDG 12 và SDG 7 do áp lực trực tiếp từ rác thải và thuế carbon CBAM; trong khi khối tài chính như Bảo Việt, SSI tập trung vào SDG 8 và 16 phục vụ chỉ số VNSI. Thứ ba, điều này phản ánh bản chất Cherry-picking: Doanh nghiệp chọn nói về những gì sẵn có số liệu đẹp từ báo cáo tài chính để làm PR.</a:t>
             </a:r>
           </a:p>
           <a:p/>
@@ -1117,7 +1116,7 @@
               </a:defRPr>
             </a:pPr>
             <a:r>
-              <a:t>Pos/Neg trung bình = 4,06 lần; PNJ 2022 rơi xuống 1,21 lần do lỗi nhiễu OCR scan ảnh kết hợp thách thức hậu Covid; 2023 bật lại 4,23 lần.</a:t>
+              <a:t>Toàn mẫu VN: SDG 17 (50.2) &gt; SDG 09 (48.4) &gt; SDG 12 (47.9); Phân hóa sản xuất vs tài chính; Bản chất Cherry-picking.</a:t>
             </a:r>
           </a:p>
           <a:p/>
@@ -1144,7 +1143,7 @@
               </a:defRPr>
             </a:pPr>
             <a:r>
-              <a:t>Tại sao PNJ 2022 lại thấp tịt 1,21: Do báo cáo là bản scan ảnh khiến OCR bị nhiễu và đứt câu, PhoBERT nhầm câu vỡ cấu trúc là Tiêu cực (39%), cộng hưởng cùng các khó khăn đóng cửa mạng lưới sau dịch.</a:t>
+              <a:t>Tại sao SDG 17 luôn đứng đầu: Vì SDG 17 bao hàm các quan hệ đối tác công-tư, hợp tác nhà cung ứng và tuân thủ chuẩn mực báo cáo quốc tế - đây là nội dung bắt buộc trong mọi bản công bố thông tin.</a:t>
             </a:r>
           </a:p>
           <a:p/>
@@ -1237,7 +1236,7 @@
               </a:defRPr>
             </a:pPr>
             <a:r>
-              <a:t>Phân tích bảng tổng hợp xếp hạng Top SDGs của 7 doanh nghiệp, làm rõ quy luật 'Tam giác ưu tiên' và bản chất Cherry-picking.</a:t>
+              <a:t>Chỉ ra 4 'vùng trũng' thông tin bị né tránh, khẳng định giá trị phản biện học thuật sắc bén của đề tài.</a:t>
             </a:r>
           </a:p>
           <a:p/>
@@ -1264,7 +1263,7 @@
               </a:defRPr>
             </a:pPr>
             <a:r>
-              <a:t>Kính thưa Hội đồng, bảng bên trái là kết quả định lượng chính xác Top 3 mục tiêu SDG được nói nhiều nhất của từng doanh nghiệp và toàn thị trường. Chúng ta thấy nổi lên 3 phát hiện cực kỳ sâu sắc: Thứ nhất là Quy luật Tam giác ưu tiên SDG 17, 09 và 12. Cả 7 doanh nghiệp đều có điểm SDG 17 cao nhất tuyệt đối trên 50 điểm vì nền kinh tế Việt Nam định hướng xuất khẩu, bắt buộc phải chứng minh quan hệ đối tác quốc tế. Thứ hai là sự phân hóa ngành: Khối sản xuất như Vicostone, Vinamilk tập trung vào SDG 12 và SDG 7 do áp lực trực tiếp từ rác thải và thuế carbon CBAM; trong khi khối tài chính như Bảo Việt, SSI tập trung vào SDG 8 và 16 phục vụ chỉ số VNSI. Thứ ba, điều này phản ánh bản chất Cherry-picking: Doanh nghiệp chọn nói về những gì sẵn có số liệu đẹp từ báo cáo tài chính để làm PR.</a:t>
+              <a:t>Mặt đối lập của bức tranh là 4 vùng trũng thông tin bị né tránh: 1. Đa dạng sinh học hoàn toàn thiếu số liệu; 2. Bình đẳng lương và chênh lệch thu nhập lãnh đạo bị giấu kín; 3. Phát thải Scope 3 chuỗi cung ứng bị bỏ ngỏ; và 4. Các sự cố xử phạt môi trường không được công bố. Đây là đóng góp phản biện thực tiễn quan trọng nhất của đề tài.</a:t>
             </a:r>
           </a:p>
           <a:p/>
@@ -1291,7 +1290,7 @@
               </a:defRPr>
             </a:pPr>
             <a:r>
-              <a:t>Toàn mẫu VN: SDG 17 (50.2) &gt; SDG 09 (48.4) &gt; SDG 12 (47.9); Phân hóa sản xuất vs tài chính; Bản chất Cherry-picking.</a:t>
+              <a:t>4 vùng né tránh: Đa dạng sinh học, Chênh lệch lương CEO, Scope 3 chuỗi cung ứng, Sự cố xử phạt.</a:t>
             </a:r>
           </a:p>
           <a:p/>
@@ -1318,7 +1317,7 @@
               </a:defRPr>
             </a:pPr>
             <a:r>
-              <a:t>Tại sao SDG 17 luôn đứng đầu: Vì SDG 17 bao hàm các quan hệ đối tác công-tư, hợp tác nhà cung ứng và tuân thủ chuẩn mực báo cáo quốc tế - đây là nội dung bắt buộc trong mọi bản công bố thông tin.</a:t>
+              <a:t>Tại sao phát hiện né tránh lại quan trọng: Giám sát AI giúp nhìn ra những gì bị ẩn giấu chứ không chỉ đọc những gì được trình bày.</a:t>
             </a:r>
           </a:p>
           <a:p/>
@@ -1411,7 +1410,7 @@
               </a:defRPr>
             </a:pPr>
             <a:r>
-              <a:t>Chỉ ra 4 'vùng trũng' thông tin bị né tránh, khẳng định giá trị phản biện học thuật sắc bén của đề tài.</a:t>
+              <a:t>Khẳng định sự vượt trội và giá trị nâng cấp của code mới so với bài báo gốc Kang &amp; Kim (2022) trên 8 tiêu chí.</a:t>
             </a:r>
           </a:p>
           <a:p/>
@@ -1438,7 +1437,7 @@
               </a:defRPr>
             </a:pPr>
             <a:r>
-              <a:t>Mặt đối lập của bức tranh là 4 vùng trũng thông tin bị né tránh: 1. Đa dạng sinh học hoàn toàn thiếu số liệu; 2. Bình đẳng lương và chênh lệch thu nhập lãnh đạo bị giấu kín; 3. Phát thải Scope 3 chuỗi cung ứng bị bỏ ngỏ; và 4. Các sự cố xử phạt môi trường không được công bố. Đây là đóng góp phản biện thực tiễn quan trọng nhất của đề tài.</a:t>
+              <a:t>Bảng trên slide là sự đối chuẩn trực diện giữa công trình gốc Kang &amp; Kim (2022) và nghiên cứu của chúng em trên 8 khía cạnh kỹ thuật: Đa ngữ tiếng Việt, OCR cứu hộ 100% scan, tăng gấp đôi số chiều vector lên 768 chiều, bộ ngữ liệu song ngữ 1.032 câu chuẩn, đột phá lớp Trung tính 32,9% của PhoBERT, phép nhân ma trận toàn cục dưới 3 giây, bóc tách đặc thù ngành sâu sắc và sẵn sàng cho Agentic RAG.</a:t>
             </a:r>
           </a:p>
           <a:p/>
@@ -1465,7 +1464,7 @@
               </a:defRPr>
             </a:pPr>
             <a:r>
-              <a:t>4 vùng né tránh: Đa dạng sinh học, Chênh lệch lương CEO, Scope 3 chuỗi cung ứng, Sự cố xử phạt.</a:t>
+              <a:t>8 điểm nâng cấp trực tiếp so với paper gốc.</a:t>
             </a:r>
           </a:p>
           <a:p/>
@@ -1492,7 +1491,7 @@
               </a:defRPr>
             </a:pPr>
             <a:r>
-              <a:t>Tại sao phát hiện né tránh lại quan trọng: Giám sát AI giúp nhìn ra những gì bị ẩn giấu chứ không chỉ đọc những gì được trình bày.</a:t>
+              <a:t>Đóng góp lớn nhất: Không sao chép nguyên xi mà bản địa hóa thành công, giải quyết triệt để 4 rào cản kỹ thuật của paper gốc.</a:t>
             </a:r>
           </a:p>
           <a:p/>
@@ -1585,7 +1584,7 @@
               </a:defRPr>
             </a:pPr>
             <a:r>
-              <a:t>Khẳng định sự vượt trội và giá trị nâng cấp của code mới so với bài báo gốc Kang &amp; Kim (2022) trên 8 tiêu chí.</a:t>
+              <a:t>Đưa ra khuyến nghị thiết thực cho 3 đối tượng: Nhà nước (UBCKNN), Doanh nghiệp và Nhà đầu tư.</a:t>
             </a:r>
           </a:p>
           <a:p/>
@@ -1612,7 +1611,7 @@
               </a:defRPr>
             </a:pPr>
             <a:r>
-              <a:t>Bảng trên slide là sự đối chuẩn trực diện giữa công trình gốc Kang &amp; Kim (2022) và nghiên cứu của chúng em trên 8 khía cạnh kỹ thuật: Đa ngữ tiếng Việt, OCR cứu hộ 100% scan, tăng gấp đôi số chiều vector lên 768 chiều, bộ ngữ liệu song ngữ 1.032 câu chuẩn, đột phá lớp Trung tính 32,9% của PhoBERT, phép nhân ma trận toàn cục dưới 3 giây, bóc tách đặc thù ngành sâu sắc và sẵn sàng cho Agentic RAG.</a:t>
+              <a:t>Nghiên cứu đem lại 3 hàm ý lớn: UBCKNN cần chuẩn hóa định dạng XBRL và lập cổng AI giám sát; Doanh nghiệp cần chuyển từ tiếp thị sang giải trình rủi ro; Nhà đầu tư có thể dùng công cụ NLP này để sàng lọc nhanh hồ sơ vay vốn xanh và phòng ngừa tẩy xanh.</a:t>
             </a:r>
           </a:p>
           <a:p/>
@@ -1639,7 +1638,7 @@
               </a:defRPr>
             </a:pPr>
             <a:r>
-              <a:t>8 điểm nâng cấp trực tiếp so với paper gốc.</a:t>
+              <a:t>Khuyến nghị 3 bên: XBRL cho Nhà nước, Giải trình cho Doanh nghiệp, Sàng lọc nhanh cho Nhà đầu tư.</a:t>
             </a:r>
           </a:p>
           <a:p/>
@@ -1666,7 +1665,7 @@
               </a:defRPr>
             </a:pPr>
             <a:r>
-              <a:t>Đóng góp lớn nhất: Không sao chép nguyên xi mà bản địa hóa thành công, giải quyết triệt để 4 rào cản kỹ thuật của paper gốc.</a:t>
+              <a:t>Tại sao XBRL quan trọng: Giúp máy đọc tự động dữ liệu bảng biểu tài chính và phi tài chính 100% không bị lỗi font.</a:t>
             </a:r>
           </a:p>
           <a:p/>
@@ -1759,7 +1758,7 @@
               </a:defRPr>
             </a:pPr>
             <a:r>
-              <a:t>Đưa ra khuyến nghị thiết thực cho 3 đối tượng: Nhà nước (UBCKNN), Doanh nghiệp và Nhà đầu tư.</a:t>
+              <a:t>Thẳng thắn nhìn nhận hạn chế và vạch ra lộ trình tích hợp Multi-Agent AI trong tương lai.</a:t>
             </a:r>
           </a:p>
           <a:p/>
@@ -1786,7 +1785,7 @@
               </a:defRPr>
             </a:pPr>
             <a:r>
-              <a:t>Nghiên cứu đem lại 3 hàm ý lớn: UBCKNN cần chuẩn hóa định dạng XBRL và lập cổng AI giám sát; Doanh nghiệp cần chuyển từ tiếp thị sang giải trình rủi ro; Nhà đầu tư có thể dùng công cụ NLP này để sàng lọc nhanh hồ sơ vay vốn xanh và phòng ngừa tẩy xanh.</a:t>
+              <a:t>Chúng em nhìn nhận rõ 3 hạn chế: Mẫu 7 tập đoàn, chưa kiểm chứng chéo số liệu bảng biểu, và chunking câu đơn. Tuy nhiên sơ đồ bên phải chỉ ra hướng phát triển tự nhiên: dùng pipeline hiện tại làm nền móng sạch để cắm thêm các Agent kiểm tra số liệu bảng biểu và đưa vào LLM sinh báo cáo kiểm toán độc lập.</a:t>
             </a:r>
           </a:p>
           <a:p/>
@@ -1813,7 +1812,7 @@
               </a:defRPr>
             </a:pPr>
             <a:r>
-              <a:t>Khuyến nghị 3 bên: XBRL cho Nhà nước, Giải trình cho Doanh nghiệp, Sàng lọc nhanh cho Nhà đầu tư.</a:t>
+              <a:t>Thẳng thắn nhìn nhận hạn chế; Mở ra tầm nhìn Agentic ESG Auditor.</a:t>
             </a:r>
           </a:p>
           <a:p/>
@@ -1840,7 +1839,7 @@
               </a:defRPr>
             </a:pPr>
             <a:r>
-              <a:t>Tại sao XBRL quan trọng: Giúp máy đọc tự động dữ liệu bảng biểu tài chính và phi tài chính 100% không bị lỗi font.</a:t>
+              <a:t>Tại sao không dùng LLM ngay từ đầu: Vì LLM nhồi cả cuốn PDF rất đắt và dễ ảo giác, dùng SBERT làm Retrieval sạch trước mới đảm bảo độ chính xác.</a:t>
             </a:r>
           </a:p>
           <a:p/>
@@ -1933,180 +1932,6 @@
               </a:defRPr>
             </a:pPr>
             <a:r>
-              <a:t>Thẳng thắn nhìn nhận hạn chế và vạch ra lộ trình tích hợp Multi-Agent AI trong tương lai.</a:t>
-            </a:r>
-          </a:p>
-          <a:p/>
-          <a:p>
-            <a:pPr>
-              <a:defRPr sz="1100" b="1">
-                <a:solidFill>
-                  <a:srgbClr val="1B365D"/>
-                </a:solidFill>
-                <a:latin typeface="Segoe UI"/>
-              </a:defRPr>
-            </a:pPr>
-            <a:r>
-              <a:t>【 KỊCH BẢN NÓI CHI TIẾT (LỜI THOẠI MẪU) 】</a:t>
-            </a:r>
-          </a:p>
-          <a:p>
-            <a:pPr>
-              <a:defRPr sz="1000">
-                <a:solidFill>
-                  <a:srgbClr val="212529"/>
-                </a:solidFill>
-                <a:latin typeface="Segoe UI"/>
-              </a:defRPr>
-            </a:pPr>
-            <a:r>
-              <a:t>Chúng em nhìn nhận rõ 3 hạn chế: Mẫu 7 tập đoàn, chưa kiểm chứng chéo số liệu bảng biểu, và chunking câu đơn. Tuy nhiên sơ đồ bên phải chỉ ra hướng phát triển tự nhiên: dùng pipeline hiện tại làm nền móng sạch để cắm thêm các Agent kiểm tra số liệu bảng biểu và đưa vào LLM sinh báo cáo kiểm toán độc lập.</a:t>
-            </a:r>
-          </a:p>
-          <a:p/>
-          <a:p>
-            <a:pPr>
-              <a:defRPr sz="1100" b="1">
-                <a:solidFill>
-                  <a:srgbClr val="1B365D"/>
-                </a:solidFill>
-                <a:latin typeface="Segoe UI"/>
-              </a:defRPr>
-            </a:pPr>
-            <a:r>
-              <a:t>【 ĐIỂM NHẤN CẦN NHỚ 】</a:t>
-            </a:r>
-          </a:p>
-          <a:p>
-            <a:pPr>
-              <a:defRPr sz="1000">
-                <a:solidFill>
-                  <a:srgbClr val="212529"/>
-                </a:solidFill>
-                <a:latin typeface="Segoe UI"/>
-              </a:defRPr>
-            </a:pPr>
-            <a:r>
-              <a:t>Thẳng thắn nhìn nhận hạn chế; Mở ra tầm nhìn Agentic ESG Auditor.</a:t>
-            </a:r>
-          </a:p>
-          <a:p/>
-          <a:p>
-            <a:pPr>
-              <a:defRPr sz="1100" b="1">
-                <a:solidFill>
-                  <a:srgbClr val="1B365D"/>
-                </a:solidFill>
-                <a:latin typeface="Segoe UI"/>
-              </a:defRPr>
-            </a:pPr>
-            <a:r>
-              <a:t>【 DỰ ĐOÁN CÂU HỎI HỘI ĐỒNG &amp; CÁCH TRẢ LỜI 】</a:t>
-            </a:r>
-          </a:p>
-          <a:p>
-            <a:pPr>
-              <a:defRPr sz="1000">
-                <a:solidFill>
-                  <a:srgbClr val="212529"/>
-                </a:solidFill>
-                <a:latin typeface="Segoe UI"/>
-              </a:defRPr>
-            </a:pPr>
-            <a:r>
-              <a:t>Tại sao không dùng LLM ngay từ đầu: Vì LLM nhồi cả cuốn PDF rất đắt và dễ ảo giác, dùng SBERT làm Retrieval sạch trước mới đảm bảo độ chính xác.</a:t>
-            </a:r>
-          </a:p>
-          <a:p/>
-        </p:txBody>
-      </p:sp>
-      <p:sp>
-        <p:nvSpPr>
-          <p:cNvPr id="4" name="Slide Number Placeholder 3"/>
-          <p:cNvSpPr>
-            <a:spLocks noGrp="1"/>
-          </p:cNvSpPr>
-          <p:nvPr>
-            <p:ph type="sldNum" idx="5" sz="quarter"/>
-          </p:nvPr>
-        </p:nvSpPr>
-        <p:spPr/>
-      </p:sp>
-    </p:spTree>
-  </p:cSld>
-  <p:clrMapOvr>
-    <a:masterClrMapping/>
-  </p:clrMapOvr>
-</p:notes>
-</file>
-
-<file path=ppt/notesSlides/notesSlide18.xml><?xml version="1.0" encoding="utf-8"?>
-<p:notes xmlns:a="http://schemas.openxmlformats.org/drawingml/2006/main" xmlns:p="http://schemas.openxmlformats.org/presentationml/2006/main" xmlns:r="http://schemas.openxmlformats.org/officeDocument/2006/relationships">
-  <p:cSld>
-    <p:spTree>
-      <p:nvGrpSpPr>
-        <p:cNvPr id="1" name=""/>
-        <p:cNvGrpSpPr/>
-        <p:nvPr/>
-      </p:nvGrpSpPr>
-      <p:grpSpPr>
-        <a:xfrm>
-          <a:off x="0" y="0"/>
-          <a:ext cx="0" cy="0"/>
-          <a:chOff x="0" y="0"/>
-          <a:chExt cx="0" cy="0"/>
-        </a:xfrm>
-      </p:grpSpPr>
-      <p:sp>
-        <p:nvSpPr>
-          <p:cNvPr id="2" name="Slide Image Placeholder 1"/>
-          <p:cNvSpPr>
-            <a:spLocks noGrp="1"/>
-          </p:cNvSpPr>
-          <p:nvPr>
-            <p:ph type="sldImg" idx="2"/>
-          </p:nvPr>
-        </p:nvSpPr>
-        <p:spPr/>
-      </p:sp>
-      <p:sp>
-        <p:nvSpPr>
-          <p:cNvPr id="3" name="Notes Placeholder 2"/>
-          <p:cNvSpPr>
-            <a:spLocks noGrp="1"/>
-          </p:cNvSpPr>
-          <p:nvPr>
-            <p:ph type="body" idx="3" sz="quarter"/>
-          </p:nvPr>
-        </p:nvSpPr>
-        <p:spPr/>
-        <p:txBody>
-          <a:bodyPr/>
-          <a:lstStyle/>
-          <a:p/>
-          <a:p>
-            <a:pPr>
-              <a:defRPr sz="1100" b="1">
-                <a:solidFill>
-                  <a:srgbClr val="1B365D"/>
-                </a:solidFill>
-                <a:latin typeface="Segoe UI"/>
-              </a:defRPr>
-            </a:pPr>
-            <a:r>
-              <a:t>【 MỤC TIÊU TRÌNH BÀY 】</a:t>
-            </a:r>
-          </a:p>
-          <a:p>
-            <a:pPr>
-              <a:defRPr sz="1000">
-                <a:solidFill>
-                  <a:srgbClr val="212529"/>
-                </a:solidFill>
-                <a:latin typeface="Segoe UI"/>
-              </a:defRPr>
-            </a:pPr>
-            <a:r>
               <a:t>Tóm kết đĩnh đạc 4 thông điệp cốt lõi, gửi lời cảm ơn trang trọng đến Hội đồng và tự tin mở phiên Hỏi đáp (Q&amp;A).</a:t>
             </a:r>
           </a:p>
@@ -3325,7 +3150,7 @@
               </a:defRPr>
             </a:pPr>
             <a:r>
-              <a:t>Chứng minh mô hình NLP bắt đúng bản chất kinh doanh: giải thích tại sao doanh nghiệp này lại có goal này cao vượt trội.</a:t>
+              <a:t>Tổng hợp đối chiếu cả 7 doanh nghiệp trên cùng 1 bảng 6 nhóm chủ đề SDG, làm bật quy luật thị trường và phân hóa đặc thù ngành.</a:t>
             </a:r>
           </a:p>
           <a:p/>
@@ -3352,7 +3177,7 @@
               </a:defRPr>
             </a:pPr>
             <a:r>
-              <a:t>Biểu đồ bên trái minh họa điểm số các SDG cốt lõi của khối Sản xuất &amp; Năng lượng năm 2025. Mô hình NLP phản ánh cực kỳ nhạy bén bản chất kinh doanh: Vicostone dẫn đầu SDG 9 và 12 nhờ công nghệ Breton và tuần hoàn bùn thải; Vinamilk bứt phá SDG 13 nhờ chứng nhận PAS 2060 trung hòa carbon; PAN dẫn đầu SDG 2 nhờ chuỗi lúa gạo tôm sạch; và Petrolimex tập trung SDG 7 và 13 nhờ nhiên liệu Euro 5.</a:t>
+              <a:t>Kính thưa Hội đồng, bảng tổng hợp trên slide là bức tranh toàn cảnh so sánh đồng thời 7 doanh nghiệp qua 6 nhóm chủ đề SDG theo phân loại quốc tế của Kang &amp; Kim (2022). Kết quả định lượng chỉ ra 3 quy luật thực nghiệm: Thứ nhất, quy luật 'Economic cao nhất - Equity thấp nhất' mang tính phổ quát ở tất cả các doanh nghiệp; thứ hai là sự phân hóa rõ nét giữa nhóm xuất khẩu tư nhân (chú trọng Tài nguyên &amp; Môi trường để vượt rào cản CBAM) và nhóm tài chính/nhà nước (chú trọng Xã hội &amp; Thể chế); thứ ba là từng doanh nghiệp đều có điểm bứt phá tương ứng với mô hình kinh doanh, như VCS dẫn đầu nhờ đá thạch anh, PNJ dẫn đầu Bình đẳng giới và Bảo Việt dẫn đầu Xã hội.</a:t>
             </a:r>
           </a:p>
           <a:p/>
@@ -3379,7 +3204,7 @@
               </a:defRPr>
             </a:pPr>
             <a:r>
-              <a:t>VCS cao nhất SDG 9 &amp; 12; VNM bứt phá SDG 13; PAN dẫn đầu SDG 2; PLX trọng tâm SDG 7 &amp; 13.</a:t>
+              <a:t>Toàn mẫu: Economic (47,69đ) &gt; Social (46,39đ) &gt; Resources (45,63đ) &gt; Environs (44,98đ) &gt; Life (44,26đ) &gt; Equity (42,08đ); Phân hóa sản xuất vs tài chính.</a:t>
             </a:r>
           </a:p>
           <a:p/>
@@ -3406,7 +3231,7 @@
               </a:defRPr>
             </a:pPr>
             <a:r>
-              <a:t>Tại sao PLX điểm SDG 13 lại cao: Vì Petrolimex chịu áp lực chuyển đổi năng lượng hóa thạch lớn nhất, bắt buộc phải kiểm kê phát thải ISO 14064-1.</a:t>
+              <a:t>Tại sao lại gom 17 SDG thành 6 nhóm: Vì 17 SDG có sự giao thoa, gom thành 6 nhóm theo lý thuyết Max-Neef giúp phát hiện xu hướng chiến lược vĩ mô rõ ràng hơn.</a:t>
             </a:r>
           </a:p>
           <a:p/>
@@ -3499,7 +3324,7 @@
               </a:defRPr>
             </a:pPr>
             <a:r>
-              <a:t>Làm nổi bật nét đặc thù của khối Tài chính và Bán lẻ, giải thích tại sao PNJ dẫn đầu SDG 5 và BVH dẫn đầu SDG 17.</a:t>
+              <a:t>Phân tích xu hướng chuyển dịch 6 nhóm SDG qua 3 giai đoạn: Covid (2020-2021), Thể chế hóa (2022), Bùng nổ Net Zero (2024-2025).</a:t>
             </a:r>
           </a:p>
           <a:p/>
@@ -3526,7 +3351,7 @@
               </a:defRPr>
             </a:pPr>
             <a:r>
-              <a:t>Khối Dịch vụ Tài chính và Bán lẻ thể hiện bản đồ SDG hoàn toàn khác biệt: PNJ là doanh nghiệp duy nhất trong toàn bộ mẫu đạt điểm cao vượt trội ở SDG 5 Bình đẳng giới (40,70 điểm) nhờ đặc thù bán lẻ trang sức và nhân sự nữ chiếm đa số. Bảo Việt đạt điểm kỷ lục ở SDG 17 (53,32 điểm) nhờ áp dụng Báo cáo Tích hợp IIRC. SSI bứt phá ở SDG 8 và 9 qua các thương vụ thu xếp trái phiếu xanh.</a:t>
+              <a:t>Đồ thị đường chuỗi thời gian cho thấy bước chuyển dịch rõ nét qua 3 giai đoạn: 2020-2021 tập trung ứng phó đại dịch; 2022 tái định hình theo Thông tư 96; và 2024-2025 bùng nổ mạnh mẽ với các cam kết Net Zero, đưa điểm số toàn bộ 7 doanh nghiệp lên mức cao kỷ lục.</a:t>
             </a:r>
           </a:p>
           <a:p/>
@@ -3553,7 +3378,7 @@
               </a:defRPr>
             </a:pPr>
             <a:r>
-              <a:t>PNJ dẫn đầu toàn mẫu ở SDG 5 (40,70đ); BVH dẫn đầu SDG 17 (53,32đ); SSI mạnh về tài chính xanh.</a:t>
+              <a:t>3 giai đoạn chuyển dịch; năm 2025 điểm số cao nhất lịch sử toàn mẫu.</a:t>
             </a:r>
           </a:p>
           <a:p/>
@@ -3580,7 +3405,7 @@
               </a:defRPr>
             </a:pPr>
             <a:r>
-              <a:t>Tại sao điểm bình đẳng giới của PNJ lại cao hơn các công ty khác: Tỷ lệ nữ nhân sự PNJ trên 60% và công ty lồng ghép yếu tố phụ nữ vào chiến lược thương hiệu.</a:t>
+              <a:t>Xu hướng này phản ánh điều gì: Phản ánh nhận thức doanh nghiệp chuyển từ đối phó sang tích hợp ESG vào chiến lược cốt lõi.</a:t>
             </a:r>
           </a:p>
           <a:p/>
@@ -7200,7 +7025,7 @@
                 </a:solidFill>
                 <a:latin typeface="Segoe UI"/>
               </a:rPr>
-              <a:t>KẾT QUẢ 4: XU HƯỚNG DỊCH CHUYỂN CHUỖI THỜI GIAN (2020–2025)</a:t>
+              <a:t>KẾT QUẢ 5: SẮC THÁI CẢM XÚC PHOBERT &amp; ĐỐI CHUẨN PAPER GỐC</a:t>
             </a:r>
           </a:p>
         </p:txBody>
@@ -7235,7 +7060,7 @@
                 </a:solidFill>
                 <a:latin typeface="Segoe UI"/>
               </a:rPr>
-              <a:t>10 / 18</a:t>
+              <a:t>10 / 17</a:t>
             </a:r>
           </a:p>
         </p:txBody>
@@ -7276,7 +7101,7 @@
       </p:sp>
       <p:pic>
         <p:nvPicPr>
-          <p:cNvPr id="9" name="Picture 8" descr="slide_trends_grid.png"/>
+          <p:cNvPr id="9" name="Picture 8" descr="slide_sentiment_summary.png"/>
           <p:cNvPicPr>
             <a:picLocks noChangeAspect="1"/>
           </p:cNvPicPr>
@@ -7291,7 +7116,7 @@
         <p:spPr>
           <a:xfrm>
             <a:off x="731520" y="1188720"/>
-            <a:ext cx="10728655" cy="3474720"/>
+            <a:ext cx="10728655" cy="3429000"/>
           </a:xfrm>
           <a:prstGeom prst="rect">
             <a:avLst/>
@@ -7306,8 +7131,8 @@
         </p:nvSpPr>
         <p:spPr>
           <a:xfrm>
-            <a:off x="731520" y="4892040"/>
-            <a:ext cx="3429000" cy="1325880"/>
+            <a:off x="731520" y="4846320"/>
+            <a:ext cx="3429000" cy="1371600"/>
           </a:xfrm>
           <a:prstGeom prst="roundRect">
             <a:avLst/>
@@ -7351,8 +7176,8 @@
         </p:nvSpPr>
         <p:spPr>
           <a:xfrm>
-            <a:off x="868680" y="4956048"/>
-            <a:ext cx="3154680" cy="1188720"/>
+            <a:off x="868680" y="4919472"/>
+            <a:ext cx="3154680" cy="1234440"/>
           </a:xfrm>
           <a:prstGeom prst="rect">
             <a:avLst/>
@@ -7371,7 +7196,7 @@
                   <a:srgbClr val="1B365D"/>
                 </a:solidFill>
               </a:rPr>
-              <a:t>GIAI ĐOẠN 2020–2021: ỨNG PHÓ COVID
+              <a:t>PAPER GỐC (DISTILBERT 2 LỚP)
 </a:t>
             </a:r>
             <a:r>
@@ -7380,7 +7205,7 @@
                   <a:srgbClr val="212529"/>
                 </a:solidFill>
               </a:rPr>
-              <a:t>Điểm số phân hóa mạnh, nhóm Life &amp; Social tăng đột biến nhằm đảm bảo an toàn lao động và lương thưởng mùa dịch.</a:t>
+              <a:t>Tích cực ~78%, Tiêu cực ~15%. Bỏ qua lớp Trung tính, ép câu số liệu kiểm toán kỹ thuật vào nhãn cảm xúc sai lệch.</a:t>
             </a:r>
           </a:p>
         </p:txBody>
@@ -7393,95 +7218,8 @@
         </p:nvSpPr>
         <p:spPr>
           <a:xfrm>
-            <a:off x="4379976" y="4892040"/>
-            <a:ext cx="3429000" cy="1325880"/>
-          </a:xfrm>
-          <a:prstGeom prst="roundRect">
-            <a:avLst/>
-          </a:prstGeom>
-          <a:solidFill>
-            <a:srgbClr val="FFFFFF"/>
-          </a:solidFill>
-          <a:ln w="12700">
-            <a:solidFill>
-              <a:srgbClr val="1F77B4"/>
-            </a:solidFill>
-          </a:ln>
-        </p:spPr>
-        <p:style>
-          <a:lnRef idx="1">
-            <a:schemeClr val="accent1"/>
-          </a:lnRef>
-          <a:fillRef idx="3">
-            <a:schemeClr val="accent1"/>
-          </a:fillRef>
-          <a:effectRef idx="2">
-            <a:schemeClr val="accent1"/>
-          </a:effectRef>
-          <a:fontRef idx="minor">
-            <a:schemeClr val="lt1"/>
-          </a:fontRef>
-        </p:style>
-        <p:txBody>
-          <a:bodyPr rtlCol="0" anchor="ctr"/>
-          <a:lstStyle/>
-          <a:p>
-            <a:pPr algn="ctr"/>
-          </a:p>
-        </p:txBody>
-      </p:sp>
-      <p:sp>
-        <p:nvSpPr>
-          <p:cNvPr id="13" name="TextBox 12"/>
-          <p:cNvSpPr txBox="1"/>
-          <p:nvPr/>
-        </p:nvSpPr>
-        <p:spPr>
-          <a:xfrm>
-            <a:off x="4517136" y="4956048"/>
-            <a:ext cx="3154680" cy="1188720"/>
-          </a:xfrm>
-          <a:prstGeom prst="rect">
-            <a:avLst/>
-          </a:prstGeom>
-          <a:noFill/>
-        </p:spPr>
-        <p:txBody>
-          <a:bodyPr wrap="square">
-            <a:spAutoFit/>
-          </a:bodyPr>
-          <a:lstStyle/>
-          <a:p>
-            <a:r>
-              <a:rPr sz="950" b="1">
-                <a:solidFill>
-                  <a:srgbClr val="1F77B4"/>
-                </a:solidFill>
-              </a:rPr>
-              <a:t>MỐC 2022: TÁI CƠ CẤU THEO THÔNG TƯ 96
-</a:t>
-            </a:r>
-            <a:r>
-              <a:rPr sz="850">
-                <a:solidFill>
-                  <a:srgbClr val="212529"/>
-                </a:solidFill>
-              </a:rPr>
-              <a:t>Số lượng báo cáo tăng vọt; điểm số 6 nhóm bắt đầu hội tụ theo cấu trúc tiêu chuẩn báo cáo bền vững GRI.</a:t>
-            </a:r>
-          </a:p>
-        </p:txBody>
-      </p:sp>
-      <p:sp>
-        <p:nvSpPr>
-          <p:cNvPr id="14" name="Rounded Rectangle 13"/>
-          <p:cNvSpPr/>
-          <p:nvPr/>
-        </p:nvSpPr>
-        <p:spPr>
-          <a:xfrm>
-            <a:off x="8028432" y="4892040"/>
-            <a:ext cx="3429000" cy="1325880"/>
+            <a:off x="4379976" y="4846320"/>
+            <a:ext cx="3429000" cy="1371600"/>
           </a:xfrm>
           <a:prstGeom prst="roundRect">
             <a:avLst/>
@@ -7519,14 +7257,14 @@
       </p:sp>
       <p:sp>
         <p:nvSpPr>
-          <p:cNvPr id="15" name="TextBox 14"/>
+          <p:cNvPr id="13" name="TextBox 12"/>
           <p:cNvSpPr txBox="1"/>
           <p:nvPr/>
         </p:nvSpPr>
         <p:spPr>
           <a:xfrm>
-            <a:off x="8165592" y="4956048"/>
-            <a:ext cx="3154680" cy="1188720"/>
+            <a:off x="4517136" y="4919472"/>
+            <a:ext cx="3154680" cy="1234440"/>
           </a:xfrm>
           <a:prstGeom prst="rect">
             <a:avLst/>
@@ -7545,7 +7283,7 @@
                   <a:srgbClr val="288C3C"/>
                 </a:solidFill>
               </a:rPr>
-              <a:t>GIAI ĐOẠN 2024–2025: BÙNG NỔ NET ZERO
+              <a:t>VIỆT NAM (PHOBERT 3 LỚP)
 </a:t>
             </a:r>
             <a:r>
@@ -7554,7 +7292,94 @@
                   <a:srgbClr val="212529"/>
                 </a:solidFill>
               </a:rPr>
-              <a:t>Cả 7 tập đoàn đều đạt điểm số cao nhất lịch sử; nhóm Môi trường (+6,06đ) và Tài nguyên (+5,42đ) tăng tốc vượt bậc.</a:t>
+              <a:t>Tích cực: 53,87% | Trung tính: 32,87% | Tiêu cực: 13,26%. Đột phá bảo lưu 1/3 câu số liệu kỹ thuật khách quan.</a:t>
+            </a:r>
+          </a:p>
+        </p:txBody>
+      </p:sp>
+      <p:sp>
+        <p:nvSpPr>
+          <p:cNvPr id="14" name="Rounded Rectangle 13"/>
+          <p:cNvSpPr/>
+          <p:nvPr/>
+        </p:nvSpPr>
+        <p:spPr>
+          <a:xfrm>
+            <a:off x="8028432" y="4846320"/>
+            <a:ext cx="3429000" cy="1371600"/>
+          </a:xfrm>
+          <a:prstGeom prst="roundRect">
+            <a:avLst/>
+          </a:prstGeom>
+          <a:solidFill>
+            <a:srgbClr val="FFFFFF"/>
+          </a:solidFill>
+          <a:ln w="12700">
+            <a:solidFill>
+              <a:srgbClr val="7030A0"/>
+            </a:solidFill>
+          </a:ln>
+        </p:spPr>
+        <p:style>
+          <a:lnRef idx="1">
+            <a:schemeClr val="accent1"/>
+          </a:lnRef>
+          <a:fillRef idx="3">
+            <a:schemeClr val="accent1"/>
+          </a:fillRef>
+          <a:effectRef idx="2">
+            <a:schemeClr val="accent1"/>
+          </a:effectRef>
+          <a:fontRef idx="minor">
+            <a:schemeClr val="lt1"/>
+          </a:fontRef>
+        </p:style>
+        <p:txBody>
+          <a:bodyPr rtlCol="0" anchor="ctr"/>
+          <a:lstStyle/>
+          <a:p>
+            <a:pPr algn="ctr"/>
+          </a:p>
+        </p:txBody>
+      </p:sp>
+      <p:sp>
+        <p:nvSpPr>
+          <p:cNvPr id="15" name="TextBox 14"/>
+          <p:cNvSpPr txBox="1"/>
+          <p:nvPr/>
+        </p:nvSpPr>
+        <p:spPr>
+          <a:xfrm>
+            <a:off x="8165592" y="4919472"/>
+            <a:ext cx="3154680" cy="1234440"/>
+          </a:xfrm>
+          <a:prstGeom prst="rect">
+            <a:avLst/>
+          </a:prstGeom>
+          <a:noFill/>
+        </p:spPr>
+        <p:txBody>
+          <a:bodyPr wrap="square">
+            <a:spAutoFit/>
+          </a:bodyPr>
+          <a:lstStyle/>
+          <a:p>
+            <a:r>
+              <a:rPr sz="950" b="1">
+                <a:solidFill>
+                  <a:srgbClr val="7030A0"/>
+                </a:solidFill>
+              </a:rPr>
+              <a:t>KẾT LUẬN VĂN PHONG DOANH NGHIỆP
+</a:t>
+            </a:r>
+            <a:r>
+              <a:rPr sz="850">
+                <a:solidFill>
+                  <a:srgbClr val="212529"/>
+                </a:solidFill>
+              </a:rPr>
+              <a:t>Báo cáo Việt Nam dành gần 1/3 dung lượng cho các số liệu đo lường kỹ thuật GRI chứ không chỉ đơn thuần quảng cáo PR.</a:t>
             </a:r>
           </a:p>
         </p:txBody>
@@ -7789,7 +7614,7 @@
                 </a:solidFill>
                 <a:latin typeface="Segoe UI"/>
               </a:rPr>
-              <a:t>KẾT QUẢ 5: SẮC THÁI CẢM XÚC PHOBERT &amp; ĐỐI CHUẨN PAPER GỐC</a:t>
+              <a:t>KẾT QUẢ 6: TỶ SỐ CẢM XÚC POS/NEG RATIO &amp; ĐỐI CHUẨN TỶ LỆ</a:t>
             </a:r>
           </a:p>
         </p:txBody>
@@ -7824,7 +7649,7 @@
                 </a:solidFill>
                 <a:latin typeface="Segoe UI"/>
               </a:rPr>
-              <a:t>11 / 18</a:t>
+              <a:t>11 / 17</a:t>
             </a:r>
           </a:p>
         </p:txBody>
@@ -7865,7 +7690,7 @@
       </p:sp>
       <p:pic>
         <p:nvPicPr>
-          <p:cNvPr id="9" name="Picture 8" descr="slide_sentiment_summary.png"/>
+          <p:cNvPr id="9" name="Picture 8" descr="sentiment_ratio.png"/>
           <p:cNvPicPr>
             <a:picLocks noChangeAspect="1"/>
           </p:cNvPicPr>
@@ -7879,8 +7704,8 @@
         </p:blipFill>
         <p:spPr>
           <a:xfrm>
-            <a:off x="731520" y="1188720"/>
-            <a:ext cx="10728655" cy="3429000"/>
+            <a:off x="731520" y="1234440"/>
+            <a:ext cx="6217920" cy="3383280"/>
           </a:xfrm>
           <a:prstGeom prst="rect">
             <a:avLst/>
@@ -7895,8 +7720,99 @@
         </p:nvSpPr>
         <p:spPr>
           <a:xfrm>
-            <a:off x="731520" y="4846320"/>
-            <a:ext cx="3429000" cy="1371600"/>
+            <a:off x="731520" y="4800600"/>
+            <a:ext cx="6217920" cy="1417320"/>
+          </a:xfrm>
+          <a:prstGeom prst="roundRect">
+            <a:avLst/>
+          </a:prstGeom>
+          <a:solidFill>
+            <a:srgbClr val="EEF4FC"/>
+          </a:solidFill>
+          <a:ln w="12700">
+            <a:solidFill>
+              <a:srgbClr val="1F77B4"/>
+            </a:solidFill>
+          </a:ln>
+        </p:spPr>
+        <p:style>
+          <a:lnRef idx="1">
+            <a:schemeClr val="accent1"/>
+          </a:lnRef>
+          <a:fillRef idx="3">
+            <a:schemeClr val="accent1"/>
+          </a:fillRef>
+          <a:effectRef idx="2">
+            <a:schemeClr val="accent1"/>
+          </a:effectRef>
+          <a:fontRef idx="minor">
+            <a:schemeClr val="lt1"/>
+          </a:fontRef>
+        </p:style>
+        <p:txBody>
+          <a:bodyPr rtlCol="0" anchor="ctr"/>
+          <a:lstStyle/>
+          <a:p>
+            <a:pPr algn="ctr"/>
+          </a:p>
+        </p:txBody>
+      </p:sp>
+      <p:sp>
+        <p:nvSpPr>
+          <p:cNvPr id="11" name="TextBox 10"/>
+          <p:cNvSpPr txBox="1"/>
+          <p:nvPr/>
+        </p:nvSpPr>
+        <p:spPr>
+          <a:xfrm>
+            <a:off x="868680" y="4864608"/>
+            <a:ext cx="5943600" cy="1280160"/>
+          </a:xfrm>
+          <a:prstGeom prst="rect">
+            <a:avLst/>
+          </a:prstGeom>
+          <a:noFill/>
+        </p:spPr>
+        <p:txBody>
+          <a:bodyPr wrap="square">
+            <a:spAutoFit/>
+          </a:bodyPr>
+          <a:lstStyle/>
+          <a:p>
+            <a:r>
+              <a:rPr b="1" sz="950">
+                <a:solidFill>
+                  <a:srgbClr val="1B365D"/>
+                </a:solidFill>
+              </a:rPr>
+              <a:t>KẾT LUẬN THIÊN LỆCH LẠC QUAN CẤU TRÚC:
+</a:t>
+            </a:r>
+          </a:p>
+          <a:p>
+            <a:pPr>
+              <a:defRPr sz="850">
+                <a:solidFill>
+                  <a:srgbClr val="212529"/>
+                </a:solidFill>
+              </a:defRPr>
+            </a:pPr>
+            <a:r>
+              <a:t>Tỷ số Pos/Neg trung bình đạt 4,06 lần khẳng định doanh nghiệp Việt Nam luôn có xu hướng dùng ngôn từ tích cực gấp hơn 4 lần so với tiêu cực nhằm làm đẹp hình ảnh quản trị (Hiệu ứng Pollyanna).</a:t>
+            </a:r>
+          </a:p>
+        </p:txBody>
+      </p:sp>
+      <p:sp>
+        <p:nvSpPr>
+          <p:cNvPr id="12" name="Rounded Rectangle 11"/>
+          <p:cNvSpPr/>
+          <p:nvPr/>
+        </p:nvSpPr>
+        <p:spPr>
+          <a:xfrm>
+            <a:off x="7269480" y="1234440"/>
+            <a:ext cx="4206240" cy="2423160"/>
           </a:xfrm>
           <a:prstGeom prst="roundRect">
             <a:avLst/>
@@ -7934,14 +7850,14 @@
       </p:sp>
       <p:sp>
         <p:nvSpPr>
-          <p:cNvPr id="11" name="TextBox 10"/>
+          <p:cNvPr id="13" name="TextBox 12"/>
           <p:cNvSpPr txBox="1"/>
           <p:nvPr/>
         </p:nvSpPr>
         <p:spPr>
           <a:xfrm>
-            <a:off x="868680" y="4919472"/>
-            <a:ext cx="3154680" cy="1234440"/>
+            <a:off x="7406640" y="1325880"/>
+            <a:ext cx="3931920" cy="2240280"/>
           </a:xfrm>
           <a:prstGeom prst="rect">
             <a:avLst/>
@@ -7960,30 +7876,67 @@
                   <a:srgbClr val="1B365D"/>
                 </a:solidFill>
               </a:rPr>
-              <a:t>PAPER GỐC (DISTILBERT 2 LỚP)
+              <a:t>ĐỐI CHUẨN QUỐC TẾ: KANG &amp; KIM (2022)
 </a:t>
             </a:r>
-            <a:r>
-              <a:rPr sz="850">
+          </a:p>
+          <a:p>
+            <a:pPr>
+              <a:spcAft>
+                <a:spcPts val="250"/>
+              </a:spcAft>
+            </a:pPr>
+            <a:r>
+              <a:rPr sz="819">
                 <a:solidFill>
                   <a:srgbClr val="212529"/>
                 </a:solidFill>
               </a:rPr>
-              <a:t>Tích cực ~78%, Tiêu cực ~15%. Bỏ qua lớp Trung tính, ép câu số liệu kiểm toán kỹ thuật vào nhãn cảm xúc sai lệch.</a:t>
-            </a:r>
-          </a:p>
-        </p:txBody>
-      </p:sp>
-      <p:sp>
-        <p:nvSpPr>
-          <p:cNvPr id="12" name="Rounded Rectangle 11"/>
+              <a:t>• Kang &amp; Kim (2022): Pos/Neg toàn cầu đạt ≈ 5,20 lần.</a:t>
+            </a:r>
+          </a:p>
+          <a:p>
+            <a:pPr>
+              <a:spcAft>
+                <a:spcPts val="250"/>
+              </a:spcAft>
+            </a:pPr>
+            <a:r>
+              <a:rPr sz="819">
+                <a:solidFill>
+                  <a:srgbClr val="212529"/>
+                </a:solidFill>
+              </a:rPr>
+              <a:t>• Việt Nam: Pos/Neg trung bình đạt 4,06 lần (dao động 3,0 – 6,7x).</a:t>
+            </a:r>
+          </a:p>
+          <a:p>
+            <a:pPr>
+              <a:spcAft>
+                <a:spcPts val="250"/>
+              </a:spcAft>
+            </a:pPr>
+            <a:r>
+              <a:rPr sz="819">
+                <a:solidFill>
+                  <a:srgbClr val="212529"/>
+                </a:solidFill>
+              </a:rPr>
+              <a:t>• Cả 2 đều xác nhận Lý thuyết Quản trị Ấn tượng &amp; Hiệu ứng Pollyanna.</a:t>
+            </a:r>
+          </a:p>
+        </p:txBody>
+      </p:sp>
+      <p:sp>
+        <p:nvSpPr>
+          <p:cNvPr id="14" name="Rounded Rectangle 13"/>
           <p:cNvSpPr/>
           <p:nvPr/>
         </p:nvSpPr>
         <p:spPr>
           <a:xfrm>
-            <a:off x="4379976" y="4846320"/>
-            <a:ext cx="3429000" cy="1371600"/>
+            <a:off x="7269480" y="3794760"/>
+            <a:ext cx="4206240" cy="2423160"/>
           </a:xfrm>
           <a:prstGeom prst="roundRect">
             <a:avLst/>
@@ -7993,7 +7946,7 @@
           </a:solidFill>
           <a:ln w="12700">
             <a:solidFill>
-              <a:srgbClr val="288C3C"/>
+              <a:srgbClr val="D62728"/>
             </a:solidFill>
           </a:ln>
         </p:spPr>
@@ -8021,14 +7974,14 @@
       </p:sp>
       <p:sp>
         <p:nvSpPr>
-          <p:cNvPr id="13" name="TextBox 12"/>
+          <p:cNvPr id="15" name="TextBox 14"/>
           <p:cNvSpPr txBox="1"/>
           <p:nvPr/>
         </p:nvSpPr>
         <p:spPr>
           <a:xfrm>
-            <a:off x="4517136" y="4919472"/>
-            <a:ext cx="3154680" cy="1234440"/>
+            <a:off x="7406640" y="3886200"/>
+            <a:ext cx="3931920" cy="2240280"/>
           </a:xfrm>
           <a:prstGeom prst="rect">
             <a:avLst/>
@@ -8044,106 +7997,101 @@
             <a:r>
               <a:rPr sz="950" b="1">
                 <a:solidFill>
-                  <a:srgbClr val="288C3C"/>
+                  <a:srgbClr val="D62728"/>
                 </a:solidFill>
               </a:rPr>
-              <a:t>VIỆT NAM (PHOBERT 3 LỚP)
+              <a:t>CASE STUDY ĐẶC BIỆT: HIỆN TƯỢNG PNJ 2022
 </a:t>
             </a:r>
-            <a:r>
-              <a:rPr sz="850">
+          </a:p>
+          <a:p>
+            <a:pPr>
+              <a:spcAft>
+                <a:spcPts val="250"/>
+              </a:spcAft>
+            </a:pPr>
+            <a:r>
+              <a:rPr b="1" sz="819">
                 <a:solidFill>
                   <a:srgbClr val="212529"/>
                 </a:solidFill>
               </a:rPr>
-              <a:t>Tích cực: 53,87% | Trung tính: 32,87% | Tiêu cực: 13,26%. Đột phá bảo lưu 1/3 câu số liệu kỹ thuật khách quan.</a:t>
-            </a:r>
-          </a:p>
-        </p:txBody>
-      </p:sp>
-      <p:sp>
-        <p:nvSpPr>
-          <p:cNvPr id="14" name="Rounded Rectangle 13"/>
-          <p:cNvSpPr/>
-          <p:nvPr/>
-        </p:nvSpPr>
-        <p:spPr>
-          <a:xfrm>
-            <a:off x="8028432" y="4846320"/>
-            <a:ext cx="3429000" cy="1371600"/>
-          </a:xfrm>
-          <a:prstGeom prst="roundRect">
-            <a:avLst/>
-          </a:prstGeom>
-          <a:solidFill>
-            <a:srgbClr val="FFFFFF"/>
-          </a:solidFill>
-          <a:ln w="12700">
-            <a:solidFill>
-              <a:srgbClr val="7030A0"/>
-            </a:solidFill>
-          </a:ln>
-        </p:spPr>
-        <p:style>
-          <a:lnRef idx="1">
-            <a:schemeClr val="accent1"/>
-          </a:lnRef>
-          <a:fillRef idx="3">
-            <a:schemeClr val="accent1"/>
-          </a:fillRef>
-          <a:effectRef idx="2">
-            <a:schemeClr val="accent1"/>
-          </a:effectRef>
-          <a:fontRef idx="minor">
-            <a:schemeClr val="lt1"/>
-          </a:fontRef>
-        </p:style>
-        <p:txBody>
-          <a:bodyPr rtlCol="0" anchor="ctr"/>
-          <a:lstStyle/>
-          <a:p>
-            <a:pPr algn="ctr"/>
-          </a:p>
-        </p:txBody>
-      </p:sp>
-      <p:sp>
-        <p:nvSpPr>
-          <p:cNvPr id="15" name="TextBox 14"/>
-          <p:cNvSpPr txBox="1"/>
-          <p:nvPr/>
-        </p:nvSpPr>
-        <p:spPr>
-          <a:xfrm>
-            <a:off x="8165592" y="4919472"/>
-            <a:ext cx="3154680" cy="1234440"/>
-          </a:xfrm>
-          <a:prstGeom prst="rect">
-            <a:avLst/>
-          </a:prstGeom>
-          <a:noFill/>
-        </p:spPr>
-        <p:txBody>
-          <a:bodyPr wrap="square">
-            <a:spAutoFit/>
-          </a:bodyPr>
-          <a:lstStyle/>
-          <a:p>
-            <a:r>
-              <a:rPr sz="950" b="1">
-                <a:solidFill>
-                  <a:srgbClr val="7030A0"/>
+              <a:t>• Tỷ số Pos/Neg chạm đáy 1,21x (Năm 2021: 4,48x -&gt; 2023: 4,23x).</a:t>
+            </a:r>
+          </a:p>
+          <a:p>
+            <a:pPr>
+              <a:spcAft>
+                <a:spcPts val="250"/>
+              </a:spcAft>
+            </a:pPr>
+            <a:r>
+              <a:rPr b="1" sz="819">
+                <a:solidFill>
+                  <a:srgbClr val="212529"/>
                 </a:solidFill>
               </a:rPr>
-              <a:t>KẾT LUẬN VĂN PHONG DOANH NGHIỆP
-</a:t>
-            </a:r>
-            <a:r>
-              <a:rPr sz="850">
+              <a:t>• Căn nguyên Kỹ thuật NLP (Yếu tố quyết định):</a:t>
+            </a:r>
+          </a:p>
+          <a:p>
+            <a:pPr>
+              <a:spcAft>
+                <a:spcPts val="250"/>
+              </a:spcAft>
+            </a:pPr>
+            <a:r>
+              <a:rPr sz="819">
                 <a:solidFill>
                   <a:srgbClr val="212529"/>
                 </a:solidFill>
               </a:rPr>
-              <a:t>Báo cáo Việt Nam dành gần 1/3 dung lượng cho các số liệu đo lường kỹ thuật GRI chứ không chỉ đơn thuần quảng cáo PR.</a:t>
+              <a:t>  Bản PDF scan ảnh khiến OCR bị vỡ từ, đứt gãy cú pháp câu;</a:t>
+            </a:r>
+          </a:p>
+          <a:p>
+            <a:pPr>
+              <a:spcAft>
+                <a:spcPts val="250"/>
+              </a:spcAft>
+            </a:pPr>
+            <a:r>
+              <a:rPr sz="819">
+                <a:solidFill>
+                  <a:srgbClr val="212529"/>
+                </a:solidFill>
+              </a:rPr>
+              <a:t>  PhoBERT nhạy cảm với nhiễu nên gán nhầm 39,0% câu thành Tiêu cực.</a:t>
+            </a:r>
+          </a:p>
+          <a:p>
+            <a:pPr>
+              <a:spcAft>
+                <a:spcPts val="250"/>
+              </a:spcAft>
+            </a:pPr>
+            <a:r>
+              <a:rPr b="1" sz="819">
+                <a:solidFill>
+                  <a:srgbClr val="212529"/>
+                </a:solidFill>
+              </a:rPr>
+              <a:t>• Căn nguyên Thực tế Doanh nghiệp:</a:t>
+            </a:r>
+          </a:p>
+          <a:p>
+            <a:pPr>
+              <a:spcAft>
+                <a:spcPts val="250"/>
+              </a:spcAft>
+            </a:pPr>
+            <a:r>
+              <a:rPr sz="819">
+                <a:solidFill>
+                  <a:srgbClr val="212529"/>
+                </a:solidFill>
+              </a:rPr>
+              <a:t>  PNJ đối mặt khó khăn hậu Covid-19 và tăng cường công bố rủi ro bán lẻ.</a:t>
             </a:r>
           </a:p>
         </p:txBody>
@@ -8344,7 +8292,7 @@
                 </a:solidFill>
                 <a:latin typeface="Segoe UI"/>
               </a:rPr>
-              <a:t>KẾT QUẢ THỰC NGHIỆM</a:t>
+              <a:t>THẢO LUẬN CHUYÊN SÂU</a:t>
             </a:r>
           </a:p>
         </p:txBody>
@@ -8378,7 +8326,7 @@
                 </a:solidFill>
                 <a:latin typeface="Segoe UI"/>
               </a:rPr>
-              <a:t>KẾT QUẢ 6: TỶ SỐ CẢM XÚC POS/NEG RATIO &amp; ĐỐI CHUẨN TỶ LỆ</a:t>
+              <a:t>THẢO LUẬN: BẢNG TỔNG HỢP &amp; PHÂN TÍCH 'NÓI NHIỀU VỀ GÌ' TẠI VIỆT NAM</a:t>
             </a:r>
           </a:p>
         </p:txBody>
@@ -8413,719 +8361,7 @@
                 </a:solidFill>
                 <a:latin typeface="Segoe UI"/>
               </a:rPr>
-              <a:t>12 / 18</a:t>
-            </a:r>
-          </a:p>
-        </p:txBody>
-      </p:sp>
-      <p:sp>
-        <p:nvSpPr>
-          <p:cNvPr id="8" name="TextBox 7"/>
-          <p:cNvSpPr txBox="1"/>
-          <p:nvPr/>
-        </p:nvSpPr>
-        <p:spPr>
-          <a:xfrm>
-            <a:off x="731520" y="6565392"/>
-            <a:ext cx="10789920" cy="256032"/>
-          </a:xfrm>
-          <a:prstGeom prst="rect">
-            <a:avLst/>
-          </a:prstGeom>
-          <a:noFill/>
-        </p:spPr>
-        <p:txBody>
-          <a:bodyPr wrap="none">
-            <a:spAutoFit/>
-          </a:bodyPr>
-          <a:lstStyle/>
-          <a:p>
-            <a:r>
-              <a:rPr sz="850">
-                <a:solidFill>
-                  <a:srgbClr val="6C757D"/>
-                </a:solidFill>
-                <a:latin typeface="Segoe UI"/>
-              </a:rPr>
-              <a:t>Đề tài: NLP Đa ngữ trong Phân tích SDG &amp; Cảm xúc Báo cáo PTBV tại Việt Nam | Tác giả: Lê Đan Sơn, Dương Thị Hoàn</a:t>
-            </a:r>
-          </a:p>
-        </p:txBody>
-      </p:sp>
-      <p:pic>
-        <p:nvPicPr>
-          <p:cNvPr id="9" name="Picture 8" descr="sentiment_ratio.png"/>
-          <p:cNvPicPr>
-            <a:picLocks noChangeAspect="1"/>
-          </p:cNvPicPr>
-          <p:nvPr/>
-        </p:nvPicPr>
-        <p:blipFill>
-          <a:blip r:embed="rId2"/>
-          <a:stretch>
-            <a:fillRect/>
-          </a:stretch>
-        </p:blipFill>
-        <p:spPr>
-          <a:xfrm>
-            <a:off x="731520" y="1234440"/>
-            <a:ext cx="6217920" cy="3383280"/>
-          </a:xfrm>
-          <a:prstGeom prst="rect">
-            <a:avLst/>
-          </a:prstGeom>
-        </p:spPr>
-      </p:pic>
-      <p:sp>
-        <p:nvSpPr>
-          <p:cNvPr id="10" name="Rounded Rectangle 9"/>
-          <p:cNvSpPr/>
-          <p:nvPr/>
-        </p:nvSpPr>
-        <p:spPr>
-          <a:xfrm>
-            <a:off x="731520" y="4800600"/>
-            <a:ext cx="6217920" cy="1417320"/>
-          </a:xfrm>
-          <a:prstGeom prst="roundRect">
-            <a:avLst/>
-          </a:prstGeom>
-          <a:solidFill>
-            <a:srgbClr val="EEF4FC"/>
-          </a:solidFill>
-          <a:ln w="12700">
-            <a:solidFill>
-              <a:srgbClr val="1F77B4"/>
-            </a:solidFill>
-          </a:ln>
-        </p:spPr>
-        <p:style>
-          <a:lnRef idx="1">
-            <a:schemeClr val="accent1"/>
-          </a:lnRef>
-          <a:fillRef idx="3">
-            <a:schemeClr val="accent1"/>
-          </a:fillRef>
-          <a:effectRef idx="2">
-            <a:schemeClr val="accent1"/>
-          </a:effectRef>
-          <a:fontRef idx="minor">
-            <a:schemeClr val="lt1"/>
-          </a:fontRef>
-        </p:style>
-        <p:txBody>
-          <a:bodyPr rtlCol="0" anchor="ctr"/>
-          <a:lstStyle/>
-          <a:p>
-            <a:pPr algn="ctr"/>
-          </a:p>
-        </p:txBody>
-      </p:sp>
-      <p:sp>
-        <p:nvSpPr>
-          <p:cNvPr id="11" name="TextBox 10"/>
-          <p:cNvSpPr txBox="1"/>
-          <p:nvPr/>
-        </p:nvSpPr>
-        <p:spPr>
-          <a:xfrm>
-            <a:off x="868680" y="4864608"/>
-            <a:ext cx="5943600" cy="1280160"/>
-          </a:xfrm>
-          <a:prstGeom prst="rect">
-            <a:avLst/>
-          </a:prstGeom>
-          <a:noFill/>
-        </p:spPr>
-        <p:txBody>
-          <a:bodyPr wrap="square">
-            <a:spAutoFit/>
-          </a:bodyPr>
-          <a:lstStyle/>
-          <a:p>
-            <a:r>
-              <a:rPr b="1" sz="950">
-                <a:solidFill>
-                  <a:srgbClr val="1B365D"/>
-                </a:solidFill>
-              </a:rPr>
-              <a:t>KẾT LUẬN THIÊN LỆCH LẠC QUAN CẤU TRÚC:
-</a:t>
-            </a:r>
-          </a:p>
-          <a:p>
-            <a:pPr>
-              <a:defRPr sz="850">
-                <a:solidFill>
-                  <a:srgbClr val="212529"/>
-                </a:solidFill>
-              </a:defRPr>
-            </a:pPr>
-            <a:r>
-              <a:t>Tỷ số Pos/Neg trung bình đạt 4,06 lần khẳng định doanh nghiệp Việt Nam luôn có xu hướng dùng ngôn từ tích cực gấp hơn 4 lần so với tiêu cực nhằm làm đẹp hình ảnh quản trị (Hiệu ứng Pollyanna).</a:t>
-            </a:r>
-          </a:p>
-        </p:txBody>
-      </p:sp>
-      <p:sp>
-        <p:nvSpPr>
-          <p:cNvPr id="12" name="Rounded Rectangle 11"/>
-          <p:cNvSpPr/>
-          <p:nvPr/>
-        </p:nvSpPr>
-        <p:spPr>
-          <a:xfrm>
-            <a:off x="7269480" y="1234440"/>
-            <a:ext cx="4206240" cy="2423160"/>
-          </a:xfrm>
-          <a:prstGeom prst="roundRect">
-            <a:avLst/>
-          </a:prstGeom>
-          <a:solidFill>
-            <a:srgbClr val="FFFFFF"/>
-          </a:solidFill>
-          <a:ln w="12700">
-            <a:solidFill>
-              <a:srgbClr val="1B365D"/>
-            </a:solidFill>
-          </a:ln>
-        </p:spPr>
-        <p:style>
-          <a:lnRef idx="1">
-            <a:schemeClr val="accent1"/>
-          </a:lnRef>
-          <a:fillRef idx="3">
-            <a:schemeClr val="accent1"/>
-          </a:fillRef>
-          <a:effectRef idx="2">
-            <a:schemeClr val="accent1"/>
-          </a:effectRef>
-          <a:fontRef idx="minor">
-            <a:schemeClr val="lt1"/>
-          </a:fontRef>
-        </p:style>
-        <p:txBody>
-          <a:bodyPr rtlCol="0" anchor="ctr"/>
-          <a:lstStyle/>
-          <a:p>
-            <a:pPr algn="ctr"/>
-          </a:p>
-        </p:txBody>
-      </p:sp>
-      <p:sp>
-        <p:nvSpPr>
-          <p:cNvPr id="13" name="TextBox 12"/>
-          <p:cNvSpPr txBox="1"/>
-          <p:nvPr/>
-        </p:nvSpPr>
-        <p:spPr>
-          <a:xfrm>
-            <a:off x="7406640" y="1325880"/>
-            <a:ext cx="3931920" cy="2240280"/>
-          </a:xfrm>
-          <a:prstGeom prst="rect">
-            <a:avLst/>
-          </a:prstGeom>
-          <a:noFill/>
-        </p:spPr>
-        <p:txBody>
-          <a:bodyPr wrap="square">
-            <a:spAutoFit/>
-          </a:bodyPr>
-          <a:lstStyle/>
-          <a:p>
-            <a:r>
-              <a:rPr sz="950" b="1">
-                <a:solidFill>
-                  <a:srgbClr val="1B365D"/>
-                </a:solidFill>
-              </a:rPr>
-              <a:t>ĐỐI CHUẨN QUỐC TẾ: KANG &amp; KIM (2022)
-</a:t>
-            </a:r>
-          </a:p>
-          <a:p>
-            <a:pPr>
-              <a:spcAft>
-                <a:spcPts val="250"/>
-              </a:spcAft>
-            </a:pPr>
-            <a:r>
-              <a:rPr sz="819">
-                <a:solidFill>
-                  <a:srgbClr val="212529"/>
-                </a:solidFill>
-              </a:rPr>
-              <a:t>• Kang &amp; Kim (2022): Pos/Neg toàn cầu đạt ≈ 5,20 lần.</a:t>
-            </a:r>
-          </a:p>
-          <a:p>
-            <a:pPr>
-              <a:spcAft>
-                <a:spcPts val="250"/>
-              </a:spcAft>
-            </a:pPr>
-            <a:r>
-              <a:rPr sz="819">
-                <a:solidFill>
-                  <a:srgbClr val="212529"/>
-                </a:solidFill>
-              </a:rPr>
-              <a:t>• Việt Nam: Pos/Neg trung bình đạt 4,06 lần (dao động 3,0 – 6,7x).</a:t>
-            </a:r>
-          </a:p>
-          <a:p>
-            <a:pPr>
-              <a:spcAft>
-                <a:spcPts val="250"/>
-              </a:spcAft>
-            </a:pPr>
-            <a:r>
-              <a:rPr sz="819">
-                <a:solidFill>
-                  <a:srgbClr val="212529"/>
-                </a:solidFill>
-              </a:rPr>
-              <a:t>• Cả 2 đều xác nhận Lý thuyết Quản trị Ấn tượng &amp; Hiệu ứng Pollyanna.</a:t>
-            </a:r>
-          </a:p>
-        </p:txBody>
-      </p:sp>
-      <p:sp>
-        <p:nvSpPr>
-          <p:cNvPr id="14" name="Rounded Rectangle 13"/>
-          <p:cNvSpPr/>
-          <p:nvPr/>
-        </p:nvSpPr>
-        <p:spPr>
-          <a:xfrm>
-            <a:off x="7269480" y="3794760"/>
-            <a:ext cx="4206240" cy="2423160"/>
-          </a:xfrm>
-          <a:prstGeom prst="roundRect">
-            <a:avLst/>
-          </a:prstGeom>
-          <a:solidFill>
-            <a:srgbClr val="FFFFFF"/>
-          </a:solidFill>
-          <a:ln w="12700">
-            <a:solidFill>
-              <a:srgbClr val="D62728"/>
-            </a:solidFill>
-          </a:ln>
-        </p:spPr>
-        <p:style>
-          <a:lnRef idx="1">
-            <a:schemeClr val="accent1"/>
-          </a:lnRef>
-          <a:fillRef idx="3">
-            <a:schemeClr val="accent1"/>
-          </a:fillRef>
-          <a:effectRef idx="2">
-            <a:schemeClr val="accent1"/>
-          </a:effectRef>
-          <a:fontRef idx="minor">
-            <a:schemeClr val="lt1"/>
-          </a:fontRef>
-        </p:style>
-        <p:txBody>
-          <a:bodyPr rtlCol="0" anchor="ctr"/>
-          <a:lstStyle/>
-          <a:p>
-            <a:pPr algn="ctr"/>
-          </a:p>
-        </p:txBody>
-      </p:sp>
-      <p:sp>
-        <p:nvSpPr>
-          <p:cNvPr id="15" name="TextBox 14"/>
-          <p:cNvSpPr txBox="1"/>
-          <p:nvPr/>
-        </p:nvSpPr>
-        <p:spPr>
-          <a:xfrm>
-            <a:off x="7406640" y="3886200"/>
-            <a:ext cx="3931920" cy="2240280"/>
-          </a:xfrm>
-          <a:prstGeom prst="rect">
-            <a:avLst/>
-          </a:prstGeom>
-          <a:noFill/>
-        </p:spPr>
-        <p:txBody>
-          <a:bodyPr wrap="square">
-            <a:spAutoFit/>
-          </a:bodyPr>
-          <a:lstStyle/>
-          <a:p>
-            <a:r>
-              <a:rPr sz="950" b="1">
-                <a:solidFill>
-                  <a:srgbClr val="D62728"/>
-                </a:solidFill>
-              </a:rPr>
-              <a:t>CASE STUDY ĐẶC BIỆT: HIỆN TƯỢNG PNJ 2022
-</a:t>
-            </a:r>
-          </a:p>
-          <a:p>
-            <a:pPr>
-              <a:spcAft>
-                <a:spcPts val="250"/>
-              </a:spcAft>
-            </a:pPr>
-            <a:r>
-              <a:rPr b="1" sz="819">
-                <a:solidFill>
-                  <a:srgbClr val="212529"/>
-                </a:solidFill>
-              </a:rPr>
-              <a:t>• Tỷ số Pos/Neg chạm đáy 1,21x (Năm 2021: 4,48x -&gt; 2023: 4,23x).</a:t>
-            </a:r>
-          </a:p>
-          <a:p>
-            <a:pPr>
-              <a:spcAft>
-                <a:spcPts val="250"/>
-              </a:spcAft>
-            </a:pPr>
-            <a:r>
-              <a:rPr b="1" sz="819">
-                <a:solidFill>
-                  <a:srgbClr val="212529"/>
-                </a:solidFill>
-              </a:rPr>
-              <a:t>• Căn nguyên Kỹ thuật NLP (Yếu tố quyết định):</a:t>
-            </a:r>
-          </a:p>
-          <a:p>
-            <a:pPr>
-              <a:spcAft>
-                <a:spcPts val="250"/>
-              </a:spcAft>
-            </a:pPr>
-            <a:r>
-              <a:rPr sz="819">
-                <a:solidFill>
-                  <a:srgbClr val="212529"/>
-                </a:solidFill>
-              </a:rPr>
-              <a:t>  Bản PDF scan ảnh khiến OCR bị vỡ từ, đứt gãy cú pháp câu;</a:t>
-            </a:r>
-          </a:p>
-          <a:p>
-            <a:pPr>
-              <a:spcAft>
-                <a:spcPts val="250"/>
-              </a:spcAft>
-            </a:pPr>
-            <a:r>
-              <a:rPr sz="819">
-                <a:solidFill>
-                  <a:srgbClr val="212529"/>
-                </a:solidFill>
-              </a:rPr>
-              <a:t>  PhoBERT nhạy cảm với nhiễu nên gán nhầm 39,0% câu thành Tiêu cực.</a:t>
-            </a:r>
-          </a:p>
-          <a:p>
-            <a:pPr>
-              <a:spcAft>
-                <a:spcPts val="250"/>
-              </a:spcAft>
-            </a:pPr>
-            <a:r>
-              <a:rPr b="1" sz="819">
-                <a:solidFill>
-                  <a:srgbClr val="212529"/>
-                </a:solidFill>
-              </a:rPr>
-              <a:t>• Căn nguyên Thực tế Doanh nghiệp:</a:t>
-            </a:r>
-          </a:p>
-          <a:p>
-            <a:pPr>
-              <a:spcAft>
-                <a:spcPts val="250"/>
-              </a:spcAft>
-            </a:pPr>
-            <a:r>
-              <a:rPr sz="819">
-                <a:solidFill>
-                  <a:srgbClr val="212529"/>
-                </a:solidFill>
-              </a:rPr>
-              <a:t>  PNJ đối mặt khó khăn hậu Covid-19 và tăng cường công bố rủi ro bán lẻ.</a:t>
-            </a:r>
-          </a:p>
-        </p:txBody>
-      </p:sp>
-    </p:spTree>
-  </p:cSld>
-  <p:clrMapOvr>
-    <a:masterClrMapping/>
-  </p:clrMapOvr>
-</p:sld>
-</file>
-
-<file path=ppt/slides/slide13.xml><?xml version="1.0" encoding="utf-8"?>
-<p:sld xmlns:a="http://schemas.openxmlformats.org/drawingml/2006/main" xmlns:p="http://schemas.openxmlformats.org/presentationml/2006/main" xmlns:r="http://schemas.openxmlformats.org/officeDocument/2006/relationships">
-  <p:cSld>
-    <p:spTree>
-      <p:nvGrpSpPr>
-        <p:cNvPr id="1" name=""/>
-        <p:cNvGrpSpPr/>
-        <p:nvPr/>
-      </p:nvGrpSpPr>
-      <p:grpSpPr/>
-      <p:sp>
-        <p:nvSpPr>
-          <p:cNvPr id="2" name="Rectangle 1"/>
-          <p:cNvSpPr/>
-          <p:nvPr/>
-        </p:nvSpPr>
-        <p:spPr>
-          <a:xfrm>
-            <a:off x="0" y="0"/>
-            <a:ext cx="12191695" cy="6858000"/>
-          </a:xfrm>
-          <a:prstGeom prst="rect">
-            <a:avLst/>
-          </a:prstGeom>
-          <a:solidFill>
-            <a:srgbClr val="F5F7FA"/>
-          </a:solidFill>
-          <a:ln>
-            <a:noFill/>
-          </a:ln>
-        </p:spPr>
-        <p:style>
-          <a:lnRef idx="1">
-            <a:schemeClr val="accent1"/>
-          </a:lnRef>
-          <a:fillRef idx="3">
-            <a:schemeClr val="accent1"/>
-          </a:fillRef>
-          <a:effectRef idx="2">
-            <a:schemeClr val="accent1"/>
-          </a:effectRef>
-          <a:fontRef idx="minor">
-            <a:schemeClr val="lt1"/>
-          </a:fontRef>
-        </p:style>
-        <p:txBody>
-          <a:bodyPr rtlCol="0" anchor="ctr"/>
-          <a:lstStyle/>
-          <a:p>
-            <a:pPr algn="ctr"/>
-          </a:p>
-        </p:txBody>
-      </p:sp>
-      <p:sp>
-        <p:nvSpPr>
-          <p:cNvPr id="3" name="Rectangle 2"/>
-          <p:cNvSpPr/>
-          <p:nvPr/>
-        </p:nvSpPr>
-        <p:spPr>
-          <a:xfrm>
-            <a:off x="0" y="0"/>
-            <a:ext cx="12191695" cy="960120"/>
-          </a:xfrm>
-          <a:prstGeom prst="rect">
-            <a:avLst/>
-          </a:prstGeom>
-          <a:solidFill>
-            <a:srgbClr val="FFFFFF"/>
-          </a:solidFill>
-          <a:ln w="9525">
-            <a:solidFill>
-              <a:srgbClr val="DAE0E9"/>
-            </a:solidFill>
-          </a:ln>
-        </p:spPr>
-        <p:style>
-          <a:lnRef idx="1">
-            <a:schemeClr val="accent1"/>
-          </a:lnRef>
-          <a:fillRef idx="3">
-            <a:schemeClr val="accent1"/>
-          </a:fillRef>
-          <a:effectRef idx="2">
-            <a:schemeClr val="accent1"/>
-          </a:effectRef>
-          <a:fontRef idx="minor">
-            <a:schemeClr val="lt1"/>
-          </a:fontRef>
-        </p:style>
-        <p:txBody>
-          <a:bodyPr rtlCol="0" anchor="ctr"/>
-          <a:lstStyle/>
-          <a:p>
-            <a:pPr algn="ctr"/>
-          </a:p>
-        </p:txBody>
-      </p:sp>
-      <p:sp>
-        <p:nvSpPr>
-          <p:cNvPr id="4" name="Rectangle 3"/>
-          <p:cNvSpPr/>
-          <p:nvPr/>
-        </p:nvSpPr>
-        <p:spPr>
-          <a:xfrm>
-            <a:off x="0" y="0"/>
-            <a:ext cx="12191695" cy="45720"/>
-          </a:xfrm>
-          <a:prstGeom prst="rect">
-            <a:avLst/>
-          </a:prstGeom>
-          <a:solidFill>
-            <a:srgbClr val="D4AF37"/>
-          </a:solidFill>
-          <a:ln>
-            <a:noFill/>
-          </a:ln>
-        </p:spPr>
-        <p:style>
-          <a:lnRef idx="1">
-            <a:schemeClr val="accent1"/>
-          </a:lnRef>
-          <a:fillRef idx="3">
-            <a:schemeClr val="accent1"/>
-          </a:fillRef>
-          <a:effectRef idx="2">
-            <a:schemeClr val="accent1"/>
-          </a:effectRef>
-          <a:fontRef idx="minor">
-            <a:schemeClr val="lt1"/>
-          </a:fontRef>
-        </p:style>
-        <p:txBody>
-          <a:bodyPr rtlCol="0" anchor="ctr"/>
-          <a:lstStyle/>
-          <a:p>
-            <a:pPr algn="ctr"/>
-          </a:p>
-        </p:txBody>
-      </p:sp>
-      <p:sp>
-        <p:nvSpPr>
-          <p:cNvPr id="5" name="Rounded Rectangle 4"/>
-          <p:cNvSpPr/>
-          <p:nvPr/>
-        </p:nvSpPr>
-        <p:spPr>
-          <a:xfrm>
-            <a:off x="731520" y="128016"/>
-            <a:ext cx="2560320" cy="237744"/>
-          </a:xfrm>
-          <a:prstGeom prst="roundRect">
-            <a:avLst/>
-          </a:prstGeom>
-          <a:solidFill>
-            <a:srgbClr val="1B365D"/>
-          </a:solidFill>
-          <a:ln>
-            <a:noFill/>
-          </a:ln>
-        </p:spPr>
-        <p:style>
-          <a:lnRef idx="1">
-            <a:schemeClr val="accent1"/>
-          </a:lnRef>
-          <a:fillRef idx="3">
-            <a:schemeClr val="accent1"/>
-          </a:fillRef>
-          <a:effectRef idx="2">
-            <a:schemeClr val="accent1"/>
-          </a:effectRef>
-          <a:fontRef idx="minor">
-            <a:schemeClr val="lt1"/>
-          </a:fontRef>
-        </p:style>
-        <p:txBody>
-          <a:bodyPr rtlCol="0" anchor="ctr"/>
-          <a:lstStyle/>
-          <a:p>
-            <a:pPr algn="ctr"/>
-            <a:r>
-              <a:rPr sz="850" b="1">
-                <a:solidFill>
-                  <a:srgbClr val="FFFFFF"/>
-                </a:solidFill>
-                <a:latin typeface="Segoe UI"/>
-              </a:rPr>
-              <a:t>THẢO LUẬN CHUYÊN SÂU</a:t>
-            </a:r>
-          </a:p>
-        </p:txBody>
-      </p:sp>
-      <p:sp>
-        <p:nvSpPr>
-          <p:cNvPr id="6" name="TextBox 5"/>
-          <p:cNvSpPr txBox="1"/>
-          <p:nvPr/>
-        </p:nvSpPr>
-        <p:spPr>
-          <a:xfrm>
-            <a:off x="685800" y="384048"/>
-            <a:ext cx="9601200" cy="502920"/>
-          </a:xfrm>
-          <a:prstGeom prst="rect">
-            <a:avLst/>
-          </a:prstGeom>
-          <a:noFill/>
-        </p:spPr>
-        <p:txBody>
-          <a:bodyPr wrap="square" anchor="ctr">
-            <a:spAutoFit/>
-          </a:bodyPr>
-          <a:lstStyle/>
-          <a:p>
-            <a:r>
-              <a:rPr sz="1650" b="1">
-                <a:solidFill>
-                  <a:srgbClr val="1B365D"/>
-                </a:solidFill>
-                <a:latin typeface="Segoe UI"/>
-              </a:rPr>
-              <a:t>THẢO LUẬN: BẢNG TỔNG HỢP &amp; PHÂN TÍCH 'NÓI NHIỀU VỀ GÌ' TẠI VIỆT NAM</a:t>
-            </a:r>
-          </a:p>
-        </p:txBody>
-      </p:sp>
-      <p:sp>
-        <p:nvSpPr>
-          <p:cNvPr id="7" name="TextBox 6"/>
-          <p:cNvSpPr txBox="1"/>
-          <p:nvPr/>
-        </p:nvSpPr>
-        <p:spPr>
-          <a:xfrm>
-            <a:off x="10789920" y="292608"/>
-            <a:ext cx="914400" cy="457200"/>
-          </a:xfrm>
-          <a:prstGeom prst="rect">
-            <a:avLst/>
-          </a:prstGeom>
-          <a:noFill/>
-        </p:spPr>
-        <p:txBody>
-          <a:bodyPr wrap="none">
-            <a:spAutoFit/>
-          </a:bodyPr>
-          <a:lstStyle/>
-          <a:p>
-            <a:pPr algn="r"/>
-            <a:r>
-              <a:rPr sz="1100" b="1">
-                <a:solidFill>
-                  <a:srgbClr val="6C757D"/>
-                </a:solidFill>
-                <a:latin typeface="Segoe UI"/>
-              </a:rPr>
-              <a:t>13 / 18</a:t>
+              <a:t>12 / 17</a:t>
             </a:r>
           </a:p>
         </p:txBody>
@@ -10165,6 +9401,982 @@
 </p:sld>
 </file>
 
+<file path=ppt/slides/slide13.xml><?xml version="1.0" encoding="utf-8"?>
+<p:sld xmlns:a="http://schemas.openxmlformats.org/drawingml/2006/main" xmlns:p="http://schemas.openxmlformats.org/presentationml/2006/main" xmlns:r="http://schemas.openxmlformats.org/officeDocument/2006/relationships">
+  <p:cSld>
+    <p:spTree>
+      <p:nvGrpSpPr>
+        <p:cNvPr id="1" name=""/>
+        <p:cNvGrpSpPr/>
+        <p:nvPr/>
+      </p:nvGrpSpPr>
+      <p:grpSpPr/>
+      <p:sp>
+        <p:nvSpPr>
+          <p:cNvPr id="2" name="Rectangle 1"/>
+          <p:cNvSpPr/>
+          <p:nvPr/>
+        </p:nvSpPr>
+        <p:spPr>
+          <a:xfrm>
+            <a:off x="0" y="0"/>
+            <a:ext cx="12191695" cy="6858000"/>
+          </a:xfrm>
+          <a:prstGeom prst="rect">
+            <a:avLst/>
+          </a:prstGeom>
+          <a:solidFill>
+            <a:srgbClr val="F5F7FA"/>
+          </a:solidFill>
+          <a:ln>
+            <a:noFill/>
+          </a:ln>
+        </p:spPr>
+        <p:style>
+          <a:lnRef idx="1">
+            <a:schemeClr val="accent1"/>
+          </a:lnRef>
+          <a:fillRef idx="3">
+            <a:schemeClr val="accent1"/>
+          </a:fillRef>
+          <a:effectRef idx="2">
+            <a:schemeClr val="accent1"/>
+          </a:effectRef>
+          <a:fontRef idx="minor">
+            <a:schemeClr val="lt1"/>
+          </a:fontRef>
+        </p:style>
+        <p:txBody>
+          <a:bodyPr rtlCol="0" anchor="ctr"/>
+          <a:lstStyle/>
+          <a:p>
+            <a:pPr algn="ctr"/>
+          </a:p>
+        </p:txBody>
+      </p:sp>
+      <p:sp>
+        <p:nvSpPr>
+          <p:cNvPr id="3" name="Rectangle 2"/>
+          <p:cNvSpPr/>
+          <p:nvPr/>
+        </p:nvSpPr>
+        <p:spPr>
+          <a:xfrm>
+            <a:off x="0" y="0"/>
+            <a:ext cx="12191695" cy="960120"/>
+          </a:xfrm>
+          <a:prstGeom prst="rect">
+            <a:avLst/>
+          </a:prstGeom>
+          <a:solidFill>
+            <a:srgbClr val="FFFFFF"/>
+          </a:solidFill>
+          <a:ln w="9525">
+            <a:solidFill>
+              <a:srgbClr val="DAE0E9"/>
+            </a:solidFill>
+          </a:ln>
+        </p:spPr>
+        <p:style>
+          <a:lnRef idx="1">
+            <a:schemeClr val="accent1"/>
+          </a:lnRef>
+          <a:fillRef idx="3">
+            <a:schemeClr val="accent1"/>
+          </a:fillRef>
+          <a:effectRef idx="2">
+            <a:schemeClr val="accent1"/>
+          </a:effectRef>
+          <a:fontRef idx="minor">
+            <a:schemeClr val="lt1"/>
+          </a:fontRef>
+        </p:style>
+        <p:txBody>
+          <a:bodyPr rtlCol="0" anchor="ctr"/>
+          <a:lstStyle/>
+          <a:p>
+            <a:pPr algn="ctr"/>
+          </a:p>
+        </p:txBody>
+      </p:sp>
+      <p:sp>
+        <p:nvSpPr>
+          <p:cNvPr id="4" name="Rectangle 3"/>
+          <p:cNvSpPr/>
+          <p:nvPr/>
+        </p:nvSpPr>
+        <p:spPr>
+          <a:xfrm>
+            <a:off x="0" y="0"/>
+            <a:ext cx="12191695" cy="45720"/>
+          </a:xfrm>
+          <a:prstGeom prst="rect">
+            <a:avLst/>
+          </a:prstGeom>
+          <a:solidFill>
+            <a:srgbClr val="D4AF37"/>
+          </a:solidFill>
+          <a:ln>
+            <a:noFill/>
+          </a:ln>
+        </p:spPr>
+        <p:style>
+          <a:lnRef idx="1">
+            <a:schemeClr val="accent1"/>
+          </a:lnRef>
+          <a:fillRef idx="3">
+            <a:schemeClr val="accent1"/>
+          </a:fillRef>
+          <a:effectRef idx="2">
+            <a:schemeClr val="accent1"/>
+          </a:effectRef>
+          <a:fontRef idx="minor">
+            <a:schemeClr val="lt1"/>
+          </a:fontRef>
+        </p:style>
+        <p:txBody>
+          <a:bodyPr rtlCol="0" anchor="ctr"/>
+          <a:lstStyle/>
+          <a:p>
+            <a:pPr algn="ctr"/>
+          </a:p>
+        </p:txBody>
+      </p:sp>
+      <p:sp>
+        <p:nvSpPr>
+          <p:cNvPr id="5" name="Rounded Rectangle 4"/>
+          <p:cNvSpPr/>
+          <p:nvPr/>
+        </p:nvSpPr>
+        <p:spPr>
+          <a:xfrm>
+            <a:off x="731520" y="128016"/>
+            <a:ext cx="2560320" cy="237744"/>
+          </a:xfrm>
+          <a:prstGeom prst="roundRect">
+            <a:avLst/>
+          </a:prstGeom>
+          <a:solidFill>
+            <a:srgbClr val="1B365D"/>
+          </a:solidFill>
+          <a:ln>
+            <a:noFill/>
+          </a:ln>
+        </p:spPr>
+        <p:style>
+          <a:lnRef idx="1">
+            <a:schemeClr val="accent1"/>
+          </a:lnRef>
+          <a:fillRef idx="3">
+            <a:schemeClr val="accent1"/>
+          </a:fillRef>
+          <a:effectRef idx="2">
+            <a:schemeClr val="accent1"/>
+          </a:effectRef>
+          <a:fontRef idx="minor">
+            <a:schemeClr val="lt1"/>
+          </a:fontRef>
+        </p:style>
+        <p:txBody>
+          <a:bodyPr rtlCol="0" anchor="ctr"/>
+          <a:lstStyle/>
+          <a:p>
+            <a:pPr algn="ctr"/>
+            <a:r>
+              <a:rPr sz="850" b="1">
+                <a:solidFill>
+                  <a:srgbClr val="FFFFFF"/>
+                </a:solidFill>
+                <a:latin typeface="Segoe UI"/>
+              </a:rPr>
+              <a:t>THẢO LUẬN CHUYÊN SÂU</a:t>
+            </a:r>
+          </a:p>
+        </p:txBody>
+      </p:sp>
+      <p:sp>
+        <p:nvSpPr>
+          <p:cNvPr id="6" name="TextBox 5"/>
+          <p:cNvSpPr txBox="1"/>
+          <p:nvPr/>
+        </p:nvSpPr>
+        <p:spPr>
+          <a:xfrm>
+            <a:off x="685800" y="384048"/>
+            <a:ext cx="9601200" cy="502920"/>
+          </a:xfrm>
+          <a:prstGeom prst="rect">
+            <a:avLst/>
+          </a:prstGeom>
+          <a:noFill/>
+        </p:spPr>
+        <p:txBody>
+          <a:bodyPr wrap="square" anchor="ctr">
+            <a:spAutoFit/>
+          </a:bodyPr>
+          <a:lstStyle/>
+          <a:p>
+            <a:r>
+              <a:rPr sz="1650" b="1">
+                <a:solidFill>
+                  <a:srgbClr val="1B365D"/>
+                </a:solidFill>
+                <a:latin typeface="Segoe UI"/>
+              </a:rPr>
+              <a:t>THẢO LUẬN: DOANH NGHIỆP 'ÍT NÓI VỀ GÌ' (VÙNG TRŨNG NÉ TRÁNH)?</a:t>
+            </a:r>
+          </a:p>
+        </p:txBody>
+      </p:sp>
+      <p:sp>
+        <p:nvSpPr>
+          <p:cNvPr id="7" name="TextBox 6"/>
+          <p:cNvSpPr txBox="1"/>
+          <p:nvPr/>
+        </p:nvSpPr>
+        <p:spPr>
+          <a:xfrm>
+            <a:off x="10789920" y="292608"/>
+            <a:ext cx="914400" cy="457200"/>
+          </a:xfrm>
+          <a:prstGeom prst="rect">
+            <a:avLst/>
+          </a:prstGeom>
+          <a:noFill/>
+        </p:spPr>
+        <p:txBody>
+          <a:bodyPr wrap="none">
+            <a:spAutoFit/>
+          </a:bodyPr>
+          <a:lstStyle/>
+          <a:p>
+            <a:pPr algn="r"/>
+            <a:r>
+              <a:rPr sz="1100" b="1">
+                <a:solidFill>
+                  <a:srgbClr val="6C757D"/>
+                </a:solidFill>
+                <a:latin typeface="Segoe UI"/>
+              </a:rPr>
+              <a:t>13 / 17</a:t>
+            </a:r>
+          </a:p>
+        </p:txBody>
+      </p:sp>
+      <p:sp>
+        <p:nvSpPr>
+          <p:cNvPr id="8" name="TextBox 7"/>
+          <p:cNvSpPr txBox="1"/>
+          <p:nvPr/>
+        </p:nvSpPr>
+        <p:spPr>
+          <a:xfrm>
+            <a:off x="731520" y="6565392"/>
+            <a:ext cx="10789920" cy="256032"/>
+          </a:xfrm>
+          <a:prstGeom prst="rect">
+            <a:avLst/>
+          </a:prstGeom>
+          <a:noFill/>
+        </p:spPr>
+        <p:txBody>
+          <a:bodyPr wrap="none">
+            <a:spAutoFit/>
+          </a:bodyPr>
+          <a:lstStyle/>
+          <a:p>
+            <a:r>
+              <a:rPr sz="850">
+                <a:solidFill>
+                  <a:srgbClr val="6C757D"/>
+                </a:solidFill>
+                <a:latin typeface="Segoe UI"/>
+              </a:rPr>
+              <a:t>Đề tài: NLP Đa ngữ trong Phân tích SDG &amp; Cảm xúc Báo cáo PTBV tại Việt Nam | Tác giả: Lê Đan Sơn, Dương Thị Hoàn</a:t>
+            </a:r>
+          </a:p>
+        </p:txBody>
+      </p:sp>
+      <p:sp>
+        <p:nvSpPr>
+          <p:cNvPr id="9" name="Rounded Rectangle 8"/>
+          <p:cNvSpPr/>
+          <p:nvPr/>
+        </p:nvSpPr>
+        <p:spPr>
+          <a:xfrm>
+            <a:off x="731520" y="1234440"/>
+            <a:ext cx="5212080" cy="2331720"/>
+          </a:xfrm>
+          <a:prstGeom prst="roundRect">
+            <a:avLst/>
+          </a:prstGeom>
+          <a:solidFill>
+            <a:srgbClr val="FFFFFF"/>
+          </a:solidFill>
+          <a:ln w="12700">
+            <a:solidFill>
+              <a:srgbClr val="D62728"/>
+            </a:solidFill>
+          </a:ln>
+        </p:spPr>
+        <p:style>
+          <a:lnRef idx="1">
+            <a:schemeClr val="accent1"/>
+          </a:lnRef>
+          <a:fillRef idx="3">
+            <a:schemeClr val="accent1"/>
+          </a:fillRef>
+          <a:effectRef idx="2">
+            <a:schemeClr val="accent1"/>
+          </a:effectRef>
+          <a:fontRef idx="minor">
+            <a:schemeClr val="lt1"/>
+          </a:fontRef>
+        </p:style>
+        <p:txBody>
+          <a:bodyPr rtlCol="0" anchor="ctr"/>
+          <a:lstStyle/>
+          <a:p>
+            <a:pPr algn="ctr"/>
+          </a:p>
+        </p:txBody>
+      </p:sp>
+      <p:sp>
+        <p:nvSpPr>
+          <p:cNvPr id="10" name="Rectangle 9"/>
+          <p:cNvSpPr/>
+          <p:nvPr/>
+        </p:nvSpPr>
+        <p:spPr>
+          <a:xfrm>
+            <a:off x="731520" y="1234440"/>
+            <a:ext cx="5212080" cy="365760"/>
+          </a:xfrm>
+          <a:prstGeom prst="rect">
+            <a:avLst/>
+          </a:prstGeom>
+          <a:solidFill>
+            <a:srgbClr val="D62728"/>
+          </a:solidFill>
+          <a:ln>
+            <a:noFill/>
+          </a:ln>
+        </p:spPr>
+        <p:style>
+          <a:lnRef idx="1">
+            <a:schemeClr val="accent1"/>
+          </a:lnRef>
+          <a:fillRef idx="3">
+            <a:schemeClr val="accent1"/>
+          </a:fillRef>
+          <a:effectRef idx="2">
+            <a:schemeClr val="accent1"/>
+          </a:effectRef>
+          <a:fontRef idx="minor">
+            <a:schemeClr val="lt1"/>
+          </a:fontRef>
+        </p:style>
+        <p:txBody>
+          <a:bodyPr rtlCol="0" anchor="ctr"/>
+          <a:lstStyle/>
+          <a:p>
+            <a:pPr algn="l"/>
+            <a:r>
+              <a:rPr sz="1000" b="1">
+                <a:solidFill>
+                  <a:srgbClr val="FFFFFF"/>
+                </a:solidFill>
+                <a:latin typeface="Segoe UI"/>
+              </a:rPr>
+              <a:t>  ▲ 1. ĐA DẠNG SINH HỌC &amp; BẢO TỒN (SDG 14, 15)</a:t>
+            </a:r>
+          </a:p>
+        </p:txBody>
+      </p:sp>
+      <p:sp>
+        <p:nvSpPr>
+          <p:cNvPr id="11" name="TextBox 10"/>
+          <p:cNvSpPr txBox="1"/>
+          <p:nvPr/>
+        </p:nvSpPr>
+        <p:spPr>
+          <a:xfrm>
+            <a:off x="868680" y="1645920"/>
+            <a:ext cx="4937760" cy="1874519"/>
+          </a:xfrm>
+          <a:prstGeom prst="rect">
+            <a:avLst/>
+          </a:prstGeom>
+          <a:noFill/>
+        </p:spPr>
+        <p:txBody>
+          <a:bodyPr wrap="square">
+            <a:spAutoFit/>
+          </a:bodyPr>
+          <a:lstStyle/>
+          <a:p>
+            <a:pPr>
+              <a:spcAft>
+                <a:spcPts val="200"/>
+              </a:spcAft>
+            </a:pPr>
+            <a:r>
+              <a:rPr sz="880">
+                <a:solidFill>
+                  <a:srgbClr val="212529"/>
+                </a:solidFill>
+                <a:latin typeface="Segoe UI"/>
+              </a:rPr>
+              <a:t>• Điểm số luôn ở mức đáy toàn mẫu (&lt; 38 điểm).</a:t>
+            </a:r>
+          </a:p>
+          <a:p>
+            <a:pPr>
+              <a:spcAft>
+                <a:spcPts val="200"/>
+              </a:spcAft>
+            </a:pPr>
+            <a:r>
+              <a:rPr sz="880">
+                <a:solidFill>
+                  <a:srgbClr val="212529"/>
+                </a:solidFill>
+                <a:latin typeface="Segoe UI"/>
+              </a:rPr>
+              <a:t>• Chỉ nêu khẩu hiệu chung chung, thiếu số liệu kiểm kê tác động sinh thái đất liền và biển.</a:t>
+            </a:r>
+          </a:p>
+          <a:p>
+            <a:pPr>
+              <a:spcAft>
+                <a:spcPts val="200"/>
+              </a:spcAft>
+            </a:pPr>
+            <a:r>
+              <a:rPr sz="880">
+                <a:solidFill>
+                  <a:srgbClr val="212529"/>
+                </a:solidFill>
+                <a:latin typeface="Segoe UI"/>
+              </a:rPr>
+              <a:t>• Chi phí đo lường đa dạng sinh học phức tạp và chưa có chế tài bắt buộc.</a:t>
+            </a:r>
+          </a:p>
+        </p:txBody>
+      </p:sp>
+      <p:sp>
+        <p:nvSpPr>
+          <p:cNvPr id="12" name="Rounded Rectangle 11"/>
+          <p:cNvSpPr/>
+          <p:nvPr/>
+        </p:nvSpPr>
+        <p:spPr>
+          <a:xfrm>
+            <a:off x="6245352" y="1234440"/>
+            <a:ext cx="5212080" cy="2331720"/>
+          </a:xfrm>
+          <a:prstGeom prst="roundRect">
+            <a:avLst/>
+          </a:prstGeom>
+          <a:solidFill>
+            <a:srgbClr val="FFFFFF"/>
+          </a:solidFill>
+          <a:ln w="12700">
+            <a:solidFill>
+              <a:srgbClr val="D62728"/>
+            </a:solidFill>
+          </a:ln>
+        </p:spPr>
+        <p:style>
+          <a:lnRef idx="1">
+            <a:schemeClr val="accent1"/>
+          </a:lnRef>
+          <a:fillRef idx="3">
+            <a:schemeClr val="accent1"/>
+          </a:fillRef>
+          <a:effectRef idx="2">
+            <a:schemeClr val="accent1"/>
+          </a:effectRef>
+          <a:fontRef idx="minor">
+            <a:schemeClr val="lt1"/>
+          </a:fontRef>
+        </p:style>
+        <p:txBody>
+          <a:bodyPr rtlCol="0" anchor="ctr"/>
+          <a:lstStyle/>
+          <a:p>
+            <a:pPr algn="ctr"/>
+          </a:p>
+        </p:txBody>
+      </p:sp>
+      <p:sp>
+        <p:nvSpPr>
+          <p:cNvPr id="13" name="Rectangle 12"/>
+          <p:cNvSpPr/>
+          <p:nvPr/>
+        </p:nvSpPr>
+        <p:spPr>
+          <a:xfrm>
+            <a:off x="6245352" y="1234440"/>
+            <a:ext cx="5212080" cy="365760"/>
+          </a:xfrm>
+          <a:prstGeom prst="rect">
+            <a:avLst/>
+          </a:prstGeom>
+          <a:solidFill>
+            <a:srgbClr val="D62728"/>
+          </a:solidFill>
+          <a:ln>
+            <a:noFill/>
+          </a:ln>
+        </p:spPr>
+        <p:style>
+          <a:lnRef idx="1">
+            <a:schemeClr val="accent1"/>
+          </a:lnRef>
+          <a:fillRef idx="3">
+            <a:schemeClr val="accent1"/>
+          </a:fillRef>
+          <a:effectRef idx="2">
+            <a:schemeClr val="accent1"/>
+          </a:effectRef>
+          <a:fontRef idx="minor">
+            <a:schemeClr val="lt1"/>
+          </a:fontRef>
+        </p:style>
+        <p:txBody>
+          <a:bodyPr rtlCol="0" anchor="ctr"/>
+          <a:lstStyle/>
+          <a:p>
+            <a:pPr algn="l"/>
+            <a:r>
+              <a:rPr sz="1000" b="1">
+                <a:solidFill>
+                  <a:srgbClr val="FFFFFF"/>
+                </a:solidFill>
+                <a:latin typeface="Segoe UI"/>
+              </a:rPr>
+              <a:t>  ▲ 2. BÌNH ĐẲNG LƯƠNG &amp; CHÊNH LỆCH THU NHẬP (SDG 5, 10)</a:t>
+            </a:r>
+          </a:p>
+        </p:txBody>
+      </p:sp>
+      <p:sp>
+        <p:nvSpPr>
+          <p:cNvPr id="14" name="TextBox 13"/>
+          <p:cNvSpPr txBox="1"/>
+          <p:nvPr/>
+        </p:nvSpPr>
+        <p:spPr>
+          <a:xfrm>
+            <a:off x="6382512" y="1645920"/>
+            <a:ext cx="4937760" cy="1874519"/>
+          </a:xfrm>
+          <a:prstGeom prst="rect">
+            <a:avLst/>
+          </a:prstGeom>
+          <a:noFill/>
+        </p:spPr>
+        <p:txBody>
+          <a:bodyPr wrap="square">
+            <a:spAutoFit/>
+          </a:bodyPr>
+          <a:lstStyle/>
+          <a:p>
+            <a:pPr>
+              <a:spcAft>
+                <a:spcPts val="200"/>
+              </a:spcAft>
+            </a:pPr>
+            <a:r>
+              <a:rPr sz="880">
+                <a:solidFill>
+                  <a:srgbClr val="212529"/>
+                </a:solidFill>
+                <a:latin typeface="Segoe UI"/>
+              </a:rPr>
+              <a:t>• Tuyệt đối né tránh công bố Tỷ số chênh lệch lương CEO với công nhân.</a:t>
+            </a:r>
+          </a:p>
+          <a:p>
+            <a:pPr>
+              <a:spcAft>
+                <a:spcPts val="200"/>
+              </a:spcAft>
+            </a:pPr>
+            <a:r>
+              <a:rPr sz="880">
+                <a:solidFill>
+                  <a:srgbClr val="212529"/>
+                </a:solidFill>
+                <a:latin typeface="Segoe UI"/>
+              </a:rPr>
+              <a:t>• Không có thống kê khoảng cách thu nhập theo giới tính ở cùng cấp bậc chuyên môn.</a:t>
+            </a:r>
+          </a:p>
+          <a:p>
+            <a:pPr>
+              <a:spcAft>
+                <a:spcPts val="200"/>
+              </a:spcAft>
+            </a:pPr>
+            <a:r>
+              <a:rPr sz="880">
+                <a:solidFill>
+                  <a:srgbClr val="212529"/>
+                </a:solidFill>
+                <a:latin typeface="Segoe UI"/>
+              </a:rPr>
+              <a:t>• Chỉ dừng lại ở tỷ lệ % nhân sự nữ chung chung.</a:t>
+            </a:r>
+          </a:p>
+        </p:txBody>
+      </p:sp>
+      <p:sp>
+        <p:nvSpPr>
+          <p:cNvPr id="15" name="Rounded Rectangle 14"/>
+          <p:cNvSpPr/>
+          <p:nvPr/>
+        </p:nvSpPr>
+        <p:spPr>
+          <a:xfrm>
+            <a:off x="731520" y="3840480"/>
+            <a:ext cx="5212080" cy="2331720"/>
+          </a:xfrm>
+          <a:prstGeom prst="roundRect">
+            <a:avLst/>
+          </a:prstGeom>
+          <a:solidFill>
+            <a:srgbClr val="FFFFFF"/>
+          </a:solidFill>
+          <a:ln w="12700">
+            <a:solidFill>
+              <a:srgbClr val="D62728"/>
+            </a:solidFill>
+          </a:ln>
+        </p:spPr>
+        <p:style>
+          <a:lnRef idx="1">
+            <a:schemeClr val="accent1"/>
+          </a:lnRef>
+          <a:fillRef idx="3">
+            <a:schemeClr val="accent1"/>
+          </a:fillRef>
+          <a:effectRef idx="2">
+            <a:schemeClr val="accent1"/>
+          </a:effectRef>
+          <a:fontRef idx="minor">
+            <a:schemeClr val="lt1"/>
+          </a:fontRef>
+        </p:style>
+        <p:txBody>
+          <a:bodyPr rtlCol="0" anchor="ctr"/>
+          <a:lstStyle/>
+          <a:p>
+            <a:pPr algn="ctr"/>
+          </a:p>
+        </p:txBody>
+      </p:sp>
+      <p:sp>
+        <p:nvSpPr>
+          <p:cNvPr id="16" name="Rectangle 15"/>
+          <p:cNvSpPr/>
+          <p:nvPr/>
+        </p:nvSpPr>
+        <p:spPr>
+          <a:xfrm>
+            <a:off x="731520" y="3840480"/>
+            <a:ext cx="5212080" cy="365760"/>
+          </a:xfrm>
+          <a:prstGeom prst="rect">
+            <a:avLst/>
+          </a:prstGeom>
+          <a:solidFill>
+            <a:srgbClr val="D62728"/>
+          </a:solidFill>
+          <a:ln>
+            <a:noFill/>
+          </a:ln>
+        </p:spPr>
+        <p:style>
+          <a:lnRef idx="1">
+            <a:schemeClr val="accent1"/>
+          </a:lnRef>
+          <a:fillRef idx="3">
+            <a:schemeClr val="accent1"/>
+          </a:fillRef>
+          <a:effectRef idx="2">
+            <a:schemeClr val="accent1"/>
+          </a:effectRef>
+          <a:fontRef idx="minor">
+            <a:schemeClr val="lt1"/>
+          </a:fontRef>
+        </p:style>
+        <p:txBody>
+          <a:bodyPr rtlCol="0" anchor="ctr"/>
+          <a:lstStyle/>
+          <a:p>
+            <a:pPr algn="l"/>
+            <a:r>
+              <a:rPr sz="1000" b="1">
+                <a:solidFill>
+                  <a:srgbClr val="FFFFFF"/>
+                </a:solidFill>
+                <a:latin typeface="Segoe UI"/>
+              </a:rPr>
+              <a:t>  ▲ 3. PHÁT THẢI CHUỖI CUNG ỨNG SCOPE 3</a:t>
+            </a:r>
+          </a:p>
+        </p:txBody>
+      </p:sp>
+      <p:sp>
+        <p:nvSpPr>
+          <p:cNvPr id="17" name="TextBox 16"/>
+          <p:cNvSpPr txBox="1"/>
+          <p:nvPr/>
+        </p:nvSpPr>
+        <p:spPr>
+          <a:xfrm>
+            <a:off x="868680" y="4251960"/>
+            <a:ext cx="4937760" cy="1874519"/>
+          </a:xfrm>
+          <a:prstGeom prst="rect">
+            <a:avLst/>
+          </a:prstGeom>
+          <a:noFill/>
+        </p:spPr>
+        <p:txBody>
+          <a:bodyPr wrap="square">
+            <a:spAutoFit/>
+          </a:bodyPr>
+          <a:lstStyle/>
+          <a:p>
+            <a:pPr>
+              <a:spcAft>
+                <a:spcPts val="200"/>
+              </a:spcAft>
+            </a:pPr>
+            <a:r>
+              <a:rPr sz="880">
+                <a:solidFill>
+                  <a:srgbClr val="212529"/>
+                </a:solidFill>
+                <a:latin typeface="Segoe UI"/>
+              </a:rPr>
+              <a:t>• Mới chỉ đo lường phát thải trực tiếp Scope 1 và điện lưới Scope 2.</a:t>
+            </a:r>
+          </a:p>
+          <a:p>
+            <a:pPr>
+              <a:spcAft>
+                <a:spcPts val="200"/>
+              </a:spcAft>
+            </a:pPr>
+            <a:r>
+              <a:rPr sz="880">
+                <a:solidFill>
+                  <a:srgbClr val="212529"/>
+                </a:solidFill>
+                <a:latin typeface="Segoe UI"/>
+              </a:rPr>
+              <a:t>• Phát thải gián tiếp chuỗi cung ứng Scope 3 (chiếm 70–80% thực tế) gần như bị bỏ ngỏ.</a:t>
+            </a:r>
+          </a:p>
+          <a:p>
+            <a:pPr>
+              <a:spcAft>
+                <a:spcPts val="200"/>
+              </a:spcAft>
+            </a:pPr>
+            <a:r>
+              <a:rPr sz="880">
+                <a:solidFill>
+                  <a:srgbClr val="212529"/>
+                </a:solidFill>
+                <a:latin typeface="Segoe UI"/>
+              </a:rPr>
+              <a:t>• Do chuỗi cung ứng phân tán và thiếu công cụ đo lường chuyên sâu.</a:t>
+            </a:r>
+          </a:p>
+        </p:txBody>
+      </p:sp>
+      <p:sp>
+        <p:nvSpPr>
+          <p:cNvPr id="18" name="Rounded Rectangle 17"/>
+          <p:cNvSpPr/>
+          <p:nvPr/>
+        </p:nvSpPr>
+        <p:spPr>
+          <a:xfrm>
+            <a:off x="6245352" y="3840480"/>
+            <a:ext cx="5212080" cy="2331720"/>
+          </a:xfrm>
+          <a:prstGeom prst="roundRect">
+            <a:avLst/>
+          </a:prstGeom>
+          <a:solidFill>
+            <a:srgbClr val="FFFFFF"/>
+          </a:solidFill>
+          <a:ln w="12700">
+            <a:solidFill>
+              <a:srgbClr val="D62728"/>
+            </a:solidFill>
+          </a:ln>
+        </p:spPr>
+        <p:style>
+          <a:lnRef idx="1">
+            <a:schemeClr val="accent1"/>
+          </a:lnRef>
+          <a:fillRef idx="3">
+            <a:schemeClr val="accent1"/>
+          </a:fillRef>
+          <a:effectRef idx="2">
+            <a:schemeClr val="accent1"/>
+          </a:effectRef>
+          <a:fontRef idx="minor">
+            <a:schemeClr val="lt1"/>
+          </a:fontRef>
+        </p:style>
+        <p:txBody>
+          <a:bodyPr rtlCol="0" anchor="ctr"/>
+          <a:lstStyle/>
+          <a:p>
+            <a:pPr algn="ctr"/>
+          </a:p>
+        </p:txBody>
+      </p:sp>
+      <p:sp>
+        <p:nvSpPr>
+          <p:cNvPr id="19" name="Rectangle 18"/>
+          <p:cNvSpPr/>
+          <p:nvPr/>
+        </p:nvSpPr>
+        <p:spPr>
+          <a:xfrm>
+            <a:off x="6245352" y="3840480"/>
+            <a:ext cx="5212080" cy="365760"/>
+          </a:xfrm>
+          <a:prstGeom prst="rect">
+            <a:avLst/>
+          </a:prstGeom>
+          <a:solidFill>
+            <a:srgbClr val="D62728"/>
+          </a:solidFill>
+          <a:ln>
+            <a:noFill/>
+          </a:ln>
+        </p:spPr>
+        <p:style>
+          <a:lnRef idx="1">
+            <a:schemeClr val="accent1"/>
+          </a:lnRef>
+          <a:fillRef idx="3">
+            <a:schemeClr val="accent1"/>
+          </a:fillRef>
+          <a:effectRef idx="2">
+            <a:schemeClr val="accent1"/>
+          </a:effectRef>
+          <a:fontRef idx="minor">
+            <a:schemeClr val="lt1"/>
+          </a:fontRef>
+        </p:style>
+        <p:txBody>
+          <a:bodyPr rtlCol="0" anchor="ctr"/>
+          <a:lstStyle/>
+          <a:p>
+            <a:pPr algn="l"/>
+            <a:r>
+              <a:rPr sz="1000" b="1">
+                <a:solidFill>
+                  <a:srgbClr val="FFFFFF"/>
+                </a:solidFill>
+                <a:latin typeface="Segoe UI"/>
+              </a:rPr>
+              <a:t>  ▲ 4. SỰ CỐ TIÊU CỰC, TRANH CHẤP &amp; XỬ PHẠT (SDG 16)</a:t>
+            </a:r>
+          </a:p>
+        </p:txBody>
+      </p:sp>
+      <p:sp>
+        <p:nvSpPr>
+          <p:cNvPr id="20" name="TextBox 19"/>
+          <p:cNvSpPr txBox="1"/>
+          <p:nvPr/>
+        </p:nvSpPr>
+        <p:spPr>
+          <a:xfrm>
+            <a:off x="6382512" y="4251960"/>
+            <a:ext cx="4937760" cy="1874519"/>
+          </a:xfrm>
+          <a:prstGeom prst="rect">
+            <a:avLst/>
+          </a:prstGeom>
+          <a:noFill/>
+        </p:spPr>
+        <p:txBody>
+          <a:bodyPr wrap="square">
+            <a:spAutoFit/>
+          </a:bodyPr>
+          <a:lstStyle/>
+          <a:p>
+            <a:pPr>
+              <a:spcAft>
+                <a:spcPts val="200"/>
+              </a:spcAft>
+            </a:pPr>
+            <a:r>
+              <a:rPr sz="880">
+                <a:solidFill>
+                  <a:srgbClr val="212529"/>
+                </a:solidFill>
+                <a:latin typeface="Segoe UI"/>
+              </a:rPr>
+              <a:t>• 'Gạn đục khơi trong' điển hình: Không ghi nhận tai nạn lao động hay khiếu nại khách hàng.</a:t>
+            </a:r>
+          </a:p>
+          <a:p>
+            <a:pPr>
+              <a:spcAft>
+                <a:spcPts val="200"/>
+              </a:spcAft>
+            </a:pPr>
+            <a:r>
+              <a:rPr sz="880">
+                <a:solidFill>
+                  <a:srgbClr val="212529"/>
+                </a:solidFill>
+                <a:latin typeface="Segoe UI"/>
+              </a:rPr>
+              <a:t>• Các quyết định xử phạt vi phạm hành chính về môi trường hoặc thuế bị che giấu hoàn toàn.</a:t>
+            </a:r>
+          </a:p>
+          <a:p>
+            <a:pPr>
+              <a:spcAft>
+                <a:spcPts val="200"/>
+              </a:spcAft>
+            </a:pPr>
+            <a:r>
+              <a:rPr sz="880">
+                <a:solidFill>
+                  <a:srgbClr val="212529"/>
+                </a:solidFill>
+                <a:latin typeface="Segoe UI"/>
+              </a:rPr>
+              <a:t>• Báo cáo trở thành tài liệu tiếp thị thay vì công cụ giải trình rủi ro.</a:t>
+            </a:r>
+          </a:p>
+        </p:txBody>
+      </p:sp>
+    </p:spTree>
+  </p:cSld>
+  <p:clrMapOvr>
+    <a:masterClrMapping/>
+  </p:clrMapOvr>
+</p:sld>
+</file>
+
 <file path=ppt/slides/slide14.xml><?xml version="1.0" encoding="utf-8"?>
 <p:sld xmlns:a="http://schemas.openxmlformats.org/drawingml/2006/main" xmlns:p="http://schemas.openxmlformats.org/presentationml/2006/main" xmlns:r="http://schemas.openxmlformats.org/officeDocument/2006/relationships">
   <p:cSld>
@@ -10353,7 +10565,7 @@
                 </a:solidFill>
                 <a:latin typeface="Segoe UI"/>
               </a:rPr>
-              <a:t>THẢO LUẬN CHUYÊN SÂU</a:t>
+              <a:t>ĐỐI CHUẨN TOÀN DIỆN</a:t>
             </a:r>
           </a:p>
         </p:txBody>
@@ -10387,7 +10599,7 @@
                 </a:solidFill>
                 <a:latin typeface="Segoe UI"/>
               </a:rPr>
-              <a:t>THẢO LUẬN: DOANH NGHIỆP 'ÍT NÓI VỀ GÌ' (VÙNG TRŨNG NÉ TRÁNH)?</a:t>
+              <a:t>BẢNG SO SÁNH ĐỐI ĐẦU: PAPER GỐC (KANG &amp; KIM 2022) VS CODE MỚI</a:t>
             </a:r>
           </a:p>
         </p:txBody>
@@ -10422,983 +10634,7 @@
                 </a:solidFill>
                 <a:latin typeface="Segoe UI"/>
               </a:rPr>
-              <a:t>14 / 18</a:t>
-            </a:r>
-          </a:p>
-        </p:txBody>
-      </p:sp>
-      <p:sp>
-        <p:nvSpPr>
-          <p:cNvPr id="8" name="TextBox 7"/>
-          <p:cNvSpPr txBox="1"/>
-          <p:nvPr/>
-        </p:nvSpPr>
-        <p:spPr>
-          <a:xfrm>
-            <a:off x="731520" y="6565392"/>
-            <a:ext cx="10789920" cy="256032"/>
-          </a:xfrm>
-          <a:prstGeom prst="rect">
-            <a:avLst/>
-          </a:prstGeom>
-          <a:noFill/>
-        </p:spPr>
-        <p:txBody>
-          <a:bodyPr wrap="none">
-            <a:spAutoFit/>
-          </a:bodyPr>
-          <a:lstStyle/>
-          <a:p>
-            <a:r>
-              <a:rPr sz="850">
-                <a:solidFill>
-                  <a:srgbClr val="6C757D"/>
-                </a:solidFill>
-                <a:latin typeface="Segoe UI"/>
-              </a:rPr>
-              <a:t>Đề tài: NLP Đa ngữ trong Phân tích SDG &amp; Cảm xúc Báo cáo PTBV tại Việt Nam | Tác giả: Lê Đan Sơn, Dương Thị Hoàn</a:t>
-            </a:r>
-          </a:p>
-        </p:txBody>
-      </p:sp>
-      <p:sp>
-        <p:nvSpPr>
-          <p:cNvPr id="9" name="Rounded Rectangle 8"/>
-          <p:cNvSpPr/>
-          <p:nvPr/>
-        </p:nvSpPr>
-        <p:spPr>
-          <a:xfrm>
-            <a:off x="731520" y="1234440"/>
-            <a:ext cx="5212080" cy="2331720"/>
-          </a:xfrm>
-          <a:prstGeom prst="roundRect">
-            <a:avLst/>
-          </a:prstGeom>
-          <a:solidFill>
-            <a:srgbClr val="FFFFFF"/>
-          </a:solidFill>
-          <a:ln w="12700">
-            <a:solidFill>
-              <a:srgbClr val="D62728"/>
-            </a:solidFill>
-          </a:ln>
-        </p:spPr>
-        <p:style>
-          <a:lnRef idx="1">
-            <a:schemeClr val="accent1"/>
-          </a:lnRef>
-          <a:fillRef idx="3">
-            <a:schemeClr val="accent1"/>
-          </a:fillRef>
-          <a:effectRef idx="2">
-            <a:schemeClr val="accent1"/>
-          </a:effectRef>
-          <a:fontRef idx="minor">
-            <a:schemeClr val="lt1"/>
-          </a:fontRef>
-        </p:style>
-        <p:txBody>
-          <a:bodyPr rtlCol="0" anchor="ctr"/>
-          <a:lstStyle/>
-          <a:p>
-            <a:pPr algn="ctr"/>
-          </a:p>
-        </p:txBody>
-      </p:sp>
-      <p:sp>
-        <p:nvSpPr>
-          <p:cNvPr id="10" name="Rectangle 9"/>
-          <p:cNvSpPr/>
-          <p:nvPr/>
-        </p:nvSpPr>
-        <p:spPr>
-          <a:xfrm>
-            <a:off x="731520" y="1234440"/>
-            <a:ext cx="5212080" cy="365760"/>
-          </a:xfrm>
-          <a:prstGeom prst="rect">
-            <a:avLst/>
-          </a:prstGeom>
-          <a:solidFill>
-            <a:srgbClr val="D62728"/>
-          </a:solidFill>
-          <a:ln>
-            <a:noFill/>
-          </a:ln>
-        </p:spPr>
-        <p:style>
-          <a:lnRef idx="1">
-            <a:schemeClr val="accent1"/>
-          </a:lnRef>
-          <a:fillRef idx="3">
-            <a:schemeClr val="accent1"/>
-          </a:fillRef>
-          <a:effectRef idx="2">
-            <a:schemeClr val="accent1"/>
-          </a:effectRef>
-          <a:fontRef idx="minor">
-            <a:schemeClr val="lt1"/>
-          </a:fontRef>
-        </p:style>
-        <p:txBody>
-          <a:bodyPr rtlCol="0" anchor="ctr"/>
-          <a:lstStyle/>
-          <a:p>
-            <a:pPr algn="l"/>
-            <a:r>
-              <a:rPr sz="1000" b="1">
-                <a:solidFill>
-                  <a:srgbClr val="FFFFFF"/>
-                </a:solidFill>
-                <a:latin typeface="Segoe UI"/>
-              </a:rPr>
-              <a:t>  ▲ 1. ĐA DẠNG SINH HỌC &amp; BẢO TỒN (SDG 14, 15)</a:t>
-            </a:r>
-          </a:p>
-        </p:txBody>
-      </p:sp>
-      <p:sp>
-        <p:nvSpPr>
-          <p:cNvPr id="11" name="TextBox 10"/>
-          <p:cNvSpPr txBox="1"/>
-          <p:nvPr/>
-        </p:nvSpPr>
-        <p:spPr>
-          <a:xfrm>
-            <a:off x="868680" y="1645920"/>
-            <a:ext cx="4937760" cy="1874519"/>
-          </a:xfrm>
-          <a:prstGeom prst="rect">
-            <a:avLst/>
-          </a:prstGeom>
-          <a:noFill/>
-        </p:spPr>
-        <p:txBody>
-          <a:bodyPr wrap="square">
-            <a:spAutoFit/>
-          </a:bodyPr>
-          <a:lstStyle/>
-          <a:p>
-            <a:pPr>
-              <a:spcAft>
-                <a:spcPts val="200"/>
-              </a:spcAft>
-            </a:pPr>
-            <a:r>
-              <a:rPr sz="880">
-                <a:solidFill>
-                  <a:srgbClr val="212529"/>
-                </a:solidFill>
-                <a:latin typeface="Segoe UI"/>
-              </a:rPr>
-              <a:t>• Điểm số luôn ở mức đáy toàn mẫu (&lt; 38 điểm).</a:t>
-            </a:r>
-          </a:p>
-          <a:p>
-            <a:pPr>
-              <a:spcAft>
-                <a:spcPts val="200"/>
-              </a:spcAft>
-            </a:pPr>
-            <a:r>
-              <a:rPr sz="880">
-                <a:solidFill>
-                  <a:srgbClr val="212529"/>
-                </a:solidFill>
-                <a:latin typeface="Segoe UI"/>
-              </a:rPr>
-              <a:t>• Chỉ nêu khẩu hiệu chung chung, thiếu số liệu kiểm kê tác động sinh thái đất liền và biển.</a:t>
-            </a:r>
-          </a:p>
-          <a:p>
-            <a:pPr>
-              <a:spcAft>
-                <a:spcPts val="200"/>
-              </a:spcAft>
-            </a:pPr>
-            <a:r>
-              <a:rPr sz="880">
-                <a:solidFill>
-                  <a:srgbClr val="212529"/>
-                </a:solidFill>
-                <a:latin typeface="Segoe UI"/>
-              </a:rPr>
-              <a:t>• Chi phí đo lường đa dạng sinh học phức tạp và chưa có chế tài bắt buộc.</a:t>
-            </a:r>
-          </a:p>
-        </p:txBody>
-      </p:sp>
-      <p:sp>
-        <p:nvSpPr>
-          <p:cNvPr id="12" name="Rounded Rectangle 11"/>
-          <p:cNvSpPr/>
-          <p:nvPr/>
-        </p:nvSpPr>
-        <p:spPr>
-          <a:xfrm>
-            <a:off x="6245352" y="1234440"/>
-            <a:ext cx="5212080" cy="2331720"/>
-          </a:xfrm>
-          <a:prstGeom prst="roundRect">
-            <a:avLst/>
-          </a:prstGeom>
-          <a:solidFill>
-            <a:srgbClr val="FFFFFF"/>
-          </a:solidFill>
-          <a:ln w="12700">
-            <a:solidFill>
-              <a:srgbClr val="D62728"/>
-            </a:solidFill>
-          </a:ln>
-        </p:spPr>
-        <p:style>
-          <a:lnRef idx="1">
-            <a:schemeClr val="accent1"/>
-          </a:lnRef>
-          <a:fillRef idx="3">
-            <a:schemeClr val="accent1"/>
-          </a:fillRef>
-          <a:effectRef idx="2">
-            <a:schemeClr val="accent1"/>
-          </a:effectRef>
-          <a:fontRef idx="minor">
-            <a:schemeClr val="lt1"/>
-          </a:fontRef>
-        </p:style>
-        <p:txBody>
-          <a:bodyPr rtlCol="0" anchor="ctr"/>
-          <a:lstStyle/>
-          <a:p>
-            <a:pPr algn="ctr"/>
-          </a:p>
-        </p:txBody>
-      </p:sp>
-      <p:sp>
-        <p:nvSpPr>
-          <p:cNvPr id="13" name="Rectangle 12"/>
-          <p:cNvSpPr/>
-          <p:nvPr/>
-        </p:nvSpPr>
-        <p:spPr>
-          <a:xfrm>
-            <a:off x="6245352" y="1234440"/>
-            <a:ext cx="5212080" cy="365760"/>
-          </a:xfrm>
-          <a:prstGeom prst="rect">
-            <a:avLst/>
-          </a:prstGeom>
-          <a:solidFill>
-            <a:srgbClr val="D62728"/>
-          </a:solidFill>
-          <a:ln>
-            <a:noFill/>
-          </a:ln>
-        </p:spPr>
-        <p:style>
-          <a:lnRef idx="1">
-            <a:schemeClr val="accent1"/>
-          </a:lnRef>
-          <a:fillRef idx="3">
-            <a:schemeClr val="accent1"/>
-          </a:fillRef>
-          <a:effectRef idx="2">
-            <a:schemeClr val="accent1"/>
-          </a:effectRef>
-          <a:fontRef idx="minor">
-            <a:schemeClr val="lt1"/>
-          </a:fontRef>
-        </p:style>
-        <p:txBody>
-          <a:bodyPr rtlCol="0" anchor="ctr"/>
-          <a:lstStyle/>
-          <a:p>
-            <a:pPr algn="l"/>
-            <a:r>
-              <a:rPr sz="1000" b="1">
-                <a:solidFill>
-                  <a:srgbClr val="FFFFFF"/>
-                </a:solidFill>
-                <a:latin typeface="Segoe UI"/>
-              </a:rPr>
-              <a:t>  ▲ 2. BÌNH ĐẲNG LƯƠNG &amp; CHÊNH LỆCH THU NHẬP (SDG 5, 10)</a:t>
-            </a:r>
-          </a:p>
-        </p:txBody>
-      </p:sp>
-      <p:sp>
-        <p:nvSpPr>
-          <p:cNvPr id="14" name="TextBox 13"/>
-          <p:cNvSpPr txBox="1"/>
-          <p:nvPr/>
-        </p:nvSpPr>
-        <p:spPr>
-          <a:xfrm>
-            <a:off x="6382512" y="1645920"/>
-            <a:ext cx="4937760" cy="1874519"/>
-          </a:xfrm>
-          <a:prstGeom prst="rect">
-            <a:avLst/>
-          </a:prstGeom>
-          <a:noFill/>
-        </p:spPr>
-        <p:txBody>
-          <a:bodyPr wrap="square">
-            <a:spAutoFit/>
-          </a:bodyPr>
-          <a:lstStyle/>
-          <a:p>
-            <a:pPr>
-              <a:spcAft>
-                <a:spcPts val="200"/>
-              </a:spcAft>
-            </a:pPr>
-            <a:r>
-              <a:rPr sz="880">
-                <a:solidFill>
-                  <a:srgbClr val="212529"/>
-                </a:solidFill>
-                <a:latin typeface="Segoe UI"/>
-              </a:rPr>
-              <a:t>• Tuyệt đối né tránh công bố Tỷ số chênh lệch lương CEO với công nhân.</a:t>
-            </a:r>
-          </a:p>
-          <a:p>
-            <a:pPr>
-              <a:spcAft>
-                <a:spcPts val="200"/>
-              </a:spcAft>
-            </a:pPr>
-            <a:r>
-              <a:rPr sz="880">
-                <a:solidFill>
-                  <a:srgbClr val="212529"/>
-                </a:solidFill>
-                <a:latin typeface="Segoe UI"/>
-              </a:rPr>
-              <a:t>• Không có thống kê khoảng cách thu nhập theo giới tính ở cùng cấp bậc chuyên môn.</a:t>
-            </a:r>
-          </a:p>
-          <a:p>
-            <a:pPr>
-              <a:spcAft>
-                <a:spcPts val="200"/>
-              </a:spcAft>
-            </a:pPr>
-            <a:r>
-              <a:rPr sz="880">
-                <a:solidFill>
-                  <a:srgbClr val="212529"/>
-                </a:solidFill>
-                <a:latin typeface="Segoe UI"/>
-              </a:rPr>
-              <a:t>• Chỉ dừng lại ở tỷ lệ % nhân sự nữ chung chung.</a:t>
-            </a:r>
-          </a:p>
-        </p:txBody>
-      </p:sp>
-      <p:sp>
-        <p:nvSpPr>
-          <p:cNvPr id="15" name="Rounded Rectangle 14"/>
-          <p:cNvSpPr/>
-          <p:nvPr/>
-        </p:nvSpPr>
-        <p:spPr>
-          <a:xfrm>
-            <a:off x="731520" y="3840480"/>
-            <a:ext cx="5212080" cy="2331720"/>
-          </a:xfrm>
-          <a:prstGeom prst="roundRect">
-            <a:avLst/>
-          </a:prstGeom>
-          <a:solidFill>
-            <a:srgbClr val="FFFFFF"/>
-          </a:solidFill>
-          <a:ln w="12700">
-            <a:solidFill>
-              <a:srgbClr val="D62728"/>
-            </a:solidFill>
-          </a:ln>
-        </p:spPr>
-        <p:style>
-          <a:lnRef idx="1">
-            <a:schemeClr val="accent1"/>
-          </a:lnRef>
-          <a:fillRef idx="3">
-            <a:schemeClr val="accent1"/>
-          </a:fillRef>
-          <a:effectRef idx="2">
-            <a:schemeClr val="accent1"/>
-          </a:effectRef>
-          <a:fontRef idx="minor">
-            <a:schemeClr val="lt1"/>
-          </a:fontRef>
-        </p:style>
-        <p:txBody>
-          <a:bodyPr rtlCol="0" anchor="ctr"/>
-          <a:lstStyle/>
-          <a:p>
-            <a:pPr algn="ctr"/>
-          </a:p>
-        </p:txBody>
-      </p:sp>
-      <p:sp>
-        <p:nvSpPr>
-          <p:cNvPr id="16" name="Rectangle 15"/>
-          <p:cNvSpPr/>
-          <p:nvPr/>
-        </p:nvSpPr>
-        <p:spPr>
-          <a:xfrm>
-            <a:off x="731520" y="3840480"/>
-            <a:ext cx="5212080" cy="365760"/>
-          </a:xfrm>
-          <a:prstGeom prst="rect">
-            <a:avLst/>
-          </a:prstGeom>
-          <a:solidFill>
-            <a:srgbClr val="D62728"/>
-          </a:solidFill>
-          <a:ln>
-            <a:noFill/>
-          </a:ln>
-        </p:spPr>
-        <p:style>
-          <a:lnRef idx="1">
-            <a:schemeClr val="accent1"/>
-          </a:lnRef>
-          <a:fillRef idx="3">
-            <a:schemeClr val="accent1"/>
-          </a:fillRef>
-          <a:effectRef idx="2">
-            <a:schemeClr val="accent1"/>
-          </a:effectRef>
-          <a:fontRef idx="minor">
-            <a:schemeClr val="lt1"/>
-          </a:fontRef>
-        </p:style>
-        <p:txBody>
-          <a:bodyPr rtlCol="0" anchor="ctr"/>
-          <a:lstStyle/>
-          <a:p>
-            <a:pPr algn="l"/>
-            <a:r>
-              <a:rPr sz="1000" b="1">
-                <a:solidFill>
-                  <a:srgbClr val="FFFFFF"/>
-                </a:solidFill>
-                <a:latin typeface="Segoe UI"/>
-              </a:rPr>
-              <a:t>  ▲ 3. PHÁT THẢI CHUỖI CUNG ỨNG SCOPE 3</a:t>
-            </a:r>
-          </a:p>
-        </p:txBody>
-      </p:sp>
-      <p:sp>
-        <p:nvSpPr>
-          <p:cNvPr id="17" name="TextBox 16"/>
-          <p:cNvSpPr txBox="1"/>
-          <p:nvPr/>
-        </p:nvSpPr>
-        <p:spPr>
-          <a:xfrm>
-            <a:off x="868680" y="4251960"/>
-            <a:ext cx="4937760" cy="1874519"/>
-          </a:xfrm>
-          <a:prstGeom prst="rect">
-            <a:avLst/>
-          </a:prstGeom>
-          <a:noFill/>
-        </p:spPr>
-        <p:txBody>
-          <a:bodyPr wrap="square">
-            <a:spAutoFit/>
-          </a:bodyPr>
-          <a:lstStyle/>
-          <a:p>
-            <a:pPr>
-              <a:spcAft>
-                <a:spcPts val="200"/>
-              </a:spcAft>
-            </a:pPr>
-            <a:r>
-              <a:rPr sz="880">
-                <a:solidFill>
-                  <a:srgbClr val="212529"/>
-                </a:solidFill>
-                <a:latin typeface="Segoe UI"/>
-              </a:rPr>
-              <a:t>• Mới chỉ đo lường phát thải trực tiếp Scope 1 và điện lưới Scope 2.</a:t>
-            </a:r>
-          </a:p>
-          <a:p>
-            <a:pPr>
-              <a:spcAft>
-                <a:spcPts val="200"/>
-              </a:spcAft>
-            </a:pPr>
-            <a:r>
-              <a:rPr sz="880">
-                <a:solidFill>
-                  <a:srgbClr val="212529"/>
-                </a:solidFill>
-                <a:latin typeface="Segoe UI"/>
-              </a:rPr>
-              <a:t>• Phát thải gián tiếp chuỗi cung ứng Scope 3 (chiếm 70–80% thực tế) gần như bị bỏ ngỏ.</a:t>
-            </a:r>
-          </a:p>
-          <a:p>
-            <a:pPr>
-              <a:spcAft>
-                <a:spcPts val="200"/>
-              </a:spcAft>
-            </a:pPr>
-            <a:r>
-              <a:rPr sz="880">
-                <a:solidFill>
-                  <a:srgbClr val="212529"/>
-                </a:solidFill>
-                <a:latin typeface="Segoe UI"/>
-              </a:rPr>
-              <a:t>• Do chuỗi cung ứng phân tán và thiếu công cụ đo lường chuyên sâu.</a:t>
-            </a:r>
-          </a:p>
-        </p:txBody>
-      </p:sp>
-      <p:sp>
-        <p:nvSpPr>
-          <p:cNvPr id="18" name="Rounded Rectangle 17"/>
-          <p:cNvSpPr/>
-          <p:nvPr/>
-        </p:nvSpPr>
-        <p:spPr>
-          <a:xfrm>
-            <a:off x="6245352" y="3840480"/>
-            <a:ext cx="5212080" cy="2331720"/>
-          </a:xfrm>
-          <a:prstGeom prst="roundRect">
-            <a:avLst/>
-          </a:prstGeom>
-          <a:solidFill>
-            <a:srgbClr val="FFFFFF"/>
-          </a:solidFill>
-          <a:ln w="12700">
-            <a:solidFill>
-              <a:srgbClr val="D62728"/>
-            </a:solidFill>
-          </a:ln>
-        </p:spPr>
-        <p:style>
-          <a:lnRef idx="1">
-            <a:schemeClr val="accent1"/>
-          </a:lnRef>
-          <a:fillRef idx="3">
-            <a:schemeClr val="accent1"/>
-          </a:fillRef>
-          <a:effectRef idx="2">
-            <a:schemeClr val="accent1"/>
-          </a:effectRef>
-          <a:fontRef idx="minor">
-            <a:schemeClr val="lt1"/>
-          </a:fontRef>
-        </p:style>
-        <p:txBody>
-          <a:bodyPr rtlCol="0" anchor="ctr"/>
-          <a:lstStyle/>
-          <a:p>
-            <a:pPr algn="ctr"/>
-          </a:p>
-        </p:txBody>
-      </p:sp>
-      <p:sp>
-        <p:nvSpPr>
-          <p:cNvPr id="19" name="Rectangle 18"/>
-          <p:cNvSpPr/>
-          <p:nvPr/>
-        </p:nvSpPr>
-        <p:spPr>
-          <a:xfrm>
-            <a:off x="6245352" y="3840480"/>
-            <a:ext cx="5212080" cy="365760"/>
-          </a:xfrm>
-          <a:prstGeom prst="rect">
-            <a:avLst/>
-          </a:prstGeom>
-          <a:solidFill>
-            <a:srgbClr val="D62728"/>
-          </a:solidFill>
-          <a:ln>
-            <a:noFill/>
-          </a:ln>
-        </p:spPr>
-        <p:style>
-          <a:lnRef idx="1">
-            <a:schemeClr val="accent1"/>
-          </a:lnRef>
-          <a:fillRef idx="3">
-            <a:schemeClr val="accent1"/>
-          </a:fillRef>
-          <a:effectRef idx="2">
-            <a:schemeClr val="accent1"/>
-          </a:effectRef>
-          <a:fontRef idx="minor">
-            <a:schemeClr val="lt1"/>
-          </a:fontRef>
-        </p:style>
-        <p:txBody>
-          <a:bodyPr rtlCol="0" anchor="ctr"/>
-          <a:lstStyle/>
-          <a:p>
-            <a:pPr algn="l"/>
-            <a:r>
-              <a:rPr sz="1000" b="1">
-                <a:solidFill>
-                  <a:srgbClr val="FFFFFF"/>
-                </a:solidFill>
-                <a:latin typeface="Segoe UI"/>
-              </a:rPr>
-              <a:t>  ▲ 4. SỰ CỐ TIÊU CỰC, TRANH CHẤP &amp; XỬ PHẠT (SDG 16)</a:t>
-            </a:r>
-          </a:p>
-        </p:txBody>
-      </p:sp>
-      <p:sp>
-        <p:nvSpPr>
-          <p:cNvPr id="20" name="TextBox 19"/>
-          <p:cNvSpPr txBox="1"/>
-          <p:nvPr/>
-        </p:nvSpPr>
-        <p:spPr>
-          <a:xfrm>
-            <a:off x="6382512" y="4251960"/>
-            <a:ext cx="4937760" cy="1874519"/>
-          </a:xfrm>
-          <a:prstGeom prst="rect">
-            <a:avLst/>
-          </a:prstGeom>
-          <a:noFill/>
-        </p:spPr>
-        <p:txBody>
-          <a:bodyPr wrap="square">
-            <a:spAutoFit/>
-          </a:bodyPr>
-          <a:lstStyle/>
-          <a:p>
-            <a:pPr>
-              <a:spcAft>
-                <a:spcPts val="200"/>
-              </a:spcAft>
-            </a:pPr>
-            <a:r>
-              <a:rPr sz="880">
-                <a:solidFill>
-                  <a:srgbClr val="212529"/>
-                </a:solidFill>
-                <a:latin typeface="Segoe UI"/>
-              </a:rPr>
-              <a:t>• 'Gạn đục khơi trong' điển hình: Không ghi nhận tai nạn lao động hay khiếu nại khách hàng.</a:t>
-            </a:r>
-          </a:p>
-          <a:p>
-            <a:pPr>
-              <a:spcAft>
-                <a:spcPts val="200"/>
-              </a:spcAft>
-            </a:pPr>
-            <a:r>
-              <a:rPr sz="880">
-                <a:solidFill>
-                  <a:srgbClr val="212529"/>
-                </a:solidFill>
-                <a:latin typeface="Segoe UI"/>
-              </a:rPr>
-              <a:t>• Các quyết định xử phạt vi phạm hành chính về môi trường hoặc thuế bị che giấu hoàn toàn.</a:t>
-            </a:r>
-          </a:p>
-          <a:p>
-            <a:pPr>
-              <a:spcAft>
-                <a:spcPts val="200"/>
-              </a:spcAft>
-            </a:pPr>
-            <a:r>
-              <a:rPr sz="880">
-                <a:solidFill>
-                  <a:srgbClr val="212529"/>
-                </a:solidFill>
-                <a:latin typeface="Segoe UI"/>
-              </a:rPr>
-              <a:t>• Báo cáo trở thành tài liệu tiếp thị thay vì công cụ giải trình rủi ro.</a:t>
-            </a:r>
-          </a:p>
-        </p:txBody>
-      </p:sp>
-    </p:spTree>
-  </p:cSld>
-  <p:clrMapOvr>
-    <a:masterClrMapping/>
-  </p:clrMapOvr>
-</p:sld>
-</file>
-
-<file path=ppt/slides/slide15.xml><?xml version="1.0" encoding="utf-8"?>
-<p:sld xmlns:a="http://schemas.openxmlformats.org/drawingml/2006/main" xmlns:p="http://schemas.openxmlformats.org/presentationml/2006/main" xmlns:r="http://schemas.openxmlformats.org/officeDocument/2006/relationships">
-  <p:cSld>
-    <p:spTree>
-      <p:nvGrpSpPr>
-        <p:cNvPr id="1" name=""/>
-        <p:cNvGrpSpPr/>
-        <p:nvPr/>
-      </p:nvGrpSpPr>
-      <p:grpSpPr/>
-      <p:sp>
-        <p:nvSpPr>
-          <p:cNvPr id="2" name="Rectangle 1"/>
-          <p:cNvSpPr/>
-          <p:nvPr/>
-        </p:nvSpPr>
-        <p:spPr>
-          <a:xfrm>
-            <a:off x="0" y="0"/>
-            <a:ext cx="12191695" cy="6858000"/>
-          </a:xfrm>
-          <a:prstGeom prst="rect">
-            <a:avLst/>
-          </a:prstGeom>
-          <a:solidFill>
-            <a:srgbClr val="F5F7FA"/>
-          </a:solidFill>
-          <a:ln>
-            <a:noFill/>
-          </a:ln>
-        </p:spPr>
-        <p:style>
-          <a:lnRef idx="1">
-            <a:schemeClr val="accent1"/>
-          </a:lnRef>
-          <a:fillRef idx="3">
-            <a:schemeClr val="accent1"/>
-          </a:fillRef>
-          <a:effectRef idx="2">
-            <a:schemeClr val="accent1"/>
-          </a:effectRef>
-          <a:fontRef idx="minor">
-            <a:schemeClr val="lt1"/>
-          </a:fontRef>
-        </p:style>
-        <p:txBody>
-          <a:bodyPr rtlCol="0" anchor="ctr"/>
-          <a:lstStyle/>
-          <a:p>
-            <a:pPr algn="ctr"/>
-          </a:p>
-        </p:txBody>
-      </p:sp>
-      <p:sp>
-        <p:nvSpPr>
-          <p:cNvPr id="3" name="Rectangle 2"/>
-          <p:cNvSpPr/>
-          <p:nvPr/>
-        </p:nvSpPr>
-        <p:spPr>
-          <a:xfrm>
-            <a:off x="0" y="0"/>
-            <a:ext cx="12191695" cy="960120"/>
-          </a:xfrm>
-          <a:prstGeom prst="rect">
-            <a:avLst/>
-          </a:prstGeom>
-          <a:solidFill>
-            <a:srgbClr val="FFFFFF"/>
-          </a:solidFill>
-          <a:ln w="9525">
-            <a:solidFill>
-              <a:srgbClr val="DAE0E9"/>
-            </a:solidFill>
-          </a:ln>
-        </p:spPr>
-        <p:style>
-          <a:lnRef idx="1">
-            <a:schemeClr val="accent1"/>
-          </a:lnRef>
-          <a:fillRef idx="3">
-            <a:schemeClr val="accent1"/>
-          </a:fillRef>
-          <a:effectRef idx="2">
-            <a:schemeClr val="accent1"/>
-          </a:effectRef>
-          <a:fontRef idx="minor">
-            <a:schemeClr val="lt1"/>
-          </a:fontRef>
-        </p:style>
-        <p:txBody>
-          <a:bodyPr rtlCol="0" anchor="ctr"/>
-          <a:lstStyle/>
-          <a:p>
-            <a:pPr algn="ctr"/>
-          </a:p>
-        </p:txBody>
-      </p:sp>
-      <p:sp>
-        <p:nvSpPr>
-          <p:cNvPr id="4" name="Rectangle 3"/>
-          <p:cNvSpPr/>
-          <p:nvPr/>
-        </p:nvSpPr>
-        <p:spPr>
-          <a:xfrm>
-            <a:off x="0" y="0"/>
-            <a:ext cx="12191695" cy="45720"/>
-          </a:xfrm>
-          <a:prstGeom prst="rect">
-            <a:avLst/>
-          </a:prstGeom>
-          <a:solidFill>
-            <a:srgbClr val="D4AF37"/>
-          </a:solidFill>
-          <a:ln>
-            <a:noFill/>
-          </a:ln>
-        </p:spPr>
-        <p:style>
-          <a:lnRef idx="1">
-            <a:schemeClr val="accent1"/>
-          </a:lnRef>
-          <a:fillRef idx="3">
-            <a:schemeClr val="accent1"/>
-          </a:fillRef>
-          <a:effectRef idx="2">
-            <a:schemeClr val="accent1"/>
-          </a:effectRef>
-          <a:fontRef idx="minor">
-            <a:schemeClr val="lt1"/>
-          </a:fontRef>
-        </p:style>
-        <p:txBody>
-          <a:bodyPr rtlCol="0" anchor="ctr"/>
-          <a:lstStyle/>
-          <a:p>
-            <a:pPr algn="ctr"/>
-          </a:p>
-        </p:txBody>
-      </p:sp>
-      <p:sp>
-        <p:nvSpPr>
-          <p:cNvPr id="5" name="Rounded Rectangle 4"/>
-          <p:cNvSpPr/>
-          <p:nvPr/>
-        </p:nvSpPr>
-        <p:spPr>
-          <a:xfrm>
-            <a:off x="731520" y="128016"/>
-            <a:ext cx="2560320" cy="237744"/>
-          </a:xfrm>
-          <a:prstGeom prst="roundRect">
-            <a:avLst/>
-          </a:prstGeom>
-          <a:solidFill>
-            <a:srgbClr val="1B365D"/>
-          </a:solidFill>
-          <a:ln>
-            <a:noFill/>
-          </a:ln>
-        </p:spPr>
-        <p:style>
-          <a:lnRef idx="1">
-            <a:schemeClr val="accent1"/>
-          </a:lnRef>
-          <a:fillRef idx="3">
-            <a:schemeClr val="accent1"/>
-          </a:fillRef>
-          <a:effectRef idx="2">
-            <a:schemeClr val="accent1"/>
-          </a:effectRef>
-          <a:fontRef idx="minor">
-            <a:schemeClr val="lt1"/>
-          </a:fontRef>
-        </p:style>
-        <p:txBody>
-          <a:bodyPr rtlCol="0" anchor="ctr"/>
-          <a:lstStyle/>
-          <a:p>
-            <a:pPr algn="ctr"/>
-            <a:r>
-              <a:rPr sz="850" b="1">
-                <a:solidFill>
-                  <a:srgbClr val="FFFFFF"/>
-                </a:solidFill>
-                <a:latin typeface="Segoe UI"/>
-              </a:rPr>
-              <a:t>ĐỐI CHUẨN TOÀN DIỆN</a:t>
-            </a:r>
-          </a:p>
-        </p:txBody>
-      </p:sp>
-      <p:sp>
-        <p:nvSpPr>
-          <p:cNvPr id="6" name="TextBox 5"/>
-          <p:cNvSpPr txBox="1"/>
-          <p:nvPr/>
-        </p:nvSpPr>
-        <p:spPr>
-          <a:xfrm>
-            <a:off x="685800" y="384048"/>
-            <a:ext cx="9601200" cy="502920"/>
-          </a:xfrm>
-          <a:prstGeom prst="rect">
-            <a:avLst/>
-          </a:prstGeom>
-          <a:noFill/>
-        </p:spPr>
-        <p:txBody>
-          <a:bodyPr wrap="square" anchor="ctr">
-            <a:spAutoFit/>
-          </a:bodyPr>
-          <a:lstStyle/>
-          <a:p>
-            <a:r>
-              <a:rPr sz="1650" b="1">
-                <a:solidFill>
-                  <a:srgbClr val="1B365D"/>
-                </a:solidFill>
-                <a:latin typeface="Segoe UI"/>
-              </a:rPr>
-              <a:t>BẢNG SO SÁNH ĐỐI ĐẦU: PAPER GỐC (KANG &amp; KIM 2022) VS CODE MỚI</a:t>
-            </a:r>
-          </a:p>
-        </p:txBody>
-      </p:sp>
-      <p:sp>
-        <p:nvSpPr>
-          <p:cNvPr id="7" name="TextBox 6"/>
-          <p:cNvSpPr txBox="1"/>
-          <p:nvPr/>
-        </p:nvSpPr>
-        <p:spPr>
-          <a:xfrm>
-            <a:off x="10789920" y="292608"/>
-            <a:ext cx="914400" cy="457200"/>
-          </a:xfrm>
-          <a:prstGeom prst="rect">
-            <a:avLst/>
-          </a:prstGeom>
-          <a:noFill/>
-        </p:spPr>
-        <p:txBody>
-          <a:bodyPr wrap="none">
-            <a:spAutoFit/>
-          </a:bodyPr>
-          <a:lstStyle/>
-          <a:p>
-            <a:pPr algn="r"/>
-            <a:r>
-              <a:rPr sz="1100" b="1">
-                <a:solidFill>
-                  <a:srgbClr val="6C757D"/>
-                </a:solidFill>
-                <a:latin typeface="Segoe UI"/>
-              </a:rPr>
-              <a:t>15 / 18</a:t>
+              <a:t>14 / 17</a:t>
             </a:r>
           </a:p>
         </p:txBody>
@@ -12319,6 +11555,958 @@
 </p:sld>
 </file>
 
+<file path=ppt/slides/slide15.xml><?xml version="1.0" encoding="utf-8"?>
+<p:sld xmlns:a="http://schemas.openxmlformats.org/drawingml/2006/main" xmlns:p="http://schemas.openxmlformats.org/presentationml/2006/main" xmlns:r="http://schemas.openxmlformats.org/officeDocument/2006/relationships">
+  <p:cSld>
+    <p:spTree>
+      <p:nvGrpSpPr>
+        <p:cNvPr id="1" name=""/>
+        <p:cNvGrpSpPr/>
+        <p:nvPr/>
+      </p:nvGrpSpPr>
+      <p:grpSpPr/>
+      <p:sp>
+        <p:nvSpPr>
+          <p:cNvPr id="2" name="Rectangle 1"/>
+          <p:cNvSpPr/>
+          <p:nvPr/>
+        </p:nvSpPr>
+        <p:spPr>
+          <a:xfrm>
+            <a:off x="0" y="0"/>
+            <a:ext cx="12191695" cy="6858000"/>
+          </a:xfrm>
+          <a:prstGeom prst="rect">
+            <a:avLst/>
+          </a:prstGeom>
+          <a:solidFill>
+            <a:srgbClr val="F5F7FA"/>
+          </a:solidFill>
+          <a:ln>
+            <a:noFill/>
+          </a:ln>
+        </p:spPr>
+        <p:style>
+          <a:lnRef idx="1">
+            <a:schemeClr val="accent1"/>
+          </a:lnRef>
+          <a:fillRef idx="3">
+            <a:schemeClr val="accent1"/>
+          </a:fillRef>
+          <a:effectRef idx="2">
+            <a:schemeClr val="accent1"/>
+          </a:effectRef>
+          <a:fontRef idx="minor">
+            <a:schemeClr val="lt1"/>
+          </a:fontRef>
+        </p:style>
+        <p:txBody>
+          <a:bodyPr rtlCol="0" anchor="ctr"/>
+          <a:lstStyle/>
+          <a:p>
+            <a:pPr algn="ctr"/>
+          </a:p>
+        </p:txBody>
+      </p:sp>
+      <p:sp>
+        <p:nvSpPr>
+          <p:cNvPr id="3" name="Rectangle 2"/>
+          <p:cNvSpPr/>
+          <p:nvPr/>
+        </p:nvSpPr>
+        <p:spPr>
+          <a:xfrm>
+            <a:off x="0" y="0"/>
+            <a:ext cx="12191695" cy="960120"/>
+          </a:xfrm>
+          <a:prstGeom prst="rect">
+            <a:avLst/>
+          </a:prstGeom>
+          <a:solidFill>
+            <a:srgbClr val="FFFFFF"/>
+          </a:solidFill>
+          <a:ln w="9525">
+            <a:solidFill>
+              <a:srgbClr val="DAE0E9"/>
+            </a:solidFill>
+          </a:ln>
+        </p:spPr>
+        <p:style>
+          <a:lnRef idx="1">
+            <a:schemeClr val="accent1"/>
+          </a:lnRef>
+          <a:fillRef idx="3">
+            <a:schemeClr val="accent1"/>
+          </a:fillRef>
+          <a:effectRef idx="2">
+            <a:schemeClr val="accent1"/>
+          </a:effectRef>
+          <a:fontRef idx="minor">
+            <a:schemeClr val="lt1"/>
+          </a:fontRef>
+        </p:style>
+        <p:txBody>
+          <a:bodyPr rtlCol="0" anchor="ctr"/>
+          <a:lstStyle/>
+          <a:p>
+            <a:pPr algn="ctr"/>
+          </a:p>
+        </p:txBody>
+      </p:sp>
+      <p:sp>
+        <p:nvSpPr>
+          <p:cNvPr id="4" name="Rectangle 3"/>
+          <p:cNvSpPr/>
+          <p:nvPr/>
+        </p:nvSpPr>
+        <p:spPr>
+          <a:xfrm>
+            <a:off x="0" y="0"/>
+            <a:ext cx="12191695" cy="45720"/>
+          </a:xfrm>
+          <a:prstGeom prst="rect">
+            <a:avLst/>
+          </a:prstGeom>
+          <a:solidFill>
+            <a:srgbClr val="D4AF37"/>
+          </a:solidFill>
+          <a:ln>
+            <a:noFill/>
+          </a:ln>
+        </p:spPr>
+        <p:style>
+          <a:lnRef idx="1">
+            <a:schemeClr val="accent1"/>
+          </a:lnRef>
+          <a:fillRef idx="3">
+            <a:schemeClr val="accent1"/>
+          </a:fillRef>
+          <a:effectRef idx="2">
+            <a:schemeClr val="accent1"/>
+          </a:effectRef>
+          <a:fontRef idx="minor">
+            <a:schemeClr val="lt1"/>
+          </a:fontRef>
+        </p:style>
+        <p:txBody>
+          <a:bodyPr rtlCol="0" anchor="ctr"/>
+          <a:lstStyle/>
+          <a:p>
+            <a:pPr algn="ctr"/>
+          </a:p>
+        </p:txBody>
+      </p:sp>
+      <p:sp>
+        <p:nvSpPr>
+          <p:cNvPr id="5" name="Rounded Rectangle 4"/>
+          <p:cNvSpPr/>
+          <p:nvPr/>
+        </p:nvSpPr>
+        <p:spPr>
+          <a:xfrm>
+            <a:off x="731520" y="128016"/>
+            <a:ext cx="2560320" cy="237744"/>
+          </a:xfrm>
+          <a:prstGeom prst="roundRect">
+            <a:avLst/>
+          </a:prstGeom>
+          <a:solidFill>
+            <a:srgbClr val="1B365D"/>
+          </a:solidFill>
+          <a:ln>
+            <a:noFill/>
+          </a:ln>
+        </p:spPr>
+        <p:style>
+          <a:lnRef idx="1">
+            <a:schemeClr val="accent1"/>
+          </a:lnRef>
+          <a:fillRef idx="3">
+            <a:schemeClr val="accent1"/>
+          </a:fillRef>
+          <a:effectRef idx="2">
+            <a:schemeClr val="accent1"/>
+          </a:effectRef>
+          <a:fontRef idx="minor">
+            <a:schemeClr val="lt1"/>
+          </a:fontRef>
+        </p:style>
+        <p:txBody>
+          <a:bodyPr rtlCol="0" anchor="ctr"/>
+          <a:lstStyle/>
+          <a:p>
+            <a:pPr algn="ctr"/>
+            <a:r>
+              <a:rPr sz="850" b="1">
+                <a:solidFill>
+                  <a:srgbClr val="FFFFFF"/>
+                </a:solidFill>
+                <a:latin typeface="Segoe UI"/>
+              </a:rPr>
+              <a:t>HÀM Ý QUẢN TRỊ</a:t>
+            </a:r>
+          </a:p>
+        </p:txBody>
+      </p:sp>
+      <p:sp>
+        <p:nvSpPr>
+          <p:cNvPr id="6" name="TextBox 5"/>
+          <p:cNvSpPr txBox="1"/>
+          <p:nvPr/>
+        </p:nvSpPr>
+        <p:spPr>
+          <a:xfrm>
+            <a:off x="685800" y="384048"/>
+            <a:ext cx="9601200" cy="502920"/>
+          </a:xfrm>
+          <a:prstGeom prst="rect">
+            <a:avLst/>
+          </a:prstGeom>
+          <a:noFill/>
+        </p:spPr>
+        <p:txBody>
+          <a:bodyPr wrap="square" anchor="ctr">
+            <a:spAutoFit/>
+          </a:bodyPr>
+          <a:lstStyle/>
+          <a:p>
+            <a:r>
+              <a:rPr sz="1650" b="1">
+                <a:solidFill>
+                  <a:srgbClr val="1B365D"/>
+                </a:solidFill>
+                <a:latin typeface="Segoe UI"/>
+              </a:rPr>
+              <a:t>HÀM Ý THỰC TIỄN &amp; ĐỀ XUẤT CHO CÁC BÊN LIÊN QUAN</a:t>
+            </a:r>
+          </a:p>
+        </p:txBody>
+      </p:sp>
+      <p:sp>
+        <p:nvSpPr>
+          <p:cNvPr id="7" name="TextBox 6"/>
+          <p:cNvSpPr txBox="1"/>
+          <p:nvPr/>
+        </p:nvSpPr>
+        <p:spPr>
+          <a:xfrm>
+            <a:off x="10789920" y="292608"/>
+            <a:ext cx="914400" cy="457200"/>
+          </a:xfrm>
+          <a:prstGeom prst="rect">
+            <a:avLst/>
+          </a:prstGeom>
+          <a:noFill/>
+        </p:spPr>
+        <p:txBody>
+          <a:bodyPr wrap="none">
+            <a:spAutoFit/>
+          </a:bodyPr>
+          <a:lstStyle/>
+          <a:p>
+            <a:pPr algn="r"/>
+            <a:r>
+              <a:rPr sz="1100" b="1">
+                <a:solidFill>
+                  <a:srgbClr val="6C757D"/>
+                </a:solidFill>
+                <a:latin typeface="Segoe UI"/>
+              </a:rPr>
+              <a:t>15 / 17</a:t>
+            </a:r>
+          </a:p>
+        </p:txBody>
+      </p:sp>
+      <p:sp>
+        <p:nvSpPr>
+          <p:cNvPr id="8" name="TextBox 7"/>
+          <p:cNvSpPr txBox="1"/>
+          <p:nvPr/>
+        </p:nvSpPr>
+        <p:spPr>
+          <a:xfrm>
+            <a:off x="731520" y="6565392"/>
+            <a:ext cx="10789920" cy="256032"/>
+          </a:xfrm>
+          <a:prstGeom prst="rect">
+            <a:avLst/>
+          </a:prstGeom>
+          <a:noFill/>
+        </p:spPr>
+        <p:txBody>
+          <a:bodyPr wrap="none">
+            <a:spAutoFit/>
+          </a:bodyPr>
+          <a:lstStyle/>
+          <a:p>
+            <a:r>
+              <a:rPr sz="850">
+                <a:solidFill>
+                  <a:srgbClr val="6C757D"/>
+                </a:solidFill>
+                <a:latin typeface="Segoe UI"/>
+              </a:rPr>
+              <a:t>Đề tài: NLP Đa ngữ trong Phân tích SDG &amp; Cảm xúc Báo cáo PTBV tại Việt Nam | Tác giả: Lê Đan Sơn, Dương Thị Hoàn</a:t>
+            </a:r>
+          </a:p>
+        </p:txBody>
+      </p:sp>
+      <p:sp>
+        <p:nvSpPr>
+          <p:cNvPr id="9" name="Rounded Rectangle 8"/>
+          <p:cNvSpPr/>
+          <p:nvPr/>
+        </p:nvSpPr>
+        <p:spPr>
+          <a:xfrm>
+            <a:off x="731520" y="1234440"/>
+            <a:ext cx="3429000" cy="5029200"/>
+          </a:xfrm>
+          <a:prstGeom prst="roundRect">
+            <a:avLst/>
+          </a:prstGeom>
+          <a:solidFill>
+            <a:srgbClr val="FFFFFF"/>
+          </a:solidFill>
+          <a:ln w="12700">
+            <a:solidFill>
+              <a:srgbClr val="1B365D"/>
+            </a:solidFill>
+          </a:ln>
+        </p:spPr>
+        <p:style>
+          <a:lnRef idx="1">
+            <a:schemeClr val="accent1"/>
+          </a:lnRef>
+          <a:fillRef idx="3">
+            <a:schemeClr val="accent1"/>
+          </a:fillRef>
+          <a:effectRef idx="2">
+            <a:schemeClr val="accent1"/>
+          </a:effectRef>
+          <a:fontRef idx="minor">
+            <a:schemeClr val="lt1"/>
+          </a:fontRef>
+        </p:style>
+        <p:txBody>
+          <a:bodyPr rtlCol="0" anchor="ctr"/>
+          <a:lstStyle/>
+          <a:p>
+            <a:pPr algn="ctr"/>
+          </a:p>
+        </p:txBody>
+      </p:sp>
+      <p:sp>
+        <p:nvSpPr>
+          <p:cNvPr id="10" name="Rectangle 9"/>
+          <p:cNvSpPr/>
+          <p:nvPr/>
+        </p:nvSpPr>
+        <p:spPr>
+          <a:xfrm>
+            <a:off x="731520" y="1234440"/>
+            <a:ext cx="3429000" cy="411480"/>
+          </a:xfrm>
+          <a:prstGeom prst="rect">
+            <a:avLst/>
+          </a:prstGeom>
+          <a:solidFill>
+            <a:srgbClr val="1B365D"/>
+          </a:solidFill>
+          <a:ln>
+            <a:noFill/>
+          </a:ln>
+        </p:spPr>
+        <p:style>
+          <a:lnRef idx="1">
+            <a:schemeClr val="accent1"/>
+          </a:lnRef>
+          <a:fillRef idx="3">
+            <a:schemeClr val="accent1"/>
+          </a:fillRef>
+          <a:effectRef idx="2">
+            <a:schemeClr val="accent1"/>
+          </a:effectRef>
+          <a:fontRef idx="minor">
+            <a:schemeClr val="lt1"/>
+          </a:fontRef>
+        </p:style>
+        <p:txBody>
+          <a:bodyPr rtlCol="0" anchor="ctr"/>
+          <a:lstStyle/>
+          <a:p>
+            <a:pPr algn="ctr"/>
+            <a:r>
+              <a:rPr sz="1000" b="1">
+                <a:solidFill>
+                  <a:srgbClr val="FFFFFF"/>
+                </a:solidFill>
+                <a:latin typeface="Segoe UI"/>
+              </a:rPr>
+              <a:t>CƠ QUAN QUẢN LÝ (UBCKNN)</a:t>
+            </a:r>
+          </a:p>
+        </p:txBody>
+      </p:sp>
+      <p:sp>
+        <p:nvSpPr>
+          <p:cNvPr id="11" name="TextBox 10"/>
+          <p:cNvSpPr txBox="1"/>
+          <p:nvPr/>
+        </p:nvSpPr>
+        <p:spPr>
+          <a:xfrm>
+            <a:off x="868680" y="1737360"/>
+            <a:ext cx="3154680" cy="4434840"/>
+          </a:xfrm>
+          <a:prstGeom prst="rect">
+            <a:avLst/>
+          </a:prstGeom>
+          <a:noFill/>
+        </p:spPr>
+        <p:txBody>
+          <a:bodyPr wrap="square">
+            <a:spAutoFit/>
+          </a:bodyPr>
+          <a:lstStyle/>
+          <a:p>
+            <a:pPr>
+              <a:spcAft>
+                <a:spcPts val="600"/>
+              </a:spcAft>
+            </a:pPr>
+            <a:r>
+              <a:rPr b="1" sz="950">
+                <a:solidFill>
+                  <a:srgbClr val="1B365D"/>
+                </a:solidFill>
+                <a:latin typeface="Segoe UI"/>
+              </a:rPr>
+              <a:t>• Chuẩn hóa số báo cáo:</a:t>
+            </a:r>
+          </a:p>
+          <a:p>
+            <a:pPr>
+              <a:spcAft>
+                <a:spcPts val="600"/>
+              </a:spcAft>
+            </a:pPr>
+            <a:r>
+              <a:rPr sz="900">
+                <a:solidFill>
+                  <a:srgbClr val="212529"/>
+                </a:solidFill>
+                <a:latin typeface="Segoe UI"/>
+              </a:rPr>
+              <a:t>  Thúc đẩy định dạng số mở (XBRL) thay cho PDF scan lỗi font.</a:t>
+            </a:r>
+          </a:p>
+          <a:p>
+            <a:pPr>
+              <a:spcAft>
+                <a:spcPts val="600"/>
+              </a:spcAft>
+            </a:pPr>
+            <a:r>
+              <a:rPr b="1" sz="950">
+                <a:solidFill>
+                  <a:srgbClr val="1B365D"/>
+                </a:solidFill>
+                <a:latin typeface="Segoe UI"/>
+              </a:rPr>
+              <a:t>• Cổng giám sát AI tự động:</a:t>
+            </a:r>
+          </a:p>
+          <a:p>
+            <a:pPr>
+              <a:spcAft>
+                <a:spcPts val="600"/>
+              </a:spcAft>
+            </a:pPr>
+            <a:r>
+              <a:rPr sz="900">
+                <a:solidFill>
+                  <a:srgbClr val="212529"/>
+                </a:solidFill>
+                <a:latin typeface="Segoe UI"/>
+              </a:rPr>
+              <a:t>  Ứng dụng NLP quét toàn thị trường, phát hiện dấu hiệu tô hồng báo cáo.</a:t>
+            </a:r>
+          </a:p>
+          <a:p>
+            <a:pPr>
+              <a:spcAft>
+                <a:spcPts val="600"/>
+              </a:spcAft>
+            </a:pPr>
+            <a:r>
+              <a:rPr b="1" sz="950">
+                <a:solidFill>
+                  <a:srgbClr val="1B365D"/>
+                </a:solidFill>
+                <a:latin typeface="Segoe UI"/>
+              </a:rPr>
+              <a:t>• Mở rộng quy định Scope 3:</a:t>
+            </a:r>
+          </a:p>
+          <a:p>
+            <a:pPr>
+              <a:spcAft>
+                <a:spcPts val="600"/>
+              </a:spcAft>
+            </a:pPr>
+            <a:r>
+              <a:rPr sz="900">
+                <a:solidFill>
+                  <a:srgbClr val="212529"/>
+                </a:solidFill>
+                <a:latin typeface="Segoe UI"/>
+              </a:rPr>
+              <a:t>  Bổ sung hướng dẫn kiểm kê phát thải gián tiếp chuỗi cung ứng.</a:t>
+            </a:r>
+          </a:p>
+        </p:txBody>
+      </p:sp>
+      <p:sp>
+        <p:nvSpPr>
+          <p:cNvPr id="12" name="Rounded Rectangle 11"/>
+          <p:cNvSpPr/>
+          <p:nvPr/>
+        </p:nvSpPr>
+        <p:spPr>
+          <a:xfrm>
+            <a:off x="4379976" y="1234440"/>
+            <a:ext cx="3429000" cy="5029200"/>
+          </a:xfrm>
+          <a:prstGeom prst="roundRect">
+            <a:avLst/>
+          </a:prstGeom>
+          <a:solidFill>
+            <a:srgbClr val="FFFFFF"/>
+          </a:solidFill>
+          <a:ln w="12700">
+            <a:solidFill>
+              <a:srgbClr val="1F77B4"/>
+            </a:solidFill>
+          </a:ln>
+        </p:spPr>
+        <p:style>
+          <a:lnRef idx="1">
+            <a:schemeClr val="accent1"/>
+          </a:lnRef>
+          <a:fillRef idx="3">
+            <a:schemeClr val="accent1"/>
+          </a:fillRef>
+          <a:effectRef idx="2">
+            <a:schemeClr val="accent1"/>
+          </a:effectRef>
+          <a:fontRef idx="minor">
+            <a:schemeClr val="lt1"/>
+          </a:fontRef>
+        </p:style>
+        <p:txBody>
+          <a:bodyPr rtlCol="0" anchor="ctr"/>
+          <a:lstStyle/>
+          <a:p>
+            <a:pPr algn="ctr"/>
+          </a:p>
+        </p:txBody>
+      </p:sp>
+      <p:sp>
+        <p:nvSpPr>
+          <p:cNvPr id="13" name="Rectangle 12"/>
+          <p:cNvSpPr/>
+          <p:nvPr/>
+        </p:nvSpPr>
+        <p:spPr>
+          <a:xfrm>
+            <a:off x="4379976" y="1234440"/>
+            <a:ext cx="3429000" cy="411480"/>
+          </a:xfrm>
+          <a:prstGeom prst="rect">
+            <a:avLst/>
+          </a:prstGeom>
+          <a:solidFill>
+            <a:srgbClr val="1F77B4"/>
+          </a:solidFill>
+          <a:ln>
+            <a:noFill/>
+          </a:ln>
+        </p:spPr>
+        <p:style>
+          <a:lnRef idx="1">
+            <a:schemeClr val="accent1"/>
+          </a:lnRef>
+          <a:fillRef idx="3">
+            <a:schemeClr val="accent1"/>
+          </a:fillRef>
+          <a:effectRef idx="2">
+            <a:schemeClr val="accent1"/>
+          </a:effectRef>
+          <a:fontRef idx="minor">
+            <a:schemeClr val="lt1"/>
+          </a:fontRef>
+        </p:style>
+        <p:txBody>
+          <a:bodyPr rtlCol="0" anchor="ctr"/>
+          <a:lstStyle/>
+          <a:p>
+            <a:pPr algn="ctr"/>
+            <a:r>
+              <a:rPr sz="1000" b="1">
+                <a:solidFill>
+                  <a:srgbClr val="FFFFFF"/>
+                </a:solidFill>
+                <a:latin typeface="Segoe UI"/>
+              </a:rPr>
+              <a:t>DOANH NGHIỆP NIÊM YẾT</a:t>
+            </a:r>
+          </a:p>
+        </p:txBody>
+      </p:sp>
+      <p:sp>
+        <p:nvSpPr>
+          <p:cNvPr id="14" name="TextBox 13"/>
+          <p:cNvSpPr txBox="1"/>
+          <p:nvPr/>
+        </p:nvSpPr>
+        <p:spPr>
+          <a:xfrm>
+            <a:off x="4517136" y="1737360"/>
+            <a:ext cx="3154680" cy="4434840"/>
+          </a:xfrm>
+          <a:prstGeom prst="rect">
+            <a:avLst/>
+          </a:prstGeom>
+          <a:noFill/>
+        </p:spPr>
+        <p:txBody>
+          <a:bodyPr wrap="square">
+            <a:spAutoFit/>
+          </a:bodyPr>
+          <a:lstStyle/>
+          <a:p>
+            <a:pPr>
+              <a:spcAft>
+                <a:spcPts val="600"/>
+              </a:spcAft>
+            </a:pPr>
+            <a:r>
+              <a:rPr b="1" sz="950">
+                <a:solidFill>
+                  <a:srgbClr val="1F77B4"/>
+                </a:solidFill>
+                <a:latin typeface="Segoe UI"/>
+              </a:rPr>
+              <a:t>• Chuyển đổi tư duy công bố:</a:t>
+            </a:r>
+          </a:p>
+          <a:p>
+            <a:pPr>
+              <a:spcAft>
+                <a:spcPts val="600"/>
+              </a:spcAft>
+            </a:pPr>
+            <a:r>
+              <a:rPr sz="900">
+                <a:solidFill>
+                  <a:srgbClr val="212529"/>
+                </a:solidFill>
+                <a:latin typeface="Segoe UI"/>
+              </a:rPr>
+              <a:t>  Từ 'tiếp thị thành tích' sang 'giải trình trách nhiệm và quản trị rủi ro'.</a:t>
+            </a:r>
+          </a:p>
+          <a:p>
+            <a:pPr>
+              <a:spcAft>
+                <a:spcPts val="600"/>
+              </a:spcAft>
+            </a:pPr>
+            <a:r>
+              <a:rPr b="1" sz="950">
+                <a:solidFill>
+                  <a:srgbClr val="1F77B4"/>
+                </a:solidFill>
+                <a:latin typeface="Segoe UI"/>
+              </a:rPr>
+              <a:t>• Minh bạch hóa thách thức:</a:t>
+            </a:r>
+          </a:p>
+          <a:p>
+            <a:pPr>
+              <a:spcAft>
+                <a:spcPts val="600"/>
+              </a:spcAft>
+            </a:pPr>
+            <a:r>
+              <a:rPr sz="900">
+                <a:solidFill>
+                  <a:srgbClr val="212529"/>
+                </a:solidFill>
+                <a:latin typeface="Segoe UI"/>
+              </a:rPr>
+              <a:t>  Chủ động công bố sự cố và lộ trình khắc phục để nâng cao tín nhiệm.</a:t>
+            </a:r>
+          </a:p>
+          <a:p>
+            <a:pPr>
+              <a:spcAft>
+                <a:spcPts val="600"/>
+              </a:spcAft>
+            </a:pPr>
+            <a:r>
+              <a:rPr b="1" sz="950">
+                <a:solidFill>
+                  <a:srgbClr val="1F77B4"/>
+                </a:solidFill>
+                <a:latin typeface="Segoe UI"/>
+              </a:rPr>
+              <a:t>• Tích hợp ESG thực chất:</a:t>
+            </a:r>
+          </a:p>
+          <a:p>
+            <a:pPr>
+              <a:spcAft>
+                <a:spcPts val="600"/>
+              </a:spcAft>
+            </a:pPr>
+            <a:r>
+              <a:rPr sz="900">
+                <a:solidFill>
+                  <a:srgbClr val="212529"/>
+                </a:solidFill>
+                <a:latin typeface="Segoe UI"/>
+              </a:rPr>
+              <a:t>  Chuyển từ CSR từ thiện bề nổi sang chiến lược giảm phát thải cốt lõi.</a:t>
+            </a:r>
+          </a:p>
+        </p:txBody>
+      </p:sp>
+      <p:sp>
+        <p:nvSpPr>
+          <p:cNvPr id="15" name="Rounded Rectangle 14"/>
+          <p:cNvSpPr/>
+          <p:nvPr/>
+        </p:nvSpPr>
+        <p:spPr>
+          <a:xfrm>
+            <a:off x="8028432" y="1234440"/>
+            <a:ext cx="3429000" cy="5029200"/>
+          </a:xfrm>
+          <a:prstGeom prst="roundRect">
+            <a:avLst/>
+          </a:prstGeom>
+          <a:solidFill>
+            <a:srgbClr val="FFFFFF"/>
+          </a:solidFill>
+          <a:ln w="12700">
+            <a:solidFill>
+              <a:srgbClr val="288C3C"/>
+            </a:solidFill>
+          </a:ln>
+        </p:spPr>
+        <p:style>
+          <a:lnRef idx="1">
+            <a:schemeClr val="accent1"/>
+          </a:lnRef>
+          <a:fillRef idx="3">
+            <a:schemeClr val="accent1"/>
+          </a:fillRef>
+          <a:effectRef idx="2">
+            <a:schemeClr val="accent1"/>
+          </a:effectRef>
+          <a:fontRef idx="minor">
+            <a:schemeClr val="lt1"/>
+          </a:fontRef>
+        </p:style>
+        <p:txBody>
+          <a:bodyPr rtlCol="0" anchor="ctr"/>
+          <a:lstStyle/>
+          <a:p>
+            <a:pPr algn="ctr"/>
+          </a:p>
+        </p:txBody>
+      </p:sp>
+      <p:sp>
+        <p:nvSpPr>
+          <p:cNvPr id="16" name="Rectangle 15"/>
+          <p:cNvSpPr/>
+          <p:nvPr/>
+        </p:nvSpPr>
+        <p:spPr>
+          <a:xfrm>
+            <a:off x="8028432" y="1234440"/>
+            <a:ext cx="3429000" cy="411480"/>
+          </a:xfrm>
+          <a:prstGeom prst="rect">
+            <a:avLst/>
+          </a:prstGeom>
+          <a:solidFill>
+            <a:srgbClr val="288C3C"/>
+          </a:solidFill>
+          <a:ln>
+            <a:noFill/>
+          </a:ln>
+        </p:spPr>
+        <p:style>
+          <a:lnRef idx="1">
+            <a:schemeClr val="accent1"/>
+          </a:lnRef>
+          <a:fillRef idx="3">
+            <a:schemeClr val="accent1"/>
+          </a:fillRef>
+          <a:effectRef idx="2">
+            <a:schemeClr val="accent1"/>
+          </a:effectRef>
+          <a:fontRef idx="minor">
+            <a:schemeClr val="lt1"/>
+          </a:fontRef>
+        </p:style>
+        <p:txBody>
+          <a:bodyPr rtlCol="0" anchor="ctr"/>
+          <a:lstStyle/>
+          <a:p>
+            <a:pPr algn="ctr"/>
+            <a:r>
+              <a:rPr sz="1000" b="1">
+                <a:solidFill>
+                  <a:srgbClr val="FFFFFF"/>
+                </a:solidFill>
+                <a:latin typeface="Segoe UI"/>
+              </a:rPr>
+              <a:t>NHÀ ĐẦU TƯ &amp; KIỂM TOÁN</a:t>
+            </a:r>
+          </a:p>
+        </p:txBody>
+      </p:sp>
+      <p:sp>
+        <p:nvSpPr>
+          <p:cNvPr id="17" name="TextBox 16"/>
+          <p:cNvSpPr txBox="1"/>
+          <p:nvPr/>
+        </p:nvSpPr>
+        <p:spPr>
+          <a:xfrm>
+            <a:off x="8165592" y="1737360"/>
+            <a:ext cx="3154680" cy="4434840"/>
+          </a:xfrm>
+          <a:prstGeom prst="rect">
+            <a:avLst/>
+          </a:prstGeom>
+          <a:noFill/>
+        </p:spPr>
+        <p:txBody>
+          <a:bodyPr wrap="square">
+            <a:spAutoFit/>
+          </a:bodyPr>
+          <a:lstStyle/>
+          <a:p>
+            <a:pPr>
+              <a:spcAft>
+                <a:spcPts val="600"/>
+              </a:spcAft>
+            </a:pPr>
+            <a:r>
+              <a:rPr b="1" sz="950">
+                <a:solidFill>
+                  <a:srgbClr val="288C3C"/>
+                </a:solidFill>
+                <a:latin typeface="Segoe UI"/>
+              </a:rPr>
+              <a:t>• Thẩm định nhanh bằng AI:</a:t>
+            </a:r>
+          </a:p>
+          <a:p>
+            <a:pPr>
+              <a:spcAft>
+                <a:spcPts val="600"/>
+              </a:spcAft>
+            </a:pPr>
+            <a:r>
+              <a:rPr sz="900">
+                <a:solidFill>
+                  <a:srgbClr val="212529"/>
+                </a:solidFill>
+                <a:latin typeface="Segoe UI"/>
+              </a:rPr>
+              <a:t>  Sàng lọc hàng trăm báo cáo trong vài phút, tiết kiệm 80% thời gian rà soát.</a:t>
+            </a:r>
+          </a:p>
+          <a:p>
+            <a:pPr>
+              <a:spcAft>
+                <a:spcPts val="600"/>
+              </a:spcAft>
+            </a:pPr>
+            <a:r>
+              <a:rPr b="1" sz="950">
+                <a:solidFill>
+                  <a:srgbClr val="288C3C"/>
+                </a:solidFill>
+                <a:latin typeface="Segoe UI"/>
+              </a:rPr>
+              <a:t>• Cảnh báo Tẩy xanh sớm:</a:t>
+            </a:r>
+          </a:p>
+          <a:p>
+            <a:pPr>
+              <a:spcAft>
+                <a:spcPts val="600"/>
+              </a:spcAft>
+            </a:pPr>
+            <a:r>
+              <a:rPr sz="900">
+                <a:solidFill>
+                  <a:srgbClr val="212529"/>
+                </a:solidFill>
+                <a:latin typeface="Segoe UI"/>
+              </a:rPr>
+              <a:t>  Theo dõi Tỷ số Pos/Neg Ratio để phát hiện các tuyên bố suông thiếu số liệu.</a:t>
+            </a:r>
+          </a:p>
+          <a:p>
+            <a:pPr>
+              <a:spcAft>
+                <a:spcPts val="600"/>
+              </a:spcAft>
+            </a:pPr>
+            <a:r>
+              <a:rPr b="1" sz="950">
+                <a:solidFill>
+                  <a:srgbClr val="288C3C"/>
+                </a:solidFill>
+                <a:latin typeface="Segoe UI"/>
+              </a:rPr>
+              <a:t>• Định hướng dòng vốn xanh:</a:t>
+            </a:r>
+          </a:p>
+          <a:p>
+            <a:pPr>
+              <a:spcAft>
+                <a:spcPts val="600"/>
+              </a:spcAft>
+            </a:pPr>
+            <a:r>
+              <a:rPr sz="900">
+                <a:solidFill>
+                  <a:srgbClr val="212529"/>
+                </a:solidFill>
+                <a:latin typeface="Segoe UI"/>
+              </a:rPr>
+              <a:t>  Ưu tiên giải ngân tín dụng xanh cho doanh nghiệp có cam kết thực chất.</a:t>
+            </a:r>
+          </a:p>
+        </p:txBody>
+      </p:sp>
+    </p:spTree>
+  </p:cSld>
+  <p:clrMapOvr>
+    <a:masterClrMapping/>
+  </p:clrMapOvr>
+</p:sld>
+</file>
+
 <file path=ppt/slides/slide16.xml><?xml version="1.0" encoding="utf-8"?>
 <p:sld xmlns:a="http://schemas.openxmlformats.org/drawingml/2006/main" xmlns:p="http://schemas.openxmlformats.org/presentationml/2006/main" xmlns:r="http://schemas.openxmlformats.org/officeDocument/2006/relationships">
   <p:cSld>
@@ -12507,7 +12695,7 @@
                 </a:solidFill>
                 <a:latin typeface="Segoe UI"/>
               </a:rPr>
-              <a:t>HÀM Ý QUẢN TRỊ</a:t>
+              <a:t>HƯỚNG PHÁT TRIỂN</a:t>
             </a:r>
           </a:p>
         </p:txBody>
@@ -12541,7 +12729,7 @@
                 </a:solidFill>
                 <a:latin typeface="Segoe UI"/>
               </a:rPr>
-              <a:t>HÀM Ý THỰC TIỄN &amp; ĐỀ XUẤT CHO CÁC BÊN LIÊN QUAN</a:t>
+              <a:t>HẠN CHẾ ĐỀ TÀI &amp; HƯỚNG PHÁT TRIỂN AGENTIC ESG AUDITOR</a:t>
             </a:r>
           </a:p>
         </p:txBody>
@@ -12576,7 +12764,7 @@
                 </a:solidFill>
                 <a:latin typeface="Segoe UI"/>
               </a:rPr>
-              <a:t>16 / 18</a:t>
+              <a:t>16 / 17</a:t>
             </a:r>
           </a:p>
         </p:txBody>
@@ -12615,16 +12803,40 @@
           </a:p>
         </p:txBody>
       </p:sp>
-      <p:sp>
-        <p:nvSpPr>
-          <p:cNvPr id="9" name="Rounded Rectangle 8"/>
+      <p:pic>
+        <p:nvPicPr>
+          <p:cNvPr id="9" name="Picture 8" descr="rag_agentic_flow.png"/>
+          <p:cNvPicPr>
+            <a:picLocks noChangeAspect="1"/>
+          </p:cNvPicPr>
+          <p:nvPr/>
+        </p:nvPicPr>
+        <p:blipFill>
+          <a:blip r:embed="rId2"/>
+          <a:stretch>
+            <a:fillRect/>
+          </a:stretch>
+        </p:blipFill>
+        <p:spPr>
+          <a:xfrm>
+            <a:off x="731520" y="1188720"/>
+            <a:ext cx="10728655" cy="3611880"/>
+          </a:xfrm>
+          <a:prstGeom prst="rect">
+            <a:avLst/>
+          </a:prstGeom>
+        </p:spPr>
+      </p:pic>
+      <p:sp>
+        <p:nvSpPr>
+          <p:cNvPr id="10" name="Rounded Rectangle 9"/>
           <p:cNvSpPr/>
           <p:nvPr/>
         </p:nvSpPr>
         <p:spPr>
           <a:xfrm>
-            <a:off x="731520" y="1234440"/>
-            <a:ext cx="3429000" cy="5029200"/>
+            <a:off x="731520" y="4983480"/>
+            <a:ext cx="3429000" cy="1280160"/>
           </a:xfrm>
           <a:prstGeom prst="roundRect">
             <a:avLst/>
@@ -12634,7 +12846,7 @@
           </a:solidFill>
           <a:ln w="12700">
             <a:solidFill>
-              <a:srgbClr val="1B365D"/>
+              <a:srgbClr val="D62728"/>
             </a:solidFill>
           </a:ln>
         </p:spPr>
@@ -12662,23 +12874,67 @@
       </p:sp>
       <p:sp>
         <p:nvSpPr>
-          <p:cNvPr id="10" name="Rectangle 9"/>
+          <p:cNvPr id="11" name="TextBox 10"/>
+          <p:cNvSpPr txBox="1"/>
+          <p:nvPr/>
+        </p:nvSpPr>
+        <p:spPr>
+          <a:xfrm>
+            <a:off x="868680" y="5047488"/>
+            <a:ext cx="3154680" cy="1143000"/>
+          </a:xfrm>
+          <a:prstGeom prst="rect">
+            <a:avLst/>
+          </a:prstGeom>
+          <a:noFill/>
+        </p:spPr>
+        <p:txBody>
+          <a:bodyPr wrap="square">
+            <a:spAutoFit/>
+          </a:bodyPr>
+          <a:lstStyle/>
+          <a:p>
+            <a:r>
+              <a:rPr sz="950" b="1">
+                <a:solidFill>
+                  <a:srgbClr val="D62728"/>
+                </a:solidFill>
+              </a:rPr>
+              <a:t>HẠN CHẾ HIỆN TẠI
+</a:t>
+            </a:r>
+            <a:r>
+              <a:rPr sz="850">
+                <a:solidFill>
+                  <a:srgbClr val="212529"/>
+                </a:solidFill>
+              </a:rPr>
+              <a:t>Mẫu 7 tập đoàn; mô hình đo lường tương đồng ngữ nghĩa chứ chưa tự động Fact-checking chéo số liệu định lượng trong Table.</a:t>
+            </a:r>
+          </a:p>
+        </p:txBody>
+      </p:sp>
+      <p:sp>
+        <p:nvSpPr>
+          <p:cNvPr id="12" name="Rounded Rectangle 11"/>
           <p:cNvSpPr/>
           <p:nvPr/>
         </p:nvSpPr>
         <p:spPr>
           <a:xfrm>
-            <a:off x="731520" y="1234440"/>
-            <a:ext cx="3429000" cy="411480"/>
-          </a:xfrm>
-          <a:prstGeom prst="rect">
+            <a:off x="4379976" y="4983480"/>
+            <a:ext cx="3429000" cy="1280160"/>
+          </a:xfrm>
+          <a:prstGeom prst="roundRect">
             <a:avLst/>
           </a:prstGeom>
           <a:solidFill>
-            <a:srgbClr val="1B365D"/>
+            <a:srgbClr val="FFFFFF"/>
           </a:solidFill>
-          <a:ln>
-            <a:noFill/>
+          <a:ln w="12700">
+            <a:solidFill>
+              <a:srgbClr val="7030A0"/>
+            </a:solidFill>
           </a:ln>
         </p:spPr>
         <p:style>
@@ -12700,28 +12956,19 @@
           <a:lstStyle/>
           <a:p>
             <a:pPr algn="ctr"/>
-            <a:r>
-              <a:rPr sz="1000" b="1">
-                <a:solidFill>
-                  <a:srgbClr val="FFFFFF"/>
-                </a:solidFill>
-                <a:latin typeface="Segoe UI"/>
-              </a:rPr>
-              <a:t>CƠ QUAN QUẢN LÝ (UBCKNN)</a:t>
-            </a:r>
-          </a:p>
-        </p:txBody>
-      </p:sp>
-      <p:sp>
-        <p:nvSpPr>
-          <p:cNvPr id="11" name="TextBox 10"/>
+          </a:p>
+        </p:txBody>
+      </p:sp>
+      <p:sp>
+        <p:nvSpPr>
+          <p:cNvPr id="13" name="TextBox 12"/>
           <p:cNvSpPr txBox="1"/>
           <p:nvPr/>
         </p:nvSpPr>
         <p:spPr>
           <a:xfrm>
-            <a:off x="868680" y="1737360"/>
-            <a:ext cx="3154680" cy="4434840"/>
+            <a:off x="4517136" y="5047488"/>
+            <a:ext cx="3154680" cy="1143000"/>
           </a:xfrm>
           <a:prstGeom prst="rect">
             <a:avLst/>
@@ -12734,329 +12981,36 @@
           </a:bodyPr>
           <a:lstStyle/>
           <a:p>
-            <a:pPr>
-              <a:spcAft>
-                <a:spcPts val="600"/>
-              </a:spcAft>
-            </a:pPr>
-            <a:r>
-              <a:rPr b="1" sz="950">
-                <a:solidFill>
-                  <a:srgbClr val="1B365D"/>
-                </a:solidFill>
-                <a:latin typeface="Segoe UI"/>
+            <a:r>
+              <a:rPr sz="950" b="1">
+                <a:solidFill>
+                  <a:srgbClr val="7030A0"/>
+                </a:solidFill>
               </a:rPr>
-              <a:t>• Chuẩn hóa số báo cáo:</a:t>
-            </a:r>
-          </a:p>
-          <a:p>
-            <a:pPr>
-              <a:spcAft>
-                <a:spcPts val="600"/>
-              </a:spcAft>
-            </a:pPr>
-            <a:r>
-              <a:rPr sz="900">
+              <a:t>ĐỘT PHÁ MULTI-AGENT
+</a:t>
+            </a:r>
+            <a:r>
+              <a:rPr sz="850">
                 <a:solidFill>
                   <a:srgbClr val="212529"/>
                 </a:solidFill>
-                <a:latin typeface="Segoe UI"/>
               </a:rPr>
-              <a:t>  Thúc đẩy định dạng số mở (XBRL) thay cho PDF scan lỗi font.</a:t>
-            </a:r>
-          </a:p>
-          <a:p>
-            <a:pPr>
-              <a:spcAft>
-                <a:spcPts val="600"/>
-              </a:spcAft>
-            </a:pPr>
-            <a:r>
-              <a:rPr b="1" sz="950">
-                <a:solidFill>
-                  <a:srgbClr val="1B365D"/>
-                </a:solidFill>
-                <a:latin typeface="Segoe UI"/>
-              </a:rPr>
-              <a:t>• Cổng giám sát AI tự động:</a:t>
-            </a:r>
-          </a:p>
-          <a:p>
-            <a:pPr>
-              <a:spcAft>
-                <a:spcPts val="600"/>
-              </a:spcAft>
-            </a:pPr>
-            <a:r>
-              <a:rPr sz="900">
-                <a:solidFill>
-                  <a:srgbClr val="212529"/>
-                </a:solidFill>
-                <a:latin typeface="Segoe UI"/>
-              </a:rPr>
-              <a:t>  Ứng dụng NLP quét toàn thị trường, phát hiện dấu hiệu tô hồng báo cáo.</a:t>
-            </a:r>
-          </a:p>
-          <a:p>
-            <a:pPr>
-              <a:spcAft>
-                <a:spcPts val="600"/>
-              </a:spcAft>
-            </a:pPr>
-            <a:r>
-              <a:rPr b="1" sz="950">
-                <a:solidFill>
-                  <a:srgbClr val="1B365D"/>
-                </a:solidFill>
-                <a:latin typeface="Segoe UI"/>
-              </a:rPr>
-              <a:t>• Mở rộng quy định Scope 3:</a:t>
-            </a:r>
-          </a:p>
-          <a:p>
-            <a:pPr>
-              <a:spcAft>
-                <a:spcPts val="600"/>
-              </a:spcAft>
-            </a:pPr>
-            <a:r>
-              <a:rPr sz="900">
-                <a:solidFill>
-                  <a:srgbClr val="212529"/>
-                </a:solidFill>
-                <a:latin typeface="Segoe UI"/>
-              </a:rPr>
-              <a:t>  Bổ sung hướng dẫn kiểm kê phát thải gián tiếp chuỗi cung ứng.</a:t>
-            </a:r>
-          </a:p>
-        </p:txBody>
-      </p:sp>
-      <p:sp>
-        <p:nvSpPr>
-          <p:cNvPr id="12" name="Rounded Rectangle 11"/>
+              <a:t>Kế thừa pipeline Retrieval hiện tại làm nền móng sạch để tích hợp Agent bóc tách bảng số và Agent kiểm tra chéo cam kết.</a:t>
+            </a:r>
+          </a:p>
+        </p:txBody>
+      </p:sp>
+      <p:sp>
+        <p:nvSpPr>
+          <p:cNvPr id="14" name="Rounded Rectangle 13"/>
           <p:cNvSpPr/>
           <p:nvPr/>
         </p:nvSpPr>
         <p:spPr>
           <a:xfrm>
-            <a:off x="4379976" y="1234440"/>
-            <a:ext cx="3429000" cy="5029200"/>
-          </a:xfrm>
-          <a:prstGeom prst="roundRect">
-            <a:avLst/>
-          </a:prstGeom>
-          <a:solidFill>
-            <a:srgbClr val="FFFFFF"/>
-          </a:solidFill>
-          <a:ln w="12700">
-            <a:solidFill>
-              <a:srgbClr val="1F77B4"/>
-            </a:solidFill>
-          </a:ln>
-        </p:spPr>
-        <p:style>
-          <a:lnRef idx="1">
-            <a:schemeClr val="accent1"/>
-          </a:lnRef>
-          <a:fillRef idx="3">
-            <a:schemeClr val="accent1"/>
-          </a:fillRef>
-          <a:effectRef idx="2">
-            <a:schemeClr val="accent1"/>
-          </a:effectRef>
-          <a:fontRef idx="minor">
-            <a:schemeClr val="lt1"/>
-          </a:fontRef>
-        </p:style>
-        <p:txBody>
-          <a:bodyPr rtlCol="0" anchor="ctr"/>
-          <a:lstStyle/>
-          <a:p>
-            <a:pPr algn="ctr"/>
-          </a:p>
-        </p:txBody>
-      </p:sp>
-      <p:sp>
-        <p:nvSpPr>
-          <p:cNvPr id="13" name="Rectangle 12"/>
-          <p:cNvSpPr/>
-          <p:nvPr/>
-        </p:nvSpPr>
-        <p:spPr>
-          <a:xfrm>
-            <a:off x="4379976" y="1234440"/>
-            <a:ext cx="3429000" cy="411480"/>
-          </a:xfrm>
-          <a:prstGeom prst="rect">
-            <a:avLst/>
-          </a:prstGeom>
-          <a:solidFill>
-            <a:srgbClr val="1F77B4"/>
-          </a:solidFill>
-          <a:ln>
-            <a:noFill/>
-          </a:ln>
-        </p:spPr>
-        <p:style>
-          <a:lnRef idx="1">
-            <a:schemeClr val="accent1"/>
-          </a:lnRef>
-          <a:fillRef idx="3">
-            <a:schemeClr val="accent1"/>
-          </a:fillRef>
-          <a:effectRef idx="2">
-            <a:schemeClr val="accent1"/>
-          </a:effectRef>
-          <a:fontRef idx="minor">
-            <a:schemeClr val="lt1"/>
-          </a:fontRef>
-        </p:style>
-        <p:txBody>
-          <a:bodyPr rtlCol="0" anchor="ctr"/>
-          <a:lstStyle/>
-          <a:p>
-            <a:pPr algn="ctr"/>
-            <a:r>
-              <a:rPr sz="1000" b="1">
-                <a:solidFill>
-                  <a:srgbClr val="FFFFFF"/>
-                </a:solidFill>
-                <a:latin typeface="Segoe UI"/>
-              </a:rPr>
-              <a:t>DOANH NGHIỆP NIÊM YẾT</a:t>
-            </a:r>
-          </a:p>
-        </p:txBody>
-      </p:sp>
-      <p:sp>
-        <p:nvSpPr>
-          <p:cNvPr id="14" name="TextBox 13"/>
-          <p:cNvSpPr txBox="1"/>
-          <p:nvPr/>
-        </p:nvSpPr>
-        <p:spPr>
-          <a:xfrm>
-            <a:off x="4517136" y="1737360"/>
-            <a:ext cx="3154680" cy="4434840"/>
-          </a:xfrm>
-          <a:prstGeom prst="rect">
-            <a:avLst/>
-          </a:prstGeom>
-          <a:noFill/>
-        </p:spPr>
-        <p:txBody>
-          <a:bodyPr wrap="square">
-            <a:spAutoFit/>
-          </a:bodyPr>
-          <a:lstStyle/>
-          <a:p>
-            <a:pPr>
-              <a:spcAft>
-                <a:spcPts val="600"/>
-              </a:spcAft>
-            </a:pPr>
-            <a:r>
-              <a:rPr b="1" sz="950">
-                <a:solidFill>
-                  <a:srgbClr val="1F77B4"/>
-                </a:solidFill>
-                <a:latin typeface="Segoe UI"/>
-              </a:rPr>
-              <a:t>• Chuyển đổi tư duy công bố:</a:t>
-            </a:r>
-          </a:p>
-          <a:p>
-            <a:pPr>
-              <a:spcAft>
-                <a:spcPts val="600"/>
-              </a:spcAft>
-            </a:pPr>
-            <a:r>
-              <a:rPr sz="900">
-                <a:solidFill>
-                  <a:srgbClr val="212529"/>
-                </a:solidFill>
-                <a:latin typeface="Segoe UI"/>
-              </a:rPr>
-              <a:t>  Từ 'tiếp thị thành tích' sang 'giải trình trách nhiệm và quản trị rủi ro'.</a:t>
-            </a:r>
-          </a:p>
-          <a:p>
-            <a:pPr>
-              <a:spcAft>
-                <a:spcPts val="600"/>
-              </a:spcAft>
-            </a:pPr>
-            <a:r>
-              <a:rPr b="1" sz="950">
-                <a:solidFill>
-                  <a:srgbClr val="1F77B4"/>
-                </a:solidFill>
-                <a:latin typeface="Segoe UI"/>
-              </a:rPr>
-              <a:t>• Minh bạch hóa thách thức:</a:t>
-            </a:r>
-          </a:p>
-          <a:p>
-            <a:pPr>
-              <a:spcAft>
-                <a:spcPts val="600"/>
-              </a:spcAft>
-            </a:pPr>
-            <a:r>
-              <a:rPr sz="900">
-                <a:solidFill>
-                  <a:srgbClr val="212529"/>
-                </a:solidFill>
-                <a:latin typeface="Segoe UI"/>
-              </a:rPr>
-              <a:t>  Chủ động công bố sự cố và lộ trình khắc phục để nâng cao tín nhiệm.</a:t>
-            </a:r>
-          </a:p>
-          <a:p>
-            <a:pPr>
-              <a:spcAft>
-                <a:spcPts val="600"/>
-              </a:spcAft>
-            </a:pPr>
-            <a:r>
-              <a:rPr b="1" sz="950">
-                <a:solidFill>
-                  <a:srgbClr val="1F77B4"/>
-                </a:solidFill>
-                <a:latin typeface="Segoe UI"/>
-              </a:rPr>
-              <a:t>• Tích hợp ESG thực chất:</a:t>
-            </a:r>
-          </a:p>
-          <a:p>
-            <a:pPr>
-              <a:spcAft>
-                <a:spcPts val="600"/>
-              </a:spcAft>
-            </a:pPr>
-            <a:r>
-              <a:rPr sz="900">
-                <a:solidFill>
-                  <a:srgbClr val="212529"/>
-                </a:solidFill>
-                <a:latin typeface="Segoe UI"/>
-              </a:rPr>
-              <a:t>  Chuyển từ CSR từ thiện bề nổi sang chiến lược giảm phát thải cốt lõi.</a:t>
-            </a:r>
-          </a:p>
-        </p:txBody>
-      </p:sp>
-      <p:sp>
-        <p:nvSpPr>
-          <p:cNvPr id="15" name="Rounded Rectangle 14"/>
-          <p:cNvSpPr/>
-          <p:nvPr/>
-        </p:nvSpPr>
-        <p:spPr>
-          <a:xfrm>
-            <a:off x="8028432" y="1234440"/>
-            <a:ext cx="3429000" cy="5029200"/>
+            <a:off x="8028432" y="4983480"/>
+            <a:ext cx="3429000" cy="1280160"/>
           </a:xfrm>
           <a:prstGeom prst="roundRect">
             <a:avLst/>
@@ -13094,66 +13048,14 @@
       </p:sp>
       <p:sp>
         <p:nvSpPr>
-          <p:cNvPr id="16" name="Rectangle 15"/>
-          <p:cNvSpPr/>
-          <p:nvPr/>
-        </p:nvSpPr>
-        <p:spPr>
-          <a:xfrm>
-            <a:off x="8028432" y="1234440"/>
-            <a:ext cx="3429000" cy="411480"/>
-          </a:xfrm>
-          <a:prstGeom prst="rect">
-            <a:avLst/>
-          </a:prstGeom>
-          <a:solidFill>
-            <a:srgbClr val="288C3C"/>
-          </a:solidFill>
-          <a:ln>
-            <a:noFill/>
-          </a:ln>
-        </p:spPr>
-        <p:style>
-          <a:lnRef idx="1">
-            <a:schemeClr val="accent1"/>
-          </a:lnRef>
-          <a:fillRef idx="3">
-            <a:schemeClr val="accent1"/>
-          </a:fillRef>
-          <a:effectRef idx="2">
-            <a:schemeClr val="accent1"/>
-          </a:effectRef>
-          <a:fontRef idx="minor">
-            <a:schemeClr val="lt1"/>
-          </a:fontRef>
-        </p:style>
-        <p:txBody>
-          <a:bodyPr rtlCol="0" anchor="ctr"/>
-          <a:lstStyle/>
-          <a:p>
-            <a:pPr algn="ctr"/>
-            <a:r>
-              <a:rPr sz="1000" b="1">
-                <a:solidFill>
-                  <a:srgbClr val="FFFFFF"/>
-                </a:solidFill>
-                <a:latin typeface="Segoe UI"/>
-              </a:rPr>
-              <a:t>NHÀ ĐẦU TƯ &amp; KIỂM TOÁN</a:t>
-            </a:r>
-          </a:p>
-        </p:txBody>
-      </p:sp>
-      <p:sp>
-        <p:nvSpPr>
-          <p:cNvPr id="17" name="TextBox 16"/>
+          <p:cNvPr id="15" name="TextBox 14"/>
           <p:cNvSpPr txBox="1"/>
           <p:nvPr/>
         </p:nvSpPr>
         <p:spPr>
           <a:xfrm>
-            <a:off x="8165592" y="1737360"/>
-            <a:ext cx="3154680" cy="4434840"/>
+            <a:off x="8165592" y="5047488"/>
+            <a:ext cx="3154680" cy="1143000"/>
           </a:xfrm>
           <a:prstGeom prst="rect">
             <a:avLst/>
@@ -13166,99 +13068,22 @@
           </a:bodyPr>
           <a:lstStyle/>
           <a:p>
-            <a:pPr>
-              <a:spcAft>
-                <a:spcPts val="600"/>
-              </a:spcAft>
-            </a:pPr>
-            <a:r>
-              <a:rPr b="1" sz="950">
+            <a:r>
+              <a:rPr sz="950" b="1">
                 <a:solidFill>
                   <a:srgbClr val="288C3C"/>
                 </a:solidFill>
-                <a:latin typeface="Segoe UI"/>
               </a:rPr>
-              <a:t>• Thẩm định nhanh bằng AI:</a:t>
-            </a:r>
-          </a:p>
-          <a:p>
-            <a:pPr>
-              <a:spcAft>
-                <a:spcPts val="600"/>
-              </a:spcAft>
-            </a:pPr>
-            <a:r>
-              <a:rPr sz="900">
+              <a:t>TẦM NHÌN SẢN PHẨM SAAS
+</a:t>
+            </a:r>
+            <a:r>
+              <a:rPr sz="850">
                 <a:solidFill>
                   <a:srgbClr val="212529"/>
                 </a:solidFill>
-                <a:latin typeface="Segoe UI"/>
               </a:rPr>
-              <a:t>  Sàng lọc hàng trăm báo cáo trong vài phút, tiết kiệm 80% thời gian rà soát.</a:t>
-            </a:r>
-          </a:p>
-          <a:p>
-            <a:pPr>
-              <a:spcAft>
-                <a:spcPts val="600"/>
-              </a:spcAft>
-            </a:pPr>
-            <a:r>
-              <a:rPr b="1" sz="950">
-                <a:solidFill>
-                  <a:srgbClr val="288C3C"/>
-                </a:solidFill>
-                <a:latin typeface="Segoe UI"/>
-              </a:rPr>
-              <a:t>• Cảnh báo Tẩy xanh sớm:</a:t>
-            </a:r>
-          </a:p>
-          <a:p>
-            <a:pPr>
-              <a:spcAft>
-                <a:spcPts val="600"/>
-              </a:spcAft>
-            </a:pPr>
-            <a:r>
-              <a:rPr sz="900">
-                <a:solidFill>
-                  <a:srgbClr val="212529"/>
-                </a:solidFill>
-                <a:latin typeface="Segoe UI"/>
-              </a:rPr>
-              <a:t>  Theo dõi Tỷ số Pos/Neg Ratio để phát hiện các tuyên bố suông thiếu số liệu.</a:t>
-            </a:r>
-          </a:p>
-          <a:p>
-            <a:pPr>
-              <a:spcAft>
-                <a:spcPts val="600"/>
-              </a:spcAft>
-            </a:pPr>
-            <a:r>
-              <a:rPr b="1" sz="950">
-                <a:solidFill>
-                  <a:srgbClr val="288C3C"/>
-                </a:solidFill>
-                <a:latin typeface="Segoe UI"/>
-              </a:rPr>
-              <a:t>• Định hướng dòng vốn xanh:</a:t>
-            </a:r>
-          </a:p>
-          <a:p>
-            <a:pPr>
-              <a:spcAft>
-                <a:spcPts val="600"/>
-              </a:spcAft>
-            </a:pPr>
-            <a:r>
-              <a:rPr sz="900">
-                <a:solidFill>
-                  <a:srgbClr val="212529"/>
-                </a:solidFill>
-                <a:latin typeface="Segoe UI"/>
-              </a:rPr>
-              <a:t>  Ưu tiên giải ngân tín dụng xanh cho doanh nghiệp có cam kết thực chất.</a:t>
+              <a:t>Tích hợp LLM (GPT-4o/Gemini) tự động xuất Báo cáo Thẩm định ESG Độc lập trong 30 giây phục vụ ngân hàng và quỹ đầu tư.</a:t>
             </a:r>
           </a:p>
         </p:txBody>
@@ -13296,595 +13121,6 @@
             <a:avLst/>
           </a:prstGeom>
           <a:solidFill>
-            <a:srgbClr val="F5F7FA"/>
-          </a:solidFill>
-          <a:ln>
-            <a:noFill/>
-          </a:ln>
-        </p:spPr>
-        <p:style>
-          <a:lnRef idx="1">
-            <a:schemeClr val="accent1"/>
-          </a:lnRef>
-          <a:fillRef idx="3">
-            <a:schemeClr val="accent1"/>
-          </a:fillRef>
-          <a:effectRef idx="2">
-            <a:schemeClr val="accent1"/>
-          </a:effectRef>
-          <a:fontRef idx="minor">
-            <a:schemeClr val="lt1"/>
-          </a:fontRef>
-        </p:style>
-        <p:txBody>
-          <a:bodyPr rtlCol="0" anchor="ctr"/>
-          <a:lstStyle/>
-          <a:p>
-            <a:pPr algn="ctr"/>
-          </a:p>
-        </p:txBody>
-      </p:sp>
-      <p:sp>
-        <p:nvSpPr>
-          <p:cNvPr id="3" name="Rectangle 2"/>
-          <p:cNvSpPr/>
-          <p:nvPr/>
-        </p:nvSpPr>
-        <p:spPr>
-          <a:xfrm>
-            <a:off x="0" y="0"/>
-            <a:ext cx="12191695" cy="960120"/>
-          </a:xfrm>
-          <a:prstGeom prst="rect">
-            <a:avLst/>
-          </a:prstGeom>
-          <a:solidFill>
-            <a:srgbClr val="FFFFFF"/>
-          </a:solidFill>
-          <a:ln w="9525">
-            <a:solidFill>
-              <a:srgbClr val="DAE0E9"/>
-            </a:solidFill>
-          </a:ln>
-        </p:spPr>
-        <p:style>
-          <a:lnRef idx="1">
-            <a:schemeClr val="accent1"/>
-          </a:lnRef>
-          <a:fillRef idx="3">
-            <a:schemeClr val="accent1"/>
-          </a:fillRef>
-          <a:effectRef idx="2">
-            <a:schemeClr val="accent1"/>
-          </a:effectRef>
-          <a:fontRef idx="minor">
-            <a:schemeClr val="lt1"/>
-          </a:fontRef>
-        </p:style>
-        <p:txBody>
-          <a:bodyPr rtlCol="0" anchor="ctr"/>
-          <a:lstStyle/>
-          <a:p>
-            <a:pPr algn="ctr"/>
-          </a:p>
-        </p:txBody>
-      </p:sp>
-      <p:sp>
-        <p:nvSpPr>
-          <p:cNvPr id="4" name="Rectangle 3"/>
-          <p:cNvSpPr/>
-          <p:nvPr/>
-        </p:nvSpPr>
-        <p:spPr>
-          <a:xfrm>
-            <a:off x="0" y="0"/>
-            <a:ext cx="12191695" cy="45720"/>
-          </a:xfrm>
-          <a:prstGeom prst="rect">
-            <a:avLst/>
-          </a:prstGeom>
-          <a:solidFill>
-            <a:srgbClr val="D4AF37"/>
-          </a:solidFill>
-          <a:ln>
-            <a:noFill/>
-          </a:ln>
-        </p:spPr>
-        <p:style>
-          <a:lnRef idx="1">
-            <a:schemeClr val="accent1"/>
-          </a:lnRef>
-          <a:fillRef idx="3">
-            <a:schemeClr val="accent1"/>
-          </a:fillRef>
-          <a:effectRef idx="2">
-            <a:schemeClr val="accent1"/>
-          </a:effectRef>
-          <a:fontRef idx="minor">
-            <a:schemeClr val="lt1"/>
-          </a:fontRef>
-        </p:style>
-        <p:txBody>
-          <a:bodyPr rtlCol="0" anchor="ctr"/>
-          <a:lstStyle/>
-          <a:p>
-            <a:pPr algn="ctr"/>
-          </a:p>
-        </p:txBody>
-      </p:sp>
-      <p:sp>
-        <p:nvSpPr>
-          <p:cNvPr id="5" name="Rounded Rectangle 4"/>
-          <p:cNvSpPr/>
-          <p:nvPr/>
-        </p:nvSpPr>
-        <p:spPr>
-          <a:xfrm>
-            <a:off x="731520" y="128016"/>
-            <a:ext cx="2560320" cy="237744"/>
-          </a:xfrm>
-          <a:prstGeom prst="roundRect">
-            <a:avLst/>
-          </a:prstGeom>
-          <a:solidFill>
-            <a:srgbClr val="1B365D"/>
-          </a:solidFill>
-          <a:ln>
-            <a:noFill/>
-          </a:ln>
-        </p:spPr>
-        <p:style>
-          <a:lnRef idx="1">
-            <a:schemeClr val="accent1"/>
-          </a:lnRef>
-          <a:fillRef idx="3">
-            <a:schemeClr val="accent1"/>
-          </a:fillRef>
-          <a:effectRef idx="2">
-            <a:schemeClr val="accent1"/>
-          </a:effectRef>
-          <a:fontRef idx="minor">
-            <a:schemeClr val="lt1"/>
-          </a:fontRef>
-        </p:style>
-        <p:txBody>
-          <a:bodyPr rtlCol="0" anchor="ctr"/>
-          <a:lstStyle/>
-          <a:p>
-            <a:pPr algn="ctr"/>
-            <a:r>
-              <a:rPr sz="850" b="1">
-                <a:solidFill>
-                  <a:srgbClr val="FFFFFF"/>
-                </a:solidFill>
-                <a:latin typeface="Segoe UI"/>
-              </a:rPr>
-              <a:t>HƯỚNG PHÁT TRIỂN</a:t>
-            </a:r>
-          </a:p>
-        </p:txBody>
-      </p:sp>
-      <p:sp>
-        <p:nvSpPr>
-          <p:cNvPr id="6" name="TextBox 5"/>
-          <p:cNvSpPr txBox="1"/>
-          <p:nvPr/>
-        </p:nvSpPr>
-        <p:spPr>
-          <a:xfrm>
-            <a:off x="685800" y="384048"/>
-            <a:ext cx="9601200" cy="502920"/>
-          </a:xfrm>
-          <a:prstGeom prst="rect">
-            <a:avLst/>
-          </a:prstGeom>
-          <a:noFill/>
-        </p:spPr>
-        <p:txBody>
-          <a:bodyPr wrap="square" anchor="ctr">
-            <a:spAutoFit/>
-          </a:bodyPr>
-          <a:lstStyle/>
-          <a:p>
-            <a:r>
-              <a:rPr sz="1650" b="1">
-                <a:solidFill>
-                  <a:srgbClr val="1B365D"/>
-                </a:solidFill>
-                <a:latin typeface="Segoe UI"/>
-              </a:rPr>
-              <a:t>HẠN CHẾ ĐỀ TÀI &amp; HƯỚNG PHÁT TRIỂN AGENTIC ESG AUDITOR</a:t>
-            </a:r>
-          </a:p>
-        </p:txBody>
-      </p:sp>
-      <p:sp>
-        <p:nvSpPr>
-          <p:cNvPr id="7" name="TextBox 6"/>
-          <p:cNvSpPr txBox="1"/>
-          <p:nvPr/>
-        </p:nvSpPr>
-        <p:spPr>
-          <a:xfrm>
-            <a:off x="10789920" y="292608"/>
-            <a:ext cx="914400" cy="457200"/>
-          </a:xfrm>
-          <a:prstGeom prst="rect">
-            <a:avLst/>
-          </a:prstGeom>
-          <a:noFill/>
-        </p:spPr>
-        <p:txBody>
-          <a:bodyPr wrap="none">
-            <a:spAutoFit/>
-          </a:bodyPr>
-          <a:lstStyle/>
-          <a:p>
-            <a:pPr algn="r"/>
-            <a:r>
-              <a:rPr sz="1100" b="1">
-                <a:solidFill>
-                  <a:srgbClr val="6C757D"/>
-                </a:solidFill>
-                <a:latin typeface="Segoe UI"/>
-              </a:rPr>
-              <a:t>17 / 18</a:t>
-            </a:r>
-          </a:p>
-        </p:txBody>
-      </p:sp>
-      <p:sp>
-        <p:nvSpPr>
-          <p:cNvPr id="8" name="TextBox 7"/>
-          <p:cNvSpPr txBox="1"/>
-          <p:nvPr/>
-        </p:nvSpPr>
-        <p:spPr>
-          <a:xfrm>
-            <a:off x="731520" y="6565392"/>
-            <a:ext cx="10789920" cy="256032"/>
-          </a:xfrm>
-          <a:prstGeom prst="rect">
-            <a:avLst/>
-          </a:prstGeom>
-          <a:noFill/>
-        </p:spPr>
-        <p:txBody>
-          <a:bodyPr wrap="none">
-            <a:spAutoFit/>
-          </a:bodyPr>
-          <a:lstStyle/>
-          <a:p>
-            <a:r>
-              <a:rPr sz="850">
-                <a:solidFill>
-                  <a:srgbClr val="6C757D"/>
-                </a:solidFill>
-                <a:latin typeface="Segoe UI"/>
-              </a:rPr>
-              <a:t>Đề tài: NLP Đa ngữ trong Phân tích SDG &amp; Cảm xúc Báo cáo PTBV tại Việt Nam | Tác giả: Lê Đan Sơn, Dương Thị Hoàn</a:t>
-            </a:r>
-          </a:p>
-        </p:txBody>
-      </p:sp>
-      <p:pic>
-        <p:nvPicPr>
-          <p:cNvPr id="9" name="Picture 8" descr="rag_agentic_flow.png"/>
-          <p:cNvPicPr>
-            <a:picLocks noChangeAspect="1"/>
-          </p:cNvPicPr>
-          <p:nvPr/>
-        </p:nvPicPr>
-        <p:blipFill>
-          <a:blip r:embed="rId2"/>
-          <a:stretch>
-            <a:fillRect/>
-          </a:stretch>
-        </p:blipFill>
-        <p:spPr>
-          <a:xfrm>
-            <a:off x="731520" y="1188720"/>
-            <a:ext cx="10728655" cy="3611880"/>
-          </a:xfrm>
-          <a:prstGeom prst="rect">
-            <a:avLst/>
-          </a:prstGeom>
-        </p:spPr>
-      </p:pic>
-      <p:sp>
-        <p:nvSpPr>
-          <p:cNvPr id="10" name="Rounded Rectangle 9"/>
-          <p:cNvSpPr/>
-          <p:nvPr/>
-        </p:nvSpPr>
-        <p:spPr>
-          <a:xfrm>
-            <a:off x="731520" y="4983480"/>
-            <a:ext cx="3429000" cy="1280160"/>
-          </a:xfrm>
-          <a:prstGeom prst="roundRect">
-            <a:avLst/>
-          </a:prstGeom>
-          <a:solidFill>
-            <a:srgbClr val="FFFFFF"/>
-          </a:solidFill>
-          <a:ln w="12700">
-            <a:solidFill>
-              <a:srgbClr val="D62728"/>
-            </a:solidFill>
-          </a:ln>
-        </p:spPr>
-        <p:style>
-          <a:lnRef idx="1">
-            <a:schemeClr val="accent1"/>
-          </a:lnRef>
-          <a:fillRef idx="3">
-            <a:schemeClr val="accent1"/>
-          </a:fillRef>
-          <a:effectRef idx="2">
-            <a:schemeClr val="accent1"/>
-          </a:effectRef>
-          <a:fontRef idx="minor">
-            <a:schemeClr val="lt1"/>
-          </a:fontRef>
-        </p:style>
-        <p:txBody>
-          <a:bodyPr rtlCol="0" anchor="ctr"/>
-          <a:lstStyle/>
-          <a:p>
-            <a:pPr algn="ctr"/>
-          </a:p>
-        </p:txBody>
-      </p:sp>
-      <p:sp>
-        <p:nvSpPr>
-          <p:cNvPr id="11" name="TextBox 10"/>
-          <p:cNvSpPr txBox="1"/>
-          <p:nvPr/>
-        </p:nvSpPr>
-        <p:spPr>
-          <a:xfrm>
-            <a:off x="868680" y="5047488"/>
-            <a:ext cx="3154680" cy="1143000"/>
-          </a:xfrm>
-          <a:prstGeom prst="rect">
-            <a:avLst/>
-          </a:prstGeom>
-          <a:noFill/>
-        </p:spPr>
-        <p:txBody>
-          <a:bodyPr wrap="square">
-            <a:spAutoFit/>
-          </a:bodyPr>
-          <a:lstStyle/>
-          <a:p>
-            <a:r>
-              <a:rPr sz="950" b="1">
-                <a:solidFill>
-                  <a:srgbClr val="D62728"/>
-                </a:solidFill>
-              </a:rPr>
-              <a:t>HẠN CHẾ HIỆN TẠI
-</a:t>
-            </a:r>
-            <a:r>
-              <a:rPr sz="850">
-                <a:solidFill>
-                  <a:srgbClr val="212529"/>
-                </a:solidFill>
-              </a:rPr>
-              <a:t>Mẫu 7 tập đoàn; mô hình đo lường tương đồng ngữ nghĩa chứ chưa tự động Fact-checking chéo số liệu định lượng trong Table.</a:t>
-            </a:r>
-          </a:p>
-        </p:txBody>
-      </p:sp>
-      <p:sp>
-        <p:nvSpPr>
-          <p:cNvPr id="12" name="Rounded Rectangle 11"/>
-          <p:cNvSpPr/>
-          <p:nvPr/>
-        </p:nvSpPr>
-        <p:spPr>
-          <a:xfrm>
-            <a:off x="4379976" y="4983480"/>
-            <a:ext cx="3429000" cy="1280160"/>
-          </a:xfrm>
-          <a:prstGeom prst="roundRect">
-            <a:avLst/>
-          </a:prstGeom>
-          <a:solidFill>
-            <a:srgbClr val="FFFFFF"/>
-          </a:solidFill>
-          <a:ln w="12700">
-            <a:solidFill>
-              <a:srgbClr val="7030A0"/>
-            </a:solidFill>
-          </a:ln>
-        </p:spPr>
-        <p:style>
-          <a:lnRef idx="1">
-            <a:schemeClr val="accent1"/>
-          </a:lnRef>
-          <a:fillRef idx="3">
-            <a:schemeClr val="accent1"/>
-          </a:fillRef>
-          <a:effectRef idx="2">
-            <a:schemeClr val="accent1"/>
-          </a:effectRef>
-          <a:fontRef idx="minor">
-            <a:schemeClr val="lt1"/>
-          </a:fontRef>
-        </p:style>
-        <p:txBody>
-          <a:bodyPr rtlCol="0" anchor="ctr"/>
-          <a:lstStyle/>
-          <a:p>
-            <a:pPr algn="ctr"/>
-          </a:p>
-        </p:txBody>
-      </p:sp>
-      <p:sp>
-        <p:nvSpPr>
-          <p:cNvPr id="13" name="TextBox 12"/>
-          <p:cNvSpPr txBox="1"/>
-          <p:nvPr/>
-        </p:nvSpPr>
-        <p:spPr>
-          <a:xfrm>
-            <a:off x="4517136" y="5047488"/>
-            <a:ext cx="3154680" cy="1143000"/>
-          </a:xfrm>
-          <a:prstGeom prst="rect">
-            <a:avLst/>
-          </a:prstGeom>
-          <a:noFill/>
-        </p:spPr>
-        <p:txBody>
-          <a:bodyPr wrap="square">
-            <a:spAutoFit/>
-          </a:bodyPr>
-          <a:lstStyle/>
-          <a:p>
-            <a:r>
-              <a:rPr sz="950" b="1">
-                <a:solidFill>
-                  <a:srgbClr val="7030A0"/>
-                </a:solidFill>
-              </a:rPr>
-              <a:t>ĐỘT PHÁ MULTI-AGENT
-</a:t>
-            </a:r>
-            <a:r>
-              <a:rPr sz="850">
-                <a:solidFill>
-                  <a:srgbClr val="212529"/>
-                </a:solidFill>
-              </a:rPr>
-              <a:t>Kế thừa pipeline Retrieval hiện tại làm nền móng sạch để tích hợp Agent bóc tách bảng số và Agent kiểm tra chéo cam kết.</a:t>
-            </a:r>
-          </a:p>
-        </p:txBody>
-      </p:sp>
-      <p:sp>
-        <p:nvSpPr>
-          <p:cNvPr id="14" name="Rounded Rectangle 13"/>
-          <p:cNvSpPr/>
-          <p:nvPr/>
-        </p:nvSpPr>
-        <p:spPr>
-          <a:xfrm>
-            <a:off x="8028432" y="4983480"/>
-            <a:ext cx="3429000" cy="1280160"/>
-          </a:xfrm>
-          <a:prstGeom prst="roundRect">
-            <a:avLst/>
-          </a:prstGeom>
-          <a:solidFill>
-            <a:srgbClr val="FFFFFF"/>
-          </a:solidFill>
-          <a:ln w="12700">
-            <a:solidFill>
-              <a:srgbClr val="288C3C"/>
-            </a:solidFill>
-          </a:ln>
-        </p:spPr>
-        <p:style>
-          <a:lnRef idx="1">
-            <a:schemeClr val="accent1"/>
-          </a:lnRef>
-          <a:fillRef idx="3">
-            <a:schemeClr val="accent1"/>
-          </a:fillRef>
-          <a:effectRef idx="2">
-            <a:schemeClr val="accent1"/>
-          </a:effectRef>
-          <a:fontRef idx="minor">
-            <a:schemeClr val="lt1"/>
-          </a:fontRef>
-        </p:style>
-        <p:txBody>
-          <a:bodyPr rtlCol="0" anchor="ctr"/>
-          <a:lstStyle/>
-          <a:p>
-            <a:pPr algn="ctr"/>
-          </a:p>
-        </p:txBody>
-      </p:sp>
-      <p:sp>
-        <p:nvSpPr>
-          <p:cNvPr id="15" name="TextBox 14"/>
-          <p:cNvSpPr txBox="1"/>
-          <p:nvPr/>
-        </p:nvSpPr>
-        <p:spPr>
-          <a:xfrm>
-            <a:off x="8165592" y="5047488"/>
-            <a:ext cx="3154680" cy="1143000"/>
-          </a:xfrm>
-          <a:prstGeom prst="rect">
-            <a:avLst/>
-          </a:prstGeom>
-          <a:noFill/>
-        </p:spPr>
-        <p:txBody>
-          <a:bodyPr wrap="square">
-            <a:spAutoFit/>
-          </a:bodyPr>
-          <a:lstStyle/>
-          <a:p>
-            <a:r>
-              <a:rPr sz="950" b="1">
-                <a:solidFill>
-                  <a:srgbClr val="288C3C"/>
-                </a:solidFill>
-              </a:rPr>
-              <a:t>TẦM NHÌN SẢN PHẨM SAAS
-</a:t>
-            </a:r>
-            <a:r>
-              <a:rPr sz="850">
-                <a:solidFill>
-                  <a:srgbClr val="212529"/>
-                </a:solidFill>
-              </a:rPr>
-              <a:t>Tích hợp LLM (GPT-4o/Gemini) tự động xuất Báo cáo Thẩm định ESG Độc lập trong 30 giây phục vụ ngân hàng và quỹ đầu tư.</a:t>
-            </a:r>
-          </a:p>
-        </p:txBody>
-      </p:sp>
-    </p:spTree>
-  </p:cSld>
-  <p:clrMapOvr>
-    <a:masterClrMapping/>
-  </p:clrMapOvr>
-</p:sld>
-</file>
-
-<file path=ppt/slides/slide18.xml><?xml version="1.0" encoding="utf-8"?>
-<p:sld xmlns:a="http://schemas.openxmlformats.org/drawingml/2006/main" xmlns:p="http://schemas.openxmlformats.org/presentationml/2006/main" xmlns:r="http://schemas.openxmlformats.org/officeDocument/2006/relationships">
-  <p:cSld>
-    <p:spTree>
-      <p:nvGrpSpPr>
-        <p:cNvPr id="1" name=""/>
-        <p:cNvGrpSpPr/>
-        <p:nvPr/>
-      </p:nvGrpSpPr>
-      <p:grpSpPr/>
-      <p:sp>
-        <p:nvSpPr>
-          <p:cNvPr id="2" name="Rectangle 1"/>
-          <p:cNvSpPr/>
-          <p:nvPr/>
-        </p:nvSpPr>
-        <p:spPr>
-          <a:xfrm>
-            <a:off x="0" y="0"/>
-            <a:ext cx="12191695" cy="6858000"/>
-          </a:xfrm>
-          <a:prstGeom prst="rect">
-            <a:avLst/>
-          </a:prstGeom>
-          <a:solidFill>
             <a:srgbClr val="0C1E36"/>
           </a:solidFill>
           <a:ln>
@@ -14885,7 +14121,7 @@
                 </a:solidFill>
                 <a:latin typeface="Segoe UI"/>
               </a:rPr>
-              <a:t>02 / 18</a:t>
+              <a:t>02 / 17</a:t>
             </a:r>
           </a:p>
         </p:txBody>
@@ -16086,7 +15322,7 @@
                 </a:solidFill>
                 <a:latin typeface="Segoe UI"/>
               </a:rPr>
-              <a:t>03 / 18</a:t>
+              <a:t>03 / 17</a:t>
             </a:r>
           </a:p>
         </p:txBody>
@@ -16798,7 +16034,7 @@
                 </a:solidFill>
                 <a:latin typeface="Segoe UI"/>
               </a:rPr>
-              <a:t>04 / 18</a:t>
+              <a:t>04 / 17</a:t>
             </a:r>
           </a:p>
         </p:txBody>
@@ -17126,7 +16362,7 @@
                 </a:solidFill>
                 <a:latin typeface="Segoe UI"/>
               </a:rPr>
-              <a:t>05 / 18</a:t>
+              <a:t>05 / 17</a:t>
             </a:r>
           </a:p>
         </p:txBody>
@@ -18739,7 +17975,7 @@
                 </a:solidFill>
                 <a:latin typeface="Segoe UI"/>
               </a:rPr>
-              <a:t>06 / 18</a:t>
+              <a:t>06 / 17</a:t>
             </a:r>
           </a:p>
         </p:txBody>
@@ -19603,7 +18839,7 @@
                 </a:solidFill>
                 <a:latin typeface="Segoe UI"/>
               </a:rPr>
-              <a:t>07 / 18</a:t>
+              <a:t>07 / 17</a:t>
             </a:r>
           </a:p>
         </p:txBody>
@@ -20219,7 +19455,7 @@
                 </a:solidFill>
                 <a:latin typeface="Segoe UI"/>
               </a:rPr>
-              <a:t>ĐẶC THÙ NGÀNH DOANH NGHIỆP</a:t>
+              <a:t>KẾT QUẢ THỰC NGHIỆM</a:t>
             </a:r>
           </a:p>
         </p:txBody>
@@ -20253,7 +19489,7 @@
                 </a:solidFill>
                 <a:latin typeface="Segoe UI"/>
               </a:rPr>
-              <a:t>ĐẶC THÙ NGÀNH: KHỐI SẢN XUẤT &amp; NĂNG LƯỢNG (VNM, VCS, PAN, PLX)</a:t>
+              <a:t>KẾT QUẢ 3: BẢNG SO SÁNH ĐẶC THÙ 7 DOANH NGHIỆP THEO 6 NHÓM SDG</a:t>
             </a:r>
           </a:p>
         </p:txBody>
@@ -20288,7 +19524,7 @@
                 </a:solidFill>
                 <a:latin typeface="Segoe UI"/>
               </a:rPr>
-              <a:t>08 / 18</a:t>
+              <a:t>08 / 17</a:t>
             </a:r>
           </a:p>
         </p:txBody>
@@ -20327,30 +19563,1736 @@
           </a:p>
         </p:txBody>
       </p:sp>
-      <p:pic>
-        <p:nvPicPr>
-          <p:cNvPr id="9" name="Picture 8" descr="slide_manuf_sdgs.png"/>
-          <p:cNvPicPr>
-            <a:picLocks noChangeAspect="1"/>
-          </p:cNvPicPr>
-          <p:nvPr/>
-        </p:nvPicPr>
-        <p:blipFill>
-          <a:blip r:embed="rId2"/>
-          <a:stretch>
-            <a:fillRect/>
-          </a:stretch>
-        </p:blipFill>
-        <p:spPr>
-          <a:xfrm>
-            <a:off x="731520" y="1234440"/>
-            <a:ext cx="6217920" cy="4800600"/>
-          </a:xfrm>
-          <a:prstGeom prst="rect">
-            <a:avLst/>
-          </a:prstGeom>
-        </p:spPr>
-      </p:pic>
+      <p:graphicFrame>
+        <p:nvGraphicFramePr>
+          <p:cNvPr id="9" name="Table 8"/>
+          <p:cNvGraphicFramePr>
+            <a:graphicFrameLocks noGrp="1"/>
+          </p:cNvGraphicFramePr>
+          <p:nvPr/>
+        </p:nvGraphicFramePr>
+        <p:xfrm>
+          <a:off x="731520" y="1188720"/>
+          <a:ext cx="10728655" cy="3474720"/>
+        </p:xfrm>
+        <a:graphic>
+          <a:graphicData uri="http://schemas.openxmlformats.org/drawingml/2006/table">
+            <a:tbl>
+              <a:tblPr firstRow="1" bandRow="1">
+                <a:tableStyleId>{5C22544A-7EE6-4342-B048-85BDC9FD1C3A}</a:tableStyleId>
+              </a:tblPr>
+              <a:tblGrid>
+                <a:gridCol w="2041855"/>
+                <a:gridCol w="1051560"/>
+                <a:gridCol w="1143000"/>
+                <a:gridCol w="1051560"/>
+                <a:gridCol w="1051560"/>
+                <a:gridCol w="1143000"/>
+                <a:gridCol w="1051560"/>
+                <a:gridCol w="2194560"/>
+              </a:tblGrid>
+              <a:tr h="386080">
+                <a:tc>
+                  <a:txBody>
+                    <a:bodyPr/>
+                    <a:lstStyle/>
+                    <a:p>
+                      <a:pPr algn="ctr">
+                        <a:defRPr b="1" sz="819">
+                          <a:solidFill>
+                            <a:srgbClr val="FFFFFF"/>
+                          </a:solidFill>
+                        </a:defRPr>
+                      </a:pPr>
+                      <a:r>
+                        <a:t>DOANH NGHIỆP (NGÀNH)</a:t>
+                      </a:r>
+                    </a:p>
+                  </a:txBody>
+                  <a:tcPr>
+                    <a:solidFill>
+                      <a:srgbClr val="1B365D"/>
+                    </a:solidFill>
+                  </a:tcPr>
+                </a:tc>
+                <a:tc>
+                  <a:txBody>
+                    <a:bodyPr/>
+                    <a:lstStyle/>
+                    <a:p>
+                      <a:pPr algn="ctr">
+                        <a:defRPr b="1" sz="819">
+                          <a:solidFill>
+                            <a:srgbClr val="FFFFFF"/>
+                          </a:solidFill>
+                        </a:defRPr>
+                      </a:pPr>
+                      <a:r>
+                        <a:t>LIFE</a:t>
+                      </a:r>
+                      <a:br/>
+                      <a:r>
+                        <a:t>(1, 2, 3)</a:t>
+                      </a:r>
+                    </a:p>
+                  </a:txBody>
+                  <a:tcPr>
+                    <a:solidFill>
+                      <a:srgbClr val="1B365D"/>
+                    </a:solidFill>
+                  </a:tcPr>
+                </a:tc>
+                <a:tc>
+                  <a:txBody>
+                    <a:bodyPr/>
+                    <a:lstStyle/>
+                    <a:p>
+                      <a:pPr algn="ctr">
+                        <a:defRPr b="1" sz="819">
+                          <a:solidFill>
+                            <a:srgbClr val="FFFFFF"/>
+                          </a:solidFill>
+                        </a:defRPr>
+                      </a:pPr>
+                      <a:r>
+                        <a:t>ECONOMIC</a:t>
+                      </a:r>
+                      <a:br/>
+                      <a:r>
+                        <a:t>(8, 9)</a:t>
+                      </a:r>
+                    </a:p>
+                  </a:txBody>
+                  <a:tcPr>
+                    <a:solidFill>
+                      <a:srgbClr val="1B365D"/>
+                    </a:solidFill>
+                  </a:tcPr>
+                </a:tc>
+                <a:tc>
+                  <a:txBody>
+                    <a:bodyPr/>
+                    <a:lstStyle/>
+                    <a:p>
+                      <a:pPr algn="ctr">
+                        <a:defRPr b="1" sz="819">
+                          <a:solidFill>
+                            <a:srgbClr val="FFFFFF"/>
+                          </a:solidFill>
+                        </a:defRPr>
+                      </a:pPr>
+                      <a:r>
+                        <a:t>EQUITY</a:t>
+                      </a:r>
+                      <a:br/>
+                      <a:r>
+                        <a:t>(4, 5, 10)</a:t>
+                      </a:r>
+                    </a:p>
+                  </a:txBody>
+                  <a:tcPr>
+                    <a:solidFill>
+                      <a:srgbClr val="1B365D"/>
+                    </a:solidFill>
+                  </a:tcPr>
+                </a:tc>
+                <a:tc>
+                  <a:txBody>
+                    <a:bodyPr/>
+                    <a:lstStyle/>
+                    <a:p>
+                      <a:pPr algn="ctr">
+                        <a:defRPr b="1" sz="819">
+                          <a:solidFill>
+                            <a:srgbClr val="FFFFFF"/>
+                          </a:solidFill>
+                        </a:defRPr>
+                      </a:pPr>
+                      <a:r>
+                        <a:t>SOCIAL</a:t>
+                      </a:r>
+                      <a:br/>
+                      <a:r>
+                        <a:t>(11, 16, 17)</a:t>
+                      </a:r>
+                    </a:p>
+                  </a:txBody>
+                  <a:tcPr>
+                    <a:solidFill>
+                      <a:srgbClr val="1B365D"/>
+                    </a:solidFill>
+                  </a:tcPr>
+                </a:tc>
+                <a:tc>
+                  <a:txBody>
+                    <a:bodyPr/>
+                    <a:lstStyle/>
+                    <a:p>
+                      <a:pPr algn="ctr">
+                        <a:defRPr b="1" sz="819">
+                          <a:solidFill>
+                            <a:srgbClr val="FFFFFF"/>
+                          </a:solidFill>
+                        </a:defRPr>
+                      </a:pPr>
+                      <a:r>
+                        <a:t>RESOURCES</a:t>
+                      </a:r>
+                      <a:br/>
+                      <a:r>
+                        <a:t>(6, 7, 12, 14)</a:t>
+                      </a:r>
+                    </a:p>
+                  </a:txBody>
+                  <a:tcPr>
+                    <a:solidFill>
+                      <a:srgbClr val="1B365D"/>
+                    </a:solidFill>
+                  </a:tcPr>
+                </a:tc>
+                <a:tc>
+                  <a:txBody>
+                    <a:bodyPr/>
+                    <a:lstStyle/>
+                    <a:p>
+                      <a:pPr algn="ctr">
+                        <a:defRPr b="1" sz="819">
+                          <a:solidFill>
+                            <a:srgbClr val="FFFFFF"/>
+                          </a:solidFill>
+                        </a:defRPr>
+                      </a:pPr>
+                      <a:r>
+                        <a:t>ENVIRONS</a:t>
+                      </a:r>
+                      <a:br/>
+                      <a:r>
+                        <a:t>(13, 15)</a:t>
+                      </a:r>
+                    </a:p>
+                  </a:txBody>
+                  <a:tcPr>
+                    <a:solidFill>
+                      <a:srgbClr val="1B365D"/>
+                    </a:solidFill>
+                  </a:tcPr>
+                </a:tc>
+                <a:tc>
+                  <a:txBody>
+                    <a:bodyPr/>
+                    <a:lstStyle/>
+                    <a:p>
+                      <a:pPr algn="ctr">
+                        <a:defRPr b="1" sz="819">
+                          <a:solidFill>
+                            <a:srgbClr val="FFFFFF"/>
+                          </a:solidFill>
+                        </a:defRPr>
+                      </a:pPr>
+                      <a:r>
+                        <a:t>ĐẶC TRƯNG CHIẾN LƯỢC CỐT LÕI</a:t>
+                      </a:r>
+                    </a:p>
+                  </a:txBody>
+                  <a:tcPr>
+                    <a:solidFill>
+                      <a:srgbClr val="1B365D"/>
+                    </a:solidFill>
+                  </a:tcPr>
+                </a:tc>
+              </a:tr>
+              <a:tr h="386080">
+                <a:tc>
+                  <a:txBody>
+                    <a:bodyPr/>
+                    <a:lstStyle/>
+                    <a:p>
+                      <a:pPr>
+                        <a:defRPr sz="780" b="1">
+                          <a:solidFill>
+                            <a:srgbClr val="1B365D"/>
+                          </a:solidFill>
+                        </a:defRPr>
+                      </a:pPr>
+                      <a:r>
+                        <a:t>Vinamilk (VNM - Sữa &amp; Chăn nuôi)</a:t>
+                      </a:r>
+                    </a:p>
+                  </a:txBody>
+                  <a:tcPr>
+                    <a:solidFill>
+                      <a:srgbClr val="F8FAFC"/>
+                    </a:solidFill>
+                  </a:tcPr>
+                </a:tc>
+                <a:tc>
+                  <a:txBody>
+                    <a:bodyPr/>
+                    <a:lstStyle/>
+                    <a:p>
+                      <a:pPr algn="ctr">
+                        <a:defRPr sz="780" b="0">
+                          <a:solidFill>
+                            <a:srgbClr val="212529"/>
+                          </a:solidFill>
+                        </a:defRPr>
+                      </a:pPr>
+                      <a:r>
+                        <a:t>42.26</a:t>
+                      </a:r>
+                    </a:p>
+                  </a:txBody>
+                  <a:tcPr>
+                    <a:solidFill>
+                      <a:srgbClr val="F8FAFC"/>
+                    </a:solidFill>
+                  </a:tcPr>
+                </a:tc>
+                <a:tc>
+                  <a:txBody>
+                    <a:bodyPr/>
+                    <a:lstStyle/>
+                    <a:p>
+                      <a:pPr algn="ctr">
+                        <a:defRPr sz="780" b="1">
+                          <a:solidFill>
+                            <a:srgbClr val="1B365D"/>
+                          </a:solidFill>
+                        </a:defRPr>
+                      </a:pPr>
+                      <a:r>
+                        <a:t>45.09</a:t>
+                      </a:r>
+                    </a:p>
+                  </a:txBody>
+                  <a:tcPr>
+                    <a:solidFill>
+                      <a:srgbClr val="F8FAFC"/>
+                    </a:solidFill>
+                  </a:tcPr>
+                </a:tc>
+                <a:tc>
+                  <a:txBody>
+                    <a:bodyPr/>
+                    <a:lstStyle/>
+                    <a:p>
+                      <a:pPr algn="ctr">
+                        <a:defRPr sz="780" b="0">
+                          <a:solidFill>
+                            <a:srgbClr val="D4AF37"/>
+                          </a:solidFill>
+                        </a:defRPr>
+                      </a:pPr>
+                      <a:r>
+                        <a:t>40.28</a:t>
+                      </a:r>
+                    </a:p>
+                  </a:txBody>
+                  <a:tcPr>
+                    <a:solidFill>
+                      <a:srgbClr val="F8FAFC"/>
+                    </a:solidFill>
+                  </a:tcPr>
+                </a:tc>
+                <a:tc>
+                  <a:txBody>
+                    <a:bodyPr/>
+                    <a:lstStyle/>
+                    <a:p>
+                      <a:pPr algn="ctr">
+                        <a:defRPr sz="780" b="0">
+                          <a:solidFill>
+                            <a:srgbClr val="212529"/>
+                          </a:solidFill>
+                        </a:defRPr>
+                      </a:pPr>
+                      <a:r>
+                        <a:t>43.94</a:t>
+                      </a:r>
+                    </a:p>
+                  </a:txBody>
+                  <a:tcPr>
+                    <a:solidFill>
+                      <a:srgbClr val="F8FAFC"/>
+                    </a:solidFill>
+                  </a:tcPr>
+                </a:tc>
+                <a:tc>
+                  <a:txBody>
+                    <a:bodyPr/>
+                    <a:lstStyle/>
+                    <a:p>
+                      <a:pPr algn="ctr">
+                        <a:defRPr sz="780" b="0">
+                          <a:solidFill>
+                            <a:srgbClr val="212529"/>
+                          </a:solidFill>
+                        </a:defRPr>
+                      </a:pPr>
+                      <a:r>
+                        <a:t>44.08</a:t>
+                      </a:r>
+                    </a:p>
+                  </a:txBody>
+                  <a:tcPr>
+                    <a:solidFill>
+                      <a:srgbClr val="F8FAFC"/>
+                    </a:solidFill>
+                  </a:tcPr>
+                </a:tc>
+                <a:tc>
+                  <a:txBody>
+                    <a:bodyPr/>
+                    <a:lstStyle/>
+                    <a:p>
+                      <a:pPr algn="ctr">
+                        <a:defRPr sz="780" b="0">
+                          <a:solidFill>
+                            <a:srgbClr val="212529"/>
+                          </a:solidFill>
+                        </a:defRPr>
+                      </a:pPr>
+                      <a:r>
+                        <a:t>43.38</a:t>
+                      </a:r>
+                    </a:p>
+                  </a:txBody>
+                  <a:tcPr>
+                    <a:solidFill>
+                      <a:srgbClr val="F8FAFC"/>
+                    </a:solidFill>
+                  </a:tcPr>
+                </a:tc>
+                <a:tc>
+                  <a:txBody>
+                    <a:bodyPr/>
+                    <a:lstStyle/>
+                    <a:p>
+                      <a:pPr>
+                        <a:defRPr sz="740" b="0">
+                          <a:solidFill>
+                            <a:srgbClr val="212529"/>
+                          </a:solidFill>
+                        </a:defRPr>
+                      </a:pPr>
+                      <a:r>
+                        <a:t>Net Zero 2050, 3 đơn vị PAS 2060, Green Farm.</a:t>
+                      </a:r>
+                    </a:p>
+                  </a:txBody>
+                  <a:tcPr>
+                    <a:solidFill>
+                      <a:srgbClr val="F8FAFC"/>
+                    </a:solidFill>
+                  </a:tcPr>
+                </a:tc>
+              </a:tr>
+              <a:tr h="386080">
+                <a:tc>
+                  <a:txBody>
+                    <a:bodyPr/>
+                    <a:lstStyle/>
+                    <a:p>
+                      <a:pPr>
+                        <a:defRPr sz="780" b="1">
+                          <a:solidFill>
+                            <a:srgbClr val="1B365D"/>
+                          </a:solidFill>
+                        </a:defRPr>
+                      </a:pPr>
+                      <a:r>
+                        <a:t>Vicostone (VCS - Đá thạch anh)</a:t>
+                      </a:r>
+                    </a:p>
+                  </a:txBody>
+                  <a:tcPr>
+                    <a:solidFill>
+                      <a:srgbClr val="FFFFFF"/>
+                    </a:solidFill>
+                  </a:tcPr>
+                </a:tc>
+                <a:tc>
+                  <a:txBody>
+                    <a:bodyPr/>
+                    <a:lstStyle/>
+                    <a:p>
+                      <a:pPr algn="ctr">
+                        <a:defRPr sz="780" b="0">
+                          <a:solidFill>
+                            <a:srgbClr val="212529"/>
+                          </a:solidFill>
+                        </a:defRPr>
+                      </a:pPr>
+                      <a:r>
+                        <a:t>46.19</a:t>
+                      </a:r>
+                    </a:p>
+                  </a:txBody>
+                  <a:tcPr>
+                    <a:solidFill>
+                      <a:srgbClr val="FFFFFF"/>
+                    </a:solidFill>
+                  </a:tcPr>
+                </a:tc>
+                <a:tc>
+                  <a:txBody>
+                    <a:bodyPr/>
+                    <a:lstStyle/>
+                    <a:p>
+                      <a:pPr algn="ctr">
+                        <a:defRPr sz="780" b="1">
+                          <a:solidFill>
+                            <a:srgbClr val="1B365D"/>
+                          </a:solidFill>
+                        </a:defRPr>
+                      </a:pPr>
+                      <a:r>
+                        <a:t>50.71</a:t>
+                      </a:r>
+                    </a:p>
+                  </a:txBody>
+                  <a:tcPr>
+                    <a:solidFill>
+                      <a:srgbClr val="FFFFFF"/>
+                    </a:solidFill>
+                  </a:tcPr>
+                </a:tc>
+                <a:tc>
+                  <a:txBody>
+                    <a:bodyPr/>
+                    <a:lstStyle/>
+                    <a:p>
+                      <a:pPr algn="ctr">
+                        <a:defRPr sz="780" b="0">
+                          <a:solidFill>
+                            <a:srgbClr val="D4AF37"/>
+                          </a:solidFill>
+                        </a:defRPr>
+                      </a:pPr>
+                      <a:r>
+                        <a:t>44.20</a:t>
+                      </a:r>
+                    </a:p>
+                  </a:txBody>
+                  <a:tcPr>
+                    <a:solidFill>
+                      <a:srgbClr val="FFFFFF"/>
+                    </a:solidFill>
+                  </a:tcPr>
+                </a:tc>
+                <a:tc>
+                  <a:txBody>
+                    <a:bodyPr/>
+                    <a:lstStyle/>
+                    <a:p>
+                      <a:pPr algn="ctr">
+                        <a:defRPr sz="780" b="0">
+                          <a:solidFill>
+                            <a:srgbClr val="212529"/>
+                          </a:solidFill>
+                        </a:defRPr>
+                      </a:pPr>
+                      <a:r>
+                        <a:t>49.08</a:t>
+                      </a:r>
+                    </a:p>
+                  </a:txBody>
+                  <a:tcPr>
+                    <a:solidFill>
+                      <a:srgbClr val="FFFFFF"/>
+                    </a:solidFill>
+                  </a:tcPr>
+                </a:tc>
+                <a:tc>
+                  <a:txBody>
+                    <a:bodyPr/>
+                    <a:lstStyle/>
+                    <a:p>
+                      <a:pPr algn="ctr">
+                        <a:defRPr sz="780" b="0">
+                          <a:solidFill>
+                            <a:srgbClr val="212529"/>
+                          </a:solidFill>
+                        </a:defRPr>
+                      </a:pPr>
+                      <a:r>
+                        <a:t>48.63</a:t>
+                      </a:r>
+                    </a:p>
+                  </a:txBody>
+                  <a:tcPr>
+                    <a:solidFill>
+                      <a:srgbClr val="FFFFFF"/>
+                    </a:solidFill>
+                  </a:tcPr>
+                </a:tc>
+                <a:tc>
+                  <a:txBody>
+                    <a:bodyPr/>
+                    <a:lstStyle/>
+                    <a:p>
+                      <a:pPr algn="ctr">
+                        <a:defRPr sz="780" b="0">
+                          <a:solidFill>
+                            <a:srgbClr val="212529"/>
+                          </a:solidFill>
+                        </a:defRPr>
+                      </a:pPr>
+                      <a:r>
+                        <a:t>47.31</a:t>
+                      </a:r>
+                    </a:p>
+                  </a:txBody>
+                  <a:tcPr>
+                    <a:solidFill>
+                      <a:srgbClr val="FFFFFF"/>
+                    </a:solidFill>
+                  </a:tcPr>
+                </a:tc>
+                <a:tc>
+                  <a:txBody>
+                    <a:bodyPr/>
+                    <a:lstStyle/>
+                    <a:p>
+                      <a:pPr>
+                        <a:defRPr sz="740" b="0">
+                          <a:solidFill>
+                            <a:srgbClr val="212529"/>
+                          </a:solidFill>
+                        </a:defRPr>
+                      </a:pPr>
+                      <a:r>
+                        <a:t>Đỉnh toàn mẫu Economic &amp; Resources nhờ xuất khẩu Âu-Mỹ.</a:t>
+                      </a:r>
+                    </a:p>
+                  </a:txBody>
+                  <a:tcPr>
+                    <a:solidFill>
+                      <a:srgbClr val="FFFFFF"/>
+                    </a:solidFill>
+                  </a:tcPr>
+                </a:tc>
+              </a:tr>
+              <a:tr h="386080">
+                <a:tc>
+                  <a:txBody>
+                    <a:bodyPr/>
+                    <a:lstStyle/>
+                    <a:p>
+                      <a:pPr>
+                        <a:defRPr sz="780" b="1">
+                          <a:solidFill>
+                            <a:srgbClr val="1B365D"/>
+                          </a:solidFill>
+                        </a:defRPr>
+                      </a:pPr>
+                      <a:r>
+                        <a:t>PNJ (PNJ - Bán lẻ &amp; Chế tác vàng)</a:t>
+                      </a:r>
+                    </a:p>
+                  </a:txBody>
+                  <a:tcPr>
+                    <a:solidFill>
+                      <a:srgbClr val="F8FAFC"/>
+                    </a:solidFill>
+                  </a:tcPr>
+                </a:tc>
+                <a:tc>
+                  <a:txBody>
+                    <a:bodyPr/>
+                    <a:lstStyle/>
+                    <a:p>
+                      <a:pPr algn="ctr">
+                        <a:defRPr sz="780" b="0">
+                          <a:solidFill>
+                            <a:srgbClr val="212529"/>
+                          </a:solidFill>
+                        </a:defRPr>
+                      </a:pPr>
+                      <a:r>
+                        <a:t>44.58</a:t>
+                      </a:r>
+                    </a:p>
+                  </a:txBody>
+                  <a:tcPr>
+                    <a:solidFill>
+                      <a:srgbClr val="F8FAFC"/>
+                    </a:solidFill>
+                  </a:tcPr>
+                </a:tc>
+                <a:tc>
+                  <a:txBody>
+                    <a:bodyPr/>
+                    <a:lstStyle/>
+                    <a:p>
+                      <a:pPr algn="ctr">
+                        <a:defRPr sz="780" b="1">
+                          <a:solidFill>
+                            <a:srgbClr val="1B365D"/>
+                          </a:solidFill>
+                        </a:defRPr>
+                      </a:pPr>
+                      <a:r>
+                        <a:t>48.67</a:t>
+                      </a:r>
+                    </a:p>
+                  </a:txBody>
+                  <a:tcPr>
+                    <a:solidFill>
+                      <a:srgbClr val="F8FAFC"/>
+                    </a:solidFill>
+                  </a:tcPr>
+                </a:tc>
+                <a:tc>
+                  <a:txBody>
+                    <a:bodyPr/>
+                    <a:lstStyle/>
+                    <a:p>
+                      <a:pPr algn="ctr">
+                        <a:defRPr sz="780" b="0">
+                          <a:solidFill>
+                            <a:srgbClr val="D4AF37"/>
+                          </a:solidFill>
+                        </a:defRPr>
+                      </a:pPr>
+                      <a:r>
+                        <a:t>43.18</a:t>
+                      </a:r>
+                    </a:p>
+                  </a:txBody>
+                  <a:tcPr>
+                    <a:solidFill>
+                      <a:srgbClr val="F8FAFC"/>
+                    </a:solidFill>
+                  </a:tcPr>
+                </a:tc>
+                <a:tc>
+                  <a:txBody>
+                    <a:bodyPr/>
+                    <a:lstStyle/>
+                    <a:p>
+                      <a:pPr algn="ctr">
+                        <a:defRPr sz="780" b="0">
+                          <a:solidFill>
+                            <a:srgbClr val="212529"/>
+                          </a:solidFill>
+                        </a:defRPr>
+                      </a:pPr>
+                      <a:r>
+                        <a:t>47.32</a:t>
+                      </a:r>
+                    </a:p>
+                  </a:txBody>
+                  <a:tcPr>
+                    <a:solidFill>
+                      <a:srgbClr val="F8FAFC"/>
+                    </a:solidFill>
+                  </a:tcPr>
+                </a:tc>
+                <a:tc>
+                  <a:txBody>
+                    <a:bodyPr/>
+                    <a:lstStyle/>
+                    <a:p>
+                      <a:pPr algn="ctr">
+                        <a:defRPr sz="780" b="0">
+                          <a:solidFill>
+                            <a:srgbClr val="212529"/>
+                          </a:solidFill>
+                        </a:defRPr>
+                      </a:pPr>
+                      <a:r>
+                        <a:t>46.93</a:t>
+                      </a:r>
+                    </a:p>
+                  </a:txBody>
+                  <a:tcPr>
+                    <a:solidFill>
+                      <a:srgbClr val="F8FAFC"/>
+                    </a:solidFill>
+                  </a:tcPr>
+                </a:tc>
+                <a:tc>
+                  <a:txBody>
+                    <a:bodyPr/>
+                    <a:lstStyle/>
+                    <a:p>
+                      <a:pPr algn="ctr">
+                        <a:defRPr sz="780" b="0">
+                          <a:solidFill>
+                            <a:srgbClr val="212529"/>
+                          </a:solidFill>
+                        </a:defRPr>
+                      </a:pPr>
+                      <a:r>
+                        <a:t>45.97</a:t>
+                      </a:r>
+                    </a:p>
+                  </a:txBody>
+                  <a:tcPr>
+                    <a:solidFill>
+                      <a:srgbClr val="F8FAFC"/>
+                    </a:solidFill>
+                  </a:tcPr>
+                </a:tc>
+                <a:tc>
+                  <a:txBody>
+                    <a:bodyPr/>
+                    <a:lstStyle/>
+                    <a:p>
+                      <a:pPr>
+                        <a:defRPr sz="740" b="0">
+                          <a:solidFill>
+                            <a:srgbClr val="212529"/>
+                          </a:solidFill>
+                        </a:defRPr>
+                      </a:pPr>
+                      <a:r>
+                        <a:t>Dẫn đầu Equity (43,18đ) nhờ &gt;60% nhân sự nữ &amp; DE&amp;I.</a:t>
+                      </a:r>
+                    </a:p>
+                  </a:txBody>
+                  <a:tcPr>
+                    <a:solidFill>
+                      <a:srgbClr val="F8FAFC"/>
+                    </a:solidFill>
+                  </a:tcPr>
+                </a:tc>
+              </a:tr>
+              <a:tr h="386080">
+                <a:tc>
+                  <a:txBody>
+                    <a:bodyPr/>
+                    <a:lstStyle/>
+                    <a:p>
+                      <a:pPr>
+                        <a:defRPr sz="780" b="1">
+                          <a:solidFill>
+                            <a:srgbClr val="1B365D"/>
+                          </a:solidFill>
+                        </a:defRPr>
+                      </a:pPr>
+                      <a:r>
+                        <a:t>Bảo Việt (BVH - Bảo hiểm &amp; Tài chính)</a:t>
+                      </a:r>
+                    </a:p>
+                  </a:txBody>
+                  <a:tcPr>
+                    <a:solidFill>
+                      <a:srgbClr val="FFFFFF"/>
+                    </a:solidFill>
+                  </a:tcPr>
+                </a:tc>
+                <a:tc>
+                  <a:txBody>
+                    <a:bodyPr/>
+                    <a:lstStyle/>
+                    <a:p>
+                      <a:pPr algn="ctr">
+                        <a:defRPr sz="780" b="0">
+                          <a:solidFill>
+                            <a:srgbClr val="212529"/>
+                          </a:solidFill>
+                        </a:defRPr>
+                      </a:pPr>
+                      <a:r>
+                        <a:t>46.34</a:t>
+                      </a:r>
+                    </a:p>
+                  </a:txBody>
+                  <a:tcPr>
+                    <a:solidFill>
+                      <a:srgbClr val="FFFFFF"/>
+                    </a:solidFill>
+                  </a:tcPr>
+                </a:tc>
+                <a:tc>
+                  <a:txBody>
+                    <a:bodyPr/>
+                    <a:lstStyle/>
+                    <a:p>
+                      <a:pPr algn="ctr">
+                        <a:defRPr sz="780" b="1">
+                          <a:solidFill>
+                            <a:srgbClr val="1B365D"/>
+                          </a:solidFill>
+                        </a:defRPr>
+                      </a:pPr>
+                      <a:r>
+                        <a:t>49.36</a:t>
+                      </a:r>
+                    </a:p>
+                  </a:txBody>
+                  <a:tcPr>
+                    <a:solidFill>
+                      <a:srgbClr val="FFFFFF"/>
+                    </a:solidFill>
+                  </a:tcPr>
+                </a:tc>
+                <a:tc>
+                  <a:txBody>
+                    <a:bodyPr/>
+                    <a:lstStyle/>
+                    <a:p>
+                      <a:pPr algn="ctr">
+                        <a:defRPr sz="780" b="0">
+                          <a:solidFill>
+                            <a:srgbClr val="D4AF37"/>
+                          </a:solidFill>
+                        </a:defRPr>
+                      </a:pPr>
+                      <a:r>
+                        <a:t>43.05</a:t>
+                      </a:r>
+                    </a:p>
+                  </a:txBody>
+                  <a:tcPr>
+                    <a:solidFill>
+                      <a:srgbClr val="FFFFFF"/>
+                    </a:solidFill>
+                  </a:tcPr>
+                </a:tc>
+                <a:tc>
+                  <a:txBody>
+                    <a:bodyPr/>
+                    <a:lstStyle/>
+                    <a:p>
+                      <a:pPr algn="ctr">
+                        <a:defRPr sz="780" b="0">
+                          <a:solidFill>
+                            <a:srgbClr val="212529"/>
+                          </a:solidFill>
+                        </a:defRPr>
+                      </a:pPr>
+                      <a:r>
+                        <a:t>48.13</a:t>
+                      </a:r>
+                    </a:p>
+                  </a:txBody>
+                  <a:tcPr>
+                    <a:solidFill>
+                      <a:srgbClr val="FFFFFF"/>
+                    </a:solidFill>
+                  </a:tcPr>
+                </a:tc>
+                <a:tc>
+                  <a:txBody>
+                    <a:bodyPr/>
+                    <a:lstStyle/>
+                    <a:p>
+                      <a:pPr algn="ctr">
+                        <a:defRPr sz="780" b="0">
+                          <a:solidFill>
+                            <a:srgbClr val="212529"/>
+                          </a:solidFill>
+                        </a:defRPr>
+                      </a:pPr>
+                      <a:r>
+                        <a:t>46.40</a:t>
+                      </a:r>
+                    </a:p>
+                  </a:txBody>
+                  <a:tcPr>
+                    <a:solidFill>
+                      <a:srgbClr val="FFFFFF"/>
+                    </a:solidFill>
+                  </a:tcPr>
+                </a:tc>
+                <a:tc>
+                  <a:txBody>
+                    <a:bodyPr/>
+                    <a:lstStyle/>
+                    <a:p>
+                      <a:pPr algn="ctr">
+                        <a:defRPr sz="780" b="0">
+                          <a:solidFill>
+                            <a:srgbClr val="212529"/>
+                          </a:solidFill>
+                        </a:defRPr>
+                      </a:pPr>
+                      <a:r>
+                        <a:t>46.08</a:t>
+                      </a:r>
+                    </a:p>
+                  </a:txBody>
+                  <a:tcPr>
+                    <a:solidFill>
+                      <a:srgbClr val="FFFFFF"/>
+                    </a:solidFill>
+                  </a:tcPr>
+                </a:tc>
+                <a:tc>
+                  <a:txBody>
+                    <a:bodyPr/>
+                    <a:lstStyle/>
+                    <a:p>
+                      <a:pPr>
+                        <a:defRPr sz="740" b="0">
+                          <a:solidFill>
+                            <a:srgbClr val="212529"/>
+                          </a:solidFill>
+                        </a:defRPr>
+                      </a:pPr>
+                      <a:r>
+                        <a:t>Tiên phong Báo cáo Tích hợp IIRC, bảo hiểm vi mô.</a:t>
+                      </a:r>
+                    </a:p>
+                  </a:txBody>
+                  <a:tcPr>
+                    <a:solidFill>
+                      <a:srgbClr val="FFFFFF"/>
+                    </a:solidFill>
+                  </a:tcPr>
+                </a:tc>
+              </a:tr>
+              <a:tr h="386080">
+                <a:tc>
+                  <a:txBody>
+                    <a:bodyPr/>
+                    <a:lstStyle/>
+                    <a:p>
+                      <a:pPr>
+                        <a:defRPr sz="780" b="1">
+                          <a:solidFill>
+                            <a:srgbClr val="1B365D"/>
+                          </a:solidFill>
+                        </a:defRPr>
+                      </a:pPr>
+                      <a:r>
+                        <a:t>The PAN Group (PAN - Nông nghiệp)</a:t>
+                      </a:r>
+                    </a:p>
+                  </a:txBody>
+                  <a:tcPr>
+                    <a:solidFill>
+                      <a:srgbClr val="F8FAFC"/>
+                    </a:solidFill>
+                  </a:tcPr>
+                </a:tc>
+                <a:tc>
+                  <a:txBody>
+                    <a:bodyPr/>
+                    <a:lstStyle/>
+                    <a:p>
+                      <a:pPr algn="ctr">
+                        <a:defRPr sz="780" b="0">
+                          <a:solidFill>
+                            <a:srgbClr val="212529"/>
+                          </a:solidFill>
+                        </a:defRPr>
+                      </a:pPr>
+                      <a:r>
+                        <a:t>44.81</a:t>
+                      </a:r>
+                    </a:p>
+                  </a:txBody>
+                  <a:tcPr>
+                    <a:solidFill>
+                      <a:srgbClr val="F8FAFC"/>
+                    </a:solidFill>
+                  </a:tcPr>
+                </a:tc>
+                <a:tc>
+                  <a:txBody>
+                    <a:bodyPr/>
+                    <a:lstStyle/>
+                    <a:p>
+                      <a:pPr algn="ctr">
+                        <a:defRPr sz="780" b="1">
+                          <a:solidFill>
+                            <a:srgbClr val="1B365D"/>
+                          </a:solidFill>
+                        </a:defRPr>
+                      </a:pPr>
+                      <a:r>
+                        <a:t>47.29</a:t>
+                      </a:r>
+                    </a:p>
+                  </a:txBody>
+                  <a:tcPr>
+                    <a:solidFill>
+                      <a:srgbClr val="F8FAFC"/>
+                    </a:solidFill>
+                  </a:tcPr>
+                </a:tc>
+                <a:tc>
+                  <a:txBody>
+                    <a:bodyPr/>
+                    <a:lstStyle/>
+                    <a:p>
+                      <a:pPr algn="ctr">
+                        <a:defRPr sz="780" b="0">
+                          <a:solidFill>
+                            <a:srgbClr val="D4AF37"/>
+                          </a:solidFill>
+                        </a:defRPr>
+                      </a:pPr>
+                      <a:r>
+                        <a:t>41.91</a:t>
+                      </a:r>
+                    </a:p>
+                  </a:txBody>
+                  <a:tcPr>
+                    <a:solidFill>
+                      <a:srgbClr val="F8FAFC"/>
+                    </a:solidFill>
+                  </a:tcPr>
+                </a:tc>
+                <a:tc>
+                  <a:txBody>
+                    <a:bodyPr/>
+                    <a:lstStyle/>
+                    <a:p>
+                      <a:pPr algn="ctr">
+                        <a:defRPr sz="780" b="0">
+                          <a:solidFill>
+                            <a:srgbClr val="212529"/>
+                          </a:solidFill>
+                        </a:defRPr>
+                      </a:pPr>
+                      <a:r>
+                        <a:t>45.51</a:t>
+                      </a:r>
+                    </a:p>
+                  </a:txBody>
+                  <a:tcPr>
+                    <a:solidFill>
+                      <a:srgbClr val="F8FAFC"/>
+                    </a:solidFill>
+                  </a:tcPr>
+                </a:tc>
+                <a:tc>
+                  <a:txBody>
+                    <a:bodyPr/>
+                    <a:lstStyle/>
+                    <a:p>
+                      <a:pPr algn="ctr">
+                        <a:defRPr sz="780" b="0">
+                          <a:solidFill>
+                            <a:srgbClr val="212529"/>
+                          </a:solidFill>
+                        </a:defRPr>
+                      </a:pPr>
+                      <a:r>
+                        <a:t>45.07</a:t>
+                      </a:r>
+                    </a:p>
+                  </a:txBody>
+                  <a:tcPr>
+                    <a:solidFill>
+                      <a:srgbClr val="F8FAFC"/>
+                    </a:solidFill>
+                  </a:tcPr>
+                </a:tc>
+                <a:tc>
+                  <a:txBody>
+                    <a:bodyPr/>
+                    <a:lstStyle/>
+                    <a:p>
+                      <a:pPr algn="ctr">
+                        <a:defRPr sz="780" b="0">
+                          <a:solidFill>
+                            <a:srgbClr val="212529"/>
+                          </a:solidFill>
+                        </a:defRPr>
+                      </a:pPr>
+                      <a:r>
+                        <a:t>44.67</a:t>
+                      </a:r>
+                    </a:p>
+                  </a:txBody>
+                  <a:tcPr>
+                    <a:solidFill>
+                      <a:srgbClr val="F8FAFC"/>
+                    </a:solidFill>
+                  </a:tcPr>
+                </a:tc>
+                <a:tc>
+                  <a:txBody>
+                    <a:bodyPr/>
+                    <a:lstStyle/>
+                    <a:p>
+                      <a:pPr>
+                        <a:defRPr sz="740" b="0">
+                          <a:solidFill>
+                            <a:srgbClr val="212529"/>
+                          </a:solidFill>
+                        </a:defRPr>
+                      </a:pPr>
+                      <a:r>
+                        <a:t>Chuỗi Farm-Food-Family, lúa gạo giảm phát thải (SDG 2).</a:t>
+                      </a:r>
+                    </a:p>
+                  </a:txBody>
+                  <a:tcPr>
+                    <a:solidFill>
+                      <a:srgbClr val="F8FAFC"/>
+                    </a:solidFill>
+                  </a:tcPr>
+                </a:tc>
+              </a:tr>
+              <a:tr h="386080">
+                <a:tc>
+                  <a:txBody>
+                    <a:bodyPr/>
+                    <a:lstStyle/>
+                    <a:p>
+                      <a:pPr>
+                        <a:defRPr sz="780" b="1">
+                          <a:solidFill>
+                            <a:srgbClr val="1B365D"/>
+                          </a:solidFill>
+                        </a:defRPr>
+                      </a:pPr>
+                      <a:r>
+                        <a:t>Petrolimex (PLX - Xăng dầu &amp; Năng lượng)</a:t>
+                      </a:r>
+                    </a:p>
+                  </a:txBody>
+                  <a:tcPr>
+                    <a:solidFill>
+                      <a:srgbClr val="FFFFFF"/>
+                    </a:solidFill>
+                  </a:tcPr>
+                </a:tc>
+                <a:tc>
+                  <a:txBody>
+                    <a:bodyPr/>
+                    <a:lstStyle/>
+                    <a:p>
+                      <a:pPr algn="ctr">
+                        <a:defRPr sz="780" b="0">
+                          <a:solidFill>
+                            <a:srgbClr val="212529"/>
+                          </a:solidFill>
+                        </a:defRPr>
+                      </a:pPr>
+                      <a:r>
+                        <a:t>42.14</a:t>
+                      </a:r>
+                    </a:p>
+                  </a:txBody>
+                  <a:tcPr>
+                    <a:solidFill>
+                      <a:srgbClr val="FFFFFF"/>
+                    </a:solidFill>
+                  </a:tcPr>
+                </a:tc>
+                <a:tc>
+                  <a:txBody>
+                    <a:bodyPr/>
+                    <a:lstStyle/>
+                    <a:p>
+                      <a:pPr algn="ctr">
+                        <a:defRPr sz="780" b="1">
+                          <a:solidFill>
+                            <a:srgbClr val="1B365D"/>
+                          </a:solidFill>
+                        </a:defRPr>
+                      </a:pPr>
+                      <a:r>
+                        <a:t>45.55</a:t>
+                      </a:r>
+                    </a:p>
+                  </a:txBody>
+                  <a:tcPr>
+                    <a:solidFill>
+                      <a:srgbClr val="FFFFFF"/>
+                    </a:solidFill>
+                  </a:tcPr>
+                </a:tc>
+                <a:tc>
+                  <a:txBody>
+                    <a:bodyPr/>
+                    <a:lstStyle/>
+                    <a:p>
+                      <a:pPr algn="ctr">
+                        <a:defRPr sz="780" b="0">
+                          <a:solidFill>
+                            <a:srgbClr val="D4AF37"/>
+                          </a:solidFill>
+                        </a:defRPr>
+                      </a:pPr>
+                      <a:r>
+                        <a:t>39.98</a:t>
+                      </a:r>
+                    </a:p>
+                  </a:txBody>
+                  <a:tcPr>
+                    <a:solidFill>
+                      <a:srgbClr val="FFFFFF"/>
+                    </a:solidFill>
+                  </a:tcPr>
+                </a:tc>
+                <a:tc>
+                  <a:txBody>
+                    <a:bodyPr/>
+                    <a:lstStyle/>
+                    <a:p>
+                      <a:pPr algn="ctr">
+                        <a:defRPr sz="780" b="0">
+                          <a:solidFill>
+                            <a:srgbClr val="212529"/>
+                          </a:solidFill>
+                        </a:defRPr>
+                      </a:pPr>
+                      <a:r>
+                        <a:t>44.42</a:t>
+                      </a:r>
+                    </a:p>
+                  </a:txBody>
+                  <a:tcPr>
+                    <a:solidFill>
+                      <a:srgbClr val="FFFFFF"/>
+                    </a:solidFill>
+                  </a:tcPr>
+                </a:tc>
+                <a:tc>
+                  <a:txBody>
+                    <a:bodyPr/>
+                    <a:lstStyle/>
+                    <a:p>
+                      <a:pPr algn="ctr">
+                        <a:defRPr sz="780" b="0">
+                          <a:solidFill>
+                            <a:srgbClr val="212529"/>
+                          </a:solidFill>
+                        </a:defRPr>
+                      </a:pPr>
+                      <a:r>
+                        <a:t>44.22</a:t>
+                      </a:r>
+                    </a:p>
+                  </a:txBody>
+                  <a:tcPr>
+                    <a:solidFill>
+                      <a:srgbClr val="FFFFFF"/>
+                    </a:solidFill>
+                  </a:tcPr>
+                </a:tc>
+                <a:tc>
+                  <a:txBody>
+                    <a:bodyPr/>
+                    <a:lstStyle/>
+                    <a:p>
+                      <a:pPr algn="ctr">
+                        <a:defRPr sz="780" b="0">
+                          <a:solidFill>
+                            <a:srgbClr val="212529"/>
+                          </a:solidFill>
+                        </a:defRPr>
+                      </a:pPr>
+                      <a:r>
+                        <a:t>43.72</a:t>
+                      </a:r>
+                    </a:p>
+                  </a:txBody>
+                  <a:tcPr>
+                    <a:solidFill>
+                      <a:srgbClr val="FFFFFF"/>
+                    </a:solidFill>
+                  </a:tcPr>
+                </a:tc>
+                <a:tc>
+                  <a:txBody>
+                    <a:bodyPr/>
+                    <a:lstStyle/>
+                    <a:p>
+                      <a:pPr>
+                        <a:defRPr sz="740" b="0">
+                          <a:solidFill>
+                            <a:srgbClr val="212529"/>
+                          </a:solidFill>
+                        </a:defRPr>
+                      </a:pPr>
+                      <a:r>
+                        <a:t>Hạ tầng xăng dầu Euro 5, kiểm kê phát thải ISO 14064.</a:t>
+                      </a:r>
+                    </a:p>
+                  </a:txBody>
+                  <a:tcPr>
+                    <a:solidFill>
+                      <a:srgbClr val="FFFFFF"/>
+                    </a:solidFill>
+                  </a:tcPr>
+                </a:tc>
+              </a:tr>
+              <a:tr h="386080">
+                <a:tc>
+                  <a:txBody>
+                    <a:bodyPr/>
+                    <a:lstStyle/>
+                    <a:p>
+                      <a:pPr>
+                        <a:defRPr sz="780" b="1">
+                          <a:solidFill>
+                            <a:srgbClr val="1B365D"/>
+                          </a:solidFill>
+                        </a:defRPr>
+                      </a:pPr>
+                      <a:r>
+                        <a:t>Chứng khoán SSI (SSI - Dịch vụ Tài chính)</a:t>
+                      </a:r>
+                    </a:p>
+                  </a:txBody>
+                  <a:tcPr>
+                    <a:solidFill>
+                      <a:srgbClr val="F8FAFC"/>
+                    </a:solidFill>
+                  </a:tcPr>
+                </a:tc>
+                <a:tc>
+                  <a:txBody>
+                    <a:bodyPr/>
+                    <a:lstStyle/>
+                    <a:p>
+                      <a:pPr algn="ctr">
+                        <a:defRPr sz="780" b="0">
+                          <a:solidFill>
+                            <a:srgbClr val="212529"/>
+                          </a:solidFill>
+                        </a:defRPr>
+                      </a:pPr>
+                      <a:r>
+                        <a:t>43.52</a:t>
+                      </a:r>
+                    </a:p>
+                  </a:txBody>
+                  <a:tcPr>
+                    <a:solidFill>
+                      <a:srgbClr val="F8FAFC"/>
+                    </a:solidFill>
+                  </a:tcPr>
+                </a:tc>
+                <a:tc>
+                  <a:txBody>
+                    <a:bodyPr/>
+                    <a:lstStyle/>
+                    <a:p>
+                      <a:pPr algn="ctr">
+                        <a:defRPr sz="780" b="1">
+                          <a:solidFill>
+                            <a:srgbClr val="1B365D"/>
+                          </a:solidFill>
+                        </a:defRPr>
+                      </a:pPr>
+                      <a:r>
+                        <a:t>47.20</a:t>
+                      </a:r>
+                    </a:p>
+                  </a:txBody>
+                  <a:tcPr>
+                    <a:solidFill>
+                      <a:srgbClr val="F8FAFC"/>
+                    </a:solidFill>
+                  </a:tcPr>
+                </a:tc>
+                <a:tc>
+                  <a:txBody>
+                    <a:bodyPr/>
+                    <a:lstStyle/>
+                    <a:p>
+                      <a:pPr algn="ctr">
+                        <a:defRPr sz="780" b="0">
+                          <a:solidFill>
+                            <a:srgbClr val="D4AF37"/>
+                          </a:solidFill>
+                        </a:defRPr>
+                      </a:pPr>
+                      <a:r>
+                        <a:t>41.99</a:t>
+                      </a:r>
+                    </a:p>
+                  </a:txBody>
+                  <a:tcPr>
+                    <a:solidFill>
+                      <a:srgbClr val="F8FAFC"/>
+                    </a:solidFill>
+                  </a:tcPr>
+                </a:tc>
+                <a:tc>
+                  <a:txBody>
+                    <a:bodyPr/>
+                    <a:lstStyle/>
+                    <a:p>
+                      <a:pPr algn="ctr">
+                        <a:defRPr sz="780" b="0">
+                          <a:solidFill>
+                            <a:srgbClr val="212529"/>
+                          </a:solidFill>
+                        </a:defRPr>
+                      </a:pPr>
+                      <a:r>
+                        <a:t>46.33</a:t>
+                      </a:r>
+                    </a:p>
+                  </a:txBody>
+                  <a:tcPr>
+                    <a:solidFill>
+                      <a:srgbClr val="F8FAFC"/>
+                    </a:solidFill>
+                  </a:tcPr>
+                </a:tc>
+                <a:tc>
+                  <a:txBody>
+                    <a:bodyPr/>
+                    <a:lstStyle/>
+                    <a:p>
+                      <a:pPr algn="ctr">
+                        <a:defRPr sz="780" b="0">
+                          <a:solidFill>
+                            <a:srgbClr val="212529"/>
+                          </a:solidFill>
+                        </a:defRPr>
+                      </a:pPr>
+                      <a:r>
+                        <a:t>44.10</a:t>
+                      </a:r>
+                    </a:p>
+                  </a:txBody>
+                  <a:tcPr>
+                    <a:solidFill>
+                      <a:srgbClr val="F8FAFC"/>
+                    </a:solidFill>
+                  </a:tcPr>
+                </a:tc>
+                <a:tc>
+                  <a:txBody>
+                    <a:bodyPr/>
+                    <a:lstStyle/>
+                    <a:p>
+                      <a:pPr algn="ctr">
+                        <a:defRPr sz="780" b="0">
+                          <a:solidFill>
+                            <a:srgbClr val="212529"/>
+                          </a:solidFill>
+                        </a:defRPr>
+                      </a:pPr>
+                      <a:r>
+                        <a:t>43.71</a:t>
+                      </a:r>
+                    </a:p>
+                  </a:txBody>
+                  <a:tcPr>
+                    <a:solidFill>
+                      <a:srgbClr val="F8FAFC"/>
+                    </a:solidFill>
+                  </a:tcPr>
+                </a:tc>
+                <a:tc>
+                  <a:txBody>
+                    <a:bodyPr/>
+                    <a:lstStyle/>
+                    <a:p>
+                      <a:pPr>
+                        <a:defRPr sz="740" b="0">
+                          <a:solidFill>
+                            <a:srgbClr val="212529"/>
+                          </a:solidFill>
+                        </a:defRPr>
+                      </a:pPr>
+                      <a:r>
+                        <a:t>Thu xếp vốn trái phiếu xanh, quản trị thẻ điểm ASEAN.</a:t>
+                      </a:r>
+                    </a:p>
+                  </a:txBody>
+                  <a:tcPr>
+                    <a:solidFill>
+                      <a:srgbClr val="F8FAFC"/>
+                    </a:solidFill>
+                  </a:tcPr>
+                </a:tc>
+              </a:tr>
+              <a:tr h="386080">
+                <a:tc>
+                  <a:txBody>
+                    <a:bodyPr/>
+                    <a:lstStyle/>
+                    <a:p>
+                      <a:pPr>
+                        <a:defRPr sz="780" b="1">
+                          <a:solidFill>
+                            <a:srgbClr val="1F77B4"/>
+                          </a:solidFill>
+                        </a:defRPr>
+                      </a:pPr>
+                      <a:r>
+                        <a:t>★ TOÀN MẪU VIỆT NAM (TRUNG BÌNH)</a:t>
+                      </a:r>
+                    </a:p>
+                  </a:txBody>
+                  <a:tcPr>
+                    <a:solidFill>
+                      <a:srgbClr val="EAF3FF"/>
+                    </a:solidFill>
+                  </a:tcPr>
+                </a:tc>
+                <a:tc>
+                  <a:txBody>
+                    <a:bodyPr/>
+                    <a:lstStyle/>
+                    <a:p>
+                      <a:pPr algn="ctr">
+                        <a:defRPr sz="780" b="1">
+                          <a:solidFill>
+                            <a:srgbClr val="1B365D"/>
+                          </a:solidFill>
+                        </a:defRPr>
+                      </a:pPr>
+                      <a:r>
+                        <a:t>44.26</a:t>
+                      </a:r>
+                    </a:p>
+                  </a:txBody>
+                  <a:tcPr>
+                    <a:solidFill>
+                      <a:srgbClr val="EAF3FF"/>
+                    </a:solidFill>
+                  </a:tcPr>
+                </a:tc>
+                <a:tc>
+                  <a:txBody>
+                    <a:bodyPr/>
+                    <a:lstStyle/>
+                    <a:p>
+                      <a:pPr algn="ctr">
+                        <a:defRPr sz="780" b="1">
+                          <a:solidFill>
+                            <a:srgbClr val="1B365D"/>
+                          </a:solidFill>
+                        </a:defRPr>
+                      </a:pPr>
+                      <a:r>
+                        <a:t>47.69</a:t>
+                      </a:r>
+                    </a:p>
+                  </a:txBody>
+                  <a:tcPr>
+                    <a:solidFill>
+                      <a:srgbClr val="EAF3FF"/>
+                    </a:solidFill>
+                  </a:tcPr>
+                </a:tc>
+                <a:tc>
+                  <a:txBody>
+                    <a:bodyPr/>
+                    <a:lstStyle/>
+                    <a:p>
+                      <a:pPr algn="ctr">
+                        <a:defRPr sz="780" b="1">
+                          <a:solidFill>
+                            <a:srgbClr val="1B365D"/>
+                          </a:solidFill>
+                        </a:defRPr>
+                      </a:pPr>
+                      <a:r>
+                        <a:t>42.08</a:t>
+                      </a:r>
+                    </a:p>
+                  </a:txBody>
+                  <a:tcPr>
+                    <a:solidFill>
+                      <a:srgbClr val="EAF3FF"/>
+                    </a:solidFill>
+                  </a:tcPr>
+                </a:tc>
+                <a:tc>
+                  <a:txBody>
+                    <a:bodyPr/>
+                    <a:lstStyle/>
+                    <a:p>
+                      <a:pPr algn="ctr">
+                        <a:defRPr sz="780" b="1">
+                          <a:solidFill>
+                            <a:srgbClr val="1B365D"/>
+                          </a:solidFill>
+                        </a:defRPr>
+                      </a:pPr>
+                      <a:r>
+                        <a:t>46.39</a:t>
+                      </a:r>
+                    </a:p>
+                  </a:txBody>
+                  <a:tcPr>
+                    <a:solidFill>
+                      <a:srgbClr val="EAF3FF"/>
+                    </a:solidFill>
+                  </a:tcPr>
+                </a:tc>
+                <a:tc>
+                  <a:txBody>
+                    <a:bodyPr/>
+                    <a:lstStyle/>
+                    <a:p>
+                      <a:pPr algn="ctr">
+                        <a:defRPr sz="780" b="1">
+                          <a:solidFill>
+                            <a:srgbClr val="1B365D"/>
+                          </a:solidFill>
+                        </a:defRPr>
+                      </a:pPr>
+                      <a:r>
+                        <a:t>45.63</a:t>
+                      </a:r>
+                    </a:p>
+                  </a:txBody>
+                  <a:tcPr>
+                    <a:solidFill>
+                      <a:srgbClr val="EAF3FF"/>
+                    </a:solidFill>
+                  </a:tcPr>
+                </a:tc>
+                <a:tc>
+                  <a:txBody>
+                    <a:bodyPr/>
+                    <a:lstStyle/>
+                    <a:p>
+                      <a:pPr algn="ctr">
+                        <a:defRPr sz="780" b="1">
+                          <a:solidFill>
+                            <a:srgbClr val="1B365D"/>
+                          </a:solidFill>
+                        </a:defRPr>
+                      </a:pPr>
+                      <a:r>
+                        <a:t>44.98</a:t>
+                      </a:r>
+                    </a:p>
+                  </a:txBody>
+                  <a:tcPr>
+                    <a:solidFill>
+                      <a:srgbClr val="EAF3FF"/>
+                    </a:solidFill>
+                  </a:tcPr>
+                </a:tc>
+                <a:tc>
+                  <a:txBody>
+                    <a:bodyPr/>
+                    <a:lstStyle/>
+                    <a:p>
+                      <a:pPr>
+                        <a:defRPr sz="740" b="1">
+                          <a:solidFill>
+                            <a:srgbClr val="1B365D"/>
+                          </a:solidFill>
+                        </a:defRPr>
+                      </a:pPr>
+                      <a:r>
+                        <a:t>Quy luật toàn diện: Economic cao nhất, Equity thấp nhất.</a:t>
+                      </a:r>
+                    </a:p>
+                  </a:txBody>
+                  <a:tcPr>
+                    <a:solidFill>
+                      <a:srgbClr val="EAF3FF"/>
+                    </a:solidFill>
+                  </a:tcPr>
+                </a:tc>
+              </a:tr>
+            </a:tbl>
+          </a:graphicData>
+        </a:graphic>
+      </p:graphicFrame>
       <p:sp>
         <p:nvSpPr>
           <p:cNvPr id="10" name="Rounded Rectangle 9"/>
@@ -20359,8 +21301,8 @@
         </p:nvSpPr>
         <p:spPr>
           <a:xfrm>
-            <a:off x="7269480" y="1234440"/>
-            <a:ext cx="4206240" cy="1143000"/>
+            <a:off x="731520" y="4846320"/>
+            <a:ext cx="3429000" cy="1508760"/>
           </a:xfrm>
           <a:prstGeom prst="roundRect">
             <a:avLst/>
@@ -20404,8 +21346,8 @@
         </p:nvSpPr>
         <p:spPr>
           <a:xfrm>
-            <a:off x="7406640" y="1289304"/>
-            <a:ext cx="3931920" cy="1033271"/>
+            <a:off x="841248" y="4901184"/>
+            <a:ext cx="3209544" cy="1371600"/>
           </a:xfrm>
           <a:prstGeom prst="rect">
             <a:avLst/>
@@ -20419,24 +21361,43 @@
           <a:lstStyle/>
           <a:p>
             <a:r>
-              <a:rPr sz="950" b="1">
+              <a:rPr sz="880" b="1">
                 <a:solidFill>
                   <a:srgbClr val="1B365D"/>
                 </a:solidFill>
               </a:rPr>
-              <a:t>VICOSTONE (VCS) — ĐỈNH SDG 9 &amp; 12
+              <a:t>1. QUY LUẬT 'ECONOMIC ĐỈNH - EQUITY ĐÁY'
 </a:t>
             </a:r>
           </a:p>
           <a:p>
-            <a:r>
-              <a:rPr sz="850">
+            <a:pPr>
+              <a:spcAft>
+                <a:spcPts val="200"/>
+              </a:spcAft>
+            </a:pPr>
+            <a:r>
+              <a:rPr sz="760">
                 <a:solidFill>
                   <a:srgbClr val="212529"/>
                 </a:solidFill>
               </a:rPr>
-              <a:t>• SDG 9 (52,96đ) &amp; SDG 12 (53,18đ) cao nhất toàn khối.
-• Lý do: Công nghệ rung ép Breton, tự chủ &gt;95% nguyên liệu, tuần hoàn 100% bùn đá.</a:t>
+              <a:t>• Nhóm Economic (47,69đ) luôn cao nhất ở 100% doanh nghiệp (đỉnh tại VCS 50,71đ và BVH 49,36đ) vì việc làm và tăng trưởng là lẽ sống còn.</a:t>
+            </a:r>
+          </a:p>
+          <a:p>
+            <a:pPr>
+              <a:spcAft>
+                <a:spcPts val="200"/>
+              </a:spcAft>
+            </a:pPr>
+            <a:r>
+              <a:rPr sz="760">
+                <a:solidFill>
+                  <a:srgbClr val="212529"/>
+                </a:solidFill>
+              </a:rPr>
+              <a:t>• Nhóm Equity (42,08đ) luôn thấp nhất toàn mẫu do doanh nghiệp né tránh công bố chênh lệch thu nhập và bình đẳng giới.</a:t>
             </a:r>
           </a:p>
         </p:txBody>
@@ -20449,8 +21410,8 @@
         </p:nvSpPr>
         <p:spPr>
           <a:xfrm>
-            <a:off x="7269480" y="2496312"/>
-            <a:ext cx="4206240" cy="1143000"/>
+            <a:off x="4379976" y="4846320"/>
+            <a:ext cx="3429000" cy="1508760"/>
           </a:xfrm>
           <a:prstGeom prst="roundRect">
             <a:avLst/>
@@ -20494,8 +21455,8 @@
         </p:nvSpPr>
         <p:spPr>
           <a:xfrm>
-            <a:off x="7406640" y="2551176"/>
-            <a:ext cx="3931920" cy="1033271"/>
+            <a:off x="4489704" y="4901184"/>
+            <a:ext cx="3209544" cy="1371600"/>
           </a:xfrm>
           <a:prstGeom prst="rect">
             <a:avLst/>
@@ -20509,24 +21470,43 @@
           <a:lstStyle/>
           <a:p>
             <a:r>
-              <a:rPr sz="950" b="1">
+              <a:rPr sz="880" b="1">
                 <a:solidFill>
                   <a:srgbClr val="288C3C"/>
                 </a:solidFill>
               </a:rPr>
-              <a:t>VINAMILK (VNM) — BỨT PHÁ SDG 13
+              <a:t>2. PHÂN HÓA RÕ NÉT THEO THỊ TRƯỜNG &amp; SỞ HỮU
 </a:t>
             </a:r>
           </a:p>
           <a:p>
-            <a:r>
-              <a:rPr sz="850">
+            <a:pPr>
+              <a:spcAft>
+                <a:spcPts val="200"/>
+              </a:spcAft>
+            </a:pPr>
+            <a:r>
+              <a:rPr sz="760">
                 <a:solidFill>
                   <a:srgbClr val="212529"/>
                 </a:solidFill>
               </a:rPr>
-              <a:t>• SDG 13 (45,36đ) &amp; Nhóm Môi trường tăng mạnh (+6,06đ).
-• Lý do: Lộ trình Net Zero 2050, 3 đơn vị PAS 2060, nông nghiệp tái sinh Green Farm.</a:t>
+              <a:t>• Khối Tư nhân &amp; Xuất khẩu (VCS, VNM, PNJ): Điểm Resources &amp; Environments vượt trội nhằm vượt rào cản xanh khắt khe của Âu - Mỹ (CBAM, Declare).</a:t>
+            </a:r>
+          </a:p>
+          <a:p>
+            <a:pPr>
+              <a:spcAft>
+                <a:spcPts val="200"/>
+              </a:spcAft>
+            </a:pPr>
+            <a:r>
+              <a:rPr sz="760">
+                <a:solidFill>
+                  <a:srgbClr val="212529"/>
+                </a:solidFill>
+              </a:rPr>
+              <a:t>• Khối Nhà nước &amp; Tài chính (PLX, BVH): Tập trung Social &amp; Economic nhằm phục vụ mục tiêu vĩ mô và bộ chỉ số VNSI của HOSE.</a:t>
             </a:r>
           </a:p>
         </p:txBody>
@@ -20539,8 +21519,8 @@
         </p:nvSpPr>
         <p:spPr>
           <a:xfrm>
-            <a:off x="7269480" y="3758183"/>
-            <a:ext cx="4206240" cy="1143000"/>
+            <a:off x="8028432" y="4846320"/>
+            <a:ext cx="3429000" cy="1508760"/>
           </a:xfrm>
           <a:prstGeom prst="roundRect">
             <a:avLst/>
@@ -20584,8 +21564,8 @@
         </p:nvSpPr>
         <p:spPr>
           <a:xfrm>
-            <a:off x="7406640" y="3813047"/>
-            <a:ext cx="3931920" cy="1033271"/>
+            <a:off x="8138160" y="4901184"/>
+            <a:ext cx="3209544" cy="1371600"/>
           </a:xfrm>
           <a:prstGeom prst="rect">
             <a:avLst/>
@@ -20599,114 +21579,58 @@
           <a:lstStyle/>
           <a:p>
             <a:r>
-              <a:rPr sz="950" b="1">
+              <a:rPr sz="880" b="1">
                 <a:solidFill>
                   <a:srgbClr val="D4AF37"/>
                 </a:solidFill>
               </a:rPr>
-              <a:t>PAN GROUP (PAN) — TRỤ CỘT SDG 2
+              <a:t>3. ĐỘNG LỰC CÁ BIỆT ĐỘT PHÁ CỦA TỪNG DOANH NGHIỆP
 </a:t>
             </a:r>
           </a:p>
           <a:p>
-            <a:r>
-              <a:rPr sz="850">
+            <a:pPr>
+              <a:spcAft>
+                <a:spcPts val="200"/>
+              </a:spcAft>
+            </a:pPr>
+            <a:r>
+              <a:rPr sz="760">
                 <a:solidFill>
                   <a:srgbClr val="212529"/>
                 </a:solidFill>
               </a:rPr>
-              <a:t>• SDG 2 (47,47đ) &amp; SDG 12 (49,01đ) dẫn đầu mẫu.
-• Lý do: Chuỗi nông nghiệp khép kín từ giống cây trồng (Vinaseed) đến tôm sạch (Fimex).</a:t>
-            </a:r>
-          </a:p>
-        </p:txBody>
-      </p:sp>
-      <p:sp>
-        <p:nvSpPr>
-          <p:cNvPr id="16" name="Rounded Rectangle 15"/>
-          <p:cNvSpPr/>
-          <p:nvPr/>
-        </p:nvSpPr>
-        <p:spPr>
-          <a:xfrm>
-            <a:off x="7269480" y="5020056"/>
-            <a:ext cx="4206240" cy="1143000"/>
-          </a:xfrm>
-          <a:prstGeom prst="roundRect">
-            <a:avLst/>
-          </a:prstGeom>
-          <a:solidFill>
-            <a:srgbClr val="FFFFFF"/>
-          </a:solidFill>
-          <a:ln w="12700">
-            <a:solidFill>
-              <a:srgbClr val="D62728"/>
-            </a:solidFill>
-          </a:ln>
-        </p:spPr>
-        <p:style>
-          <a:lnRef idx="1">
-            <a:schemeClr val="accent1"/>
-          </a:lnRef>
-          <a:fillRef idx="3">
-            <a:schemeClr val="accent1"/>
-          </a:fillRef>
-          <a:effectRef idx="2">
-            <a:schemeClr val="accent1"/>
-          </a:effectRef>
-          <a:fontRef idx="minor">
-            <a:schemeClr val="lt1"/>
-          </a:fontRef>
-        </p:style>
-        <p:txBody>
-          <a:bodyPr rtlCol="0" anchor="ctr"/>
-          <a:lstStyle/>
-          <a:p>
-            <a:pPr algn="ctr"/>
-          </a:p>
-        </p:txBody>
-      </p:sp>
-      <p:sp>
-        <p:nvSpPr>
-          <p:cNvPr id="17" name="TextBox 16"/>
-          <p:cNvSpPr txBox="1"/>
-          <p:nvPr/>
-        </p:nvSpPr>
-        <p:spPr>
-          <a:xfrm>
-            <a:off x="7406640" y="5074920"/>
-            <a:ext cx="3931920" cy="1033271"/>
-          </a:xfrm>
-          <a:prstGeom prst="rect">
-            <a:avLst/>
-          </a:prstGeom>
-          <a:noFill/>
-        </p:spPr>
-        <p:txBody>
-          <a:bodyPr wrap="square">
-            <a:spAutoFit/>
-          </a:bodyPr>
-          <a:lstStyle/>
-          <a:p>
-            <a:r>
-              <a:rPr sz="950" b="1">
-                <a:solidFill>
-                  <a:srgbClr val="D62728"/>
+              <a:t>• VCS dẫn đầu toàn diện (TB 47,68đ) nhờ công nghệ Breton và tuần hoàn bùn thải.</a:t>
+            </a:r>
+          </a:p>
+          <a:p>
+            <a:pPr>
+              <a:spcAft>
+                <a:spcPts val="200"/>
+              </a:spcAft>
+            </a:pPr>
+            <a:r>
+              <a:rPr sz="760">
+                <a:solidFill>
+                  <a:srgbClr val="212529"/>
                 </a:solidFill>
               </a:rPr>
-              <a:t>PETROLIMEX (PLX) — CHUYỂN ĐỔI SDG 7
-</a:t>
-            </a:r>
-          </a:p>
-          <a:p>
-            <a:r>
-              <a:rPr sz="850">
+              <a:t>• PNJ dẫn đầu nhóm Equity (43,18đ) nhờ &gt;60% nhân sự nữ và văn hóa tôn vinh phụ nữ.</a:t>
+            </a:r>
+          </a:p>
+          <a:p>
+            <a:pPr>
+              <a:spcAft>
+                <a:spcPts val="200"/>
+              </a:spcAft>
+            </a:pPr>
+            <a:r>
+              <a:rPr sz="760">
                 <a:solidFill>
                   <a:srgbClr val="212529"/>
                 </a:solidFill>
               </a:rPr>
-              <a:t>• Trọng tâm SDG 7 Năng lượng (48,04đ) và SDG 13 (46,19đ).
-• Lý do: Nhiên liệu Euro 5, điện mặt trời cây xăng, kiểm kê khí nhà kính ISO 14064-1.</a:t>
+              <a:t>• BVH dẫn đầu Social (48,13đ) nhờ áp dụng Báo cáo Tích hợp IIRC sớm nhất Việt Nam.</a:t>
             </a:r>
           </a:p>
         </p:txBody>
@@ -20907,7 +21831,7 @@
                 </a:solidFill>
                 <a:latin typeface="Segoe UI"/>
               </a:rPr>
-              <a:t>ĐẶC THÙ NGÀNH DOANH NGHIỆP</a:t>
+              <a:t>KẾT QUẢ THỰC NGHIỆM</a:t>
             </a:r>
           </a:p>
         </p:txBody>
@@ -20941,7 +21865,7 @@
                 </a:solidFill>
                 <a:latin typeface="Segoe UI"/>
               </a:rPr>
-              <a:t>ĐẶC THÙ NGÀNH: KHỐI TÀI CHÍNH &amp; BÁN LẺ (PNJ, BVH, SSI)</a:t>
+              <a:t>KẾT QUẢ 4: XU HƯỚNG DỊCH CHUYỂN CHUỖI THỜI GIAN (2020–2025)</a:t>
             </a:r>
           </a:p>
         </p:txBody>
@@ -20976,7 +21900,7 @@
                 </a:solidFill>
                 <a:latin typeface="Segoe UI"/>
               </a:rPr>
-              <a:t>09 / 18</a:t>
+              <a:t>09 / 17</a:t>
             </a:r>
           </a:p>
         </p:txBody>
@@ -21017,7 +21941,7 @@
       </p:sp>
       <p:pic>
         <p:nvPicPr>
-          <p:cNvPr id="9" name="Picture 8" descr="slide_finance_sdgs.png"/>
+          <p:cNvPr id="9" name="Picture 8" descr="slide_trends_grid.png"/>
           <p:cNvPicPr>
             <a:picLocks noChangeAspect="1"/>
           </p:cNvPicPr>
@@ -21031,8 +21955,8 @@
         </p:blipFill>
         <p:spPr>
           <a:xfrm>
-            <a:off x="731520" y="1234440"/>
-            <a:ext cx="6217920" cy="4800600"/>
+            <a:off x="731520" y="1188720"/>
+            <a:ext cx="10728655" cy="3474720"/>
           </a:xfrm>
           <a:prstGeom prst="rect">
             <a:avLst/>
@@ -21047,98 +21971,8 @@
         </p:nvSpPr>
         <p:spPr>
           <a:xfrm>
-            <a:off x="7269480" y="1234440"/>
-            <a:ext cx="4206240" cy="1508760"/>
-          </a:xfrm>
-          <a:prstGeom prst="roundRect">
-            <a:avLst/>
-          </a:prstGeom>
-          <a:solidFill>
-            <a:srgbClr val="FFFFFF"/>
-          </a:solidFill>
-          <a:ln w="12700">
-            <a:solidFill>
-              <a:srgbClr val="7030A0"/>
-            </a:solidFill>
-          </a:ln>
-        </p:spPr>
-        <p:style>
-          <a:lnRef idx="1">
-            <a:schemeClr val="accent1"/>
-          </a:lnRef>
-          <a:fillRef idx="3">
-            <a:schemeClr val="accent1"/>
-          </a:fillRef>
-          <a:effectRef idx="2">
-            <a:schemeClr val="accent1"/>
-          </a:effectRef>
-          <a:fontRef idx="minor">
-            <a:schemeClr val="lt1"/>
-          </a:fontRef>
-        </p:style>
-        <p:txBody>
-          <a:bodyPr rtlCol="0" anchor="ctr"/>
-          <a:lstStyle/>
-          <a:p>
-            <a:pPr algn="ctr"/>
-          </a:p>
-        </p:txBody>
-      </p:sp>
-      <p:sp>
-        <p:nvSpPr>
-          <p:cNvPr id="11" name="TextBox 10"/>
-          <p:cNvSpPr txBox="1"/>
-          <p:nvPr/>
-        </p:nvSpPr>
-        <p:spPr>
-          <a:xfrm>
-            <a:off x="7406640" y="1307592"/>
-            <a:ext cx="3931920" cy="1353312"/>
-          </a:xfrm>
-          <a:prstGeom prst="rect">
-            <a:avLst/>
-          </a:prstGeom>
-          <a:noFill/>
-        </p:spPr>
-        <p:txBody>
-          <a:bodyPr wrap="square">
-            <a:spAutoFit/>
-          </a:bodyPr>
-          <a:lstStyle/>
-          <a:p>
-            <a:r>
-              <a:rPr sz="950" b="1">
-                <a:solidFill>
-                  <a:srgbClr val="7030A0"/>
-                </a:solidFill>
-              </a:rPr>
-              <a:t>PNJ — ĐIỂM SÁNG SDG 5 BÌNH ĐẲNG GIỚI (40,70đ)
-</a:t>
-            </a:r>
-          </a:p>
-          <a:p>
-            <a:r>
-              <a:rPr sz="860">
-                <a:solidFill>
-                  <a:srgbClr val="212529"/>
-                </a:solidFill>
-              </a:rPr>
-              <a:t>• Dẫn đầu tuyệt đối toàn bộ 7 doanh nghiệp ở SDG 5 Bình đẳng giới.
-• Lý do: Lao động nữ chiếm &gt;60%, tỷ lệ lãnh đạo nữ vượt trội, tôn chỉ kinh doanh tôn vinh phụ nữ và chiến lược hòa nhập DE&amp;I.</a:t>
-            </a:r>
-          </a:p>
-        </p:txBody>
-      </p:sp>
-      <p:sp>
-        <p:nvSpPr>
-          <p:cNvPr id="12" name="Rounded Rectangle 11"/>
-          <p:cNvSpPr/>
-          <p:nvPr/>
-        </p:nvSpPr>
-        <p:spPr>
-          <a:xfrm>
-            <a:off x="7269480" y="2926080"/>
-            <a:ext cx="4206240" cy="1508760"/>
+            <a:off x="731520" y="4892040"/>
+            <a:ext cx="3429000" cy="1325880"/>
           </a:xfrm>
           <a:prstGeom prst="roundRect">
             <a:avLst/>
@@ -21176,14 +22010,14 @@
       </p:sp>
       <p:sp>
         <p:nvSpPr>
-          <p:cNvPr id="13" name="TextBox 12"/>
+          <p:cNvPr id="11" name="TextBox 10"/>
           <p:cNvSpPr txBox="1"/>
           <p:nvPr/>
         </p:nvSpPr>
         <p:spPr>
           <a:xfrm>
-            <a:off x="7406640" y="2999232"/>
-            <a:ext cx="3931920" cy="1353312"/>
+            <a:off x="868680" y="4956048"/>
+            <a:ext cx="3154680" cy="1188720"/>
           </a:xfrm>
           <a:prstGeom prst="rect">
             <a:avLst/>
@@ -21202,33 +22036,30 @@
                   <a:srgbClr val="1B365D"/>
                 </a:solidFill>
               </a:rPr>
-              <a:t>BẢO VIỆT (BVH) — DẪN ĐẦU SDG 17 HỢP TÁC (53,32đ)
+              <a:t>GIAI ĐOẠN 2020–2021: ỨNG PHÓ COVID
 </a:t>
             </a:r>
-          </a:p>
-          <a:p>
-            <a:r>
-              <a:rPr sz="860">
+            <a:r>
+              <a:rPr sz="850">
                 <a:solidFill>
                   <a:srgbClr val="212529"/>
                 </a:solidFill>
               </a:rPr>
-              <a:t>• Dẫn đầu toàn mẫu ở SDG 17 Đối tác phát triển &amp; SDG 8 Tăng trưởng.
-• Lý do: Tiên phong áp dụng Khung Báo cáo Tích hợp Quốc tế &lt;IIRC&gt; từ 2015, triển khai bảo hiểm vi mô bảo vệ nông dân trước thiên tai.</a:t>
-            </a:r>
-          </a:p>
-        </p:txBody>
-      </p:sp>
-      <p:sp>
-        <p:nvSpPr>
-          <p:cNvPr id="14" name="Rounded Rectangle 13"/>
+              <a:t>Điểm số phân hóa mạnh, nhóm Life &amp; Social tăng đột biến nhằm đảm bảo an toàn lao động và lương thưởng mùa dịch.</a:t>
+            </a:r>
+          </a:p>
+        </p:txBody>
+      </p:sp>
+      <p:sp>
+        <p:nvSpPr>
+          <p:cNvPr id="12" name="Rounded Rectangle 11"/>
           <p:cNvSpPr/>
           <p:nvPr/>
         </p:nvSpPr>
         <p:spPr>
           <a:xfrm>
-            <a:off x="7269480" y="4617720"/>
-            <a:ext cx="4206240" cy="1508760"/>
+            <a:off x="4379976" y="4892040"/>
+            <a:ext cx="3429000" cy="1325880"/>
           </a:xfrm>
           <a:prstGeom prst="roundRect">
             <a:avLst/>
@@ -21266,14 +22097,14 @@
       </p:sp>
       <p:sp>
         <p:nvSpPr>
-          <p:cNvPr id="15" name="TextBox 14"/>
+          <p:cNvPr id="13" name="TextBox 12"/>
           <p:cNvSpPr txBox="1"/>
           <p:nvPr/>
         </p:nvSpPr>
         <p:spPr>
           <a:xfrm>
-            <a:off x="7406640" y="4690872"/>
-            <a:ext cx="3931920" cy="1353312"/>
+            <a:off x="4517136" y="4956048"/>
+            <a:ext cx="3154680" cy="1188720"/>
           </a:xfrm>
           <a:prstGeom prst="rect">
             <a:avLst/>
@@ -21292,19 +22123,103 @@
                   <a:srgbClr val="1F77B4"/>
                 </a:solidFill>
               </a:rPr>
-              <a:t>CHỨNG KHOÁN SSI (SSI) — TÀI CHÍNH XANH SDG 8 &amp; 9
+              <a:t>MỐC 2022: TÁI CƠ CẤU THEO THÔNG TƯ 96
 </a:t>
             </a:r>
-          </a:p>
-          <a:p>
-            <a:r>
-              <a:rPr sz="860">
+            <a:r>
+              <a:rPr sz="850">
                 <a:solidFill>
                   <a:srgbClr val="212529"/>
                 </a:solidFill>
               </a:rPr>
-              <a:t>• Đạt đỉnh ở SDG 8 Việc làm (50,91đ) &amp; SDG 9 Đổi mới hạ tầng (48,93đ).
-• Lý do: Thu xếp các gói vốn trái phiếu xanh quốc tế (IFC), số hóa 100% giao dịch iBoard và tài trợ giáo dục tài chính.</a:t>
+              <a:t>Số lượng báo cáo tăng vọt; điểm số 6 nhóm bắt đầu hội tụ theo cấu trúc tiêu chuẩn báo cáo bền vững GRI.</a:t>
+            </a:r>
+          </a:p>
+        </p:txBody>
+      </p:sp>
+      <p:sp>
+        <p:nvSpPr>
+          <p:cNvPr id="14" name="Rounded Rectangle 13"/>
+          <p:cNvSpPr/>
+          <p:nvPr/>
+        </p:nvSpPr>
+        <p:spPr>
+          <a:xfrm>
+            <a:off x="8028432" y="4892040"/>
+            <a:ext cx="3429000" cy="1325880"/>
+          </a:xfrm>
+          <a:prstGeom prst="roundRect">
+            <a:avLst/>
+          </a:prstGeom>
+          <a:solidFill>
+            <a:srgbClr val="FFFFFF"/>
+          </a:solidFill>
+          <a:ln w="12700">
+            <a:solidFill>
+              <a:srgbClr val="288C3C"/>
+            </a:solidFill>
+          </a:ln>
+        </p:spPr>
+        <p:style>
+          <a:lnRef idx="1">
+            <a:schemeClr val="accent1"/>
+          </a:lnRef>
+          <a:fillRef idx="3">
+            <a:schemeClr val="accent1"/>
+          </a:fillRef>
+          <a:effectRef idx="2">
+            <a:schemeClr val="accent1"/>
+          </a:effectRef>
+          <a:fontRef idx="minor">
+            <a:schemeClr val="lt1"/>
+          </a:fontRef>
+        </p:style>
+        <p:txBody>
+          <a:bodyPr rtlCol="0" anchor="ctr"/>
+          <a:lstStyle/>
+          <a:p>
+            <a:pPr algn="ctr"/>
+          </a:p>
+        </p:txBody>
+      </p:sp>
+      <p:sp>
+        <p:nvSpPr>
+          <p:cNvPr id="15" name="TextBox 14"/>
+          <p:cNvSpPr txBox="1"/>
+          <p:nvPr/>
+        </p:nvSpPr>
+        <p:spPr>
+          <a:xfrm>
+            <a:off x="8165592" y="4956048"/>
+            <a:ext cx="3154680" cy="1188720"/>
+          </a:xfrm>
+          <a:prstGeom prst="rect">
+            <a:avLst/>
+          </a:prstGeom>
+          <a:noFill/>
+        </p:spPr>
+        <p:txBody>
+          <a:bodyPr wrap="square">
+            <a:spAutoFit/>
+          </a:bodyPr>
+          <a:lstStyle/>
+          <a:p>
+            <a:r>
+              <a:rPr sz="950" b="1">
+                <a:solidFill>
+                  <a:srgbClr val="288C3C"/>
+                </a:solidFill>
+              </a:rPr>
+              <a:t>GIAI ĐOẠN 2024–2025: BÙNG NỔ NET ZERO
+</a:t>
+            </a:r>
+            <a:r>
+              <a:rPr sz="850">
+                <a:solidFill>
+                  <a:srgbClr val="212529"/>
+                </a:solidFill>
+              </a:rPr>
+              <a:t>Cả 7 tập đoàn đều đạt điểm số cao nhất lịch sử; nhóm Môi trường (+6,06đ) và Tài nguyên (+5,42đ) tăng tốc vượt bậc.</a:t>
             </a:r>
           </a:p>
         </p:txBody>

--- a/bao_cao_nghien_cuu_sdg_vietnam.pptx
+++ b/bao_cao_nghien_cuu_sdg_vietnam.pptx
@@ -3150,7 +3150,7 @@
               </a:defRPr>
             </a:pPr>
             <a:r>
-              <a:t>Tổng hợp đối chiếu cả 7 doanh nghiệp trên cùng 1 bảng 6 nhóm chủ đề SDG, làm bật quy luật thị trường và phân hóa đặc thù ngành.</a:t>
+              <a:t>Chỉ vào biểu đồ cột Bar Chart đối chuẩn 7 doanh nghiệp qua 6 nhóm chủ đề SDG, làm bật quy luật thị trường và phân hóa đặc thù ngành.</a:t>
             </a:r>
           </a:p>
           <a:p/>
@@ -3177,7 +3177,7 @@
               </a:defRPr>
             </a:pPr>
             <a:r>
-              <a:t>Kính thưa Hội đồng, bảng tổng hợp trên slide là bức tranh toàn cảnh so sánh đồng thời 7 doanh nghiệp qua 6 nhóm chủ đề SDG theo phân loại quốc tế của Kang &amp; Kim (2022). Kết quả định lượng chỉ ra 3 quy luật thực nghiệm: Thứ nhất, quy luật 'Economic cao nhất - Equity thấp nhất' mang tính phổ quát ở tất cả các doanh nghiệp; thứ hai là sự phân hóa rõ nét giữa nhóm xuất khẩu tư nhân (chú trọng Tài nguyên &amp; Môi trường để vượt rào cản CBAM) và nhóm tài chính/nhà nước (chú trọng Xã hội &amp; Thể chế); thứ ba là từng doanh nghiệp đều có điểm bứt phá tương ứng với mô hình kinh doanh, như VCS dẫn đầu nhờ đá thạch anh, PNJ dẫn đầu Bình đẳng giới và Bảo Việt dẫn đầu Xã hội.</a:t>
+              <a:t>Kính thưa Hội đồng, biểu đồ cột trên slide trực quan hóa mức độ gắn kết của 7 doanh nghiệp với 6 nhóm chủ đề SDG. Kết quả định lượng chỉ ra 3 phát hiện lớn: Thứ nhất, quy luật 'Economic cao nhất - Equity thấp nhất' thể hiện trực quan qua việc thanh màu xanh dương luôn cao nhất và thanh màu tím luôn thấp nhất ở toàn bộ các doanh nghiệp; thứ hai là sự phân hóa rõ nét giữa nhóm xuất khẩu tư nhân (chú trọng Tài nguyên &amp; Môi trường để vượt rào cản CBAM) và nhóm tài chính/nhà nước (chú trọng Xã hội &amp; Thể chế); thứ ba là từng doanh nghiệp đều có điểm bứt phá tương ứng với mô hình kinh doanh, như VCS dẫn đầu nhờ đá thạch anh, PNJ dẫn đầu Bình đẳng giới và Bảo Việt dẫn đầu Xã hội.</a:t>
             </a:r>
           </a:p>
           <a:p/>
@@ -3204,7 +3204,7 @@
               </a:defRPr>
             </a:pPr>
             <a:r>
-              <a:t>Toàn mẫu: Economic (47,69đ) &gt; Social (46,39đ) &gt; Resources (45,63đ) &gt; Environs (44,98đ) &gt; Life (44,26đ) &gt; Equity (42,08đ); Phân hóa sản xuất vs tài chính.</a:t>
+              <a:t>Toàn mẫu: Economic (47,69đ) &gt; Social (46,39đ) &gt; Resources (45,63đ) &gt; Environs (44,98đ) &gt; Life (44,26đ) &gt; Equity (42,08đ); Thanh màu trực quan phân hóa theo ngành.</a:t>
             </a:r>
           </a:p>
           <a:p/>
@@ -3231,7 +3231,7 @@
               </a:defRPr>
             </a:pPr>
             <a:r>
-              <a:t>Tại sao lại gom 17 SDG thành 6 nhóm: Vì 17 SDG có sự giao thoa, gom thành 6 nhóm theo lý thuyết Max-Neef giúp phát hiện xu hướng chiến lược vĩ mô rõ ràng hơn.</a:t>
+              <a:t>Tại sao lại dùng biểu đồ cột thay cho bảng số liệu: Biểu đồ cột trực quan hóa tức thì sự chênh lệch giữa các nhóm chủ đề, giúp hội đồng thấy ngay cột Economic luôn vọt lên cao nhất và cột Equity luôn tụt sâu nhất ở 100% doanh nghiệp.</a:t>
             </a:r>
           </a:p>
           <a:p/>
@@ -19489,7 +19489,7 @@
                 </a:solidFill>
                 <a:latin typeface="Segoe UI"/>
               </a:rPr>
-              <a:t>KẾT QUẢ 3: BẢNG SO SÁNH ĐẶC THÙ 7 DOANH NGHIỆP THEO 6 NHÓM SDG</a:t>
+              <a:t>KẾT QUẢ 3: ĐẶC THÙ 7 DOANH NGHIỆP THEO 6 NHÓM CHỦ ĐỀ SDG</a:t>
             </a:r>
           </a:p>
         </p:txBody>
@@ -19563,1736 +19563,30 @@
           </a:p>
         </p:txBody>
       </p:sp>
-      <p:graphicFrame>
-        <p:nvGraphicFramePr>
-          <p:cNvPr id="9" name="Table 8"/>
-          <p:cNvGraphicFramePr>
-            <a:graphicFrameLocks noGrp="1"/>
-          </p:cNvGraphicFramePr>
-          <p:nvPr/>
-        </p:nvGraphicFramePr>
-        <p:xfrm>
-          <a:off x="731520" y="1188720"/>
-          <a:ext cx="10728655" cy="3474720"/>
-        </p:xfrm>
-        <a:graphic>
-          <a:graphicData uri="http://schemas.openxmlformats.org/drawingml/2006/table">
-            <a:tbl>
-              <a:tblPr firstRow="1" bandRow="1">
-                <a:tableStyleId>{5C22544A-7EE6-4342-B048-85BDC9FD1C3A}</a:tableStyleId>
-              </a:tblPr>
-              <a:tblGrid>
-                <a:gridCol w="2041855"/>
-                <a:gridCol w="1051560"/>
-                <a:gridCol w="1143000"/>
-                <a:gridCol w="1051560"/>
-                <a:gridCol w="1051560"/>
-                <a:gridCol w="1143000"/>
-                <a:gridCol w="1051560"/>
-                <a:gridCol w="2194560"/>
-              </a:tblGrid>
-              <a:tr h="386080">
-                <a:tc>
-                  <a:txBody>
-                    <a:bodyPr/>
-                    <a:lstStyle/>
-                    <a:p>
-                      <a:pPr algn="ctr">
-                        <a:defRPr b="1" sz="819">
-                          <a:solidFill>
-                            <a:srgbClr val="FFFFFF"/>
-                          </a:solidFill>
-                        </a:defRPr>
-                      </a:pPr>
-                      <a:r>
-                        <a:t>DOANH NGHIỆP (NGÀNH)</a:t>
-                      </a:r>
-                    </a:p>
-                  </a:txBody>
-                  <a:tcPr>
-                    <a:solidFill>
-                      <a:srgbClr val="1B365D"/>
-                    </a:solidFill>
-                  </a:tcPr>
-                </a:tc>
-                <a:tc>
-                  <a:txBody>
-                    <a:bodyPr/>
-                    <a:lstStyle/>
-                    <a:p>
-                      <a:pPr algn="ctr">
-                        <a:defRPr b="1" sz="819">
-                          <a:solidFill>
-                            <a:srgbClr val="FFFFFF"/>
-                          </a:solidFill>
-                        </a:defRPr>
-                      </a:pPr>
-                      <a:r>
-                        <a:t>LIFE</a:t>
-                      </a:r>
-                      <a:br/>
-                      <a:r>
-                        <a:t>(1, 2, 3)</a:t>
-                      </a:r>
-                    </a:p>
-                  </a:txBody>
-                  <a:tcPr>
-                    <a:solidFill>
-                      <a:srgbClr val="1B365D"/>
-                    </a:solidFill>
-                  </a:tcPr>
-                </a:tc>
-                <a:tc>
-                  <a:txBody>
-                    <a:bodyPr/>
-                    <a:lstStyle/>
-                    <a:p>
-                      <a:pPr algn="ctr">
-                        <a:defRPr b="1" sz="819">
-                          <a:solidFill>
-                            <a:srgbClr val="FFFFFF"/>
-                          </a:solidFill>
-                        </a:defRPr>
-                      </a:pPr>
-                      <a:r>
-                        <a:t>ECONOMIC</a:t>
-                      </a:r>
-                      <a:br/>
-                      <a:r>
-                        <a:t>(8, 9)</a:t>
-                      </a:r>
-                    </a:p>
-                  </a:txBody>
-                  <a:tcPr>
-                    <a:solidFill>
-                      <a:srgbClr val="1B365D"/>
-                    </a:solidFill>
-                  </a:tcPr>
-                </a:tc>
-                <a:tc>
-                  <a:txBody>
-                    <a:bodyPr/>
-                    <a:lstStyle/>
-                    <a:p>
-                      <a:pPr algn="ctr">
-                        <a:defRPr b="1" sz="819">
-                          <a:solidFill>
-                            <a:srgbClr val="FFFFFF"/>
-                          </a:solidFill>
-                        </a:defRPr>
-                      </a:pPr>
-                      <a:r>
-                        <a:t>EQUITY</a:t>
-                      </a:r>
-                      <a:br/>
-                      <a:r>
-                        <a:t>(4, 5, 10)</a:t>
-                      </a:r>
-                    </a:p>
-                  </a:txBody>
-                  <a:tcPr>
-                    <a:solidFill>
-                      <a:srgbClr val="1B365D"/>
-                    </a:solidFill>
-                  </a:tcPr>
-                </a:tc>
-                <a:tc>
-                  <a:txBody>
-                    <a:bodyPr/>
-                    <a:lstStyle/>
-                    <a:p>
-                      <a:pPr algn="ctr">
-                        <a:defRPr b="1" sz="819">
-                          <a:solidFill>
-                            <a:srgbClr val="FFFFFF"/>
-                          </a:solidFill>
-                        </a:defRPr>
-                      </a:pPr>
-                      <a:r>
-                        <a:t>SOCIAL</a:t>
-                      </a:r>
-                      <a:br/>
-                      <a:r>
-                        <a:t>(11, 16, 17)</a:t>
-                      </a:r>
-                    </a:p>
-                  </a:txBody>
-                  <a:tcPr>
-                    <a:solidFill>
-                      <a:srgbClr val="1B365D"/>
-                    </a:solidFill>
-                  </a:tcPr>
-                </a:tc>
-                <a:tc>
-                  <a:txBody>
-                    <a:bodyPr/>
-                    <a:lstStyle/>
-                    <a:p>
-                      <a:pPr algn="ctr">
-                        <a:defRPr b="1" sz="819">
-                          <a:solidFill>
-                            <a:srgbClr val="FFFFFF"/>
-                          </a:solidFill>
-                        </a:defRPr>
-                      </a:pPr>
-                      <a:r>
-                        <a:t>RESOURCES</a:t>
-                      </a:r>
-                      <a:br/>
-                      <a:r>
-                        <a:t>(6, 7, 12, 14)</a:t>
-                      </a:r>
-                    </a:p>
-                  </a:txBody>
-                  <a:tcPr>
-                    <a:solidFill>
-                      <a:srgbClr val="1B365D"/>
-                    </a:solidFill>
-                  </a:tcPr>
-                </a:tc>
-                <a:tc>
-                  <a:txBody>
-                    <a:bodyPr/>
-                    <a:lstStyle/>
-                    <a:p>
-                      <a:pPr algn="ctr">
-                        <a:defRPr b="1" sz="819">
-                          <a:solidFill>
-                            <a:srgbClr val="FFFFFF"/>
-                          </a:solidFill>
-                        </a:defRPr>
-                      </a:pPr>
-                      <a:r>
-                        <a:t>ENVIRONS</a:t>
-                      </a:r>
-                      <a:br/>
-                      <a:r>
-                        <a:t>(13, 15)</a:t>
-                      </a:r>
-                    </a:p>
-                  </a:txBody>
-                  <a:tcPr>
-                    <a:solidFill>
-                      <a:srgbClr val="1B365D"/>
-                    </a:solidFill>
-                  </a:tcPr>
-                </a:tc>
-                <a:tc>
-                  <a:txBody>
-                    <a:bodyPr/>
-                    <a:lstStyle/>
-                    <a:p>
-                      <a:pPr algn="ctr">
-                        <a:defRPr b="1" sz="819">
-                          <a:solidFill>
-                            <a:srgbClr val="FFFFFF"/>
-                          </a:solidFill>
-                        </a:defRPr>
-                      </a:pPr>
-                      <a:r>
-                        <a:t>ĐẶC TRƯNG CHIẾN LƯỢC CỐT LÕI</a:t>
-                      </a:r>
-                    </a:p>
-                  </a:txBody>
-                  <a:tcPr>
-                    <a:solidFill>
-                      <a:srgbClr val="1B365D"/>
-                    </a:solidFill>
-                  </a:tcPr>
-                </a:tc>
-              </a:tr>
-              <a:tr h="386080">
-                <a:tc>
-                  <a:txBody>
-                    <a:bodyPr/>
-                    <a:lstStyle/>
-                    <a:p>
-                      <a:pPr>
-                        <a:defRPr sz="780" b="1">
-                          <a:solidFill>
-                            <a:srgbClr val="1B365D"/>
-                          </a:solidFill>
-                        </a:defRPr>
-                      </a:pPr>
-                      <a:r>
-                        <a:t>Vinamilk (VNM - Sữa &amp; Chăn nuôi)</a:t>
-                      </a:r>
-                    </a:p>
-                  </a:txBody>
-                  <a:tcPr>
-                    <a:solidFill>
-                      <a:srgbClr val="F8FAFC"/>
-                    </a:solidFill>
-                  </a:tcPr>
-                </a:tc>
-                <a:tc>
-                  <a:txBody>
-                    <a:bodyPr/>
-                    <a:lstStyle/>
-                    <a:p>
-                      <a:pPr algn="ctr">
-                        <a:defRPr sz="780" b="0">
-                          <a:solidFill>
-                            <a:srgbClr val="212529"/>
-                          </a:solidFill>
-                        </a:defRPr>
-                      </a:pPr>
-                      <a:r>
-                        <a:t>42.26</a:t>
-                      </a:r>
-                    </a:p>
-                  </a:txBody>
-                  <a:tcPr>
-                    <a:solidFill>
-                      <a:srgbClr val="F8FAFC"/>
-                    </a:solidFill>
-                  </a:tcPr>
-                </a:tc>
-                <a:tc>
-                  <a:txBody>
-                    <a:bodyPr/>
-                    <a:lstStyle/>
-                    <a:p>
-                      <a:pPr algn="ctr">
-                        <a:defRPr sz="780" b="1">
-                          <a:solidFill>
-                            <a:srgbClr val="1B365D"/>
-                          </a:solidFill>
-                        </a:defRPr>
-                      </a:pPr>
-                      <a:r>
-                        <a:t>45.09</a:t>
-                      </a:r>
-                    </a:p>
-                  </a:txBody>
-                  <a:tcPr>
-                    <a:solidFill>
-                      <a:srgbClr val="F8FAFC"/>
-                    </a:solidFill>
-                  </a:tcPr>
-                </a:tc>
-                <a:tc>
-                  <a:txBody>
-                    <a:bodyPr/>
-                    <a:lstStyle/>
-                    <a:p>
-                      <a:pPr algn="ctr">
-                        <a:defRPr sz="780" b="0">
-                          <a:solidFill>
-                            <a:srgbClr val="D4AF37"/>
-                          </a:solidFill>
-                        </a:defRPr>
-                      </a:pPr>
-                      <a:r>
-                        <a:t>40.28</a:t>
-                      </a:r>
-                    </a:p>
-                  </a:txBody>
-                  <a:tcPr>
-                    <a:solidFill>
-                      <a:srgbClr val="F8FAFC"/>
-                    </a:solidFill>
-                  </a:tcPr>
-                </a:tc>
-                <a:tc>
-                  <a:txBody>
-                    <a:bodyPr/>
-                    <a:lstStyle/>
-                    <a:p>
-                      <a:pPr algn="ctr">
-                        <a:defRPr sz="780" b="0">
-                          <a:solidFill>
-                            <a:srgbClr val="212529"/>
-                          </a:solidFill>
-                        </a:defRPr>
-                      </a:pPr>
-                      <a:r>
-                        <a:t>43.94</a:t>
-                      </a:r>
-                    </a:p>
-                  </a:txBody>
-                  <a:tcPr>
-                    <a:solidFill>
-                      <a:srgbClr val="F8FAFC"/>
-                    </a:solidFill>
-                  </a:tcPr>
-                </a:tc>
-                <a:tc>
-                  <a:txBody>
-                    <a:bodyPr/>
-                    <a:lstStyle/>
-                    <a:p>
-                      <a:pPr algn="ctr">
-                        <a:defRPr sz="780" b="0">
-                          <a:solidFill>
-                            <a:srgbClr val="212529"/>
-                          </a:solidFill>
-                        </a:defRPr>
-                      </a:pPr>
-                      <a:r>
-                        <a:t>44.08</a:t>
-                      </a:r>
-                    </a:p>
-                  </a:txBody>
-                  <a:tcPr>
-                    <a:solidFill>
-                      <a:srgbClr val="F8FAFC"/>
-                    </a:solidFill>
-                  </a:tcPr>
-                </a:tc>
-                <a:tc>
-                  <a:txBody>
-                    <a:bodyPr/>
-                    <a:lstStyle/>
-                    <a:p>
-                      <a:pPr algn="ctr">
-                        <a:defRPr sz="780" b="0">
-                          <a:solidFill>
-                            <a:srgbClr val="212529"/>
-                          </a:solidFill>
-                        </a:defRPr>
-                      </a:pPr>
-                      <a:r>
-                        <a:t>43.38</a:t>
-                      </a:r>
-                    </a:p>
-                  </a:txBody>
-                  <a:tcPr>
-                    <a:solidFill>
-                      <a:srgbClr val="F8FAFC"/>
-                    </a:solidFill>
-                  </a:tcPr>
-                </a:tc>
-                <a:tc>
-                  <a:txBody>
-                    <a:bodyPr/>
-                    <a:lstStyle/>
-                    <a:p>
-                      <a:pPr>
-                        <a:defRPr sz="740" b="0">
-                          <a:solidFill>
-                            <a:srgbClr val="212529"/>
-                          </a:solidFill>
-                        </a:defRPr>
-                      </a:pPr>
-                      <a:r>
-                        <a:t>Net Zero 2050, 3 đơn vị PAS 2060, Green Farm.</a:t>
-                      </a:r>
-                    </a:p>
-                  </a:txBody>
-                  <a:tcPr>
-                    <a:solidFill>
-                      <a:srgbClr val="F8FAFC"/>
-                    </a:solidFill>
-                  </a:tcPr>
-                </a:tc>
-              </a:tr>
-              <a:tr h="386080">
-                <a:tc>
-                  <a:txBody>
-                    <a:bodyPr/>
-                    <a:lstStyle/>
-                    <a:p>
-                      <a:pPr>
-                        <a:defRPr sz="780" b="1">
-                          <a:solidFill>
-                            <a:srgbClr val="1B365D"/>
-                          </a:solidFill>
-                        </a:defRPr>
-                      </a:pPr>
-                      <a:r>
-                        <a:t>Vicostone (VCS - Đá thạch anh)</a:t>
-                      </a:r>
-                    </a:p>
-                  </a:txBody>
-                  <a:tcPr>
-                    <a:solidFill>
-                      <a:srgbClr val="FFFFFF"/>
-                    </a:solidFill>
-                  </a:tcPr>
-                </a:tc>
-                <a:tc>
-                  <a:txBody>
-                    <a:bodyPr/>
-                    <a:lstStyle/>
-                    <a:p>
-                      <a:pPr algn="ctr">
-                        <a:defRPr sz="780" b="0">
-                          <a:solidFill>
-                            <a:srgbClr val="212529"/>
-                          </a:solidFill>
-                        </a:defRPr>
-                      </a:pPr>
-                      <a:r>
-                        <a:t>46.19</a:t>
-                      </a:r>
-                    </a:p>
-                  </a:txBody>
-                  <a:tcPr>
-                    <a:solidFill>
-                      <a:srgbClr val="FFFFFF"/>
-                    </a:solidFill>
-                  </a:tcPr>
-                </a:tc>
-                <a:tc>
-                  <a:txBody>
-                    <a:bodyPr/>
-                    <a:lstStyle/>
-                    <a:p>
-                      <a:pPr algn="ctr">
-                        <a:defRPr sz="780" b="1">
-                          <a:solidFill>
-                            <a:srgbClr val="1B365D"/>
-                          </a:solidFill>
-                        </a:defRPr>
-                      </a:pPr>
-                      <a:r>
-                        <a:t>50.71</a:t>
-                      </a:r>
-                    </a:p>
-                  </a:txBody>
-                  <a:tcPr>
-                    <a:solidFill>
-                      <a:srgbClr val="FFFFFF"/>
-                    </a:solidFill>
-                  </a:tcPr>
-                </a:tc>
-                <a:tc>
-                  <a:txBody>
-                    <a:bodyPr/>
-                    <a:lstStyle/>
-                    <a:p>
-                      <a:pPr algn="ctr">
-                        <a:defRPr sz="780" b="0">
-                          <a:solidFill>
-                            <a:srgbClr val="D4AF37"/>
-                          </a:solidFill>
-                        </a:defRPr>
-                      </a:pPr>
-                      <a:r>
-                        <a:t>44.20</a:t>
-                      </a:r>
-                    </a:p>
-                  </a:txBody>
-                  <a:tcPr>
-                    <a:solidFill>
-                      <a:srgbClr val="FFFFFF"/>
-                    </a:solidFill>
-                  </a:tcPr>
-                </a:tc>
-                <a:tc>
-                  <a:txBody>
-                    <a:bodyPr/>
-                    <a:lstStyle/>
-                    <a:p>
-                      <a:pPr algn="ctr">
-                        <a:defRPr sz="780" b="0">
-                          <a:solidFill>
-                            <a:srgbClr val="212529"/>
-                          </a:solidFill>
-                        </a:defRPr>
-                      </a:pPr>
-                      <a:r>
-                        <a:t>49.08</a:t>
-                      </a:r>
-                    </a:p>
-                  </a:txBody>
-                  <a:tcPr>
-                    <a:solidFill>
-                      <a:srgbClr val="FFFFFF"/>
-                    </a:solidFill>
-                  </a:tcPr>
-                </a:tc>
-                <a:tc>
-                  <a:txBody>
-                    <a:bodyPr/>
-                    <a:lstStyle/>
-                    <a:p>
-                      <a:pPr algn="ctr">
-                        <a:defRPr sz="780" b="0">
-                          <a:solidFill>
-                            <a:srgbClr val="212529"/>
-                          </a:solidFill>
-                        </a:defRPr>
-                      </a:pPr>
-                      <a:r>
-                        <a:t>48.63</a:t>
-                      </a:r>
-                    </a:p>
-                  </a:txBody>
-                  <a:tcPr>
-                    <a:solidFill>
-                      <a:srgbClr val="FFFFFF"/>
-                    </a:solidFill>
-                  </a:tcPr>
-                </a:tc>
-                <a:tc>
-                  <a:txBody>
-                    <a:bodyPr/>
-                    <a:lstStyle/>
-                    <a:p>
-                      <a:pPr algn="ctr">
-                        <a:defRPr sz="780" b="0">
-                          <a:solidFill>
-                            <a:srgbClr val="212529"/>
-                          </a:solidFill>
-                        </a:defRPr>
-                      </a:pPr>
-                      <a:r>
-                        <a:t>47.31</a:t>
-                      </a:r>
-                    </a:p>
-                  </a:txBody>
-                  <a:tcPr>
-                    <a:solidFill>
-                      <a:srgbClr val="FFFFFF"/>
-                    </a:solidFill>
-                  </a:tcPr>
-                </a:tc>
-                <a:tc>
-                  <a:txBody>
-                    <a:bodyPr/>
-                    <a:lstStyle/>
-                    <a:p>
-                      <a:pPr>
-                        <a:defRPr sz="740" b="0">
-                          <a:solidFill>
-                            <a:srgbClr val="212529"/>
-                          </a:solidFill>
-                        </a:defRPr>
-                      </a:pPr>
-                      <a:r>
-                        <a:t>Đỉnh toàn mẫu Economic &amp; Resources nhờ xuất khẩu Âu-Mỹ.</a:t>
-                      </a:r>
-                    </a:p>
-                  </a:txBody>
-                  <a:tcPr>
-                    <a:solidFill>
-                      <a:srgbClr val="FFFFFF"/>
-                    </a:solidFill>
-                  </a:tcPr>
-                </a:tc>
-              </a:tr>
-              <a:tr h="386080">
-                <a:tc>
-                  <a:txBody>
-                    <a:bodyPr/>
-                    <a:lstStyle/>
-                    <a:p>
-                      <a:pPr>
-                        <a:defRPr sz="780" b="1">
-                          <a:solidFill>
-                            <a:srgbClr val="1B365D"/>
-                          </a:solidFill>
-                        </a:defRPr>
-                      </a:pPr>
-                      <a:r>
-                        <a:t>PNJ (PNJ - Bán lẻ &amp; Chế tác vàng)</a:t>
-                      </a:r>
-                    </a:p>
-                  </a:txBody>
-                  <a:tcPr>
-                    <a:solidFill>
-                      <a:srgbClr val="F8FAFC"/>
-                    </a:solidFill>
-                  </a:tcPr>
-                </a:tc>
-                <a:tc>
-                  <a:txBody>
-                    <a:bodyPr/>
-                    <a:lstStyle/>
-                    <a:p>
-                      <a:pPr algn="ctr">
-                        <a:defRPr sz="780" b="0">
-                          <a:solidFill>
-                            <a:srgbClr val="212529"/>
-                          </a:solidFill>
-                        </a:defRPr>
-                      </a:pPr>
-                      <a:r>
-                        <a:t>44.58</a:t>
-                      </a:r>
-                    </a:p>
-                  </a:txBody>
-                  <a:tcPr>
-                    <a:solidFill>
-                      <a:srgbClr val="F8FAFC"/>
-                    </a:solidFill>
-                  </a:tcPr>
-                </a:tc>
-                <a:tc>
-                  <a:txBody>
-                    <a:bodyPr/>
-                    <a:lstStyle/>
-                    <a:p>
-                      <a:pPr algn="ctr">
-                        <a:defRPr sz="780" b="1">
-                          <a:solidFill>
-                            <a:srgbClr val="1B365D"/>
-                          </a:solidFill>
-                        </a:defRPr>
-                      </a:pPr>
-                      <a:r>
-                        <a:t>48.67</a:t>
-                      </a:r>
-                    </a:p>
-                  </a:txBody>
-                  <a:tcPr>
-                    <a:solidFill>
-                      <a:srgbClr val="F8FAFC"/>
-                    </a:solidFill>
-                  </a:tcPr>
-                </a:tc>
-                <a:tc>
-                  <a:txBody>
-                    <a:bodyPr/>
-                    <a:lstStyle/>
-                    <a:p>
-                      <a:pPr algn="ctr">
-                        <a:defRPr sz="780" b="0">
-                          <a:solidFill>
-                            <a:srgbClr val="D4AF37"/>
-                          </a:solidFill>
-                        </a:defRPr>
-                      </a:pPr>
-                      <a:r>
-                        <a:t>43.18</a:t>
-                      </a:r>
-                    </a:p>
-                  </a:txBody>
-                  <a:tcPr>
-                    <a:solidFill>
-                      <a:srgbClr val="F8FAFC"/>
-                    </a:solidFill>
-                  </a:tcPr>
-                </a:tc>
-                <a:tc>
-                  <a:txBody>
-                    <a:bodyPr/>
-                    <a:lstStyle/>
-                    <a:p>
-                      <a:pPr algn="ctr">
-                        <a:defRPr sz="780" b="0">
-                          <a:solidFill>
-                            <a:srgbClr val="212529"/>
-                          </a:solidFill>
-                        </a:defRPr>
-                      </a:pPr>
-                      <a:r>
-                        <a:t>47.32</a:t>
-                      </a:r>
-                    </a:p>
-                  </a:txBody>
-                  <a:tcPr>
-                    <a:solidFill>
-                      <a:srgbClr val="F8FAFC"/>
-                    </a:solidFill>
-                  </a:tcPr>
-                </a:tc>
-                <a:tc>
-                  <a:txBody>
-                    <a:bodyPr/>
-                    <a:lstStyle/>
-                    <a:p>
-                      <a:pPr algn="ctr">
-                        <a:defRPr sz="780" b="0">
-                          <a:solidFill>
-                            <a:srgbClr val="212529"/>
-                          </a:solidFill>
-                        </a:defRPr>
-                      </a:pPr>
-                      <a:r>
-                        <a:t>46.93</a:t>
-                      </a:r>
-                    </a:p>
-                  </a:txBody>
-                  <a:tcPr>
-                    <a:solidFill>
-                      <a:srgbClr val="F8FAFC"/>
-                    </a:solidFill>
-                  </a:tcPr>
-                </a:tc>
-                <a:tc>
-                  <a:txBody>
-                    <a:bodyPr/>
-                    <a:lstStyle/>
-                    <a:p>
-                      <a:pPr algn="ctr">
-                        <a:defRPr sz="780" b="0">
-                          <a:solidFill>
-                            <a:srgbClr val="212529"/>
-                          </a:solidFill>
-                        </a:defRPr>
-                      </a:pPr>
-                      <a:r>
-                        <a:t>45.97</a:t>
-                      </a:r>
-                    </a:p>
-                  </a:txBody>
-                  <a:tcPr>
-                    <a:solidFill>
-                      <a:srgbClr val="F8FAFC"/>
-                    </a:solidFill>
-                  </a:tcPr>
-                </a:tc>
-                <a:tc>
-                  <a:txBody>
-                    <a:bodyPr/>
-                    <a:lstStyle/>
-                    <a:p>
-                      <a:pPr>
-                        <a:defRPr sz="740" b="0">
-                          <a:solidFill>
-                            <a:srgbClr val="212529"/>
-                          </a:solidFill>
-                        </a:defRPr>
-                      </a:pPr>
-                      <a:r>
-                        <a:t>Dẫn đầu Equity (43,18đ) nhờ &gt;60% nhân sự nữ &amp; DE&amp;I.</a:t>
-                      </a:r>
-                    </a:p>
-                  </a:txBody>
-                  <a:tcPr>
-                    <a:solidFill>
-                      <a:srgbClr val="F8FAFC"/>
-                    </a:solidFill>
-                  </a:tcPr>
-                </a:tc>
-              </a:tr>
-              <a:tr h="386080">
-                <a:tc>
-                  <a:txBody>
-                    <a:bodyPr/>
-                    <a:lstStyle/>
-                    <a:p>
-                      <a:pPr>
-                        <a:defRPr sz="780" b="1">
-                          <a:solidFill>
-                            <a:srgbClr val="1B365D"/>
-                          </a:solidFill>
-                        </a:defRPr>
-                      </a:pPr>
-                      <a:r>
-                        <a:t>Bảo Việt (BVH - Bảo hiểm &amp; Tài chính)</a:t>
-                      </a:r>
-                    </a:p>
-                  </a:txBody>
-                  <a:tcPr>
-                    <a:solidFill>
-                      <a:srgbClr val="FFFFFF"/>
-                    </a:solidFill>
-                  </a:tcPr>
-                </a:tc>
-                <a:tc>
-                  <a:txBody>
-                    <a:bodyPr/>
-                    <a:lstStyle/>
-                    <a:p>
-                      <a:pPr algn="ctr">
-                        <a:defRPr sz="780" b="0">
-                          <a:solidFill>
-                            <a:srgbClr val="212529"/>
-                          </a:solidFill>
-                        </a:defRPr>
-                      </a:pPr>
-                      <a:r>
-                        <a:t>46.34</a:t>
-                      </a:r>
-                    </a:p>
-                  </a:txBody>
-                  <a:tcPr>
-                    <a:solidFill>
-                      <a:srgbClr val="FFFFFF"/>
-                    </a:solidFill>
-                  </a:tcPr>
-                </a:tc>
-                <a:tc>
-                  <a:txBody>
-                    <a:bodyPr/>
-                    <a:lstStyle/>
-                    <a:p>
-                      <a:pPr algn="ctr">
-                        <a:defRPr sz="780" b="1">
-                          <a:solidFill>
-                            <a:srgbClr val="1B365D"/>
-                          </a:solidFill>
-                        </a:defRPr>
-                      </a:pPr>
-                      <a:r>
-                        <a:t>49.36</a:t>
-                      </a:r>
-                    </a:p>
-                  </a:txBody>
-                  <a:tcPr>
-                    <a:solidFill>
-                      <a:srgbClr val="FFFFFF"/>
-                    </a:solidFill>
-                  </a:tcPr>
-                </a:tc>
-                <a:tc>
-                  <a:txBody>
-                    <a:bodyPr/>
-                    <a:lstStyle/>
-                    <a:p>
-                      <a:pPr algn="ctr">
-                        <a:defRPr sz="780" b="0">
-                          <a:solidFill>
-                            <a:srgbClr val="D4AF37"/>
-                          </a:solidFill>
-                        </a:defRPr>
-                      </a:pPr>
-                      <a:r>
-                        <a:t>43.05</a:t>
-                      </a:r>
-                    </a:p>
-                  </a:txBody>
-                  <a:tcPr>
-                    <a:solidFill>
-                      <a:srgbClr val="FFFFFF"/>
-                    </a:solidFill>
-                  </a:tcPr>
-                </a:tc>
-                <a:tc>
-                  <a:txBody>
-                    <a:bodyPr/>
-                    <a:lstStyle/>
-                    <a:p>
-                      <a:pPr algn="ctr">
-                        <a:defRPr sz="780" b="0">
-                          <a:solidFill>
-                            <a:srgbClr val="212529"/>
-                          </a:solidFill>
-                        </a:defRPr>
-                      </a:pPr>
-                      <a:r>
-                        <a:t>48.13</a:t>
-                      </a:r>
-                    </a:p>
-                  </a:txBody>
-                  <a:tcPr>
-                    <a:solidFill>
-                      <a:srgbClr val="FFFFFF"/>
-                    </a:solidFill>
-                  </a:tcPr>
-                </a:tc>
-                <a:tc>
-                  <a:txBody>
-                    <a:bodyPr/>
-                    <a:lstStyle/>
-                    <a:p>
-                      <a:pPr algn="ctr">
-                        <a:defRPr sz="780" b="0">
-                          <a:solidFill>
-                            <a:srgbClr val="212529"/>
-                          </a:solidFill>
-                        </a:defRPr>
-                      </a:pPr>
-                      <a:r>
-                        <a:t>46.40</a:t>
-                      </a:r>
-                    </a:p>
-                  </a:txBody>
-                  <a:tcPr>
-                    <a:solidFill>
-                      <a:srgbClr val="FFFFFF"/>
-                    </a:solidFill>
-                  </a:tcPr>
-                </a:tc>
-                <a:tc>
-                  <a:txBody>
-                    <a:bodyPr/>
-                    <a:lstStyle/>
-                    <a:p>
-                      <a:pPr algn="ctr">
-                        <a:defRPr sz="780" b="0">
-                          <a:solidFill>
-                            <a:srgbClr val="212529"/>
-                          </a:solidFill>
-                        </a:defRPr>
-                      </a:pPr>
-                      <a:r>
-                        <a:t>46.08</a:t>
-                      </a:r>
-                    </a:p>
-                  </a:txBody>
-                  <a:tcPr>
-                    <a:solidFill>
-                      <a:srgbClr val="FFFFFF"/>
-                    </a:solidFill>
-                  </a:tcPr>
-                </a:tc>
-                <a:tc>
-                  <a:txBody>
-                    <a:bodyPr/>
-                    <a:lstStyle/>
-                    <a:p>
-                      <a:pPr>
-                        <a:defRPr sz="740" b="0">
-                          <a:solidFill>
-                            <a:srgbClr val="212529"/>
-                          </a:solidFill>
-                        </a:defRPr>
-                      </a:pPr>
-                      <a:r>
-                        <a:t>Tiên phong Báo cáo Tích hợp IIRC, bảo hiểm vi mô.</a:t>
-                      </a:r>
-                    </a:p>
-                  </a:txBody>
-                  <a:tcPr>
-                    <a:solidFill>
-                      <a:srgbClr val="FFFFFF"/>
-                    </a:solidFill>
-                  </a:tcPr>
-                </a:tc>
-              </a:tr>
-              <a:tr h="386080">
-                <a:tc>
-                  <a:txBody>
-                    <a:bodyPr/>
-                    <a:lstStyle/>
-                    <a:p>
-                      <a:pPr>
-                        <a:defRPr sz="780" b="1">
-                          <a:solidFill>
-                            <a:srgbClr val="1B365D"/>
-                          </a:solidFill>
-                        </a:defRPr>
-                      </a:pPr>
-                      <a:r>
-                        <a:t>The PAN Group (PAN - Nông nghiệp)</a:t>
-                      </a:r>
-                    </a:p>
-                  </a:txBody>
-                  <a:tcPr>
-                    <a:solidFill>
-                      <a:srgbClr val="F8FAFC"/>
-                    </a:solidFill>
-                  </a:tcPr>
-                </a:tc>
-                <a:tc>
-                  <a:txBody>
-                    <a:bodyPr/>
-                    <a:lstStyle/>
-                    <a:p>
-                      <a:pPr algn="ctr">
-                        <a:defRPr sz="780" b="0">
-                          <a:solidFill>
-                            <a:srgbClr val="212529"/>
-                          </a:solidFill>
-                        </a:defRPr>
-                      </a:pPr>
-                      <a:r>
-                        <a:t>44.81</a:t>
-                      </a:r>
-                    </a:p>
-                  </a:txBody>
-                  <a:tcPr>
-                    <a:solidFill>
-                      <a:srgbClr val="F8FAFC"/>
-                    </a:solidFill>
-                  </a:tcPr>
-                </a:tc>
-                <a:tc>
-                  <a:txBody>
-                    <a:bodyPr/>
-                    <a:lstStyle/>
-                    <a:p>
-                      <a:pPr algn="ctr">
-                        <a:defRPr sz="780" b="1">
-                          <a:solidFill>
-                            <a:srgbClr val="1B365D"/>
-                          </a:solidFill>
-                        </a:defRPr>
-                      </a:pPr>
-                      <a:r>
-                        <a:t>47.29</a:t>
-                      </a:r>
-                    </a:p>
-                  </a:txBody>
-                  <a:tcPr>
-                    <a:solidFill>
-                      <a:srgbClr val="F8FAFC"/>
-                    </a:solidFill>
-                  </a:tcPr>
-                </a:tc>
-                <a:tc>
-                  <a:txBody>
-                    <a:bodyPr/>
-                    <a:lstStyle/>
-                    <a:p>
-                      <a:pPr algn="ctr">
-                        <a:defRPr sz="780" b="0">
-                          <a:solidFill>
-                            <a:srgbClr val="D4AF37"/>
-                          </a:solidFill>
-                        </a:defRPr>
-                      </a:pPr>
-                      <a:r>
-                        <a:t>41.91</a:t>
-                      </a:r>
-                    </a:p>
-                  </a:txBody>
-                  <a:tcPr>
-                    <a:solidFill>
-                      <a:srgbClr val="F8FAFC"/>
-                    </a:solidFill>
-                  </a:tcPr>
-                </a:tc>
-                <a:tc>
-                  <a:txBody>
-                    <a:bodyPr/>
-                    <a:lstStyle/>
-                    <a:p>
-                      <a:pPr algn="ctr">
-                        <a:defRPr sz="780" b="0">
-                          <a:solidFill>
-                            <a:srgbClr val="212529"/>
-                          </a:solidFill>
-                        </a:defRPr>
-                      </a:pPr>
-                      <a:r>
-                        <a:t>45.51</a:t>
-                      </a:r>
-                    </a:p>
-                  </a:txBody>
-                  <a:tcPr>
-                    <a:solidFill>
-                      <a:srgbClr val="F8FAFC"/>
-                    </a:solidFill>
-                  </a:tcPr>
-                </a:tc>
-                <a:tc>
-                  <a:txBody>
-                    <a:bodyPr/>
-                    <a:lstStyle/>
-                    <a:p>
-                      <a:pPr algn="ctr">
-                        <a:defRPr sz="780" b="0">
-                          <a:solidFill>
-                            <a:srgbClr val="212529"/>
-                          </a:solidFill>
-                        </a:defRPr>
-                      </a:pPr>
-                      <a:r>
-                        <a:t>45.07</a:t>
-                      </a:r>
-                    </a:p>
-                  </a:txBody>
-                  <a:tcPr>
-                    <a:solidFill>
-                      <a:srgbClr val="F8FAFC"/>
-                    </a:solidFill>
-                  </a:tcPr>
-                </a:tc>
-                <a:tc>
-                  <a:txBody>
-                    <a:bodyPr/>
-                    <a:lstStyle/>
-                    <a:p>
-                      <a:pPr algn="ctr">
-                        <a:defRPr sz="780" b="0">
-                          <a:solidFill>
-                            <a:srgbClr val="212529"/>
-                          </a:solidFill>
-                        </a:defRPr>
-                      </a:pPr>
-                      <a:r>
-                        <a:t>44.67</a:t>
-                      </a:r>
-                    </a:p>
-                  </a:txBody>
-                  <a:tcPr>
-                    <a:solidFill>
-                      <a:srgbClr val="F8FAFC"/>
-                    </a:solidFill>
-                  </a:tcPr>
-                </a:tc>
-                <a:tc>
-                  <a:txBody>
-                    <a:bodyPr/>
-                    <a:lstStyle/>
-                    <a:p>
-                      <a:pPr>
-                        <a:defRPr sz="740" b="0">
-                          <a:solidFill>
-                            <a:srgbClr val="212529"/>
-                          </a:solidFill>
-                        </a:defRPr>
-                      </a:pPr>
-                      <a:r>
-                        <a:t>Chuỗi Farm-Food-Family, lúa gạo giảm phát thải (SDG 2).</a:t>
-                      </a:r>
-                    </a:p>
-                  </a:txBody>
-                  <a:tcPr>
-                    <a:solidFill>
-                      <a:srgbClr val="F8FAFC"/>
-                    </a:solidFill>
-                  </a:tcPr>
-                </a:tc>
-              </a:tr>
-              <a:tr h="386080">
-                <a:tc>
-                  <a:txBody>
-                    <a:bodyPr/>
-                    <a:lstStyle/>
-                    <a:p>
-                      <a:pPr>
-                        <a:defRPr sz="780" b="1">
-                          <a:solidFill>
-                            <a:srgbClr val="1B365D"/>
-                          </a:solidFill>
-                        </a:defRPr>
-                      </a:pPr>
-                      <a:r>
-                        <a:t>Petrolimex (PLX - Xăng dầu &amp; Năng lượng)</a:t>
-                      </a:r>
-                    </a:p>
-                  </a:txBody>
-                  <a:tcPr>
-                    <a:solidFill>
-                      <a:srgbClr val="FFFFFF"/>
-                    </a:solidFill>
-                  </a:tcPr>
-                </a:tc>
-                <a:tc>
-                  <a:txBody>
-                    <a:bodyPr/>
-                    <a:lstStyle/>
-                    <a:p>
-                      <a:pPr algn="ctr">
-                        <a:defRPr sz="780" b="0">
-                          <a:solidFill>
-                            <a:srgbClr val="212529"/>
-                          </a:solidFill>
-                        </a:defRPr>
-                      </a:pPr>
-                      <a:r>
-                        <a:t>42.14</a:t>
-                      </a:r>
-                    </a:p>
-                  </a:txBody>
-                  <a:tcPr>
-                    <a:solidFill>
-                      <a:srgbClr val="FFFFFF"/>
-                    </a:solidFill>
-                  </a:tcPr>
-                </a:tc>
-                <a:tc>
-                  <a:txBody>
-                    <a:bodyPr/>
-                    <a:lstStyle/>
-                    <a:p>
-                      <a:pPr algn="ctr">
-                        <a:defRPr sz="780" b="1">
-                          <a:solidFill>
-                            <a:srgbClr val="1B365D"/>
-                          </a:solidFill>
-                        </a:defRPr>
-                      </a:pPr>
-                      <a:r>
-                        <a:t>45.55</a:t>
-                      </a:r>
-                    </a:p>
-                  </a:txBody>
-                  <a:tcPr>
-                    <a:solidFill>
-                      <a:srgbClr val="FFFFFF"/>
-                    </a:solidFill>
-                  </a:tcPr>
-                </a:tc>
-                <a:tc>
-                  <a:txBody>
-                    <a:bodyPr/>
-                    <a:lstStyle/>
-                    <a:p>
-                      <a:pPr algn="ctr">
-                        <a:defRPr sz="780" b="0">
-                          <a:solidFill>
-                            <a:srgbClr val="D4AF37"/>
-                          </a:solidFill>
-                        </a:defRPr>
-                      </a:pPr>
-                      <a:r>
-                        <a:t>39.98</a:t>
-                      </a:r>
-                    </a:p>
-                  </a:txBody>
-                  <a:tcPr>
-                    <a:solidFill>
-                      <a:srgbClr val="FFFFFF"/>
-                    </a:solidFill>
-                  </a:tcPr>
-                </a:tc>
-                <a:tc>
-                  <a:txBody>
-                    <a:bodyPr/>
-                    <a:lstStyle/>
-                    <a:p>
-                      <a:pPr algn="ctr">
-                        <a:defRPr sz="780" b="0">
-                          <a:solidFill>
-                            <a:srgbClr val="212529"/>
-                          </a:solidFill>
-                        </a:defRPr>
-                      </a:pPr>
-                      <a:r>
-                        <a:t>44.42</a:t>
-                      </a:r>
-                    </a:p>
-                  </a:txBody>
-                  <a:tcPr>
-                    <a:solidFill>
-                      <a:srgbClr val="FFFFFF"/>
-                    </a:solidFill>
-                  </a:tcPr>
-                </a:tc>
-                <a:tc>
-                  <a:txBody>
-                    <a:bodyPr/>
-                    <a:lstStyle/>
-                    <a:p>
-                      <a:pPr algn="ctr">
-                        <a:defRPr sz="780" b="0">
-                          <a:solidFill>
-                            <a:srgbClr val="212529"/>
-                          </a:solidFill>
-                        </a:defRPr>
-                      </a:pPr>
-                      <a:r>
-                        <a:t>44.22</a:t>
-                      </a:r>
-                    </a:p>
-                  </a:txBody>
-                  <a:tcPr>
-                    <a:solidFill>
-                      <a:srgbClr val="FFFFFF"/>
-                    </a:solidFill>
-                  </a:tcPr>
-                </a:tc>
-                <a:tc>
-                  <a:txBody>
-                    <a:bodyPr/>
-                    <a:lstStyle/>
-                    <a:p>
-                      <a:pPr algn="ctr">
-                        <a:defRPr sz="780" b="0">
-                          <a:solidFill>
-                            <a:srgbClr val="212529"/>
-                          </a:solidFill>
-                        </a:defRPr>
-                      </a:pPr>
-                      <a:r>
-                        <a:t>43.72</a:t>
-                      </a:r>
-                    </a:p>
-                  </a:txBody>
-                  <a:tcPr>
-                    <a:solidFill>
-                      <a:srgbClr val="FFFFFF"/>
-                    </a:solidFill>
-                  </a:tcPr>
-                </a:tc>
-                <a:tc>
-                  <a:txBody>
-                    <a:bodyPr/>
-                    <a:lstStyle/>
-                    <a:p>
-                      <a:pPr>
-                        <a:defRPr sz="740" b="0">
-                          <a:solidFill>
-                            <a:srgbClr val="212529"/>
-                          </a:solidFill>
-                        </a:defRPr>
-                      </a:pPr>
-                      <a:r>
-                        <a:t>Hạ tầng xăng dầu Euro 5, kiểm kê phát thải ISO 14064.</a:t>
-                      </a:r>
-                    </a:p>
-                  </a:txBody>
-                  <a:tcPr>
-                    <a:solidFill>
-                      <a:srgbClr val="FFFFFF"/>
-                    </a:solidFill>
-                  </a:tcPr>
-                </a:tc>
-              </a:tr>
-              <a:tr h="386080">
-                <a:tc>
-                  <a:txBody>
-                    <a:bodyPr/>
-                    <a:lstStyle/>
-                    <a:p>
-                      <a:pPr>
-                        <a:defRPr sz="780" b="1">
-                          <a:solidFill>
-                            <a:srgbClr val="1B365D"/>
-                          </a:solidFill>
-                        </a:defRPr>
-                      </a:pPr>
-                      <a:r>
-                        <a:t>Chứng khoán SSI (SSI - Dịch vụ Tài chính)</a:t>
-                      </a:r>
-                    </a:p>
-                  </a:txBody>
-                  <a:tcPr>
-                    <a:solidFill>
-                      <a:srgbClr val="F8FAFC"/>
-                    </a:solidFill>
-                  </a:tcPr>
-                </a:tc>
-                <a:tc>
-                  <a:txBody>
-                    <a:bodyPr/>
-                    <a:lstStyle/>
-                    <a:p>
-                      <a:pPr algn="ctr">
-                        <a:defRPr sz="780" b="0">
-                          <a:solidFill>
-                            <a:srgbClr val="212529"/>
-                          </a:solidFill>
-                        </a:defRPr>
-                      </a:pPr>
-                      <a:r>
-                        <a:t>43.52</a:t>
-                      </a:r>
-                    </a:p>
-                  </a:txBody>
-                  <a:tcPr>
-                    <a:solidFill>
-                      <a:srgbClr val="F8FAFC"/>
-                    </a:solidFill>
-                  </a:tcPr>
-                </a:tc>
-                <a:tc>
-                  <a:txBody>
-                    <a:bodyPr/>
-                    <a:lstStyle/>
-                    <a:p>
-                      <a:pPr algn="ctr">
-                        <a:defRPr sz="780" b="1">
-                          <a:solidFill>
-                            <a:srgbClr val="1B365D"/>
-                          </a:solidFill>
-                        </a:defRPr>
-                      </a:pPr>
-                      <a:r>
-                        <a:t>47.20</a:t>
-                      </a:r>
-                    </a:p>
-                  </a:txBody>
-                  <a:tcPr>
-                    <a:solidFill>
-                      <a:srgbClr val="F8FAFC"/>
-                    </a:solidFill>
-                  </a:tcPr>
-                </a:tc>
-                <a:tc>
-                  <a:txBody>
-                    <a:bodyPr/>
-                    <a:lstStyle/>
-                    <a:p>
-                      <a:pPr algn="ctr">
-                        <a:defRPr sz="780" b="0">
-                          <a:solidFill>
-                            <a:srgbClr val="D4AF37"/>
-                          </a:solidFill>
-                        </a:defRPr>
-                      </a:pPr>
-                      <a:r>
-                        <a:t>41.99</a:t>
-                      </a:r>
-                    </a:p>
-                  </a:txBody>
-                  <a:tcPr>
-                    <a:solidFill>
-                      <a:srgbClr val="F8FAFC"/>
-                    </a:solidFill>
-                  </a:tcPr>
-                </a:tc>
-                <a:tc>
-                  <a:txBody>
-                    <a:bodyPr/>
-                    <a:lstStyle/>
-                    <a:p>
-                      <a:pPr algn="ctr">
-                        <a:defRPr sz="780" b="0">
-                          <a:solidFill>
-                            <a:srgbClr val="212529"/>
-                          </a:solidFill>
-                        </a:defRPr>
-                      </a:pPr>
-                      <a:r>
-                        <a:t>46.33</a:t>
-                      </a:r>
-                    </a:p>
-                  </a:txBody>
-                  <a:tcPr>
-                    <a:solidFill>
-                      <a:srgbClr val="F8FAFC"/>
-                    </a:solidFill>
-                  </a:tcPr>
-                </a:tc>
-                <a:tc>
-                  <a:txBody>
-                    <a:bodyPr/>
-                    <a:lstStyle/>
-                    <a:p>
-                      <a:pPr algn="ctr">
-                        <a:defRPr sz="780" b="0">
-                          <a:solidFill>
-                            <a:srgbClr val="212529"/>
-                          </a:solidFill>
-                        </a:defRPr>
-                      </a:pPr>
-                      <a:r>
-                        <a:t>44.10</a:t>
-                      </a:r>
-                    </a:p>
-                  </a:txBody>
-                  <a:tcPr>
-                    <a:solidFill>
-                      <a:srgbClr val="F8FAFC"/>
-                    </a:solidFill>
-                  </a:tcPr>
-                </a:tc>
-                <a:tc>
-                  <a:txBody>
-                    <a:bodyPr/>
-                    <a:lstStyle/>
-                    <a:p>
-                      <a:pPr algn="ctr">
-                        <a:defRPr sz="780" b="0">
-                          <a:solidFill>
-                            <a:srgbClr val="212529"/>
-                          </a:solidFill>
-                        </a:defRPr>
-                      </a:pPr>
-                      <a:r>
-                        <a:t>43.71</a:t>
-                      </a:r>
-                    </a:p>
-                  </a:txBody>
-                  <a:tcPr>
-                    <a:solidFill>
-                      <a:srgbClr val="F8FAFC"/>
-                    </a:solidFill>
-                  </a:tcPr>
-                </a:tc>
-                <a:tc>
-                  <a:txBody>
-                    <a:bodyPr/>
-                    <a:lstStyle/>
-                    <a:p>
-                      <a:pPr>
-                        <a:defRPr sz="740" b="0">
-                          <a:solidFill>
-                            <a:srgbClr val="212529"/>
-                          </a:solidFill>
-                        </a:defRPr>
-                      </a:pPr>
-                      <a:r>
-                        <a:t>Thu xếp vốn trái phiếu xanh, quản trị thẻ điểm ASEAN.</a:t>
-                      </a:r>
-                    </a:p>
-                  </a:txBody>
-                  <a:tcPr>
-                    <a:solidFill>
-                      <a:srgbClr val="F8FAFC"/>
-                    </a:solidFill>
-                  </a:tcPr>
-                </a:tc>
-              </a:tr>
-              <a:tr h="386080">
-                <a:tc>
-                  <a:txBody>
-                    <a:bodyPr/>
-                    <a:lstStyle/>
-                    <a:p>
-                      <a:pPr>
-                        <a:defRPr sz="780" b="1">
-                          <a:solidFill>
-                            <a:srgbClr val="1F77B4"/>
-                          </a:solidFill>
-                        </a:defRPr>
-                      </a:pPr>
-                      <a:r>
-                        <a:t>★ TOÀN MẪU VIỆT NAM (TRUNG BÌNH)</a:t>
-                      </a:r>
-                    </a:p>
-                  </a:txBody>
-                  <a:tcPr>
-                    <a:solidFill>
-                      <a:srgbClr val="EAF3FF"/>
-                    </a:solidFill>
-                  </a:tcPr>
-                </a:tc>
-                <a:tc>
-                  <a:txBody>
-                    <a:bodyPr/>
-                    <a:lstStyle/>
-                    <a:p>
-                      <a:pPr algn="ctr">
-                        <a:defRPr sz="780" b="1">
-                          <a:solidFill>
-                            <a:srgbClr val="1B365D"/>
-                          </a:solidFill>
-                        </a:defRPr>
-                      </a:pPr>
-                      <a:r>
-                        <a:t>44.26</a:t>
-                      </a:r>
-                    </a:p>
-                  </a:txBody>
-                  <a:tcPr>
-                    <a:solidFill>
-                      <a:srgbClr val="EAF3FF"/>
-                    </a:solidFill>
-                  </a:tcPr>
-                </a:tc>
-                <a:tc>
-                  <a:txBody>
-                    <a:bodyPr/>
-                    <a:lstStyle/>
-                    <a:p>
-                      <a:pPr algn="ctr">
-                        <a:defRPr sz="780" b="1">
-                          <a:solidFill>
-                            <a:srgbClr val="1B365D"/>
-                          </a:solidFill>
-                        </a:defRPr>
-                      </a:pPr>
-                      <a:r>
-                        <a:t>47.69</a:t>
-                      </a:r>
-                    </a:p>
-                  </a:txBody>
-                  <a:tcPr>
-                    <a:solidFill>
-                      <a:srgbClr val="EAF3FF"/>
-                    </a:solidFill>
-                  </a:tcPr>
-                </a:tc>
-                <a:tc>
-                  <a:txBody>
-                    <a:bodyPr/>
-                    <a:lstStyle/>
-                    <a:p>
-                      <a:pPr algn="ctr">
-                        <a:defRPr sz="780" b="1">
-                          <a:solidFill>
-                            <a:srgbClr val="1B365D"/>
-                          </a:solidFill>
-                        </a:defRPr>
-                      </a:pPr>
-                      <a:r>
-                        <a:t>42.08</a:t>
-                      </a:r>
-                    </a:p>
-                  </a:txBody>
-                  <a:tcPr>
-                    <a:solidFill>
-                      <a:srgbClr val="EAF3FF"/>
-                    </a:solidFill>
-                  </a:tcPr>
-                </a:tc>
-                <a:tc>
-                  <a:txBody>
-                    <a:bodyPr/>
-                    <a:lstStyle/>
-                    <a:p>
-                      <a:pPr algn="ctr">
-                        <a:defRPr sz="780" b="1">
-                          <a:solidFill>
-                            <a:srgbClr val="1B365D"/>
-                          </a:solidFill>
-                        </a:defRPr>
-                      </a:pPr>
-                      <a:r>
-                        <a:t>46.39</a:t>
-                      </a:r>
-                    </a:p>
-                  </a:txBody>
-                  <a:tcPr>
-                    <a:solidFill>
-                      <a:srgbClr val="EAF3FF"/>
-                    </a:solidFill>
-                  </a:tcPr>
-                </a:tc>
-                <a:tc>
-                  <a:txBody>
-                    <a:bodyPr/>
-                    <a:lstStyle/>
-                    <a:p>
-                      <a:pPr algn="ctr">
-                        <a:defRPr sz="780" b="1">
-                          <a:solidFill>
-                            <a:srgbClr val="1B365D"/>
-                          </a:solidFill>
-                        </a:defRPr>
-                      </a:pPr>
-                      <a:r>
-                        <a:t>45.63</a:t>
-                      </a:r>
-                    </a:p>
-                  </a:txBody>
-                  <a:tcPr>
-                    <a:solidFill>
-                      <a:srgbClr val="EAF3FF"/>
-                    </a:solidFill>
-                  </a:tcPr>
-                </a:tc>
-                <a:tc>
-                  <a:txBody>
-                    <a:bodyPr/>
-                    <a:lstStyle/>
-                    <a:p>
-                      <a:pPr algn="ctr">
-                        <a:defRPr sz="780" b="1">
-                          <a:solidFill>
-                            <a:srgbClr val="1B365D"/>
-                          </a:solidFill>
-                        </a:defRPr>
-                      </a:pPr>
-                      <a:r>
-                        <a:t>44.98</a:t>
-                      </a:r>
-                    </a:p>
-                  </a:txBody>
-                  <a:tcPr>
-                    <a:solidFill>
-                      <a:srgbClr val="EAF3FF"/>
-                    </a:solidFill>
-                  </a:tcPr>
-                </a:tc>
-                <a:tc>
-                  <a:txBody>
-                    <a:bodyPr/>
-                    <a:lstStyle/>
-                    <a:p>
-                      <a:pPr>
-                        <a:defRPr sz="740" b="1">
-                          <a:solidFill>
-                            <a:srgbClr val="1B365D"/>
-                          </a:solidFill>
-                        </a:defRPr>
-                      </a:pPr>
-                      <a:r>
-                        <a:t>Quy luật toàn diện: Economic cao nhất, Equity thấp nhất.</a:t>
-                      </a:r>
-                    </a:p>
-                  </a:txBody>
-                  <a:tcPr>
-                    <a:solidFill>
-                      <a:srgbClr val="EAF3FF"/>
-                    </a:solidFill>
-                  </a:tcPr>
-                </a:tc>
-              </a:tr>
-            </a:tbl>
-          </a:graphicData>
-        </a:graphic>
-      </p:graphicFrame>
+      <p:pic>
+        <p:nvPicPr>
+          <p:cNvPr id="9" name="Picture 8" descr="slide_company_6cat_bar.png"/>
+          <p:cNvPicPr>
+            <a:picLocks noChangeAspect="1"/>
+          </p:cNvPicPr>
+          <p:nvPr/>
+        </p:nvPicPr>
+        <p:blipFill>
+          <a:blip r:embed="rId2"/>
+          <a:stretch>
+            <a:fillRect/>
+          </a:stretch>
+        </p:blipFill>
+        <p:spPr>
+          <a:xfrm>
+            <a:off x="731520" y="1115568"/>
+            <a:ext cx="10728655" cy="3749039"/>
+          </a:xfrm>
+          <a:prstGeom prst="rect">
+            <a:avLst/>
+          </a:prstGeom>
+        </p:spPr>
+      </p:pic>
       <p:sp>
         <p:nvSpPr>
           <p:cNvPr id="10" name="Rounded Rectangle 9"/>
@@ -21301,8 +19595,8 @@
         </p:nvSpPr>
         <p:spPr>
           <a:xfrm>
-            <a:off x="731520" y="4846320"/>
-            <a:ext cx="3429000" cy="1508760"/>
+            <a:off x="731520" y="4956048"/>
+            <a:ext cx="3429000" cy="1417320"/>
           </a:xfrm>
           <a:prstGeom prst="roundRect">
             <a:avLst/>
@@ -21346,8 +19640,8 @@
         </p:nvSpPr>
         <p:spPr>
           <a:xfrm>
-            <a:off x="841248" y="4901184"/>
-            <a:ext cx="3209544" cy="1371600"/>
+            <a:off x="841248" y="5010912"/>
+            <a:ext cx="3209544" cy="1280160"/>
           </a:xfrm>
           <a:prstGeom prst="rect">
             <a:avLst/>
@@ -21382,7 +19676,7 @@
                   <a:srgbClr val="212529"/>
                 </a:solidFill>
               </a:rPr>
-              <a:t>• Nhóm Economic (47,69đ) luôn cao nhất ở 100% doanh nghiệp (đỉnh tại VCS 50,71đ và BVH 49,36đ) vì việc làm và tăng trưởng là lẽ sống còn.</a:t>
+              <a:t>• Cột Economic (Xanh dương, 47,69đ) luôn cao nhất ở 100% doanh nghiệp (đỉnh tại VCS 50,71đ và BVH 49,36đ) vì tăng trưởng kinh tế là mục tiêu sống còn.</a:t>
             </a:r>
           </a:p>
           <a:p>
@@ -21397,7 +19691,7 @@
                   <a:srgbClr val="212529"/>
                 </a:solidFill>
               </a:rPr>
-              <a:t>• Nhóm Equity (42,08đ) luôn thấp nhất toàn mẫu do doanh nghiệp né tránh công bố chênh lệch thu nhập và bình đẳng giới.</a:t>
+              <a:t>• Cột Equity (Tím, 42,08đ) luôn thấp nhất toàn mẫu do doanh nghiệp né tránh công bố chênh lệch thu nhập và bình đẳng giới cấp cao.</a:t>
             </a:r>
           </a:p>
         </p:txBody>
@@ -21410,8 +19704,8 @@
         </p:nvSpPr>
         <p:spPr>
           <a:xfrm>
-            <a:off x="4379976" y="4846320"/>
-            <a:ext cx="3429000" cy="1508760"/>
+            <a:off x="4379976" y="4956048"/>
+            <a:ext cx="3429000" cy="1417320"/>
           </a:xfrm>
           <a:prstGeom prst="roundRect">
             <a:avLst/>
@@ -21455,8 +19749,8 @@
         </p:nvSpPr>
         <p:spPr>
           <a:xfrm>
-            <a:off x="4489704" y="4901184"/>
-            <a:ext cx="3209544" cy="1371600"/>
+            <a:off x="4489704" y="5010912"/>
+            <a:ext cx="3209544" cy="1280160"/>
           </a:xfrm>
           <a:prstGeom prst="rect">
             <a:avLst/>
@@ -21519,8 +19813,8 @@
         </p:nvSpPr>
         <p:spPr>
           <a:xfrm>
-            <a:off x="8028432" y="4846320"/>
-            <a:ext cx="3429000" cy="1508760"/>
+            <a:off x="8028432" y="4956048"/>
+            <a:ext cx="3429000" cy="1417320"/>
           </a:xfrm>
           <a:prstGeom prst="roundRect">
             <a:avLst/>
@@ -21564,8 +19858,8 @@
         </p:nvSpPr>
         <p:spPr>
           <a:xfrm>
-            <a:off x="8138160" y="4901184"/>
-            <a:ext cx="3209544" cy="1371600"/>
+            <a:off x="8138160" y="5010912"/>
+            <a:ext cx="3209544" cy="1280160"/>
           </a:xfrm>
           <a:prstGeom prst="rect">
             <a:avLst/>
